--- a/presentation/Presentation_project.pptx
+++ b/presentation/Presentation_project.pptx
@@ -5,7 +5,7 @@
     <p:sldMasterId id="2147483669" r:id="rId1"/>
   </p:sldMasterIdLst>
   <p:notesMasterIdLst>
-    <p:notesMasterId r:id="rId7"/>
+    <p:notesMasterId r:id="rId16"/>
   </p:notesMasterIdLst>
   <p:sldIdLst>
     <p:sldId id="256" r:id="rId2"/>
@@ -13,6 +13,15 @@
     <p:sldId id="258" r:id="rId4"/>
     <p:sldId id="259" r:id="rId5"/>
     <p:sldId id="260" r:id="rId6"/>
+    <p:sldId id="261" r:id="rId7"/>
+    <p:sldId id="262" r:id="rId8"/>
+    <p:sldId id="263" r:id="rId9"/>
+    <p:sldId id="264" r:id="rId10"/>
+    <p:sldId id="265" r:id="rId11"/>
+    <p:sldId id="266" r:id="rId12"/>
+    <p:sldId id="267" r:id="rId13"/>
+    <p:sldId id="268" r:id="rId14"/>
+    <p:sldId id="269" r:id="rId15"/>
   </p:sldIdLst>
   <p:sldSz cx="12192000" cy="6858000"/>
   <p:notesSz cx="6858000" cy="9144000"/>
@@ -586,6 +595,1025 @@
 </p:notes>
 </file>
 
+<file path=ppt/notesSlides/notesSlide10.xml><?xml version="1.0" encoding="utf-8"?>
+<p:notes xmlns:a="http://schemas.openxmlformats.org/drawingml/2006/main" xmlns:r="http://schemas.openxmlformats.org/officeDocument/2006/relationships" xmlns:p="http://schemas.openxmlformats.org/presentationml/2006/main">
+  <p:cSld>
+    <p:spTree>
+      <p:nvGrpSpPr>
+        <p:cNvPr id="1" name=""/>
+        <p:cNvGrpSpPr/>
+        <p:nvPr/>
+      </p:nvGrpSpPr>
+      <p:grpSpPr>
+        <a:xfrm>
+          <a:off x="0" y="0"/>
+          <a:ext cx="0" cy="0"/>
+          <a:chOff x="0" y="0"/>
+          <a:chExt cx="0" cy="0"/>
+        </a:xfrm>
+      </p:grpSpPr>
+      <p:sp>
+        <p:nvSpPr>
+          <p:cNvPr id="2" name="Slide Image Placeholder 1"/>
+          <p:cNvSpPr>
+            <a:spLocks noGrp="1" noRot="1" noChangeAspect="1"/>
+          </p:cNvSpPr>
+          <p:nvPr>
+            <p:ph type="sldImg"/>
+          </p:nvPr>
+        </p:nvSpPr>
+        <p:spPr/>
+      </p:sp>
+      <p:sp>
+        <p:nvSpPr>
+          <p:cNvPr id="3" name="Notes Placeholder 2"/>
+          <p:cNvSpPr>
+            <a:spLocks noGrp="1"/>
+          </p:cNvSpPr>
+          <p:nvPr>
+            <p:ph type="body" idx="1"/>
+          </p:nvPr>
+        </p:nvSpPr>
+        <p:spPr/>
+        <p:txBody>
+          <a:bodyPr/>
+          <a:lstStyle/>
+          <a:p>
+            <a:r>
+              <a:rPr lang="en-US" dirty="0"/>
+              <a:t>Architecture: Embedding </a:t>
+            </a:r>
+          </a:p>
+          <a:p>
+            <a:r>
+              <a:rPr lang="en-US" dirty="0"/>
+              <a:t>GRU </a:t>
+            </a:r>
+          </a:p>
+          <a:p>
+            <a:r>
+              <a:rPr lang="en-US" dirty="0"/>
+              <a:t>Dense layer </a:t>
+            </a:r>
+          </a:p>
+          <a:p>
+            <a:r>
+              <a:rPr lang="en-US" dirty="0"/>
+              <a:t>Separate models: </a:t>
+            </a:r>
+            <a:r>
+              <a:rPr lang="en-US" sz="1200" kern="1200" dirty="0">
+                <a:solidFill>
+                  <a:schemeClr val="tx1"/>
+                </a:solidFill>
+                <a:latin typeface="+mn-lt"/>
+                <a:ea typeface="+mn-ea"/>
+                <a:cs typeface="+mn-cs"/>
+              </a:rPr>
+              <a:t>Rating</a:t>
+            </a:r>
+            <a:r>
+              <a:rPr lang="en-US" dirty="0"/>
+              <a:t> → regression </a:t>
+            </a:r>
+          </a:p>
+          <a:p>
+            <a:r>
+              <a:rPr lang="en-US" sz="1200" kern="1200" dirty="0">
+                <a:solidFill>
+                  <a:schemeClr val="tx1"/>
+                </a:solidFill>
+                <a:latin typeface="+mn-lt"/>
+                <a:ea typeface="+mn-ea"/>
+                <a:cs typeface="+mn-cs"/>
+              </a:rPr>
+              <a:t>Recommended</a:t>
+            </a:r>
+            <a:r>
+              <a:rPr lang="en-US" dirty="0"/>
+              <a:t> → classification</a:t>
+            </a:r>
+          </a:p>
+          <a:p>
+            <a:endParaRPr lang="en-GB" dirty="0"/>
+          </a:p>
+          <a:p>
+            <a:r>
+              <a:rPr lang="en-US" sz="1200" kern="1200" dirty="0">
+                <a:solidFill>
+                  <a:schemeClr val="tx1"/>
+                </a:solidFill>
+                <a:latin typeface="+mn-lt"/>
+                <a:ea typeface="+mn-ea"/>
+                <a:cs typeface="+mn-cs"/>
+              </a:rPr>
+              <a:t>Rating</a:t>
+            </a:r>
+            <a:r>
+              <a:rPr lang="en-US" dirty="0"/>
+              <a:t> performed well </a:t>
+            </a:r>
+          </a:p>
+          <a:p>
+            <a:r>
+              <a:rPr lang="en-US" sz="1200" kern="1200" dirty="0">
+                <a:solidFill>
+                  <a:schemeClr val="tx1"/>
+                </a:solidFill>
+                <a:latin typeface="+mn-lt"/>
+                <a:ea typeface="+mn-ea"/>
+                <a:cs typeface="+mn-cs"/>
+              </a:rPr>
+              <a:t>Recommended</a:t>
+            </a:r>
+            <a:r>
+              <a:rPr lang="en-US" dirty="0"/>
+              <a:t> initially failed </a:t>
+            </a:r>
+          </a:p>
+          <a:p>
+            <a:r>
+              <a:rPr lang="en-US" dirty="0"/>
+              <a:t>Validation probabilities for </a:t>
+            </a:r>
+            <a:r>
+              <a:rPr lang="en-US" sz="1200" kern="1200" dirty="0">
+                <a:solidFill>
+                  <a:schemeClr val="tx1"/>
+                </a:solidFill>
+                <a:latin typeface="+mn-lt"/>
+                <a:ea typeface="+mn-ea"/>
+                <a:cs typeface="+mn-cs"/>
+              </a:rPr>
+              <a:t>Recommended</a:t>
+            </a:r>
+            <a:r>
+              <a:rPr lang="en-US" dirty="0"/>
+              <a:t> collapsed near 0.5 </a:t>
+            </a:r>
+          </a:p>
+          <a:p>
+            <a:r>
+              <a:rPr lang="en-US" dirty="0"/>
+              <a:t>Model predicted almost all reviews as recommended </a:t>
+            </a:r>
+          </a:p>
+          <a:p>
+            <a:r>
+              <a:rPr lang="en-US" dirty="0"/>
+              <a:t>You can add a small diagnostic note:</a:t>
+            </a:r>
+          </a:p>
+          <a:p>
+            <a:r>
+              <a:rPr lang="en-US" dirty="0"/>
+              <a:t>Prediction collapse due to unstable training / imbalance handling</a:t>
+            </a:r>
+          </a:p>
+          <a:p>
+            <a:endParaRPr lang="en-GB" dirty="0"/>
+          </a:p>
+          <a:p>
+            <a:endParaRPr lang="en-GB" dirty="0"/>
+          </a:p>
+          <a:p>
+            <a:pPr marL="0" marR="0" lvl="0" indent="0" algn="l" defTabSz="914400" rtl="0" eaLnBrk="1" fontAlgn="auto" latinLnBrk="0" hangingPunct="1">
+              <a:lnSpc>
+                <a:spcPct val="100000"/>
+              </a:lnSpc>
+              <a:spcBef>
+                <a:spcPts val="0"/>
+              </a:spcBef>
+              <a:spcAft>
+                <a:spcPts val="0"/>
+              </a:spcAft>
+              <a:buClrTx/>
+              <a:buSzTx/>
+              <a:buFontTx/>
+              <a:buNone/>
+              <a:tabLst/>
+              <a:defRPr/>
+            </a:pPr>
+            <a:r>
+              <a:rPr lang="en-US" dirty="0"/>
+              <a:t>The first RNN attempt was not immediately successful.</a:t>
+            </a:r>
+            <a:br>
+              <a:rPr lang="en-US" dirty="0"/>
+            </a:br>
+            <a:r>
+              <a:rPr lang="en-US" dirty="0"/>
+              <a:t>The Rating model worked well, but the Recommended model collapsed: predicted probabilities were concentrated near 0.5 and most examples were classified as recommended.</a:t>
+            </a:r>
+            <a:br>
+              <a:rPr lang="en-US" dirty="0"/>
+            </a:br>
+            <a:r>
+              <a:rPr lang="en-US" dirty="0"/>
+              <a:t>This led to a very poor Recommended Spearman score, so I diagnosed and fixed the training setup rather than keeping the initial result.</a:t>
+            </a:r>
+          </a:p>
+          <a:p>
+            <a:endParaRPr lang="en-GB" dirty="0"/>
+          </a:p>
+          <a:p>
+            <a:endParaRPr lang="en-GB" dirty="0"/>
+          </a:p>
+          <a:p>
+            <a:r>
+              <a:rPr lang="en-US" dirty="0"/>
+              <a:t>Fixing the RNN</a:t>
+            </a:r>
+          </a:p>
+          <a:p>
+            <a:r>
+              <a:rPr lang="en-US" b="1" dirty="0"/>
+              <a:t>Content:</a:t>
+            </a:r>
+            <a:endParaRPr lang="en-US" dirty="0"/>
+          </a:p>
+          <a:p>
+            <a:r>
+              <a:rPr lang="en-US" dirty="0"/>
+              <a:t>Removed </a:t>
+            </a:r>
+            <a:r>
+              <a:rPr lang="en-US" sz="1200" kern="1200" dirty="0" err="1">
+                <a:solidFill>
+                  <a:schemeClr val="tx1"/>
+                </a:solidFill>
+                <a:latin typeface="+mn-lt"/>
+                <a:ea typeface="+mn-ea"/>
+                <a:cs typeface="+mn-cs"/>
+              </a:rPr>
+              <a:t>class_weight</a:t>
+            </a:r>
+            <a:r>
+              <a:rPr lang="en-US" dirty="0"/>
+              <a:t> </a:t>
+            </a:r>
+          </a:p>
+          <a:p>
+            <a:r>
+              <a:rPr lang="en-US" dirty="0"/>
+              <a:t>Reduced dropout from 0.3 to 0.2 for </a:t>
+            </a:r>
+            <a:r>
+              <a:rPr lang="en-US" sz="1200" kern="1200" dirty="0">
+                <a:solidFill>
+                  <a:schemeClr val="tx1"/>
+                </a:solidFill>
+                <a:latin typeface="+mn-lt"/>
+                <a:ea typeface="+mn-ea"/>
+                <a:cs typeface="+mn-cs"/>
+              </a:rPr>
+              <a:t>Recommended</a:t>
+            </a:r>
+            <a:r>
+              <a:rPr lang="en-US" dirty="0"/>
+              <a:t> </a:t>
+            </a:r>
+          </a:p>
+          <a:p>
+            <a:r>
+              <a:rPr lang="en-US" dirty="0"/>
+              <a:t>Lowered learning rate to </a:t>
+            </a:r>
+            <a:r>
+              <a:rPr lang="en-US" sz="1200" kern="1200" dirty="0">
+                <a:solidFill>
+                  <a:schemeClr val="tx1"/>
+                </a:solidFill>
+                <a:latin typeface="+mn-lt"/>
+                <a:ea typeface="+mn-ea"/>
+                <a:cs typeface="+mn-cs"/>
+              </a:rPr>
+              <a:t>5e-4</a:t>
+            </a:r>
+            <a:r>
+              <a:rPr lang="en-US" dirty="0"/>
+              <a:t> </a:t>
+            </a:r>
+          </a:p>
+          <a:p>
+            <a:r>
+              <a:rPr lang="en-US" dirty="0"/>
+              <a:t>Rechecked: </a:t>
+            </a:r>
+          </a:p>
+          <a:p>
+            <a:pPr lvl="1"/>
+            <a:r>
+              <a:rPr lang="en-US" dirty="0"/>
+              <a:t>probability distribution </a:t>
+            </a:r>
+          </a:p>
+          <a:p>
+            <a:pPr lvl="1"/>
+            <a:r>
+              <a:rPr lang="en-US" dirty="0"/>
+              <a:t>label counts </a:t>
+            </a:r>
+          </a:p>
+          <a:p>
+            <a:pPr lvl="1"/>
+            <a:r>
+              <a:rPr lang="en-US" dirty="0"/>
+              <a:t>confusion matrix </a:t>
+            </a:r>
+          </a:p>
+          <a:p>
+            <a:pPr lvl="1"/>
+            <a:r>
+              <a:rPr lang="en-US" dirty="0"/>
+              <a:t>validation Spearman</a:t>
+            </a:r>
+          </a:p>
+          <a:p>
+            <a:endParaRPr lang="en-GB" dirty="0"/>
+          </a:p>
+          <a:p>
+            <a:endParaRPr lang="en-GB" dirty="0"/>
+          </a:p>
+          <a:p>
+            <a:r>
+              <a:rPr lang="en-US" dirty="0"/>
+              <a:t>I improved the RNN by making the recommendation branch more stable.</a:t>
+            </a:r>
+            <a:br>
+              <a:rPr lang="en-US" dirty="0"/>
+            </a:br>
+            <a:r>
+              <a:rPr lang="en-US" dirty="0"/>
+              <a:t>The main changes were removing class weights, lowering dropout, and reducing the learning rate.</a:t>
+            </a:r>
+            <a:br>
+              <a:rPr lang="en-US" dirty="0"/>
+            </a:br>
+            <a:r>
+              <a:rPr lang="en-US" dirty="0"/>
+              <a:t>After that, the recommendation probabilities became much more meaningful and the model stopped collapsing to trivial predictions.</a:t>
+            </a:r>
+          </a:p>
+          <a:p>
+            <a:endParaRPr lang="en-US" dirty="0"/>
+          </a:p>
+          <a:p>
+            <a:endParaRPr lang="en-US" dirty="0"/>
+          </a:p>
+          <a:p>
+            <a:r>
+              <a:rPr lang="en-US" dirty="0"/>
+              <a:t>Best local RNN setup: rounded </a:t>
+            </a:r>
+            <a:r>
+              <a:rPr lang="en-US" sz="1200" kern="1200" dirty="0">
+                <a:solidFill>
+                  <a:schemeClr val="tx1"/>
+                </a:solidFill>
+                <a:latin typeface="+mn-lt"/>
+                <a:ea typeface="+mn-ea"/>
+                <a:cs typeface="+mn-cs"/>
+              </a:rPr>
+              <a:t>Rating</a:t>
+            </a:r>
+            <a:r>
+              <a:rPr lang="en-US" dirty="0"/>
+              <a:t> </a:t>
+            </a:r>
+          </a:p>
+          <a:p>
+            <a:r>
+              <a:rPr lang="en-US" dirty="0"/>
+              <a:t>hard-label </a:t>
+            </a:r>
+            <a:r>
+              <a:rPr lang="en-US" sz="1200" kern="1200" dirty="0">
+                <a:solidFill>
+                  <a:schemeClr val="tx1"/>
+                </a:solidFill>
+                <a:latin typeface="+mn-lt"/>
+                <a:ea typeface="+mn-ea"/>
+                <a:cs typeface="+mn-cs"/>
+              </a:rPr>
+              <a:t>Recommended</a:t>
+            </a:r>
+            <a:r>
+              <a:rPr lang="en-US" dirty="0"/>
+              <a:t> </a:t>
+            </a:r>
+          </a:p>
+          <a:p>
+            <a:r>
+              <a:rPr lang="en-US" dirty="0"/>
+              <a:t>Final Kaggle score: </a:t>
+            </a:r>
+            <a:r>
+              <a:rPr lang="en-US" b="1" dirty="0"/>
+              <a:t>0.67891</a:t>
+            </a:r>
+            <a:r>
+              <a:rPr lang="en-US" dirty="0"/>
+              <a:t> Better than Bag-of-Words baseline</a:t>
+            </a:r>
+          </a:p>
+          <a:p>
+            <a:r>
+              <a:rPr lang="en-US" dirty="0"/>
+              <a:t>After tuning, the RNN became clearly stronger than the Bag-of-Words baseline.</a:t>
+            </a:r>
+            <a:br>
+              <a:rPr lang="en-US" dirty="0"/>
+            </a:br>
+            <a:r>
+              <a:rPr lang="en-US" dirty="0"/>
+              <a:t>Its public leaderboard score was 0.67891, compared with 0.64544 for the classical baseline.</a:t>
+            </a:r>
+            <a:br>
+              <a:rPr lang="en-US" dirty="0"/>
+            </a:br>
+            <a:r>
+              <a:rPr lang="en-US" dirty="0"/>
+              <a:t>This showed that sequential modeling helped, especially for Rating.</a:t>
+            </a:r>
+            <a:endParaRPr lang="en-GB" dirty="0"/>
+          </a:p>
+        </p:txBody>
+      </p:sp>
+      <p:sp>
+        <p:nvSpPr>
+          <p:cNvPr id="4" name="Slide Number Placeholder 3"/>
+          <p:cNvSpPr>
+            <a:spLocks noGrp="1"/>
+          </p:cNvSpPr>
+          <p:nvPr>
+            <p:ph type="sldNum" sz="quarter" idx="5"/>
+          </p:nvPr>
+        </p:nvSpPr>
+        <p:spPr/>
+        <p:txBody>
+          <a:bodyPr/>
+          <a:lstStyle/>
+          <a:p>
+            <a:fld id="{FD99EE23-E0B4-844F-8556-21E3C5FE9B7C}" type="slidenum">
+              <a:rPr lang="en-GB" smtClean="0"/>
+              <a:t>10</a:t>
+            </a:fld>
+            <a:endParaRPr lang="en-GB"/>
+          </a:p>
+        </p:txBody>
+      </p:sp>
+    </p:spTree>
+    <p:extLst>
+      <p:ext uri="{BB962C8B-B14F-4D97-AF65-F5344CB8AC3E}">
+        <p14:creationId xmlns:p14="http://schemas.microsoft.com/office/powerpoint/2010/main" val="824383658"/>
+      </p:ext>
+    </p:extLst>
+  </p:cSld>
+  <p:clrMapOvr>
+    <a:masterClrMapping/>
+  </p:clrMapOvr>
+</p:notes>
+</file>
+
+<file path=ppt/notesSlides/notesSlide11.xml><?xml version="1.0" encoding="utf-8"?>
+<p:notes xmlns:a="http://schemas.openxmlformats.org/drawingml/2006/main" xmlns:r="http://schemas.openxmlformats.org/officeDocument/2006/relationships" xmlns:p="http://schemas.openxmlformats.org/presentationml/2006/main">
+  <p:cSld>
+    <p:spTree>
+      <p:nvGrpSpPr>
+        <p:cNvPr id="1" name=""/>
+        <p:cNvGrpSpPr/>
+        <p:nvPr/>
+      </p:nvGrpSpPr>
+      <p:grpSpPr>
+        <a:xfrm>
+          <a:off x="0" y="0"/>
+          <a:ext cx="0" cy="0"/>
+          <a:chOff x="0" y="0"/>
+          <a:chExt cx="0" cy="0"/>
+        </a:xfrm>
+      </p:grpSpPr>
+      <p:sp>
+        <p:nvSpPr>
+          <p:cNvPr id="2" name="Slide Image Placeholder 1"/>
+          <p:cNvSpPr>
+            <a:spLocks noGrp="1" noRot="1" noChangeAspect="1"/>
+          </p:cNvSpPr>
+          <p:nvPr>
+            <p:ph type="sldImg"/>
+          </p:nvPr>
+        </p:nvSpPr>
+        <p:spPr/>
+      </p:sp>
+      <p:sp>
+        <p:nvSpPr>
+          <p:cNvPr id="3" name="Notes Placeholder 2"/>
+          <p:cNvSpPr>
+            <a:spLocks noGrp="1"/>
+          </p:cNvSpPr>
+          <p:nvPr>
+            <p:ph type="body" idx="1"/>
+          </p:nvPr>
+        </p:nvSpPr>
+        <p:spPr/>
+        <p:txBody>
+          <a:bodyPr/>
+          <a:lstStyle/>
+          <a:p>
+            <a:r>
+              <a:rPr lang="en-US" dirty="0"/>
+              <a:t>Bag-of-Words was strongest for </a:t>
+            </a:r>
+            <a:r>
+              <a:rPr lang="en-US" sz="1200" kern="1200" dirty="0">
+                <a:solidFill>
+                  <a:schemeClr val="tx1"/>
+                </a:solidFill>
+                <a:latin typeface="+mn-lt"/>
+                <a:ea typeface="+mn-ea"/>
+                <a:cs typeface="+mn-cs"/>
+              </a:rPr>
+              <a:t>Recommended</a:t>
+            </a:r>
+            <a:r>
+              <a:rPr lang="en-US" dirty="0"/>
+              <a:t> </a:t>
+            </a:r>
+          </a:p>
+          <a:p>
+            <a:r>
+              <a:rPr lang="en-US" dirty="0"/>
+              <a:t>RNN was strongest for </a:t>
+            </a:r>
+            <a:r>
+              <a:rPr lang="en-US" sz="1200" kern="1200" dirty="0">
+                <a:solidFill>
+                  <a:schemeClr val="tx1"/>
+                </a:solidFill>
+                <a:latin typeface="+mn-lt"/>
+                <a:ea typeface="+mn-ea"/>
+                <a:cs typeface="+mn-cs"/>
+              </a:rPr>
+              <a:t>Rating</a:t>
+            </a:r>
+            <a:r>
+              <a:rPr lang="en-US" dirty="0"/>
+              <a:t> </a:t>
+            </a:r>
+          </a:p>
+          <a:p>
+            <a:r>
+              <a:rPr lang="en-US" dirty="0"/>
+              <a:t>Idea: combine the best model family for each target </a:t>
+            </a:r>
+          </a:p>
+          <a:p>
+            <a:r>
+              <a:rPr lang="en-US" b="1" dirty="0"/>
+              <a:t>Hybrid setup</a:t>
+            </a:r>
+            <a:endParaRPr lang="en-US" dirty="0"/>
+          </a:p>
+          <a:p>
+            <a:r>
+              <a:rPr lang="en-US" sz="1200" kern="1200" dirty="0">
+                <a:solidFill>
+                  <a:schemeClr val="tx1"/>
+                </a:solidFill>
+                <a:latin typeface="+mn-lt"/>
+                <a:ea typeface="+mn-ea"/>
+                <a:cs typeface="+mn-cs"/>
+              </a:rPr>
+              <a:t>Rating</a:t>
+            </a:r>
+            <a:r>
+              <a:rPr lang="en-US" dirty="0"/>
+              <a:t> → RNN </a:t>
+            </a:r>
+          </a:p>
+          <a:p>
+            <a:r>
+              <a:rPr lang="en-US" sz="1200" kern="1200" dirty="0">
+                <a:solidFill>
+                  <a:schemeClr val="tx1"/>
+                </a:solidFill>
+                <a:latin typeface="+mn-lt"/>
+                <a:ea typeface="+mn-ea"/>
+                <a:cs typeface="+mn-cs"/>
+              </a:rPr>
+              <a:t>Recommended</a:t>
+            </a:r>
+            <a:r>
+              <a:rPr lang="en-US" dirty="0"/>
+              <a:t> → Bag-of-Words </a:t>
+            </a:r>
+          </a:p>
+          <a:p>
+            <a:r>
+              <a:rPr lang="en-US" b="1" dirty="0"/>
+              <a:t>What to say</a:t>
+            </a:r>
+          </a:p>
+          <a:p>
+            <a:r>
+              <a:rPr lang="en-US" dirty="0"/>
+              <a:t>The experiments suggested that different targets benefit from different model families.</a:t>
+            </a:r>
+            <a:br>
+              <a:rPr lang="en-US" dirty="0"/>
+            </a:br>
+            <a:r>
+              <a:rPr lang="en-US" dirty="0"/>
+              <a:t>The RNN captured the ordinal Rating signal very well, while the sparse Bag-of-Words model remained extremely strong for Recommended.</a:t>
+            </a:r>
+            <a:br>
+              <a:rPr lang="en-US" dirty="0"/>
+            </a:br>
+            <a:r>
+              <a:rPr lang="en-US" dirty="0"/>
+              <a:t>So I built a hybrid model that uses the best branch for each target.</a:t>
+            </a:r>
+          </a:p>
+          <a:p>
+            <a:endParaRPr lang="en-GB" dirty="0"/>
+          </a:p>
+        </p:txBody>
+      </p:sp>
+      <p:sp>
+        <p:nvSpPr>
+          <p:cNvPr id="4" name="Slide Number Placeholder 3"/>
+          <p:cNvSpPr>
+            <a:spLocks noGrp="1"/>
+          </p:cNvSpPr>
+          <p:nvPr>
+            <p:ph type="sldNum" sz="quarter" idx="5"/>
+          </p:nvPr>
+        </p:nvSpPr>
+        <p:spPr/>
+        <p:txBody>
+          <a:bodyPr/>
+          <a:lstStyle/>
+          <a:p>
+            <a:fld id="{FD99EE23-E0B4-844F-8556-21E3C5FE9B7C}" type="slidenum">
+              <a:rPr lang="en-GB" smtClean="0"/>
+              <a:t>11</a:t>
+            </a:fld>
+            <a:endParaRPr lang="en-GB"/>
+          </a:p>
+        </p:txBody>
+      </p:sp>
+    </p:spTree>
+    <p:extLst>
+      <p:ext uri="{BB962C8B-B14F-4D97-AF65-F5344CB8AC3E}">
+        <p14:creationId xmlns:p14="http://schemas.microsoft.com/office/powerpoint/2010/main" val="4038323059"/>
+      </p:ext>
+    </p:extLst>
+  </p:cSld>
+  <p:clrMapOvr>
+    <a:masterClrMapping/>
+  </p:clrMapOvr>
+</p:notes>
+</file>
+
+<file path=ppt/notesSlides/notesSlide12.xml><?xml version="1.0" encoding="utf-8"?>
+<p:notes xmlns:a="http://schemas.openxmlformats.org/drawingml/2006/main" xmlns:r="http://schemas.openxmlformats.org/officeDocument/2006/relationships" xmlns:p="http://schemas.openxmlformats.org/presentationml/2006/main">
+  <p:cSld>
+    <p:spTree>
+      <p:nvGrpSpPr>
+        <p:cNvPr id="1" name=""/>
+        <p:cNvGrpSpPr/>
+        <p:nvPr/>
+      </p:nvGrpSpPr>
+      <p:grpSpPr>
+        <a:xfrm>
+          <a:off x="0" y="0"/>
+          <a:ext cx="0" cy="0"/>
+          <a:chOff x="0" y="0"/>
+          <a:chExt cx="0" cy="0"/>
+        </a:xfrm>
+      </p:grpSpPr>
+      <p:sp>
+        <p:nvSpPr>
+          <p:cNvPr id="2" name="Slide Image Placeholder 1"/>
+          <p:cNvSpPr>
+            <a:spLocks noGrp="1" noRot="1" noChangeAspect="1"/>
+          </p:cNvSpPr>
+          <p:nvPr>
+            <p:ph type="sldImg"/>
+          </p:nvPr>
+        </p:nvSpPr>
+        <p:spPr/>
+      </p:sp>
+      <p:sp>
+        <p:nvSpPr>
+          <p:cNvPr id="3" name="Notes Placeholder 2"/>
+          <p:cNvSpPr>
+            <a:spLocks noGrp="1"/>
+          </p:cNvSpPr>
+          <p:nvPr>
+            <p:ph type="body" idx="1"/>
+          </p:nvPr>
+        </p:nvSpPr>
+        <p:spPr/>
+        <p:txBody>
+          <a:bodyPr/>
+          <a:lstStyle/>
+          <a:p>
+            <a:r>
+              <a:rPr lang="en-US" dirty="0"/>
+              <a:t>The hybrid was the best local configuration.</a:t>
+            </a:r>
+            <a:br>
+              <a:rPr lang="en-US" dirty="0"/>
+            </a:br>
+            <a:r>
+              <a:rPr lang="en-US" dirty="0"/>
+              <a:t>The strongest setup used rounded RNN predictions for Rating and hard-label Bag-of-Words predictions for Recommended.</a:t>
+            </a:r>
+            <a:br>
+              <a:rPr lang="en-US" dirty="0"/>
+            </a:br>
+            <a:r>
+              <a:rPr lang="en-US" dirty="0"/>
+              <a:t>This confirmed the idea that the two targets should not necessarily be modeled with the same approach.</a:t>
+            </a:r>
+          </a:p>
+          <a:p>
+            <a:endParaRPr lang="en-US" dirty="0"/>
+          </a:p>
+          <a:p>
+            <a:r>
+              <a:rPr lang="en-US" dirty="0"/>
+              <a:t>The hybrid submission achieved the best public leaderboard score: 0.69699.</a:t>
+            </a:r>
+            <a:br>
+              <a:rPr lang="en-US" dirty="0"/>
+            </a:br>
+            <a:r>
+              <a:rPr lang="en-US" dirty="0"/>
+              <a:t>It outperformed both standalone model families, which supports the final modeling choice.</a:t>
+            </a:r>
+            <a:br>
+              <a:rPr lang="en-US" dirty="0"/>
+            </a:br>
+            <a:r>
+              <a:rPr lang="en-US" dirty="0"/>
+              <a:t>So the best final system was not the most complex single model, but the best combination of two complementary approaches.</a:t>
+            </a:r>
+            <a:endParaRPr lang="en-GB" dirty="0"/>
+          </a:p>
+        </p:txBody>
+      </p:sp>
+      <p:sp>
+        <p:nvSpPr>
+          <p:cNvPr id="4" name="Slide Number Placeholder 3"/>
+          <p:cNvSpPr>
+            <a:spLocks noGrp="1"/>
+          </p:cNvSpPr>
+          <p:nvPr>
+            <p:ph type="sldNum" sz="quarter" idx="5"/>
+          </p:nvPr>
+        </p:nvSpPr>
+        <p:spPr/>
+        <p:txBody>
+          <a:bodyPr/>
+          <a:lstStyle/>
+          <a:p>
+            <a:fld id="{FD99EE23-E0B4-844F-8556-21E3C5FE9B7C}" type="slidenum">
+              <a:rPr lang="en-GB" smtClean="0"/>
+              <a:t>12</a:t>
+            </a:fld>
+            <a:endParaRPr lang="en-GB"/>
+          </a:p>
+        </p:txBody>
+      </p:sp>
+    </p:spTree>
+    <p:extLst>
+      <p:ext uri="{BB962C8B-B14F-4D97-AF65-F5344CB8AC3E}">
+        <p14:creationId xmlns:p14="http://schemas.microsoft.com/office/powerpoint/2010/main" val="1824324278"/>
+      </p:ext>
+    </p:extLst>
+  </p:cSld>
+  <p:clrMapOvr>
+    <a:masterClrMapping/>
+  </p:clrMapOvr>
+</p:notes>
+</file>
+
+<file path=ppt/notesSlides/notesSlide13.xml><?xml version="1.0" encoding="utf-8"?>
+<p:notes xmlns:a="http://schemas.openxmlformats.org/drawingml/2006/main" xmlns:r="http://schemas.openxmlformats.org/officeDocument/2006/relationships" xmlns:p="http://schemas.openxmlformats.org/presentationml/2006/main">
+  <p:cSld>
+    <p:spTree>
+      <p:nvGrpSpPr>
+        <p:cNvPr id="1" name=""/>
+        <p:cNvGrpSpPr/>
+        <p:nvPr/>
+      </p:nvGrpSpPr>
+      <p:grpSpPr>
+        <a:xfrm>
+          <a:off x="0" y="0"/>
+          <a:ext cx="0" cy="0"/>
+          <a:chOff x="0" y="0"/>
+          <a:chExt cx="0" cy="0"/>
+        </a:xfrm>
+      </p:grpSpPr>
+      <p:sp>
+        <p:nvSpPr>
+          <p:cNvPr id="2" name="Slide Image Placeholder 1"/>
+          <p:cNvSpPr>
+            <a:spLocks noGrp="1" noRot="1" noChangeAspect="1"/>
+          </p:cNvSpPr>
+          <p:nvPr>
+            <p:ph type="sldImg"/>
+          </p:nvPr>
+        </p:nvSpPr>
+        <p:spPr/>
+      </p:sp>
+      <p:sp>
+        <p:nvSpPr>
+          <p:cNvPr id="3" name="Notes Placeholder 2"/>
+          <p:cNvSpPr>
+            <a:spLocks noGrp="1"/>
+          </p:cNvSpPr>
+          <p:nvPr>
+            <p:ph type="body" idx="1"/>
+          </p:nvPr>
+        </p:nvSpPr>
+        <p:spPr/>
+        <p:txBody>
+          <a:bodyPr/>
+          <a:lstStyle/>
+          <a:p>
+            <a:r>
+              <a:rPr lang="en-US" b="1" dirty="0"/>
+              <a:t>Content:</a:t>
+            </a:r>
+            <a:endParaRPr lang="en-US" dirty="0"/>
+          </a:p>
+          <a:p>
+            <a:r>
+              <a:rPr lang="en-US" dirty="0"/>
+              <a:t>Threshold tuning for </a:t>
+            </a:r>
+            <a:r>
+              <a:rPr lang="en-US" sz="1200" kern="1200" dirty="0">
+                <a:solidFill>
+                  <a:schemeClr val="tx1"/>
+                </a:solidFill>
+                <a:latin typeface="+mn-lt"/>
+                <a:ea typeface="+mn-ea"/>
+                <a:cs typeface="+mn-cs"/>
+              </a:rPr>
+              <a:t>Recommended</a:t>
+            </a:r>
+            <a:r>
+              <a:rPr lang="en-US" dirty="0"/>
+              <a:t> </a:t>
+            </a:r>
+          </a:p>
+          <a:p>
+            <a:pPr lvl="1"/>
+            <a:r>
+              <a:rPr lang="en-US" dirty="0"/>
+              <a:t>did not improve the score </a:t>
+            </a:r>
+          </a:p>
+          <a:p>
+            <a:r>
+              <a:rPr lang="en-US" dirty="0"/>
+              <a:t>TF-IDF instead of </a:t>
+            </a:r>
+            <a:r>
+              <a:rPr lang="en-US" dirty="0" err="1"/>
+              <a:t>CountVectorizer</a:t>
+            </a:r>
+            <a:r>
+              <a:rPr lang="en-US" dirty="0"/>
+              <a:t> </a:t>
+            </a:r>
+          </a:p>
+          <a:p>
+            <a:pPr lvl="1"/>
+            <a:r>
+              <a:rPr lang="en-US" dirty="0"/>
+              <a:t>slightly worse than </a:t>
+            </a:r>
+            <a:r>
+              <a:rPr lang="en-US" dirty="0" err="1"/>
+              <a:t>BoW</a:t>
+            </a:r>
+            <a:r>
+              <a:rPr lang="en-US" dirty="0"/>
+              <a:t> </a:t>
+            </a:r>
+          </a:p>
+          <a:p>
+            <a:r>
+              <a:rPr lang="en-US" dirty="0"/>
+              <a:t>Huber loss for RNN </a:t>
+            </a:r>
+            <a:r>
+              <a:rPr lang="en-US" sz="1200" kern="1200" dirty="0">
+                <a:solidFill>
+                  <a:schemeClr val="tx1"/>
+                </a:solidFill>
+                <a:latin typeface="+mn-lt"/>
+                <a:ea typeface="+mn-ea"/>
+                <a:cs typeface="+mn-cs"/>
+              </a:rPr>
+              <a:t>Rating</a:t>
+            </a:r>
+            <a:r>
+              <a:rPr lang="en-US" dirty="0"/>
+              <a:t> </a:t>
+            </a:r>
+          </a:p>
+          <a:p>
+            <a:pPr lvl="1"/>
+            <a:r>
+              <a:rPr lang="en-US" dirty="0"/>
+              <a:t>improved local validation </a:t>
+            </a:r>
+          </a:p>
+          <a:p>
+            <a:pPr lvl="1"/>
+            <a:r>
+              <a:rPr lang="en-US" dirty="0"/>
+              <a:t>did not improve public leaderboard </a:t>
+            </a:r>
+          </a:p>
+          <a:p>
+            <a:endParaRPr lang="en-GB" dirty="0"/>
+          </a:p>
+          <a:p>
+            <a:endParaRPr lang="en-GB" dirty="0"/>
+          </a:p>
+          <a:p>
+            <a:r>
+              <a:rPr lang="en-US" dirty="0"/>
+              <a:t>I also tested several improvements.</a:t>
+            </a:r>
+            <a:br>
+              <a:rPr lang="en-US" dirty="0"/>
+            </a:br>
+            <a:r>
+              <a:rPr lang="en-US" dirty="0"/>
+              <a:t>Threshold tuning for Recommended did not help.</a:t>
+            </a:r>
+            <a:br>
+              <a:rPr lang="en-US" dirty="0"/>
+            </a:br>
+            <a:r>
+              <a:rPr lang="en-US" dirty="0"/>
+              <a:t>Replacing Bag-of-Words with TF-IDF was slightly worse in this dataset.</a:t>
+            </a:r>
+            <a:br>
+              <a:rPr lang="en-US" dirty="0"/>
+            </a:br>
+            <a:r>
+              <a:rPr lang="en-US" dirty="0"/>
+              <a:t>Huber loss improved local validation for Rating, but did not translate into a better public leaderboard score than the main hybrid submission</a:t>
+            </a:r>
+            <a:endParaRPr lang="en-GB" dirty="0"/>
+          </a:p>
+        </p:txBody>
+      </p:sp>
+      <p:sp>
+        <p:nvSpPr>
+          <p:cNvPr id="4" name="Slide Number Placeholder 3"/>
+          <p:cNvSpPr>
+            <a:spLocks noGrp="1"/>
+          </p:cNvSpPr>
+          <p:nvPr>
+            <p:ph type="sldNum" sz="quarter" idx="5"/>
+          </p:nvPr>
+        </p:nvSpPr>
+        <p:spPr/>
+        <p:txBody>
+          <a:bodyPr/>
+          <a:lstStyle/>
+          <a:p>
+            <a:fld id="{FD99EE23-E0B4-844F-8556-21E3C5FE9B7C}" type="slidenum">
+              <a:rPr lang="en-GB" smtClean="0"/>
+              <a:t>13</a:t>
+            </a:fld>
+            <a:endParaRPr lang="en-GB"/>
+          </a:p>
+        </p:txBody>
+      </p:sp>
+    </p:spTree>
+    <p:extLst>
+      <p:ext uri="{BB962C8B-B14F-4D97-AF65-F5344CB8AC3E}">
+        <p14:creationId xmlns:p14="http://schemas.microsoft.com/office/powerpoint/2010/main" val="787492647"/>
+      </p:ext>
+    </p:extLst>
+  </p:cSld>
+  <p:clrMapOvr>
+    <a:masterClrMapping/>
+  </p:clrMapOvr>
+</p:notes>
+</file>
+
 <file path=ppt/notesSlides/notesSlide2.xml><?xml version="1.0" encoding="utf-8"?>
 <p:notes xmlns:a="http://schemas.openxmlformats.org/drawingml/2006/main" xmlns:r="http://schemas.openxmlformats.org/officeDocument/2006/relationships" xmlns:p="http://schemas.openxmlformats.org/presentationml/2006/main">
   <p:cSld>
@@ -1298,11 +2326,7 @@
           <a:p>
             <a:r>
               <a:rPr lang="en-US" dirty="0"/>
-              <a:t>Review length is </a:t>
-            </a:r>
-            <a:r>
-              <a:rPr lang="en-US"/>
-              <a:t>informative </a:t>
+              <a:t>Review length is informative </a:t>
             </a:r>
           </a:p>
           <a:p>
@@ -1385,6 +2409,717 @@
     <p:extLst>
       <p:ext uri="{BB962C8B-B14F-4D97-AF65-F5344CB8AC3E}">
         <p14:creationId xmlns:p14="http://schemas.microsoft.com/office/powerpoint/2010/main" val="1024757444"/>
+      </p:ext>
+    </p:extLst>
+  </p:cSld>
+  <p:clrMapOvr>
+    <a:masterClrMapping/>
+  </p:clrMapOvr>
+</p:notes>
+</file>
+
+<file path=ppt/notesSlides/notesSlide6.xml><?xml version="1.0" encoding="utf-8"?>
+<p:notes xmlns:a="http://schemas.openxmlformats.org/drawingml/2006/main" xmlns:r="http://schemas.openxmlformats.org/officeDocument/2006/relationships" xmlns:p="http://schemas.openxmlformats.org/presentationml/2006/main">
+  <p:cSld>
+    <p:spTree>
+      <p:nvGrpSpPr>
+        <p:cNvPr id="1" name=""/>
+        <p:cNvGrpSpPr/>
+        <p:nvPr/>
+      </p:nvGrpSpPr>
+      <p:grpSpPr>
+        <a:xfrm>
+          <a:off x="0" y="0"/>
+          <a:ext cx="0" cy="0"/>
+          <a:chOff x="0" y="0"/>
+          <a:chExt cx="0" cy="0"/>
+        </a:xfrm>
+      </p:grpSpPr>
+      <p:sp>
+        <p:nvSpPr>
+          <p:cNvPr id="2" name="Slide Image Placeholder 1"/>
+          <p:cNvSpPr>
+            <a:spLocks noGrp="1" noRot="1" noChangeAspect="1"/>
+          </p:cNvSpPr>
+          <p:nvPr>
+            <p:ph type="sldImg"/>
+          </p:nvPr>
+        </p:nvSpPr>
+        <p:spPr/>
+      </p:sp>
+      <p:sp>
+        <p:nvSpPr>
+          <p:cNvPr id="3" name="Notes Placeholder 2"/>
+          <p:cNvSpPr>
+            <a:spLocks noGrp="1"/>
+          </p:cNvSpPr>
+          <p:nvPr>
+            <p:ph type="body" idx="1"/>
+          </p:nvPr>
+        </p:nvSpPr>
+        <p:spPr/>
+        <p:txBody>
+          <a:bodyPr/>
+          <a:lstStyle/>
+          <a:p>
+            <a:r>
+              <a:rPr lang="en-US" dirty="0"/>
+              <a:t>Put:</a:t>
+            </a:r>
+          </a:p>
+          <a:p>
+            <a:r>
+              <a:rPr lang="en-US" dirty="0"/>
+              <a:t>lowercasing / light cleaning </a:t>
+            </a:r>
+          </a:p>
+          <a:p>
+            <a:r>
+              <a:rPr lang="en-US" dirty="0"/>
+              <a:t>missing text filled with empty strings </a:t>
+            </a:r>
+          </a:p>
+          <a:p>
+            <a:r>
+              <a:rPr lang="en-US" dirty="0"/>
+              <a:t>missingness indicators kept </a:t>
+            </a:r>
+          </a:p>
+          <a:p>
+            <a:r>
+              <a:rPr lang="en-US" dirty="0"/>
+              <a:t>title and review combined </a:t>
+            </a:r>
+          </a:p>
+          <a:p>
+            <a:r>
+              <a:rPr lang="en-US" dirty="0"/>
+              <a:t>n-grams used </a:t>
+            </a:r>
+          </a:p>
+          <a:p>
+            <a:r>
+              <a:rPr lang="en-US" dirty="0" err="1"/>
+              <a:t>BoW</a:t>
+            </a:r>
+            <a:r>
+              <a:rPr lang="en-US" dirty="0"/>
+              <a:t> (</a:t>
+            </a:r>
+            <a:r>
+              <a:rPr lang="en-US" sz="1200" kern="1200" dirty="0" err="1">
+                <a:solidFill>
+                  <a:schemeClr val="tx1"/>
+                </a:solidFill>
+                <a:latin typeface="+mn-lt"/>
+                <a:ea typeface="+mn-ea"/>
+                <a:cs typeface="+mn-cs"/>
+              </a:rPr>
+              <a:t>CountVectorizer</a:t>
+            </a:r>
+            <a:r>
+              <a:rPr lang="en-US" dirty="0"/>
+              <a:t>) with metadata </a:t>
+            </a:r>
+          </a:p>
+          <a:p>
+            <a:r>
+              <a:rPr lang="en-US" dirty="0"/>
+              <a:t>separate models: </a:t>
+            </a:r>
+          </a:p>
+          <a:p>
+            <a:pPr lvl="1"/>
+            <a:r>
+              <a:rPr lang="en-US" dirty="0"/>
+              <a:t>Ridge for </a:t>
+            </a:r>
+            <a:r>
+              <a:rPr lang="en-US" sz="1200" kern="1200" dirty="0">
+                <a:solidFill>
+                  <a:schemeClr val="tx1"/>
+                </a:solidFill>
+                <a:latin typeface="+mn-lt"/>
+                <a:ea typeface="+mn-ea"/>
+                <a:cs typeface="+mn-cs"/>
+              </a:rPr>
+              <a:t>Rating</a:t>
+            </a:r>
+            <a:r>
+              <a:rPr lang="en-US" dirty="0"/>
+              <a:t> </a:t>
+            </a:r>
+          </a:p>
+          <a:p>
+            <a:pPr lvl="1"/>
+            <a:r>
+              <a:rPr lang="en-US" dirty="0"/>
+              <a:t>Logistic Regression for </a:t>
+            </a:r>
+            <a:r>
+              <a:rPr lang="en-US" sz="1200" kern="1200" dirty="0">
+                <a:solidFill>
+                  <a:schemeClr val="tx1"/>
+                </a:solidFill>
+                <a:latin typeface="+mn-lt"/>
+                <a:ea typeface="+mn-ea"/>
+                <a:cs typeface="+mn-cs"/>
+              </a:rPr>
+              <a:t>Recommended</a:t>
+            </a:r>
+            <a:r>
+              <a:rPr lang="en-US" dirty="0"/>
+              <a:t> </a:t>
+            </a:r>
+          </a:p>
+          <a:p>
+            <a:r>
+              <a:rPr lang="en-US" dirty="0"/>
+              <a:t>What to say:</a:t>
+            </a:r>
+          </a:p>
+          <a:p>
+            <a:r>
+              <a:rPr lang="en-US" dirty="0"/>
+              <a:t>Classical NLP here means preprocessing and sparse text representation </a:t>
+            </a:r>
+          </a:p>
+          <a:p>
+            <a:r>
+              <a:rPr lang="en-US" dirty="0"/>
+              <a:t>I used unigrams and bigrams because short phrases like “too small” or “not flattering” were important </a:t>
+            </a:r>
+          </a:p>
+          <a:p>
+            <a:r>
+              <a:rPr lang="en-US" dirty="0"/>
+              <a:t>Separate models were used because the targets are different </a:t>
+            </a:r>
+          </a:p>
+        </p:txBody>
+      </p:sp>
+      <p:sp>
+        <p:nvSpPr>
+          <p:cNvPr id="4" name="Slide Number Placeholder 3"/>
+          <p:cNvSpPr>
+            <a:spLocks noGrp="1"/>
+          </p:cNvSpPr>
+          <p:nvPr>
+            <p:ph type="sldNum" sz="quarter" idx="5"/>
+          </p:nvPr>
+        </p:nvSpPr>
+        <p:spPr/>
+        <p:txBody>
+          <a:bodyPr/>
+          <a:lstStyle/>
+          <a:p>
+            <a:fld id="{FD99EE23-E0B4-844F-8556-21E3C5FE9B7C}" type="slidenum">
+              <a:rPr lang="en-GB" smtClean="0"/>
+              <a:t>6</a:t>
+            </a:fld>
+            <a:endParaRPr lang="en-GB"/>
+          </a:p>
+        </p:txBody>
+      </p:sp>
+    </p:spTree>
+    <p:extLst>
+      <p:ext uri="{BB962C8B-B14F-4D97-AF65-F5344CB8AC3E}">
+        <p14:creationId xmlns:p14="http://schemas.microsoft.com/office/powerpoint/2010/main" val="1206832217"/>
+      </p:ext>
+    </p:extLst>
+  </p:cSld>
+  <p:clrMapOvr>
+    <a:masterClrMapping/>
+  </p:clrMapOvr>
+</p:notes>
+</file>
+
+<file path=ppt/notesSlides/notesSlide7.xml><?xml version="1.0" encoding="utf-8"?>
+<p:notes xmlns:a="http://schemas.openxmlformats.org/drawingml/2006/main" xmlns:r="http://schemas.openxmlformats.org/officeDocument/2006/relationships" xmlns:p="http://schemas.openxmlformats.org/presentationml/2006/main">
+  <p:cSld>
+    <p:spTree>
+      <p:nvGrpSpPr>
+        <p:cNvPr id="1" name=""/>
+        <p:cNvGrpSpPr/>
+        <p:nvPr/>
+      </p:nvGrpSpPr>
+      <p:grpSpPr>
+        <a:xfrm>
+          <a:off x="0" y="0"/>
+          <a:ext cx="0" cy="0"/>
+          <a:chOff x="0" y="0"/>
+          <a:chExt cx="0" cy="0"/>
+        </a:xfrm>
+      </p:grpSpPr>
+      <p:sp>
+        <p:nvSpPr>
+          <p:cNvPr id="2" name="Slide Image Placeholder 1"/>
+          <p:cNvSpPr>
+            <a:spLocks noGrp="1" noRot="1" noChangeAspect="1"/>
+          </p:cNvSpPr>
+          <p:nvPr>
+            <p:ph type="sldImg"/>
+          </p:nvPr>
+        </p:nvSpPr>
+        <p:spPr/>
+      </p:sp>
+      <p:sp>
+        <p:nvSpPr>
+          <p:cNvPr id="3" name="Notes Placeholder 2"/>
+          <p:cNvSpPr>
+            <a:spLocks noGrp="1"/>
+          </p:cNvSpPr>
+          <p:nvPr>
+            <p:ph type="body" idx="1"/>
+          </p:nvPr>
+        </p:nvSpPr>
+        <p:spPr/>
+        <p:txBody>
+          <a:bodyPr/>
+          <a:lstStyle/>
+          <a:p>
+            <a:r>
+              <a:rPr lang="en-US" b="1" dirty="0"/>
+              <a:t>Content:</a:t>
+            </a:r>
+            <a:endParaRPr lang="en-US" dirty="0"/>
+          </a:p>
+          <a:p>
+            <a:r>
+              <a:rPr lang="en-US" dirty="0"/>
+              <a:t>Classical NLP preprocessing: </a:t>
+            </a:r>
+          </a:p>
+          <a:p>
+            <a:pPr lvl="1"/>
+            <a:r>
+              <a:rPr lang="en-US" dirty="0"/>
+              <a:t>lowercasing </a:t>
+            </a:r>
+          </a:p>
+          <a:p>
+            <a:pPr lvl="1"/>
+            <a:r>
+              <a:rPr lang="en-US" dirty="0"/>
+              <a:t>light text cleaning </a:t>
+            </a:r>
+          </a:p>
+          <a:p>
+            <a:pPr lvl="1"/>
+            <a:r>
+              <a:rPr lang="en-US" dirty="0"/>
+              <a:t>missing text handling </a:t>
+            </a:r>
+          </a:p>
+          <a:p>
+            <a:pPr lvl="1"/>
+            <a:r>
+              <a:rPr lang="en-US" dirty="0"/>
+              <a:t>missingness indicators </a:t>
+            </a:r>
+          </a:p>
+          <a:p>
+            <a:pPr lvl="1"/>
+            <a:r>
+              <a:rPr lang="en-US" dirty="0"/>
+              <a:t>text length features </a:t>
+            </a:r>
+          </a:p>
+          <a:p>
+            <a:r>
+              <a:rPr lang="en-US" dirty="0"/>
+              <a:t>Text representation: </a:t>
+            </a:r>
+          </a:p>
+          <a:p>
+            <a:pPr lvl="1"/>
+            <a:r>
+              <a:rPr lang="en-US" sz="1200" kern="1200" dirty="0" err="1">
+                <a:solidFill>
+                  <a:schemeClr val="tx1"/>
+                </a:solidFill>
+                <a:latin typeface="+mn-lt"/>
+                <a:ea typeface="+mn-ea"/>
+                <a:cs typeface="+mn-cs"/>
+              </a:rPr>
+              <a:t>CountVectorizer</a:t>
+            </a:r>
+            <a:r>
+              <a:rPr lang="en-US" dirty="0"/>
+              <a:t> </a:t>
+            </a:r>
+          </a:p>
+          <a:p>
+            <a:pPr lvl="1"/>
+            <a:r>
+              <a:rPr lang="en-US" dirty="0"/>
+              <a:t>unigrams + bigrams </a:t>
+            </a:r>
+          </a:p>
+          <a:p>
+            <a:r>
+              <a:rPr lang="en-US" dirty="0"/>
+              <a:t>Separate models: </a:t>
+            </a:r>
+          </a:p>
+          <a:p>
+            <a:pPr lvl="1"/>
+            <a:r>
+              <a:rPr lang="en-US" sz="1200" kern="1200" dirty="0">
+                <a:solidFill>
+                  <a:schemeClr val="tx1"/>
+                </a:solidFill>
+                <a:latin typeface="+mn-lt"/>
+                <a:ea typeface="+mn-ea"/>
+                <a:cs typeface="+mn-cs"/>
+              </a:rPr>
+              <a:t>Rating</a:t>
+            </a:r>
+            <a:r>
+              <a:rPr lang="en-US" dirty="0"/>
+              <a:t> → Ridge regression </a:t>
+            </a:r>
+          </a:p>
+          <a:p>
+            <a:pPr lvl="1"/>
+            <a:r>
+              <a:rPr lang="en-US" sz="1200" kern="1200" dirty="0">
+                <a:solidFill>
+                  <a:schemeClr val="tx1"/>
+                </a:solidFill>
+                <a:latin typeface="+mn-lt"/>
+                <a:ea typeface="+mn-ea"/>
+                <a:cs typeface="+mn-cs"/>
+              </a:rPr>
+              <a:t>Recommended</a:t>
+            </a:r>
+            <a:r>
+              <a:rPr lang="en-US" dirty="0"/>
+              <a:t> → Logistic Regression </a:t>
+            </a:r>
+          </a:p>
+          <a:p>
+            <a:r>
+              <a:rPr lang="en-US" dirty="0"/>
+              <a:t>Additional metadata: </a:t>
+            </a:r>
+          </a:p>
+          <a:p>
+            <a:pPr lvl="1"/>
+            <a:r>
+              <a:rPr lang="en-US" dirty="0"/>
+              <a:t>Age </a:t>
+            </a:r>
+          </a:p>
+          <a:p>
+            <a:pPr lvl="1"/>
+            <a:r>
+              <a:rPr lang="en-US" dirty="0" err="1"/>
+              <a:t>Pos_Feedback_Cnt</a:t>
+            </a:r>
+            <a:r>
+              <a:rPr lang="en-US" dirty="0"/>
+              <a:t> </a:t>
+            </a:r>
+          </a:p>
+          <a:p>
+            <a:pPr lvl="1"/>
+            <a:r>
+              <a:rPr lang="en-US" dirty="0"/>
+              <a:t>Division / Department / </a:t>
+            </a:r>
+            <a:r>
+              <a:rPr lang="en-US" dirty="0" err="1"/>
+              <a:t>Product_Category</a:t>
+            </a:r>
+            <a:endParaRPr lang="en-US" dirty="0"/>
+          </a:p>
+          <a:p>
+            <a:endParaRPr lang="en-GB" dirty="0"/>
+          </a:p>
+          <a:p>
+            <a:endParaRPr lang="en-GB" dirty="0"/>
+          </a:p>
+          <a:p>
+            <a:endParaRPr lang="en-GB" dirty="0"/>
+          </a:p>
+          <a:p>
+            <a:r>
+              <a:rPr lang="en-US" dirty="0"/>
+              <a:t>After EDA, I built the first predictive baseline using classical NLP and Bag-of-Words.</a:t>
+            </a:r>
+            <a:br>
+              <a:rPr lang="en-US" dirty="0"/>
+            </a:br>
+            <a:r>
+              <a:rPr lang="en-US" dirty="0"/>
+              <a:t>I used light preprocessing, handled missing text explicitly, and represented the reviews with word and phrase counts using </a:t>
+            </a:r>
+            <a:r>
+              <a:rPr lang="en-US" dirty="0" err="1"/>
+              <a:t>CountVectorizer</a:t>
+            </a:r>
+            <a:r>
+              <a:rPr lang="en-US" dirty="0"/>
+              <a:t>.</a:t>
+            </a:r>
+            <a:br>
+              <a:rPr lang="en-US" dirty="0"/>
+            </a:br>
+            <a:r>
+              <a:rPr lang="en-US" dirty="0"/>
+              <a:t>I also added metadata and trained separate models for the two targets: Ridge regression for Rating and Logistic Regression for Recommended.</a:t>
+            </a:r>
+            <a:endParaRPr lang="en-GB" dirty="0"/>
+          </a:p>
+        </p:txBody>
+      </p:sp>
+      <p:sp>
+        <p:nvSpPr>
+          <p:cNvPr id="4" name="Slide Number Placeholder 3"/>
+          <p:cNvSpPr>
+            <a:spLocks noGrp="1"/>
+          </p:cNvSpPr>
+          <p:nvPr>
+            <p:ph type="sldNum" sz="quarter" idx="5"/>
+          </p:nvPr>
+        </p:nvSpPr>
+        <p:spPr/>
+        <p:txBody>
+          <a:bodyPr/>
+          <a:lstStyle/>
+          <a:p>
+            <a:fld id="{FD99EE23-E0B4-844F-8556-21E3C5FE9B7C}" type="slidenum">
+              <a:rPr lang="en-GB" smtClean="0"/>
+              <a:t>7</a:t>
+            </a:fld>
+            <a:endParaRPr lang="en-GB"/>
+          </a:p>
+        </p:txBody>
+      </p:sp>
+    </p:spTree>
+    <p:extLst>
+      <p:ext uri="{BB962C8B-B14F-4D97-AF65-F5344CB8AC3E}">
+        <p14:creationId xmlns:p14="http://schemas.microsoft.com/office/powerpoint/2010/main" val="2316121022"/>
+      </p:ext>
+    </p:extLst>
+  </p:cSld>
+  <p:clrMapOvr>
+    <a:masterClrMapping/>
+  </p:clrMapOvr>
+</p:notes>
+</file>
+
+<file path=ppt/notesSlides/notesSlide8.xml><?xml version="1.0" encoding="utf-8"?>
+<p:notes xmlns:a="http://schemas.openxmlformats.org/drawingml/2006/main" xmlns:r="http://schemas.openxmlformats.org/officeDocument/2006/relationships" xmlns:p="http://schemas.openxmlformats.org/presentationml/2006/main">
+  <p:cSld>
+    <p:spTree>
+      <p:nvGrpSpPr>
+        <p:cNvPr id="1" name=""/>
+        <p:cNvGrpSpPr/>
+        <p:nvPr/>
+      </p:nvGrpSpPr>
+      <p:grpSpPr>
+        <a:xfrm>
+          <a:off x="0" y="0"/>
+          <a:ext cx="0" cy="0"/>
+          <a:chOff x="0" y="0"/>
+          <a:chExt cx="0" cy="0"/>
+        </a:xfrm>
+      </p:grpSpPr>
+      <p:sp>
+        <p:nvSpPr>
+          <p:cNvPr id="2" name="Slide Image Placeholder 1"/>
+          <p:cNvSpPr>
+            <a:spLocks noGrp="1" noRot="1" noChangeAspect="1"/>
+          </p:cNvSpPr>
+          <p:nvPr>
+            <p:ph type="sldImg"/>
+          </p:nvPr>
+        </p:nvSpPr>
+        <p:spPr/>
+      </p:sp>
+      <p:sp>
+        <p:nvSpPr>
+          <p:cNvPr id="3" name="Notes Placeholder 2"/>
+          <p:cNvSpPr>
+            <a:spLocks noGrp="1"/>
+          </p:cNvSpPr>
+          <p:nvPr>
+            <p:ph type="body" idx="1"/>
+          </p:nvPr>
+        </p:nvSpPr>
+        <p:spPr/>
+        <p:txBody>
+          <a:bodyPr/>
+          <a:lstStyle/>
+          <a:p>
+            <a:r>
+              <a:rPr lang="en-US" dirty="0"/>
+              <a:t>I compared several output formats because the competition uses mean </a:t>
+            </a:r>
+            <a:r>
+              <a:rPr lang="en-US" dirty="0" err="1"/>
+              <a:t>columnwise</a:t>
+            </a:r>
+            <a:r>
+              <a:rPr lang="en-US" dirty="0"/>
+              <a:t> Spearman correlation.</a:t>
+            </a:r>
+            <a:br>
+              <a:rPr lang="en-US" dirty="0"/>
+            </a:br>
+            <a:r>
+              <a:rPr lang="en-US" dirty="0"/>
+              <a:t>For Rating, continuous predictions worked better locally than rounded ones, because they preserve ranking information.</a:t>
+            </a:r>
+            <a:br>
+              <a:rPr lang="en-US" dirty="0"/>
+            </a:br>
+            <a:r>
+              <a:rPr lang="en-US" dirty="0"/>
+              <a:t>For Recommended, hard class labels performed better than probabilities in this baseline.</a:t>
+            </a:r>
+            <a:br>
+              <a:rPr lang="en-US" dirty="0"/>
+            </a:br>
+            <a:r>
+              <a:rPr lang="en-US" dirty="0"/>
+              <a:t>Since Kaggle requires integer ratings, the final Bag-of-Words submission used rounded Rating and hard-label Recommended.</a:t>
+            </a:r>
+            <a:endParaRPr lang="en-GB" dirty="0"/>
+          </a:p>
+        </p:txBody>
+      </p:sp>
+      <p:sp>
+        <p:nvSpPr>
+          <p:cNvPr id="4" name="Slide Number Placeholder 3"/>
+          <p:cNvSpPr>
+            <a:spLocks noGrp="1"/>
+          </p:cNvSpPr>
+          <p:nvPr>
+            <p:ph type="sldNum" sz="quarter" idx="5"/>
+          </p:nvPr>
+        </p:nvSpPr>
+        <p:spPr/>
+        <p:txBody>
+          <a:bodyPr/>
+          <a:lstStyle/>
+          <a:p>
+            <a:fld id="{FD99EE23-E0B4-844F-8556-21E3C5FE9B7C}" type="slidenum">
+              <a:rPr lang="en-GB" smtClean="0"/>
+              <a:t>8</a:t>
+            </a:fld>
+            <a:endParaRPr lang="en-GB"/>
+          </a:p>
+        </p:txBody>
+      </p:sp>
+    </p:spTree>
+    <p:extLst>
+      <p:ext uri="{BB962C8B-B14F-4D97-AF65-F5344CB8AC3E}">
+        <p14:creationId xmlns:p14="http://schemas.microsoft.com/office/powerpoint/2010/main" val="2094001383"/>
+      </p:ext>
+    </p:extLst>
+  </p:cSld>
+  <p:clrMapOvr>
+    <a:masterClrMapping/>
+  </p:clrMapOvr>
+</p:notes>
+</file>
+
+<file path=ppt/notesSlides/notesSlide9.xml><?xml version="1.0" encoding="utf-8"?>
+<p:notes xmlns:a="http://schemas.openxmlformats.org/drawingml/2006/main" xmlns:r="http://schemas.openxmlformats.org/officeDocument/2006/relationships" xmlns:p="http://schemas.openxmlformats.org/presentationml/2006/main">
+  <p:cSld>
+    <p:spTree>
+      <p:nvGrpSpPr>
+        <p:cNvPr id="1" name=""/>
+        <p:cNvGrpSpPr/>
+        <p:nvPr/>
+      </p:nvGrpSpPr>
+      <p:grpSpPr>
+        <a:xfrm>
+          <a:off x="0" y="0"/>
+          <a:ext cx="0" cy="0"/>
+          <a:chOff x="0" y="0"/>
+          <a:chExt cx="0" cy="0"/>
+        </a:xfrm>
+      </p:grpSpPr>
+      <p:sp>
+        <p:nvSpPr>
+          <p:cNvPr id="2" name="Slide Image Placeholder 1"/>
+          <p:cNvSpPr>
+            <a:spLocks noGrp="1" noRot="1" noChangeAspect="1"/>
+          </p:cNvSpPr>
+          <p:nvPr>
+            <p:ph type="sldImg"/>
+          </p:nvPr>
+        </p:nvSpPr>
+        <p:spPr/>
+      </p:sp>
+      <p:sp>
+        <p:nvSpPr>
+          <p:cNvPr id="3" name="Notes Placeholder 2"/>
+          <p:cNvSpPr>
+            <a:spLocks noGrp="1"/>
+          </p:cNvSpPr>
+          <p:nvPr>
+            <p:ph type="body" idx="1"/>
+          </p:nvPr>
+        </p:nvSpPr>
+        <p:spPr/>
+        <p:txBody>
+          <a:bodyPr/>
+          <a:lstStyle/>
+          <a:p>
+            <a:r>
+              <a:rPr lang="en-US" dirty="0"/>
+              <a:t>The final public leaderboard score for the Bag-of-Words baseline was 0.64544.</a:t>
+            </a:r>
+            <a:br>
+              <a:rPr lang="en-US" dirty="0"/>
+            </a:br>
+            <a:r>
+              <a:rPr lang="en-US" dirty="0"/>
+              <a:t>This was already a strong and stable result, especially for the binary Recommended target.</a:t>
+            </a:r>
+            <a:br>
+              <a:rPr lang="en-US" dirty="0"/>
+            </a:br>
+            <a:r>
+              <a:rPr lang="en-US" dirty="0"/>
+              <a:t>But because Bag-of-Words ignores word order beyond local n-grams, I next tested a sequential neural network.</a:t>
+            </a:r>
+            <a:endParaRPr lang="en-GB" dirty="0"/>
+          </a:p>
+        </p:txBody>
+      </p:sp>
+      <p:sp>
+        <p:nvSpPr>
+          <p:cNvPr id="4" name="Slide Number Placeholder 3"/>
+          <p:cNvSpPr>
+            <a:spLocks noGrp="1"/>
+          </p:cNvSpPr>
+          <p:nvPr>
+            <p:ph type="sldNum" sz="quarter" idx="5"/>
+          </p:nvPr>
+        </p:nvSpPr>
+        <p:spPr/>
+        <p:txBody>
+          <a:bodyPr/>
+          <a:lstStyle/>
+          <a:p>
+            <a:fld id="{FD99EE23-E0B4-844F-8556-21E3C5FE9B7C}" type="slidenum">
+              <a:rPr lang="en-GB" smtClean="0"/>
+              <a:t>9</a:t>
+            </a:fld>
+            <a:endParaRPr lang="en-GB"/>
+          </a:p>
+        </p:txBody>
+      </p:sp>
+    </p:spTree>
+    <p:extLst>
+      <p:ext uri="{BB962C8B-B14F-4D97-AF65-F5344CB8AC3E}">
+        <p14:creationId xmlns:p14="http://schemas.microsoft.com/office/powerpoint/2010/main" val="1112732447"/>
       </p:ext>
     </p:extLst>
   </p:cSld>
@@ -5056,6 +6791,1368 @@
 </p:sld>
 </file>
 
+<file path=ppt/slides/slide10.xml><?xml version="1.0" encoding="utf-8"?>
+<p:sld xmlns:a="http://schemas.openxmlformats.org/drawingml/2006/main" xmlns:r="http://schemas.openxmlformats.org/officeDocument/2006/relationships" xmlns:p="http://schemas.openxmlformats.org/presentationml/2006/main">
+  <p:cSld>
+    <p:spTree>
+      <p:nvGrpSpPr>
+        <p:cNvPr id="1" name=""/>
+        <p:cNvGrpSpPr/>
+        <p:nvPr/>
+      </p:nvGrpSpPr>
+      <p:grpSpPr>
+        <a:xfrm>
+          <a:off x="0" y="0"/>
+          <a:ext cx="0" cy="0"/>
+          <a:chOff x="0" y="0"/>
+          <a:chExt cx="0" cy="0"/>
+        </a:xfrm>
+      </p:grpSpPr>
+      <p:sp>
+        <p:nvSpPr>
+          <p:cNvPr id="2" name="Title 1">
+            <a:extLst>
+              <a:ext uri="{FF2B5EF4-FFF2-40B4-BE49-F238E27FC236}">
+                <a16:creationId xmlns:a16="http://schemas.microsoft.com/office/drawing/2014/main" id="{4D1DC7BB-B241-2AED-5DCC-33B7F56CE548}"/>
+              </a:ext>
+            </a:extLst>
+          </p:cNvPr>
+          <p:cNvSpPr>
+            <a:spLocks noGrp="1"/>
+          </p:cNvSpPr>
+          <p:nvPr>
+            <p:ph type="title"/>
+          </p:nvPr>
+        </p:nvSpPr>
+        <p:spPr/>
+        <p:txBody>
+          <a:bodyPr/>
+          <a:lstStyle/>
+          <a:p>
+            <a:r>
+              <a:rPr lang="en-US" dirty="0"/>
+              <a:t>RNN model: setup</a:t>
+            </a:r>
+            <a:endParaRPr lang="en-GB" dirty="0"/>
+          </a:p>
+        </p:txBody>
+      </p:sp>
+      <p:sp>
+        <p:nvSpPr>
+          <p:cNvPr id="3" name="Content Placeholder 2">
+            <a:extLst>
+              <a:ext uri="{FF2B5EF4-FFF2-40B4-BE49-F238E27FC236}">
+                <a16:creationId xmlns:a16="http://schemas.microsoft.com/office/drawing/2014/main" id="{A52470FB-5058-7207-4D46-9C7BF26E88CF}"/>
+              </a:ext>
+            </a:extLst>
+          </p:cNvPr>
+          <p:cNvSpPr>
+            <a:spLocks noGrp="1"/>
+          </p:cNvSpPr>
+          <p:nvPr>
+            <p:ph idx="1"/>
+          </p:nvPr>
+        </p:nvSpPr>
+        <p:spPr/>
+        <p:txBody>
+          <a:bodyPr/>
+          <a:lstStyle/>
+          <a:p>
+            <a:r>
+              <a:rPr lang="en-GB" dirty="0"/>
+              <a:t>First attempt - </a:t>
+            </a:r>
+          </a:p>
+        </p:txBody>
+      </p:sp>
+      <p:sp>
+        <p:nvSpPr>
+          <p:cNvPr id="4" name="Rectangle 1">
+            <a:extLst>
+              <a:ext uri="{FF2B5EF4-FFF2-40B4-BE49-F238E27FC236}">
+                <a16:creationId xmlns:a16="http://schemas.microsoft.com/office/drawing/2014/main" id="{12C8A210-2F9E-CD7C-A3DB-EDC616283581}"/>
+              </a:ext>
+            </a:extLst>
+          </p:cNvPr>
+          <p:cNvSpPr>
+            <a:spLocks noChangeArrowheads="1"/>
+          </p:cNvSpPr>
+          <p:nvPr/>
+        </p:nvSpPr>
+        <p:spPr bwMode="auto">
+          <a:xfrm>
+            <a:off x="2873830" y="1715532"/>
+            <a:ext cx="5791200" cy="954107"/>
+          </a:xfrm>
+          <a:prstGeom prst="rect">
+            <a:avLst/>
+          </a:prstGeom>
+          <a:noFill/>
+          <a:ln>
+            <a:noFill/>
+          </a:ln>
+          <a:effectLst/>
+          <a:extLst>
+            <a:ext uri="{909E8E84-426E-40DD-AFC4-6F175D3DCCD1}">
+              <a14:hiddenFill xmlns:a14="http://schemas.microsoft.com/office/drawing/2010/main">
+                <a:solidFill>
+                  <a:schemeClr val="accent1"/>
+                </a:solidFill>
+              </a14:hiddenFill>
+            </a:ext>
+            <a:ext uri="{91240B29-F687-4F45-9708-019B960494DF}">
+              <a14:hiddenLine xmlns:a14="http://schemas.microsoft.com/office/drawing/2010/main" w="9525">
+                <a:solidFill>
+                  <a:schemeClr val="tx1"/>
+                </a:solidFill>
+                <a:miter lim="800000"/>
+                <a:headEnd/>
+                <a:tailEnd/>
+              </a14:hiddenLine>
+            </a:ext>
+            <a:ext uri="{AF507438-7753-43E0-B8FC-AC1667EBCBE1}">
+              <a14:hiddenEffects xmlns:a14="http://schemas.microsoft.com/office/drawing/2010/main">
+                <a:effectLst>
+                  <a:outerShdw dist="35921" dir="2700000" algn="ctr" rotWithShape="0">
+                    <a:schemeClr val="bg2"/>
+                  </a:outerShdw>
+                </a:effectLst>
+              </a14:hiddenEffects>
+            </a:ext>
+          </a:extLst>
+        </p:spPr>
+        <p:txBody>
+          <a:bodyPr vert="horz" wrap="square" lIns="91440" tIns="45720" rIns="91440" bIns="45720" numCol="1" anchor="ctr" anchorCtr="0" compatLnSpc="1">
+            <a:prstTxWarp prst="textNoShape">
+              <a:avLst/>
+            </a:prstTxWarp>
+            <a:spAutoFit/>
+          </a:bodyPr>
+          <a:lstStyle/>
+          <a:p>
+            <a:pPr marL="0" marR="0" lvl="0" indent="0" algn="l" defTabSz="914400" rtl="0" eaLnBrk="0" fontAlgn="base" latinLnBrk="0" hangingPunct="0">
+              <a:lnSpc>
+                <a:spcPct val="100000"/>
+              </a:lnSpc>
+              <a:spcBef>
+                <a:spcPct val="0"/>
+              </a:spcBef>
+              <a:spcAft>
+                <a:spcPct val="0"/>
+              </a:spcAft>
+              <a:buClrTx/>
+              <a:buSzTx/>
+              <a:buFontTx/>
+              <a:buChar char="•"/>
+              <a:tabLst/>
+            </a:pPr>
+            <a:r>
+              <a:rPr kumimoji="0" lang="en-US" altLang="en-US" sz="1400" b="0" i="0" u="none" strike="noStrike" cap="none" normalizeH="0" baseline="0" dirty="0">
+                <a:ln>
+                  <a:noFill/>
+                </a:ln>
+                <a:solidFill>
+                  <a:schemeClr val="tx1"/>
+                </a:solidFill>
+                <a:effectLst/>
+                <a:latin typeface="Arial Unicode MS" panose="020B0604020202020204" pitchFamily="34" charset="-128"/>
+              </a:rPr>
+              <a:t>Rating</a:t>
+            </a:r>
+            <a:r>
+              <a:rPr kumimoji="0" lang="en-US" altLang="en-US" sz="1400" b="0" i="0" u="none" strike="noStrike" cap="none" normalizeH="0" baseline="0" dirty="0">
+                <a:ln>
+                  <a:noFill/>
+                </a:ln>
+                <a:solidFill>
+                  <a:schemeClr val="tx1"/>
+                </a:solidFill>
+                <a:effectLst/>
+              </a:rPr>
+              <a:t> performed well </a:t>
+            </a:r>
+            <a:endParaRPr kumimoji="0" lang="en-US" altLang="en-US" sz="1400" b="0" i="0" u="none" strike="noStrike" cap="none" normalizeH="0" baseline="0" dirty="0">
+              <a:ln>
+                <a:noFill/>
+              </a:ln>
+              <a:solidFill>
+                <a:schemeClr val="tx1"/>
+              </a:solidFill>
+              <a:effectLst/>
+              <a:latin typeface="Arial" panose="020B0604020202020204" pitchFamily="34" charset="0"/>
+            </a:endParaRPr>
+          </a:p>
+          <a:p>
+            <a:pPr marL="0" marR="0" lvl="0" indent="0" algn="l" defTabSz="914400" rtl="0" eaLnBrk="0" fontAlgn="base" latinLnBrk="0" hangingPunct="0">
+              <a:lnSpc>
+                <a:spcPct val="100000"/>
+              </a:lnSpc>
+              <a:spcBef>
+                <a:spcPct val="0"/>
+              </a:spcBef>
+              <a:spcAft>
+                <a:spcPct val="0"/>
+              </a:spcAft>
+              <a:buClrTx/>
+              <a:buSzTx/>
+              <a:buFontTx/>
+              <a:buChar char="•"/>
+              <a:tabLst/>
+            </a:pPr>
+            <a:r>
+              <a:rPr kumimoji="0" lang="en-US" altLang="en-US" sz="1400" b="0" i="0" u="none" strike="noStrike" cap="none" normalizeH="0" baseline="0" dirty="0">
+                <a:ln>
+                  <a:noFill/>
+                </a:ln>
+                <a:solidFill>
+                  <a:schemeClr val="tx1"/>
+                </a:solidFill>
+                <a:effectLst/>
+                <a:latin typeface="Arial Unicode MS" panose="020B0604020202020204" pitchFamily="34" charset="-128"/>
+              </a:rPr>
+              <a:t>Recommended</a:t>
+            </a:r>
+            <a:r>
+              <a:rPr kumimoji="0" lang="en-US" altLang="en-US" sz="1400" b="0" i="0" u="none" strike="noStrike" cap="none" normalizeH="0" baseline="0" dirty="0">
+                <a:ln>
+                  <a:noFill/>
+                </a:ln>
+                <a:solidFill>
+                  <a:schemeClr val="tx1"/>
+                </a:solidFill>
+                <a:effectLst/>
+              </a:rPr>
+              <a:t> initially failed </a:t>
+            </a:r>
+            <a:endParaRPr kumimoji="0" lang="en-US" altLang="en-US" sz="1400" b="0" i="0" u="none" strike="noStrike" cap="none" normalizeH="0" baseline="0" dirty="0">
+              <a:ln>
+                <a:noFill/>
+              </a:ln>
+              <a:solidFill>
+                <a:schemeClr val="tx1"/>
+              </a:solidFill>
+              <a:effectLst/>
+              <a:latin typeface="Arial" panose="020B0604020202020204" pitchFamily="34" charset="0"/>
+            </a:endParaRPr>
+          </a:p>
+          <a:p>
+            <a:pPr marL="0" marR="0" lvl="0" indent="0" algn="l" defTabSz="914400" rtl="0" eaLnBrk="0" fontAlgn="base" latinLnBrk="0" hangingPunct="0">
+              <a:lnSpc>
+                <a:spcPct val="100000"/>
+              </a:lnSpc>
+              <a:spcBef>
+                <a:spcPct val="0"/>
+              </a:spcBef>
+              <a:spcAft>
+                <a:spcPct val="0"/>
+              </a:spcAft>
+              <a:buClrTx/>
+              <a:buSzTx/>
+              <a:buFontTx/>
+              <a:buChar char="•"/>
+              <a:tabLst/>
+            </a:pPr>
+            <a:r>
+              <a:rPr kumimoji="0" lang="en-US" altLang="en-US" sz="1400" b="0" i="0" u="none" strike="noStrike" cap="none" normalizeH="0" baseline="0" dirty="0">
+                <a:ln>
+                  <a:noFill/>
+                </a:ln>
+                <a:solidFill>
+                  <a:schemeClr val="tx1"/>
+                </a:solidFill>
+                <a:effectLst/>
+                <a:latin typeface="Arial" panose="020B0604020202020204" pitchFamily="34" charset="0"/>
+              </a:rPr>
+              <a:t>Validation probabilities for </a:t>
+            </a:r>
+            <a:r>
+              <a:rPr kumimoji="0" lang="en-US" altLang="en-US" sz="1400" b="0" i="0" u="none" strike="noStrike" cap="none" normalizeH="0" baseline="0" dirty="0">
+                <a:ln>
+                  <a:noFill/>
+                </a:ln>
+                <a:solidFill>
+                  <a:schemeClr val="tx1"/>
+                </a:solidFill>
+                <a:effectLst/>
+                <a:latin typeface="Arial Unicode MS" panose="020B0604020202020204" pitchFamily="34" charset="-128"/>
+              </a:rPr>
+              <a:t>Recommended</a:t>
+            </a:r>
+            <a:r>
+              <a:rPr kumimoji="0" lang="en-US" altLang="en-US" sz="1400" b="0" i="0" u="none" strike="noStrike" cap="none" normalizeH="0" baseline="0" dirty="0">
+                <a:ln>
+                  <a:noFill/>
+                </a:ln>
+                <a:solidFill>
+                  <a:schemeClr val="tx1"/>
+                </a:solidFill>
+                <a:effectLst/>
+              </a:rPr>
+              <a:t> collapsed near 0.5 </a:t>
+            </a:r>
+            <a:endParaRPr kumimoji="0" lang="en-US" altLang="en-US" sz="1400" b="0" i="0" u="none" strike="noStrike" cap="none" normalizeH="0" baseline="0" dirty="0">
+              <a:ln>
+                <a:noFill/>
+              </a:ln>
+              <a:solidFill>
+                <a:schemeClr val="tx1"/>
+              </a:solidFill>
+              <a:effectLst/>
+              <a:latin typeface="Arial" panose="020B0604020202020204" pitchFamily="34" charset="0"/>
+            </a:endParaRPr>
+          </a:p>
+          <a:p>
+            <a:pPr marL="0" marR="0" lvl="0" indent="0" algn="l" defTabSz="914400" rtl="0" eaLnBrk="0" fontAlgn="base" latinLnBrk="0" hangingPunct="0">
+              <a:lnSpc>
+                <a:spcPct val="100000"/>
+              </a:lnSpc>
+              <a:spcBef>
+                <a:spcPct val="0"/>
+              </a:spcBef>
+              <a:spcAft>
+                <a:spcPct val="0"/>
+              </a:spcAft>
+              <a:buClrTx/>
+              <a:buSzTx/>
+              <a:buFontTx/>
+              <a:buChar char="•"/>
+              <a:tabLst/>
+            </a:pPr>
+            <a:r>
+              <a:rPr kumimoji="0" lang="en-US" altLang="en-US" sz="1400" b="0" i="0" u="none" strike="noStrike" cap="none" normalizeH="0" baseline="0" dirty="0">
+                <a:ln>
+                  <a:noFill/>
+                </a:ln>
+                <a:solidFill>
+                  <a:schemeClr val="tx1"/>
+                </a:solidFill>
+                <a:effectLst/>
+                <a:latin typeface="Arial" panose="020B0604020202020204" pitchFamily="34" charset="0"/>
+              </a:rPr>
+              <a:t>Model predicted almost all reviews as recommended</a:t>
+            </a:r>
+          </a:p>
+        </p:txBody>
+      </p:sp>
+      <p:sp>
+        <p:nvSpPr>
+          <p:cNvPr id="6" name="TextBox 5">
+            <a:extLst>
+              <a:ext uri="{FF2B5EF4-FFF2-40B4-BE49-F238E27FC236}">
+                <a16:creationId xmlns:a16="http://schemas.microsoft.com/office/drawing/2014/main" id="{BBCFC899-88D1-C982-9A16-5625BB39F838}"/>
+              </a:ext>
+            </a:extLst>
+          </p:cNvPr>
+          <p:cNvSpPr txBox="1"/>
+          <p:nvPr/>
+        </p:nvSpPr>
+        <p:spPr>
+          <a:xfrm>
+            <a:off x="612647" y="3244334"/>
+            <a:ext cx="6096000" cy="369332"/>
+          </a:xfrm>
+          <a:prstGeom prst="rect">
+            <a:avLst/>
+          </a:prstGeom>
+          <a:noFill/>
+        </p:spPr>
+        <p:txBody>
+          <a:bodyPr wrap="square">
+            <a:spAutoFit/>
+          </a:bodyPr>
+          <a:lstStyle/>
+          <a:p>
+            <a:r>
+              <a:rPr lang="en-US" dirty="0"/>
+              <a:t>Fixing the RNN</a:t>
+            </a:r>
+            <a:endParaRPr lang="en-GB" dirty="0"/>
+          </a:p>
+        </p:txBody>
+      </p:sp>
+      <p:pic>
+        <p:nvPicPr>
+          <p:cNvPr id="8" name="Picture 7">
+            <a:extLst>
+              <a:ext uri="{FF2B5EF4-FFF2-40B4-BE49-F238E27FC236}">
+                <a16:creationId xmlns:a16="http://schemas.microsoft.com/office/drawing/2014/main" id="{F9D07F21-8ABF-FB8E-37F4-92AC273EA480}"/>
+              </a:ext>
+            </a:extLst>
+          </p:cNvPr>
+          <p:cNvPicPr>
+            <a:picLocks noChangeAspect="1"/>
+          </p:cNvPicPr>
+          <p:nvPr/>
+        </p:nvPicPr>
+        <p:blipFill>
+          <a:blip r:embed="rId3"/>
+          <a:stretch>
+            <a:fillRect/>
+          </a:stretch>
+        </p:blipFill>
+        <p:spPr>
+          <a:xfrm>
+            <a:off x="3104243" y="4797120"/>
+            <a:ext cx="7772400" cy="690695"/>
+          </a:xfrm>
+          <a:prstGeom prst="rect">
+            <a:avLst/>
+          </a:prstGeom>
+        </p:spPr>
+      </p:pic>
+      <p:sp>
+        <p:nvSpPr>
+          <p:cNvPr id="10" name="TextBox 9">
+            <a:extLst>
+              <a:ext uri="{FF2B5EF4-FFF2-40B4-BE49-F238E27FC236}">
+                <a16:creationId xmlns:a16="http://schemas.microsoft.com/office/drawing/2014/main" id="{90932C5A-A303-31A8-BD63-E2A5DE1A2C5F}"/>
+              </a:ext>
+            </a:extLst>
+          </p:cNvPr>
+          <p:cNvSpPr txBox="1"/>
+          <p:nvPr/>
+        </p:nvSpPr>
+        <p:spPr>
+          <a:xfrm>
+            <a:off x="612647" y="4671337"/>
+            <a:ext cx="6096000" cy="369332"/>
+          </a:xfrm>
+          <a:prstGeom prst="rect">
+            <a:avLst/>
+          </a:prstGeom>
+          <a:noFill/>
+        </p:spPr>
+        <p:txBody>
+          <a:bodyPr wrap="square">
+            <a:spAutoFit/>
+          </a:bodyPr>
+          <a:lstStyle/>
+          <a:p>
+            <a:r>
+              <a:rPr lang="en-US" dirty="0"/>
+              <a:t>Fixing the RNN</a:t>
+            </a:r>
+          </a:p>
+        </p:txBody>
+      </p:sp>
+    </p:spTree>
+    <p:extLst>
+      <p:ext uri="{BB962C8B-B14F-4D97-AF65-F5344CB8AC3E}">
+        <p14:creationId xmlns:p14="http://schemas.microsoft.com/office/powerpoint/2010/main" val="2057712059"/>
+      </p:ext>
+    </p:extLst>
+  </p:cSld>
+  <p:clrMapOvr>
+    <a:masterClrMapping/>
+  </p:clrMapOvr>
+</p:sld>
+</file>
+
+<file path=ppt/slides/slide11.xml><?xml version="1.0" encoding="utf-8"?>
+<p:sld xmlns:a="http://schemas.openxmlformats.org/drawingml/2006/main" xmlns:r="http://schemas.openxmlformats.org/officeDocument/2006/relationships" xmlns:p="http://schemas.openxmlformats.org/presentationml/2006/main">
+  <p:cSld>
+    <p:spTree>
+      <p:nvGrpSpPr>
+        <p:cNvPr id="1" name=""/>
+        <p:cNvGrpSpPr/>
+        <p:nvPr/>
+      </p:nvGrpSpPr>
+      <p:grpSpPr>
+        <a:xfrm>
+          <a:off x="0" y="0"/>
+          <a:ext cx="0" cy="0"/>
+          <a:chOff x="0" y="0"/>
+          <a:chExt cx="0" cy="0"/>
+        </a:xfrm>
+      </p:grpSpPr>
+      <p:sp>
+        <p:nvSpPr>
+          <p:cNvPr id="2" name="Title 1">
+            <a:extLst>
+              <a:ext uri="{FF2B5EF4-FFF2-40B4-BE49-F238E27FC236}">
+                <a16:creationId xmlns:a16="http://schemas.microsoft.com/office/drawing/2014/main" id="{D2AD2344-2617-D2C5-A56C-F462BFB09573}"/>
+              </a:ext>
+            </a:extLst>
+          </p:cNvPr>
+          <p:cNvSpPr>
+            <a:spLocks noGrp="1"/>
+          </p:cNvSpPr>
+          <p:nvPr>
+            <p:ph type="title"/>
+          </p:nvPr>
+        </p:nvSpPr>
+        <p:spPr/>
+        <p:txBody>
+          <a:bodyPr/>
+          <a:lstStyle/>
+          <a:p>
+            <a:r>
+              <a:rPr lang="en-US" dirty="0"/>
+              <a:t>Why a hybrid model?</a:t>
+            </a:r>
+            <a:endParaRPr lang="en-GB" dirty="0"/>
+          </a:p>
+        </p:txBody>
+      </p:sp>
+      <p:sp>
+        <p:nvSpPr>
+          <p:cNvPr id="3" name="Content Placeholder 2">
+            <a:extLst>
+              <a:ext uri="{FF2B5EF4-FFF2-40B4-BE49-F238E27FC236}">
+                <a16:creationId xmlns:a16="http://schemas.microsoft.com/office/drawing/2014/main" id="{7998E748-A969-E17B-0AB6-9F177BDBE2B3}"/>
+              </a:ext>
+            </a:extLst>
+          </p:cNvPr>
+          <p:cNvSpPr>
+            <a:spLocks noGrp="1"/>
+          </p:cNvSpPr>
+          <p:nvPr>
+            <p:ph idx="1"/>
+          </p:nvPr>
+        </p:nvSpPr>
+        <p:spPr/>
+        <p:txBody>
+          <a:bodyPr/>
+          <a:lstStyle/>
+          <a:p>
+            <a:r>
+              <a:rPr lang="en-US" dirty="0"/>
+              <a:t>Bag-of-Words was strongest for Recommended </a:t>
+            </a:r>
+          </a:p>
+          <a:p>
+            <a:r>
+              <a:rPr lang="en-US" dirty="0"/>
+              <a:t>RNN was strongest for Rating </a:t>
+            </a:r>
+          </a:p>
+          <a:p>
+            <a:r>
+              <a:rPr lang="en-US" dirty="0"/>
+              <a:t>Idea: combine the best model family for each target </a:t>
+            </a:r>
+          </a:p>
+          <a:p>
+            <a:pPr marL="0" indent="0">
+              <a:buNone/>
+            </a:pPr>
+            <a:endParaRPr lang="en-GB" dirty="0"/>
+          </a:p>
+        </p:txBody>
+      </p:sp>
+    </p:spTree>
+    <p:extLst>
+      <p:ext uri="{BB962C8B-B14F-4D97-AF65-F5344CB8AC3E}">
+        <p14:creationId xmlns:p14="http://schemas.microsoft.com/office/powerpoint/2010/main" val="3077746440"/>
+      </p:ext>
+    </p:extLst>
+  </p:cSld>
+  <p:clrMapOvr>
+    <a:masterClrMapping/>
+  </p:clrMapOvr>
+</p:sld>
+</file>
+
+<file path=ppt/slides/slide12.xml><?xml version="1.0" encoding="utf-8"?>
+<p:sld xmlns:a="http://schemas.openxmlformats.org/drawingml/2006/main" xmlns:r="http://schemas.openxmlformats.org/officeDocument/2006/relationships" xmlns:p="http://schemas.openxmlformats.org/presentationml/2006/main">
+  <p:cSld>
+    <p:spTree>
+      <p:nvGrpSpPr>
+        <p:cNvPr id="1" name=""/>
+        <p:cNvGrpSpPr/>
+        <p:nvPr/>
+      </p:nvGrpSpPr>
+      <p:grpSpPr>
+        <a:xfrm>
+          <a:off x="0" y="0"/>
+          <a:ext cx="0" cy="0"/>
+          <a:chOff x="0" y="0"/>
+          <a:chExt cx="0" cy="0"/>
+        </a:xfrm>
+      </p:grpSpPr>
+      <p:sp>
+        <p:nvSpPr>
+          <p:cNvPr id="2" name="Title 1">
+            <a:extLst>
+              <a:ext uri="{FF2B5EF4-FFF2-40B4-BE49-F238E27FC236}">
+                <a16:creationId xmlns:a16="http://schemas.microsoft.com/office/drawing/2014/main" id="{96C0D754-F591-28DA-6FC5-17AC13E18333}"/>
+              </a:ext>
+            </a:extLst>
+          </p:cNvPr>
+          <p:cNvSpPr>
+            <a:spLocks noGrp="1"/>
+          </p:cNvSpPr>
+          <p:nvPr>
+            <p:ph type="title"/>
+          </p:nvPr>
+        </p:nvSpPr>
+        <p:spPr/>
+        <p:txBody>
+          <a:bodyPr/>
+          <a:lstStyle/>
+          <a:p>
+            <a:r>
+              <a:rPr lang="en-US" dirty="0"/>
+              <a:t>Hybrid validation results</a:t>
+            </a:r>
+            <a:endParaRPr lang="en-GB" dirty="0"/>
+          </a:p>
+        </p:txBody>
+      </p:sp>
+      <p:graphicFrame>
+        <p:nvGraphicFramePr>
+          <p:cNvPr id="4" name="Content Placeholder 3">
+            <a:extLst>
+              <a:ext uri="{FF2B5EF4-FFF2-40B4-BE49-F238E27FC236}">
+                <a16:creationId xmlns:a16="http://schemas.microsoft.com/office/drawing/2014/main" id="{C4D4BAAE-966C-A084-18CD-6BF53CAD49A0}"/>
+              </a:ext>
+            </a:extLst>
+          </p:cNvPr>
+          <p:cNvGraphicFramePr>
+            <a:graphicFrameLocks noGrp="1"/>
+          </p:cNvGraphicFramePr>
+          <p:nvPr>
+            <p:ph idx="1"/>
+            <p:extLst>
+              <p:ext uri="{D42A27DB-BD31-4B8C-83A1-F6EECF244321}">
+                <p14:modId xmlns:p14="http://schemas.microsoft.com/office/powerpoint/2010/main" val="1635923295"/>
+              </p:ext>
+            </p:extLst>
+          </p:nvPr>
+        </p:nvGraphicFramePr>
+        <p:xfrm>
+          <a:off x="612512" y="4630715"/>
+          <a:ext cx="10653714" cy="1463040"/>
+        </p:xfrm>
+        <a:graphic>
+          <a:graphicData uri="http://schemas.openxmlformats.org/drawingml/2006/table">
+            <a:tbl>
+              <a:tblPr/>
+              <a:tblGrid>
+                <a:gridCol w="3551238">
+                  <a:extLst>
+                    <a:ext uri="{9D8B030D-6E8A-4147-A177-3AD203B41FA5}">
+                      <a16:colId xmlns:a16="http://schemas.microsoft.com/office/drawing/2014/main" val="1122791115"/>
+                    </a:ext>
+                  </a:extLst>
+                </a:gridCol>
+                <a:gridCol w="3551238">
+                  <a:extLst>
+                    <a:ext uri="{9D8B030D-6E8A-4147-A177-3AD203B41FA5}">
+                      <a16:colId xmlns:a16="http://schemas.microsoft.com/office/drawing/2014/main" val="595070134"/>
+                    </a:ext>
+                  </a:extLst>
+                </a:gridCol>
+                <a:gridCol w="3551238">
+                  <a:extLst>
+                    <a:ext uri="{9D8B030D-6E8A-4147-A177-3AD203B41FA5}">
+                      <a16:colId xmlns:a16="http://schemas.microsoft.com/office/drawing/2014/main" val="2266046194"/>
+                    </a:ext>
+                  </a:extLst>
+                </a:gridCol>
+              </a:tblGrid>
+              <a:tr h="365760">
+                <a:tc>
+                  <a:txBody>
+                    <a:bodyPr/>
+                    <a:lstStyle/>
+                    <a:p>
+                      <a:pPr>
+                        <a:buNone/>
+                      </a:pPr>
+                      <a:r>
+                        <a:rPr lang="en-US" sz="1800"/>
+                        <a:t>Rating branch</a:t>
+                      </a:r>
+                    </a:p>
+                  </a:txBody>
+                  <a:tcPr anchor="ctr">
+                    <a:lnL>
+                      <a:noFill/>
+                    </a:lnL>
+                    <a:lnR>
+                      <a:noFill/>
+                    </a:lnR>
+                    <a:lnT>
+                      <a:noFill/>
+                    </a:lnT>
+                    <a:lnB>
+                      <a:noFill/>
+                    </a:lnB>
+                    <a:noFill/>
+                  </a:tcPr>
+                </a:tc>
+                <a:tc>
+                  <a:txBody>
+                    <a:bodyPr/>
+                    <a:lstStyle/>
+                    <a:p>
+                      <a:pPr>
+                        <a:buNone/>
+                      </a:pPr>
+                      <a:r>
+                        <a:rPr lang="en-US" sz="1800"/>
+                        <a:t>Recommended branch</a:t>
+                      </a:r>
+                    </a:p>
+                  </a:txBody>
+                  <a:tcPr anchor="ctr">
+                    <a:lnL>
+                      <a:noFill/>
+                    </a:lnL>
+                    <a:lnR>
+                      <a:noFill/>
+                    </a:lnR>
+                    <a:lnT>
+                      <a:noFill/>
+                    </a:lnT>
+                    <a:lnB>
+                      <a:noFill/>
+                    </a:lnB>
+                    <a:noFill/>
+                  </a:tcPr>
+                </a:tc>
+                <a:tc>
+                  <a:txBody>
+                    <a:bodyPr/>
+                    <a:lstStyle/>
+                    <a:p>
+                      <a:pPr algn="r">
+                        <a:buNone/>
+                      </a:pPr>
+                      <a:r>
+                        <a:rPr lang="en-US" sz="1800"/>
+                        <a:t>Mean Spearman</a:t>
+                      </a:r>
+                    </a:p>
+                  </a:txBody>
+                  <a:tcPr anchor="ctr">
+                    <a:lnL>
+                      <a:noFill/>
+                    </a:lnL>
+                    <a:lnR>
+                      <a:noFill/>
+                    </a:lnR>
+                    <a:lnT>
+                      <a:noFill/>
+                    </a:lnT>
+                    <a:lnB>
+                      <a:noFill/>
+                    </a:lnB>
+                    <a:noFill/>
+                  </a:tcPr>
+                </a:tc>
+                <a:extLst>
+                  <a:ext uri="{0D108BD9-81ED-4DB2-BD59-A6C34878D82A}">
+                    <a16:rowId xmlns:a16="http://schemas.microsoft.com/office/drawing/2014/main" val="3093971238"/>
+                  </a:ext>
+                </a:extLst>
+              </a:tr>
+              <a:tr h="365760">
+                <a:tc>
+                  <a:txBody>
+                    <a:bodyPr/>
+                    <a:lstStyle/>
+                    <a:p>
+                      <a:pPr>
+                        <a:buNone/>
+                      </a:pPr>
+                      <a:r>
+                        <a:rPr lang="en-US" sz="1800"/>
+                        <a:t>rounded RNN</a:t>
+                      </a:r>
+                    </a:p>
+                  </a:txBody>
+                  <a:tcPr anchor="ctr">
+                    <a:lnL>
+                      <a:noFill/>
+                    </a:lnL>
+                    <a:lnR>
+                      <a:noFill/>
+                    </a:lnR>
+                    <a:lnT>
+                      <a:noFill/>
+                    </a:lnT>
+                    <a:lnB>
+                      <a:noFill/>
+                    </a:lnB>
+                    <a:noFill/>
+                  </a:tcPr>
+                </a:tc>
+                <a:tc>
+                  <a:txBody>
+                    <a:bodyPr/>
+                    <a:lstStyle/>
+                    <a:p>
+                      <a:pPr>
+                        <a:buNone/>
+                      </a:pPr>
+                      <a:r>
+                        <a:rPr lang="en-US" sz="1800"/>
+                        <a:t>hard-label BoW</a:t>
+                      </a:r>
+                    </a:p>
+                  </a:txBody>
+                  <a:tcPr anchor="ctr">
+                    <a:lnL>
+                      <a:noFill/>
+                    </a:lnL>
+                    <a:lnR>
+                      <a:noFill/>
+                    </a:lnR>
+                    <a:lnT>
+                      <a:noFill/>
+                    </a:lnT>
+                    <a:lnB>
+                      <a:noFill/>
+                    </a:lnB>
+                    <a:noFill/>
+                  </a:tcPr>
+                </a:tc>
+                <a:tc>
+                  <a:txBody>
+                    <a:bodyPr/>
+                    <a:lstStyle/>
+                    <a:p>
+                      <a:pPr algn="r">
+                        <a:buNone/>
+                      </a:pPr>
+                      <a:r>
+                        <a:rPr lang="en-US" sz="1800" b="1"/>
+                        <a:t>0.6986</a:t>
+                      </a:r>
+                      <a:endParaRPr lang="en-US" sz="1800"/>
+                    </a:p>
+                  </a:txBody>
+                  <a:tcPr anchor="ctr">
+                    <a:lnL>
+                      <a:noFill/>
+                    </a:lnL>
+                    <a:lnR>
+                      <a:noFill/>
+                    </a:lnR>
+                    <a:lnT>
+                      <a:noFill/>
+                    </a:lnT>
+                    <a:lnB>
+                      <a:noFill/>
+                    </a:lnB>
+                    <a:noFill/>
+                  </a:tcPr>
+                </a:tc>
+                <a:extLst>
+                  <a:ext uri="{0D108BD9-81ED-4DB2-BD59-A6C34878D82A}">
+                    <a16:rowId xmlns:a16="http://schemas.microsoft.com/office/drawing/2014/main" val="2212519604"/>
+                  </a:ext>
+                </a:extLst>
+              </a:tr>
+              <a:tr h="365760">
+                <a:tc>
+                  <a:txBody>
+                    <a:bodyPr/>
+                    <a:lstStyle/>
+                    <a:p>
+                      <a:pPr>
+                        <a:buNone/>
+                      </a:pPr>
+                      <a:r>
+                        <a:rPr lang="en-US" sz="1800"/>
+                        <a:t>continuous RNN</a:t>
+                      </a:r>
+                    </a:p>
+                  </a:txBody>
+                  <a:tcPr anchor="ctr">
+                    <a:lnL>
+                      <a:noFill/>
+                    </a:lnL>
+                    <a:lnR>
+                      <a:noFill/>
+                    </a:lnR>
+                    <a:lnT>
+                      <a:noFill/>
+                    </a:lnT>
+                    <a:lnB>
+                      <a:noFill/>
+                    </a:lnB>
+                    <a:noFill/>
+                  </a:tcPr>
+                </a:tc>
+                <a:tc>
+                  <a:txBody>
+                    <a:bodyPr/>
+                    <a:lstStyle/>
+                    <a:p>
+                      <a:pPr>
+                        <a:buNone/>
+                      </a:pPr>
+                      <a:r>
+                        <a:rPr lang="en-US" sz="1800"/>
+                        <a:t>hard-label BoW</a:t>
+                      </a:r>
+                    </a:p>
+                  </a:txBody>
+                  <a:tcPr anchor="ctr">
+                    <a:lnL>
+                      <a:noFill/>
+                    </a:lnL>
+                    <a:lnR>
+                      <a:noFill/>
+                    </a:lnR>
+                    <a:lnT>
+                      <a:noFill/>
+                    </a:lnT>
+                    <a:lnB>
+                      <a:noFill/>
+                    </a:lnB>
+                    <a:noFill/>
+                  </a:tcPr>
+                </a:tc>
+                <a:tc>
+                  <a:txBody>
+                    <a:bodyPr/>
+                    <a:lstStyle/>
+                    <a:p>
+                      <a:pPr algn="r">
+                        <a:buNone/>
+                      </a:pPr>
+                      <a:r>
+                        <a:rPr lang="en-US" sz="1800"/>
+                        <a:t>0.6984</a:t>
+                      </a:r>
+                    </a:p>
+                  </a:txBody>
+                  <a:tcPr anchor="ctr">
+                    <a:lnL>
+                      <a:noFill/>
+                    </a:lnL>
+                    <a:lnR>
+                      <a:noFill/>
+                    </a:lnR>
+                    <a:lnT>
+                      <a:noFill/>
+                    </a:lnT>
+                    <a:lnB>
+                      <a:noFill/>
+                    </a:lnB>
+                    <a:noFill/>
+                  </a:tcPr>
+                </a:tc>
+                <a:extLst>
+                  <a:ext uri="{0D108BD9-81ED-4DB2-BD59-A6C34878D82A}">
+                    <a16:rowId xmlns:a16="http://schemas.microsoft.com/office/drawing/2014/main" val="3093056752"/>
+                  </a:ext>
+                </a:extLst>
+              </a:tr>
+              <a:tr h="365760">
+                <a:tc>
+                  <a:txBody>
+                    <a:bodyPr/>
+                    <a:lstStyle/>
+                    <a:p>
+                      <a:pPr>
+                        <a:buNone/>
+                      </a:pPr>
+                      <a:r>
+                        <a:rPr lang="en-US" sz="1800"/>
+                        <a:t>rounded RNN</a:t>
+                      </a:r>
+                    </a:p>
+                  </a:txBody>
+                  <a:tcPr anchor="ctr">
+                    <a:lnL>
+                      <a:noFill/>
+                    </a:lnL>
+                    <a:lnR>
+                      <a:noFill/>
+                    </a:lnR>
+                    <a:lnT>
+                      <a:noFill/>
+                    </a:lnT>
+                    <a:lnB>
+                      <a:noFill/>
+                    </a:lnB>
+                    <a:noFill/>
+                  </a:tcPr>
+                </a:tc>
+                <a:tc>
+                  <a:txBody>
+                    <a:bodyPr/>
+                    <a:lstStyle/>
+                    <a:p>
+                      <a:pPr>
+                        <a:buNone/>
+                      </a:pPr>
+                      <a:r>
+                        <a:rPr lang="en-US" sz="1800"/>
+                        <a:t>probability BoW</a:t>
+                      </a:r>
+                    </a:p>
+                  </a:txBody>
+                  <a:tcPr anchor="ctr">
+                    <a:lnL>
+                      <a:noFill/>
+                    </a:lnL>
+                    <a:lnR>
+                      <a:noFill/>
+                    </a:lnR>
+                    <a:lnT>
+                      <a:noFill/>
+                    </a:lnT>
+                    <a:lnB>
+                      <a:noFill/>
+                    </a:lnB>
+                    <a:noFill/>
+                  </a:tcPr>
+                </a:tc>
+                <a:tc>
+                  <a:txBody>
+                    <a:bodyPr/>
+                    <a:lstStyle/>
+                    <a:p>
+                      <a:pPr algn="r">
+                        <a:buNone/>
+                      </a:pPr>
+                      <a:r>
+                        <a:rPr lang="en-US" sz="1800" dirty="0"/>
+                        <a:t>0.6384</a:t>
+                      </a:r>
+                    </a:p>
+                  </a:txBody>
+                  <a:tcPr anchor="ctr">
+                    <a:lnL>
+                      <a:noFill/>
+                    </a:lnL>
+                    <a:lnR>
+                      <a:noFill/>
+                    </a:lnR>
+                    <a:lnT>
+                      <a:noFill/>
+                    </a:lnT>
+                    <a:lnB>
+                      <a:noFill/>
+                    </a:lnB>
+                    <a:noFill/>
+                  </a:tcPr>
+                </a:tc>
+                <a:extLst>
+                  <a:ext uri="{0D108BD9-81ED-4DB2-BD59-A6C34878D82A}">
+                    <a16:rowId xmlns:a16="http://schemas.microsoft.com/office/drawing/2014/main" val="533883324"/>
+                  </a:ext>
+                </a:extLst>
+              </a:tr>
+            </a:tbl>
+          </a:graphicData>
+        </a:graphic>
+      </p:graphicFrame>
+      <p:sp>
+        <p:nvSpPr>
+          <p:cNvPr id="6" name="TextBox 5">
+            <a:extLst>
+              <a:ext uri="{FF2B5EF4-FFF2-40B4-BE49-F238E27FC236}">
+                <a16:creationId xmlns:a16="http://schemas.microsoft.com/office/drawing/2014/main" id="{7F406158-4D4D-59EE-CADA-EB9473E5E064}"/>
+              </a:ext>
+            </a:extLst>
+          </p:cNvPr>
+          <p:cNvSpPr txBox="1"/>
+          <p:nvPr/>
+        </p:nvSpPr>
+        <p:spPr>
+          <a:xfrm>
+            <a:off x="3048000" y="1580954"/>
+            <a:ext cx="6096000" cy="646331"/>
+          </a:xfrm>
+          <a:prstGeom prst="rect">
+            <a:avLst/>
+          </a:prstGeom>
+          <a:noFill/>
+        </p:spPr>
+        <p:txBody>
+          <a:bodyPr wrap="square">
+            <a:spAutoFit/>
+          </a:bodyPr>
+          <a:lstStyle/>
+          <a:p>
+            <a:pPr>
+              <a:buFont typeface="Arial" panose="020B0604020202020204" pitchFamily="34" charset="0"/>
+              <a:buChar char="•"/>
+            </a:pPr>
+            <a:r>
+              <a:rPr lang="en-US" dirty="0"/>
+              <a:t>Best Kaggle-valid local setup = </a:t>
+            </a:r>
+            <a:r>
+              <a:rPr lang="en-US" b="1" dirty="0"/>
+              <a:t>rounded RNN + hard-label </a:t>
+            </a:r>
+            <a:r>
+              <a:rPr lang="en-US" b="1" dirty="0" err="1"/>
+              <a:t>BoW</a:t>
+            </a:r>
+            <a:r>
+              <a:rPr lang="en-US" dirty="0"/>
+              <a:t> </a:t>
+            </a:r>
+          </a:p>
+        </p:txBody>
+      </p:sp>
+    </p:spTree>
+    <p:extLst>
+      <p:ext uri="{BB962C8B-B14F-4D97-AF65-F5344CB8AC3E}">
+        <p14:creationId xmlns:p14="http://schemas.microsoft.com/office/powerpoint/2010/main" val="1709606525"/>
+      </p:ext>
+    </p:extLst>
+  </p:cSld>
+  <p:clrMapOvr>
+    <a:masterClrMapping/>
+  </p:clrMapOvr>
+</p:sld>
+</file>
+
+<file path=ppt/slides/slide13.xml><?xml version="1.0" encoding="utf-8"?>
+<p:sld xmlns:a="http://schemas.openxmlformats.org/drawingml/2006/main" xmlns:r="http://schemas.openxmlformats.org/officeDocument/2006/relationships" xmlns:p="http://schemas.openxmlformats.org/presentationml/2006/main">
+  <p:cSld>
+    <p:spTree>
+      <p:nvGrpSpPr>
+        <p:cNvPr id="1" name=""/>
+        <p:cNvGrpSpPr/>
+        <p:nvPr/>
+      </p:nvGrpSpPr>
+      <p:grpSpPr>
+        <a:xfrm>
+          <a:off x="0" y="0"/>
+          <a:ext cx="0" cy="0"/>
+          <a:chOff x="0" y="0"/>
+          <a:chExt cx="0" cy="0"/>
+        </a:xfrm>
+      </p:grpSpPr>
+      <p:sp>
+        <p:nvSpPr>
+          <p:cNvPr id="2" name="Title 1">
+            <a:extLst>
+              <a:ext uri="{FF2B5EF4-FFF2-40B4-BE49-F238E27FC236}">
+                <a16:creationId xmlns:a16="http://schemas.microsoft.com/office/drawing/2014/main" id="{765504C6-0F07-0D32-04DA-155B912AF2E1}"/>
+              </a:ext>
+            </a:extLst>
+          </p:cNvPr>
+          <p:cNvSpPr>
+            <a:spLocks noGrp="1"/>
+          </p:cNvSpPr>
+          <p:nvPr>
+            <p:ph type="title"/>
+          </p:nvPr>
+        </p:nvSpPr>
+        <p:spPr/>
+        <p:txBody>
+          <a:bodyPr/>
+          <a:lstStyle/>
+          <a:p>
+            <a:r>
+              <a:rPr lang="en-US" dirty="0"/>
+              <a:t>Extra experiments</a:t>
+            </a:r>
+            <a:endParaRPr lang="en-GB" dirty="0"/>
+          </a:p>
+        </p:txBody>
+      </p:sp>
+      <p:sp>
+        <p:nvSpPr>
+          <p:cNvPr id="3" name="Content Placeholder 2">
+            <a:extLst>
+              <a:ext uri="{FF2B5EF4-FFF2-40B4-BE49-F238E27FC236}">
+                <a16:creationId xmlns:a16="http://schemas.microsoft.com/office/drawing/2014/main" id="{F970AEDF-AF43-22BA-1179-03F853FFD4A4}"/>
+              </a:ext>
+            </a:extLst>
+          </p:cNvPr>
+          <p:cNvSpPr>
+            <a:spLocks noGrp="1"/>
+          </p:cNvSpPr>
+          <p:nvPr>
+            <p:ph idx="1"/>
+          </p:nvPr>
+        </p:nvSpPr>
+        <p:spPr/>
+        <p:txBody>
+          <a:bodyPr/>
+          <a:lstStyle/>
+          <a:p>
+            <a:r>
+              <a:rPr lang="en-US" dirty="0"/>
+              <a:t>Threshold tuning for </a:t>
+            </a:r>
+            <a:r>
+              <a:rPr lang="en-US" sz="1200" dirty="0"/>
+              <a:t>Recommended</a:t>
+            </a:r>
+            <a:r>
+              <a:rPr lang="en-US" dirty="0"/>
+              <a:t> </a:t>
+            </a:r>
+          </a:p>
+          <a:p>
+            <a:pPr lvl="1"/>
+            <a:r>
+              <a:rPr lang="en-US" dirty="0"/>
+              <a:t>did not improve the score </a:t>
+            </a:r>
+          </a:p>
+          <a:p>
+            <a:r>
+              <a:rPr lang="en-US" dirty="0"/>
+              <a:t>TF-IDF instead of </a:t>
+            </a:r>
+            <a:r>
+              <a:rPr lang="en-US" dirty="0" err="1"/>
+              <a:t>CountVectorizer</a:t>
+            </a:r>
+            <a:r>
+              <a:rPr lang="en-US" dirty="0"/>
+              <a:t> </a:t>
+            </a:r>
+          </a:p>
+          <a:p>
+            <a:pPr lvl="1"/>
+            <a:r>
+              <a:rPr lang="en-US" dirty="0"/>
+              <a:t>slightly worse than </a:t>
+            </a:r>
+            <a:r>
+              <a:rPr lang="en-US" dirty="0" err="1"/>
+              <a:t>BoW</a:t>
+            </a:r>
+            <a:r>
+              <a:rPr lang="en-US" dirty="0"/>
+              <a:t> </a:t>
+            </a:r>
+          </a:p>
+          <a:p>
+            <a:r>
+              <a:rPr lang="en-US" dirty="0"/>
+              <a:t>Huber loss for RNN </a:t>
+            </a:r>
+            <a:r>
+              <a:rPr lang="en-US" sz="1200" dirty="0"/>
+              <a:t>Rating</a:t>
+            </a:r>
+            <a:r>
+              <a:rPr lang="en-US" dirty="0"/>
+              <a:t> </a:t>
+            </a:r>
+          </a:p>
+          <a:p>
+            <a:pPr lvl="1"/>
+            <a:r>
+              <a:rPr lang="en-US" dirty="0"/>
+              <a:t>improved local validation </a:t>
+            </a:r>
+          </a:p>
+          <a:p>
+            <a:pPr lvl="1"/>
+            <a:r>
+              <a:rPr lang="en-US" dirty="0"/>
+              <a:t>did not improve public leaderboard </a:t>
+            </a:r>
+          </a:p>
+          <a:p>
+            <a:endParaRPr lang="en-GB" dirty="0"/>
+          </a:p>
+        </p:txBody>
+      </p:sp>
+    </p:spTree>
+    <p:extLst>
+      <p:ext uri="{BB962C8B-B14F-4D97-AF65-F5344CB8AC3E}">
+        <p14:creationId xmlns:p14="http://schemas.microsoft.com/office/powerpoint/2010/main" val="3423293911"/>
+      </p:ext>
+    </p:extLst>
+  </p:cSld>
+  <p:clrMapOvr>
+    <a:masterClrMapping/>
+  </p:clrMapOvr>
+</p:sld>
+</file>
+
+<file path=ppt/slides/slide14.xml><?xml version="1.0" encoding="utf-8"?>
+<p:sld xmlns:a="http://schemas.openxmlformats.org/drawingml/2006/main" xmlns:r="http://schemas.openxmlformats.org/officeDocument/2006/relationships" xmlns:p="http://schemas.openxmlformats.org/presentationml/2006/main">
+  <p:cSld>
+    <p:spTree>
+      <p:nvGrpSpPr>
+        <p:cNvPr id="1" name=""/>
+        <p:cNvGrpSpPr/>
+        <p:nvPr/>
+      </p:nvGrpSpPr>
+      <p:grpSpPr>
+        <a:xfrm>
+          <a:off x="0" y="0"/>
+          <a:ext cx="0" cy="0"/>
+          <a:chOff x="0" y="0"/>
+          <a:chExt cx="0" cy="0"/>
+        </a:xfrm>
+      </p:grpSpPr>
+      <p:sp>
+        <p:nvSpPr>
+          <p:cNvPr id="2" name="Title 1">
+            <a:extLst>
+              <a:ext uri="{FF2B5EF4-FFF2-40B4-BE49-F238E27FC236}">
+                <a16:creationId xmlns:a16="http://schemas.microsoft.com/office/drawing/2014/main" id="{232D6E9E-77B7-D5B2-50FF-528B6145007F}"/>
+              </a:ext>
+            </a:extLst>
+          </p:cNvPr>
+          <p:cNvSpPr>
+            <a:spLocks noGrp="1"/>
+          </p:cNvSpPr>
+          <p:nvPr>
+            <p:ph type="title"/>
+          </p:nvPr>
+        </p:nvSpPr>
+        <p:spPr/>
+        <p:txBody>
+          <a:bodyPr/>
+          <a:lstStyle/>
+          <a:p>
+            <a:r>
+              <a:rPr lang="en-GB"/>
+              <a:t>Final conclusion</a:t>
+            </a:r>
+          </a:p>
+        </p:txBody>
+      </p:sp>
+      <p:sp>
+        <p:nvSpPr>
+          <p:cNvPr id="3" name="Content Placeholder 2">
+            <a:extLst>
+              <a:ext uri="{FF2B5EF4-FFF2-40B4-BE49-F238E27FC236}">
+                <a16:creationId xmlns:a16="http://schemas.microsoft.com/office/drawing/2014/main" id="{8CC244CB-DD11-CB76-E9F5-77C1D721FD54}"/>
+              </a:ext>
+            </a:extLst>
+          </p:cNvPr>
+          <p:cNvSpPr>
+            <a:spLocks noGrp="1"/>
+          </p:cNvSpPr>
+          <p:nvPr>
+            <p:ph idx="1"/>
+          </p:nvPr>
+        </p:nvSpPr>
+        <p:spPr/>
+        <p:txBody>
+          <a:bodyPr/>
+          <a:lstStyle/>
+          <a:p>
+            <a:endParaRPr lang="en-GB"/>
+          </a:p>
+        </p:txBody>
+      </p:sp>
+    </p:spTree>
+    <p:extLst>
+      <p:ext uri="{BB962C8B-B14F-4D97-AF65-F5344CB8AC3E}">
+        <p14:creationId xmlns:p14="http://schemas.microsoft.com/office/powerpoint/2010/main" val="1135264755"/>
+      </p:ext>
+    </p:extLst>
+  </p:cSld>
+  <p:clrMapOvr>
+    <a:masterClrMapping/>
+  </p:clrMapOvr>
+</p:sld>
+</file>
+
 <file path=ppt/slides/slide2.xml><?xml version="1.0" encoding="utf-8"?>
 <p:sld xmlns:a="http://schemas.openxmlformats.org/drawingml/2006/main" xmlns:r="http://schemas.openxmlformats.org/officeDocument/2006/relationships" xmlns:p="http://schemas.openxmlformats.org/presentationml/2006/main">
   <p:cSld>
@@ -5383,6 +8480,423 @@
     <p:extLst>
       <p:ext uri="{BB962C8B-B14F-4D97-AF65-F5344CB8AC3E}">
         <p14:creationId xmlns:p14="http://schemas.microsoft.com/office/powerpoint/2010/main" val="1761563725"/>
+      </p:ext>
+    </p:extLst>
+  </p:cSld>
+  <p:clrMapOvr>
+    <a:masterClrMapping/>
+  </p:clrMapOvr>
+</p:sld>
+</file>
+
+<file path=ppt/slides/slide6.xml><?xml version="1.0" encoding="utf-8"?>
+<p:sld xmlns:a="http://schemas.openxmlformats.org/drawingml/2006/main" xmlns:r="http://schemas.openxmlformats.org/officeDocument/2006/relationships" xmlns:p="http://schemas.openxmlformats.org/presentationml/2006/main">
+  <p:cSld>
+    <p:spTree>
+      <p:nvGrpSpPr>
+        <p:cNvPr id="1" name=""/>
+        <p:cNvGrpSpPr/>
+        <p:nvPr/>
+      </p:nvGrpSpPr>
+      <p:grpSpPr>
+        <a:xfrm>
+          <a:off x="0" y="0"/>
+          <a:ext cx="0" cy="0"/>
+          <a:chOff x="0" y="0"/>
+          <a:chExt cx="0" cy="0"/>
+        </a:xfrm>
+      </p:grpSpPr>
+      <p:sp>
+        <p:nvSpPr>
+          <p:cNvPr id="2" name="Title 1">
+            <a:extLst>
+              <a:ext uri="{FF2B5EF4-FFF2-40B4-BE49-F238E27FC236}">
+                <a16:creationId xmlns:a16="http://schemas.microsoft.com/office/drawing/2014/main" id="{36D82B7E-BBC2-5875-5EA5-0BF2CF639FCC}"/>
+              </a:ext>
+            </a:extLst>
+          </p:cNvPr>
+          <p:cNvSpPr>
+            <a:spLocks noGrp="1"/>
+          </p:cNvSpPr>
+          <p:nvPr>
+            <p:ph type="title"/>
+          </p:nvPr>
+        </p:nvSpPr>
+        <p:spPr/>
+        <p:txBody>
+          <a:bodyPr/>
+          <a:lstStyle/>
+          <a:p>
+            <a:r>
+              <a:rPr lang="en-US" dirty="0"/>
+              <a:t>Classical NLP preprocessing and Bag-of-Words baseline</a:t>
+            </a:r>
+            <a:endParaRPr lang="en-GB" dirty="0"/>
+          </a:p>
+        </p:txBody>
+      </p:sp>
+      <p:sp>
+        <p:nvSpPr>
+          <p:cNvPr id="3" name="Content Placeholder 2">
+            <a:extLst>
+              <a:ext uri="{FF2B5EF4-FFF2-40B4-BE49-F238E27FC236}">
+                <a16:creationId xmlns:a16="http://schemas.microsoft.com/office/drawing/2014/main" id="{F3CD81DA-B2E6-4423-4299-3D3B83DF0CB7}"/>
+              </a:ext>
+            </a:extLst>
+          </p:cNvPr>
+          <p:cNvSpPr>
+            <a:spLocks noGrp="1"/>
+          </p:cNvSpPr>
+          <p:nvPr>
+            <p:ph idx="1"/>
+          </p:nvPr>
+        </p:nvSpPr>
+        <p:spPr/>
+        <p:txBody>
+          <a:bodyPr/>
+          <a:lstStyle/>
+          <a:p>
+            <a:endParaRPr lang="en-GB"/>
+          </a:p>
+        </p:txBody>
+      </p:sp>
+    </p:spTree>
+    <p:extLst>
+      <p:ext uri="{BB962C8B-B14F-4D97-AF65-F5344CB8AC3E}">
+        <p14:creationId xmlns:p14="http://schemas.microsoft.com/office/powerpoint/2010/main" val="821462737"/>
+      </p:ext>
+    </p:extLst>
+  </p:cSld>
+  <p:clrMapOvr>
+    <a:masterClrMapping/>
+  </p:clrMapOvr>
+</p:sld>
+</file>
+
+<file path=ppt/slides/slide7.xml><?xml version="1.0" encoding="utf-8"?>
+<p:sld xmlns:a="http://schemas.openxmlformats.org/drawingml/2006/main" xmlns:r="http://schemas.openxmlformats.org/officeDocument/2006/relationships" xmlns:p="http://schemas.openxmlformats.org/presentationml/2006/main">
+  <p:cSld>
+    <p:spTree>
+      <p:nvGrpSpPr>
+        <p:cNvPr id="1" name=""/>
+        <p:cNvGrpSpPr/>
+        <p:nvPr/>
+      </p:nvGrpSpPr>
+      <p:grpSpPr>
+        <a:xfrm>
+          <a:off x="0" y="0"/>
+          <a:ext cx="0" cy="0"/>
+          <a:chOff x="0" y="0"/>
+          <a:chExt cx="0" cy="0"/>
+        </a:xfrm>
+      </p:grpSpPr>
+      <p:sp>
+        <p:nvSpPr>
+          <p:cNvPr id="2" name="Title 1">
+            <a:extLst>
+              <a:ext uri="{FF2B5EF4-FFF2-40B4-BE49-F238E27FC236}">
+                <a16:creationId xmlns:a16="http://schemas.microsoft.com/office/drawing/2014/main" id="{DE20B5F8-2515-3E9D-C526-582E0E49E2D3}"/>
+              </a:ext>
+            </a:extLst>
+          </p:cNvPr>
+          <p:cNvSpPr>
+            <a:spLocks noGrp="1"/>
+          </p:cNvSpPr>
+          <p:nvPr>
+            <p:ph type="title"/>
+          </p:nvPr>
+        </p:nvSpPr>
+        <p:spPr/>
+        <p:txBody>
+          <a:bodyPr/>
+          <a:lstStyle/>
+          <a:p>
+            <a:r>
+              <a:rPr lang="en-US" dirty="0"/>
+              <a:t>Bag-of-Words model: setup</a:t>
+            </a:r>
+            <a:endParaRPr lang="en-GB" dirty="0"/>
+          </a:p>
+        </p:txBody>
+      </p:sp>
+      <p:sp>
+        <p:nvSpPr>
+          <p:cNvPr id="3" name="Content Placeholder 2">
+            <a:extLst>
+              <a:ext uri="{FF2B5EF4-FFF2-40B4-BE49-F238E27FC236}">
+                <a16:creationId xmlns:a16="http://schemas.microsoft.com/office/drawing/2014/main" id="{38055292-3631-1D8D-D764-F6A0AC20CD49}"/>
+              </a:ext>
+            </a:extLst>
+          </p:cNvPr>
+          <p:cNvSpPr>
+            <a:spLocks noGrp="1"/>
+          </p:cNvSpPr>
+          <p:nvPr>
+            <p:ph idx="1"/>
+          </p:nvPr>
+        </p:nvSpPr>
+        <p:spPr/>
+        <p:txBody>
+          <a:bodyPr/>
+          <a:lstStyle/>
+          <a:p>
+            <a:endParaRPr lang="en-GB"/>
+          </a:p>
+        </p:txBody>
+      </p:sp>
+    </p:spTree>
+    <p:extLst>
+      <p:ext uri="{BB962C8B-B14F-4D97-AF65-F5344CB8AC3E}">
+        <p14:creationId xmlns:p14="http://schemas.microsoft.com/office/powerpoint/2010/main" val="1385345628"/>
+      </p:ext>
+    </p:extLst>
+  </p:cSld>
+  <p:clrMapOvr>
+    <a:masterClrMapping/>
+  </p:clrMapOvr>
+</p:sld>
+</file>
+
+<file path=ppt/slides/slide8.xml><?xml version="1.0" encoding="utf-8"?>
+<p:sld xmlns:a="http://schemas.openxmlformats.org/drawingml/2006/main" xmlns:r="http://schemas.openxmlformats.org/officeDocument/2006/relationships" xmlns:p="http://schemas.openxmlformats.org/presentationml/2006/main">
+  <p:cSld>
+    <p:spTree>
+      <p:nvGrpSpPr>
+        <p:cNvPr id="1" name=""/>
+        <p:cNvGrpSpPr/>
+        <p:nvPr/>
+      </p:nvGrpSpPr>
+      <p:grpSpPr>
+        <a:xfrm>
+          <a:off x="0" y="0"/>
+          <a:ext cx="0" cy="0"/>
+          <a:chOff x="0" y="0"/>
+          <a:chExt cx="0" cy="0"/>
+        </a:xfrm>
+      </p:grpSpPr>
+      <p:sp>
+        <p:nvSpPr>
+          <p:cNvPr id="2" name="Title 1">
+            <a:extLst>
+              <a:ext uri="{FF2B5EF4-FFF2-40B4-BE49-F238E27FC236}">
+                <a16:creationId xmlns:a16="http://schemas.microsoft.com/office/drawing/2014/main" id="{3BD27498-2256-293C-558F-6C142F0CB041}"/>
+              </a:ext>
+            </a:extLst>
+          </p:cNvPr>
+          <p:cNvSpPr>
+            <a:spLocks noGrp="1"/>
+          </p:cNvSpPr>
+          <p:nvPr>
+            <p:ph type="title"/>
+          </p:nvPr>
+        </p:nvSpPr>
+        <p:spPr/>
+        <p:txBody>
+          <a:bodyPr/>
+          <a:lstStyle/>
+          <a:p>
+            <a:r>
+              <a:rPr lang="en-US" dirty="0"/>
+              <a:t>Bag-of-Words validation results</a:t>
+            </a:r>
+            <a:endParaRPr lang="en-GB" dirty="0"/>
+          </a:p>
+        </p:txBody>
+      </p:sp>
+      <p:pic>
+        <p:nvPicPr>
+          <p:cNvPr id="5" name="Content Placeholder 4">
+            <a:extLst>
+              <a:ext uri="{FF2B5EF4-FFF2-40B4-BE49-F238E27FC236}">
+                <a16:creationId xmlns:a16="http://schemas.microsoft.com/office/drawing/2014/main" id="{821DAB98-F997-E9BB-47B6-4847DBAE5B3A}"/>
+              </a:ext>
+            </a:extLst>
+          </p:cNvPr>
+          <p:cNvPicPr>
+            <a:picLocks noGrp="1" noChangeAspect="1"/>
+          </p:cNvPicPr>
+          <p:nvPr>
+            <p:ph idx="1"/>
+          </p:nvPr>
+        </p:nvPicPr>
+        <p:blipFill>
+          <a:blip r:embed="rId3"/>
+          <a:stretch>
+            <a:fillRect/>
+          </a:stretch>
+        </p:blipFill>
+        <p:spPr>
+          <a:xfrm>
+            <a:off x="827881" y="3186906"/>
+            <a:ext cx="10223500" cy="1651000"/>
+          </a:xfrm>
+          <a:prstGeom prst="rect">
+            <a:avLst/>
+          </a:prstGeom>
+        </p:spPr>
+      </p:pic>
+    </p:spTree>
+    <p:extLst>
+      <p:ext uri="{BB962C8B-B14F-4D97-AF65-F5344CB8AC3E}">
+        <p14:creationId xmlns:p14="http://schemas.microsoft.com/office/powerpoint/2010/main" val="2907997910"/>
+      </p:ext>
+    </p:extLst>
+  </p:cSld>
+  <p:clrMapOvr>
+    <a:masterClrMapping/>
+  </p:clrMapOvr>
+</p:sld>
+</file>
+
+<file path=ppt/slides/slide9.xml><?xml version="1.0" encoding="utf-8"?>
+<p:sld xmlns:a="http://schemas.openxmlformats.org/drawingml/2006/main" xmlns:r="http://schemas.openxmlformats.org/officeDocument/2006/relationships" xmlns:p="http://schemas.openxmlformats.org/presentationml/2006/main">
+  <p:cSld>
+    <p:spTree>
+      <p:nvGrpSpPr>
+        <p:cNvPr id="1" name=""/>
+        <p:cNvGrpSpPr/>
+        <p:nvPr/>
+      </p:nvGrpSpPr>
+      <p:grpSpPr>
+        <a:xfrm>
+          <a:off x="0" y="0"/>
+          <a:ext cx="0" cy="0"/>
+          <a:chOff x="0" y="0"/>
+          <a:chExt cx="0" cy="0"/>
+        </a:xfrm>
+      </p:grpSpPr>
+      <p:sp>
+        <p:nvSpPr>
+          <p:cNvPr id="2" name="Title 1">
+            <a:extLst>
+              <a:ext uri="{FF2B5EF4-FFF2-40B4-BE49-F238E27FC236}">
+                <a16:creationId xmlns:a16="http://schemas.microsoft.com/office/drawing/2014/main" id="{0BB9D11C-6ACF-CBC3-0417-F705C8F5C77B}"/>
+              </a:ext>
+            </a:extLst>
+          </p:cNvPr>
+          <p:cNvSpPr>
+            <a:spLocks noGrp="1"/>
+          </p:cNvSpPr>
+          <p:nvPr>
+            <p:ph type="title"/>
+          </p:nvPr>
+        </p:nvSpPr>
+        <p:spPr/>
+        <p:txBody>
+          <a:bodyPr/>
+          <a:lstStyle/>
+          <a:p>
+            <a:r>
+              <a:rPr lang="en-US" dirty="0"/>
+              <a:t>Bag-of-Words interpretation</a:t>
+            </a:r>
+            <a:br>
+              <a:rPr lang="en-US" dirty="0"/>
+            </a:br>
+            <a:r>
+              <a:rPr lang="en-US" sz="2800" b="0" dirty="0"/>
+              <a:t>What the Bag-of-Words model learned</a:t>
+            </a:r>
+            <a:endParaRPr lang="en-GB" b="0" dirty="0"/>
+          </a:p>
+        </p:txBody>
+      </p:sp>
+      <p:pic>
+        <p:nvPicPr>
+          <p:cNvPr id="8" name="Picture 7">
+            <a:extLst>
+              <a:ext uri="{FF2B5EF4-FFF2-40B4-BE49-F238E27FC236}">
+                <a16:creationId xmlns:a16="http://schemas.microsoft.com/office/drawing/2014/main" id="{E9CE05DB-2D98-4F6F-27E9-10669BE812A0}"/>
+              </a:ext>
+            </a:extLst>
+          </p:cNvPr>
+          <p:cNvPicPr>
+            <a:picLocks noChangeAspect="1"/>
+          </p:cNvPicPr>
+          <p:nvPr/>
+        </p:nvPicPr>
+        <p:blipFill>
+          <a:blip r:embed="rId3"/>
+          <a:stretch>
+            <a:fillRect/>
+          </a:stretch>
+        </p:blipFill>
+        <p:spPr>
+          <a:xfrm>
+            <a:off x="7312535" y="548640"/>
+            <a:ext cx="4699141" cy="2773098"/>
+          </a:xfrm>
+          <a:prstGeom prst="rect">
+            <a:avLst/>
+          </a:prstGeom>
+        </p:spPr>
+      </p:pic>
+      <p:pic>
+        <p:nvPicPr>
+          <p:cNvPr id="13" name="Content Placeholder 12">
+            <a:extLst>
+              <a:ext uri="{FF2B5EF4-FFF2-40B4-BE49-F238E27FC236}">
+                <a16:creationId xmlns:a16="http://schemas.microsoft.com/office/drawing/2014/main" id="{04994208-7F69-547F-704D-3CAB6FA5A951}"/>
+              </a:ext>
+            </a:extLst>
+          </p:cNvPr>
+          <p:cNvPicPr>
+            <a:picLocks noGrp="1" noChangeAspect="1"/>
+          </p:cNvPicPr>
+          <p:nvPr>
+            <p:ph idx="1"/>
+          </p:nvPr>
+        </p:nvPicPr>
+        <p:blipFill>
+          <a:blip r:embed="rId4"/>
+          <a:stretch>
+            <a:fillRect/>
+          </a:stretch>
+        </p:blipFill>
+        <p:spPr>
+          <a:xfrm>
+            <a:off x="6684625" y="6049995"/>
+            <a:ext cx="5327051" cy="463458"/>
+          </a:xfrm>
+          <a:prstGeom prst="rect">
+            <a:avLst/>
+          </a:prstGeom>
+        </p:spPr>
+      </p:pic>
+      <p:pic>
+        <p:nvPicPr>
+          <p:cNvPr id="11" name="Picture 10">
+            <a:extLst>
+              <a:ext uri="{FF2B5EF4-FFF2-40B4-BE49-F238E27FC236}">
+                <a16:creationId xmlns:a16="http://schemas.microsoft.com/office/drawing/2014/main" id="{00A5E117-6774-5F2B-58C2-23CA83186E64}"/>
+              </a:ext>
+            </a:extLst>
+          </p:cNvPr>
+          <p:cNvPicPr>
+            <a:picLocks noChangeAspect="1"/>
+          </p:cNvPicPr>
+          <p:nvPr/>
+        </p:nvPicPr>
+        <p:blipFill>
+          <a:blip r:embed="rId5"/>
+          <a:stretch>
+            <a:fillRect/>
+          </a:stretch>
+        </p:blipFill>
+        <p:spPr>
+          <a:xfrm>
+            <a:off x="1789896" y="2029779"/>
+            <a:ext cx="4894729" cy="2798442"/>
+          </a:xfrm>
+          <a:prstGeom prst="rect">
+            <a:avLst/>
+          </a:prstGeom>
+        </p:spPr>
+      </p:pic>
+    </p:spTree>
+    <p:extLst>
+      <p:ext uri="{BB962C8B-B14F-4D97-AF65-F5344CB8AC3E}">
+        <p14:creationId xmlns:p14="http://schemas.microsoft.com/office/powerpoint/2010/main" val="1376153329"/>
       </p:ext>
     </p:extLst>
   </p:cSld>

--- a/presentation/Presentation_project.pptx
+++ b/presentation/Presentation_project.pptx
@@ -5,23 +5,28 @@
     <p:sldMasterId id="2147483669" r:id="rId1"/>
   </p:sldMasterIdLst>
   <p:notesMasterIdLst>
-    <p:notesMasterId r:id="rId16"/>
+    <p:notesMasterId r:id="rId21"/>
   </p:notesMasterIdLst>
   <p:sldIdLst>
     <p:sldId id="256" r:id="rId2"/>
-    <p:sldId id="257" r:id="rId3"/>
+    <p:sldId id="271" r:id="rId3"/>
     <p:sldId id="258" r:id="rId4"/>
-    <p:sldId id="259" r:id="rId5"/>
-    <p:sldId id="260" r:id="rId6"/>
-    <p:sldId id="261" r:id="rId7"/>
-    <p:sldId id="262" r:id="rId8"/>
-    <p:sldId id="263" r:id="rId9"/>
-    <p:sldId id="264" r:id="rId10"/>
-    <p:sldId id="265" r:id="rId11"/>
-    <p:sldId id="266" r:id="rId12"/>
-    <p:sldId id="267" r:id="rId13"/>
-    <p:sldId id="268" r:id="rId14"/>
-    <p:sldId id="269" r:id="rId15"/>
+    <p:sldId id="257" r:id="rId5"/>
+    <p:sldId id="272" r:id="rId6"/>
+    <p:sldId id="259" r:id="rId7"/>
+    <p:sldId id="273" r:id="rId8"/>
+    <p:sldId id="274" r:id="rId9"/>
+    <p:sldId id="260" r:id="rId10"/>
+    <p:sldId id="261" r:id="rId11"/>
+    <p:sldId id="262" r:id="rId12"/>
+    <p:sldId id="263" r:id="rId13"/>
+    <p:sldId id="264" r:id="rId14"/>
+    <p:sldId id="265" r:id="rId15"/>
+    <p:sldId id="266" r:id="rId16"/>
+    <p:sldId id="267" r:id="rId17"/>
+    <p:sldId id="268" r:id="rId18"/>
+    <p:sldId id="269" r:id="rId19"/>
+    <p:sldId id="270" r:id="rId20"/>
   </p:sldIdLst>
   <p:sldSz cx="12192000" cy="6858000"/>
   <p:notesSz cx="6858000" cy="9144000"/>
@@ -120,6 +125,11 @@
       </a:defRPr>
     </a:lvl9pPr>
   </p:defaultTextStyle>
+  <p:extLst>
+    <p:ext uri="{EFAFB233-063F-42B5-8137-9DF3F51BA10A}">
+      <p15:sldGuideLst xmlns:p15="http://schemas.microsoft.com/office/powerpoint/2012/main"/>
+    </p:ext>
+  </p:extLst>
 </p:presentation>
 </file>
 
@@ -205,7 +215,7 @@
           <a:p>
             <a:fld id="{B0334298-24E2-184A-BD19-4EB9995C8D12}" type="datetimeFigureOut">
               <a:rPr lang="en-GB" smtClean="0"/>
-              <a:t>10/05/2026</a:t>
+              <a:t>11/05/2026</a:t>
             </a:fld>
             <a:endParaRPr lang="en-GB"/>
           </a:p>
@@ -519,8 +529,50 @@
           <a:p>
             <a:r>
               <a:rPr lang="en-US" dirty="0"/>
-              <a:t>The task is to predict two targets from fashion reviews and metadata The two targets are different in nature: </a:t>
-            </a:r>
+              <a:t>The task is to build a machine learning model that can predict customer feedback from product review data.</a:t>
+            </a:r>
+          </a:p>
+          <a:p>
+            <a:r>
+              <a:rPr lang="en-US" dirty="0"/>
+              <a:t>Each row represents one customer review for a clothing item. For each review, we have information about the customer, the text of the review, the product category, and some feedback information.</a:t>
+            </a:r>
+          </a:p>
+          <a:p>
+            <a:r>
+              <a:rPr lang="en-US" dirty="0"/>
+              <a:t>The model must predict two outputs:</a:t>
+            </a:r>
+          </a:p>
+          <a:p>
+            <a:r>
+              <a:rPr lang="en-US" b="1" dirty="0"/>
+              <a:t>Rating</a:t>
+            </a:r>
+            <a:r>
+              <a:rPr lang="en-US" dirty="0"/>
+              <a:t> — an integer score from 1 to 5.</a:t>
+            </a:r>
+            <a:br>
+              <a:rPr lang="en-US" dirty="0"/>
+            </a:br>
+            <a:r>
+              <a:rPr lang="en-US" dirty="0"/>
+              <a:t>This is the customer’s overall rating of the product.</a:t>
+            </a:r>
+          </a:p>
+          <a:p>
+            <a:r>
+              <a:rPr lang="en-US" b="1" dirty="0"/>
+              <a:t>Recommended</a:t>
+            </a:r>
+            <a:r>
+              <a:rPr lang="en-US" dirty="0"/>
+              <a:t> — a binary value, either 0 or 1.</a:t>
+            </a:r>
+            <a:br>
+              <a:rPr lang="en-US" dirty="0"/>
+            </a:br>
             <a:r>
               <a:rPr lang="en-US" sz="1200" kern="1200" dirty="0">
                 <a:solidFill>
@@ -530,14 +582,12 @@
                 <a:ea typeface="+mn-ea"/>
                 <a:cs typeface="+mn-cs"/>
               </a:rPr>
-              <a:t>Rating</a:t>
-            </a:r>
-            <a:r>
-              <a:rPr lang="en-US" dirty="0"/>
-              <a:t> is ordinal from 1 to 5 </a:t>
-            </a:r>
-          </a:p>
-          <a:p>
+              <a:t>1</a:t>
+            </a:r>
+            <a:r>
+              <a:rPr lang="en-US" dirty="0"/>
+              <a:t> means the customer recommends the product, and </a:t>
+            </a:r>
             <a:r>
               <a:rPr lang="en-US" sz="1200" kern="1200" dirty="0">
                 <a:solidFill>
@@ -547,11 +597,25 @@
                 <a:ea typeface="+mn-ea"/>
                 <a:cs typeface="+mn-cs"/>
               </a:rPr>
-              <a:t>Recommended</a:t>
-            </a:r>
-            <a:r>
-              <a:rPr lang="en-US" dirty="0"/>
-              <a:t> is binary</a:t>
+              <a:t>0</a:t>
+            </a:r>
+            <a:r>
+              <a:rPr lang="en-US" dirty="0"/>
+              <a:t> means they do not.</a:t>
+            </a:r>
+          </a:p>
+          <a:p>
+            <a:r>
+              <a:rPr lang="en-US" dirty="0"/>
+              <a:t>So this is a </a:t>
+            </a:r>
+            <a:r>
+              <a:rPr lang="en-US" b="1" dirty="0"/>
+              <a:t>multi-target prediction problem</a:t>
+            </a:r>
+            <a:r>
+              <a:rPr lang="en-US" dirty="0"/>
+              <a:t>: one target is ordinal/numerical, and one target is binary.</a:t>
             </a:r>
           </a:p>
           <a:p>
@@ -641,400 +705,36 @@
           <a:p>
             <a:r>
               <a:rPr lang="en-US" dirty="0"/>
-              <a:t>Architecture: Embedding </a:t>
-            </a:r>
-          </a:p>
-          <a:p>
-            <a:r>
-              <a:rPr lang="en-US" dirty="0"/>
-              <a:t>GRU </a:t>
-            </a:r>
-          </a:p>
-          <a:p>
-            <a:r>
-              <a:rPr lang="en-US" dirty="0"/>
-              <a:t>Dense layer </a:t>
-            </a:r>
-          </a:p>
-          <a:p>
-            <a:r>
-              <a:rPr lang="en-US" dirty="0"/>
-              <a:t>Separate models: </a:t>
-            </a:r>
-            <a:r>
-              <a:rPr lang="en-US" sz="1200" kern="1200" dirty="0">
-                <a:solidFill>
-                  <a:schemeClr val="tx1"/>
-                </a:solidFill>
-                <a:latin typeface="+mn-lt"/>
-                <a:ea typeface="+mn-ea"/>
-                <a:cs typeface="+mn-cs"/>
-              </a:rPr>
-              <a:t>Rating</a:t>
-            </a:r>
-            <a:r>
-              <a:rPr lang="en-US" dirty="0"/>
-              <a:t> → regression </a:t>
-            </a:r>
-          </a:p>
-          <a:p>
-            <a:r>
-              <a:rPr lang="en-US" sz="1200" kern="1200" dirty="0">
-                <a:solidFill>
-                  <a:schemeClr val="tx1"/>
-                </a:solidFill>
-                <a:latin typeface="+mn-lt"/>
-                <a:ea typeface="+mn-ea"/>
-                <a:cs typeface="+mn-cs"/>
-              </a:rPr>
-              <a:t>Recommended</a:t>
-            </a:r>
-            <a:r>
-              <a:rPr lang="en-US" dirty="0"/>
-              <a:t> → classification</a:t>
-            </a:r>
-          </a:p>
-          <a:p>
-            <a:endParaRPr lang="en-GB" dirty="0"/>
-          </a:p>
-          <a:p>
-            <a:r>
-              <a:rPr lang="en-US" sz="1200" kern="1200" dirty="0">
-                <a:solidFill>
-                  <a:schemeClr val="tx1"/>
-                </a:solidFill>
-                <a:latin typeface="+mn-lt"/>
-                <a:ea typeface="+mn-ea"/>
-                <a:cs typeface="+mn-cs"/>
-              </a:rPr>
-              <a:t>Rating</a:t>
-            </a:r>
-            <a:r>
-              <a:rPr lang="en-US" dirty="0"/>
-              <a:t> performed well </a:t>
-            </a:r>
-          </a:p>
-          <a:p>
-            <a:r>
-              <a:rPr lang="en-US" sz="1200" kern="1200" dirty="0">
-                <a:solidFill>
-                  <a:schemeClr val="tx1"/>
-                </a:solidFill>
-                <a:latin typeface="+mn-lt"/>
-                <a:ea typeface="+mn-ea"/>
-                <a:cs typeface="+mn-cs"/>
-              </a:rPr>
-              <a:t>Recommended</a:t>
-            </a:r>
-            <a:r>
-              <a:rPr lang="en-US" dirty="0"/>
-              <a:t> initially failed </a:t>
-            </a:r>
-          </a:p>
-          <a:p>
-            <a:r>
-              <a:rPr lang="en-US" dirty="0"/>
-              <a:t>Validation probabilities for </a:t>
-            </a:r>
-            <a:r>
-              <a:rPr lang="en-US" sz="1200" kern="1200" dirty="0">
-                <a:solidFill>
-                  <a:schemeClr val="tx1"/>
-                </a:solidFill>
-                <a:latin typeface="+mn-lt"/>
-                <a:ea typeface="+mn-ea"/>
-                <a:cs typeface="+mn-cs"/>
-              </a:rPr>
-              <a:t>Recommended</a:t>
-            </a:r>
-            <a:r>
-              <a:rPr lang="en-US" dirty="0"/>
-              <a:t> collapsed near 0.5 </a:t>
-            </a:r>
-          </a:p>
-          <a:p>
-            <a:r>
-              <a:rPr lang="en-US" dirty="0"/>
-              <a:t>Model predicted almost all reviews as recommended </a:t>
-            </a:r>
-          </a:p>
-          <a:p>
-            <a:r>
-              <a:rPr lang="en-US" dirty="0"/>
-              <a:t>You can add a small diagnostic note:</a:t>
-            </a:r>
-          </a:p>
-          <a:p>
-            <a:r>
-              <a:rPr lang="en-US" dirty="0"/>
-              <a:t>Prediction collapse due to unstable training / imbalance handling</a:t>
-            </a:r>
-          </a:p>
-          <a:p>
-            <a:endParaRPr lang="en-GB" dirty="0"/>
-          </a:p>
-          <a:p>
-            <a:endParaRPr lang="en-GB" dirty="0"/>
-          </a:p>
-          <a:p>
-            <a:pPr marL="0" marR="0" lvl="0" indent="0" algn="l" defTabSz="914400" rtl="0" eaLnBrk="1" fontAlgn="auto" latinLnBrk="0" hangingPunct="1">
-              <a:lnSpc>
-                <a:spcPct val="100000"/>
-              </a:lnSpc>
-              <a:spcBef>
-                <a:spcPts val="0"/>
-              </a:spcBef>
-              <a:spcAft>
-                <a:spcPts val="0"/>
-              </a:spcAft>
-              <a:buClrTx/>
-              <a:buSzTx/>
-              <a:buFontTx/>
-              <a:buNone/>
-              <a:tabLst/>
-              <a:defRPr/>
-            </a:pPr>
-            <a:r>
-              <a:rPr lang="en-US" dirty="0"/>
-              <a:t>The first RNN attempt was not immediately successful.</a:t>
+              <a:t>I compared several output formats because the competition uses mean </a:t>
+            </a:r>
+            <a:r>
+              <a:rPr lang="en-US" dirty="0" err="1"/>
+              <a:t>columnwise</a:t>
+            </a:r>
+            <a:r>
+              <a:rPr lang="en-US" dirty="0"/>
+              <a:t> Spearman correlation.</a:t>
             </a:r>
             <a:br>
               <a:rPr lang="en-US" dirty="0"/>
             </a:br>
             <a:r>
               <a:rPr lang="en-US" dirty="0"/>
-              <a:t>The Rating model worked well, but the Recommended model collapsed: predicted probabilities were concentrated near 0.5 and most examples were classified as recommended.</a:t>
+              <a:t>For Rating, continuous predictions worked better locally than rounded ones, because they preserve ranking information.</a:t>
             </a:r>
             <a:br>
               <a:rPr lang="en-US" dirty="0"/>
             </a:br>
             <a:r>
               <a:rPr lang="en-US" dirty="0"/>
-              <a:t>This led to a very poor Recommended Spearman score, so I diagnosed and fixed the training setup rather than keeping the initial result.</a:t>
-            </a:r>
-          </a:p>
-          <a:p>
-            <a:endParaRPr lang="en-GB" dirty="0"/>
-          </a:p>
-          <a:p>
-            <a:endParaRPr lang="en-GB" dirty="0"/>
-          </a:p>
-          <a:p>
-            <a:r>
-              <a:rPr lang="en-US" dirty="0"/>
-              <a:t>Fixing the RNN</a:t>
-            </a:r>
-          </a:p>
-          <a:p>
-            <a:r>
-              <a:rPr lang="en-US" b="1" dirty="0"/>
-              <a:t>Content:</a:t>
-            </a:r>
-            <a:endParaRPr lang="en-US" dirty="0"/>
-          </a:p>
-          <a:p>
-            <a:r>
-              <a:rPr lang="en-US" dirty="0"/>
-              <a:t>Removed </a:t>
-            </a:r>
-            <a:r>
-              <a:rPr lang="en-US" sz="1200" kern="1200" dirty="0" err="1">
-                <a:solidFill>
-                  <a:schemeClr val="tx1"/>
-                </a:solidFill>
-                <a:latin typeface="+mn-lt"/>
-                <a:ea typeface="+mn-ea"/>
-                <a:cs typeface="+mn-cs"/>
-              </a:rPr>
-              <a:t>class_weight</a:t>
-            </a:r>
-            <a:r>
-              <a:rPr lang="en-US" dirty="0"/>
-              <a:t> </a:t>
-            </a:r>
-          </a:p>
-          <a:p>
-            <a:r>
-              <a:rPr lang="en-US" dirty="0"/>
-              <a:t>Reduced dropout from 0.3 to 0.2 for </a:t>
-            </a:r>
-            <a:r>
-              <a:rPr lang="en-US" sz="1200" kern="1200" dirty="0">
-                <a:solidFill>
-                  <a:schemeClr val="tx1"/>
-                </a:solidFill>
-                <a:latin typeface="+mn-lt"/>
-                <a:ea typeface="+mn-ea"/>
-                <a:cs typeface="+mn-cs"/>
-              </a:rPr>
-              <a:t>Recommended</a:t>
-            </a:r>
-            <a:r>
-              <a:rPr lang="en-US" dirty="0"/>
-              <a:t> </a:t>
-            </a:r>
-          </a:p>
-          <a:p>
-            <a:r>
-              <a:rPr lang="en-US" dirty="0"/>
-              <a:t>Lowered learning rate to </a:t>
-            </a:r>
-            <a:r>
-              <a:rPr lang="en-US" sz="1200" kern="1200" dirty="0">
-                <a:solidFill>
-                  <a:schemeClr val="tx1"/>
-                </a:solidFill>
-                <a:latin typeface="+mn-lt"/>
-                <a:ea typeface="+mn-ea"/>
-                <a:cs typeface="+mn-cs"/>
-              </a:rPr>
-              <a:t>5e-4</a:t>
-            </a:r>
-            <a:r>
-              <a:rPr lang="en-US" dirty="0"/>
-              <a:t> </a:t>
-            </a:r>
-          </a:p>
-          <a:p>
-            <a:r>
-              <a:rPr lang="en-US" dirty="0"/>
-              <a:t>Rechecked: </a:t>
-            </a:r>
-          </a:p>
-          <a:p>
-            <a:pPr lvl="1"/>
-            <a:r>
-              <a:rPr lang="en-US" dirty="0"/>
-              <a:t>probability distribution </a:t>
-            </a:r>
-          </a:p>
-          <a:p>
-            <a:pPr lvl="1"/>
-            <a:r>
-              <a:rPr lang="en-US" dirty="0"/>
-              <a:t>label counts </a:t>
-            </a:r>
-          </a:p>
-          <a:p>
-            <a:pPr lvl="1"/>
-            <a:r>
-              <a:rPr lang="en-US" dirty="0"/>
-              <a:t>confusion matrix </a:t>
-            </a:r>
-          </a:p>
-          <a:p>
-            <a:pPr lvl="1"/>
-            <a:r>
-              <a:rPr lang="en-US" dirty="0"/>
-              <a:t>validation Spearman</a:t>
-            </a:r>
-          </a:p>
-          <a:p>
-            <a:endParaRPr lang="en-GB" dirty="0"/>
-          </a:p>
-          <a:p>
-            <a:endParaRPr lang="en-GB" dirty="0"/>
-          </a:p>
-          <a:p>
-            <a:r>
-              <a:rPr lang="en-US" dirty="0"/>
-              <a:t>I improved the RNN by making the recommendation branch more stable.</a:t>
+              <a:t>For Recommended, hard class labels performed better than probabilities in this baseline.</a:t>
             </a:r>
             <a:br>
               <a:rPr lang="en-US" dirty="0"/>
             </a:br>
             <a:r>
               <a:rPr lang="en-US" dirty="0"/>
-              <a:t>The main changes were removing class weights, lowering dropout, and reducing the learning rate.</a:t>
-            </a:r>
-            <a:br>
-              <a:rPr lang="en-US" dirty="0"/>
-            </a:br>
-            <a:r>
-              <a:rPr lang="en-US" dirty="0"/>
-              <a:t>After that, the recommendation probabilities became much more meaningful and the model stopped collapsing to trivial predictions.</a:t>
-            </a:r>
-          </a:p>
-          <a:p>
-            <a:endParaRPr lang="en-US" dirty="0"/>
-          </a:p>
-          <a:p>
-            <a:endParaRPr lang="en-US" dirty="0"/>
-          </a:p>
-          <a:p>
-            <a:r>
-              <a:rPr lang="en-US" dirty="0"/>
-              <a:t>Best local RNN setup: rounded </a:t>
-            </a:r>
-            <a:r>
-              <a:rPr lang="en-US" sz="1200" kern="1200" dirty="0">
-                <a:solidFill>
-                  <a:schemeClr val="tx1"/>
-                </a:solidFill>
-                <a:latin typeface="+mn-lt"/>
-                <a:ea typeface="+mn-ea"/>
-                <a:cs typeface="+mn-cs"/>
-              </a:rPr>
-              <a:t>Rating</a:t>
-            </a:r>
-            <a:r>
-              <a:rPr lang="en-US" dirty="0"/>
-              <a:t> </a:t>
-            </a:r>
-          </a:p>
-          <a:p>
-            <a:r>
-              <a:rPr lang="en-US" dirty="0"/>
-              <a:t>hard-label </a:t>
-            </a:r>
-            <a:r>
-              <a:rPr lang="en-US" sz="1200" kern="1200" dirty="0">
-                <a:solidFill>
-                  <a:schemeClr val="tx1"/>
-                </a:solidFill>
-                <a:latin typeface="+mn-lt"/>
-                <a:ea typeface="+mn-ea"/>
-                <a:cs typeface="+mn-cs"/>
-              </a:rPr>
-              <a:t>Recommended</a:t>
-            </a:r>
-            <a:r>
-              <a:rPr lang="en-US" dirty="0"/>
-              <a:t> </a:t>
-            </a:r>
-          </a:p>
-          <a:p>
-            <a:r>
-              <a:rPr lang="en-US" dirty="0"/>
-              <a:t>Final Kaggle score: </a:t>
-            </a:r>
-            <a:r>
-              <a:rPr lang="en-US" b="1" dirty="0"/>
-              <a:t>0.67891</a:t>
-            </a:r>
-            <a:r>
-              <a:rPr lang="en-US" dirty="0"/>
-              <a:t> Better than Bag-of-Words baseline</a:t>
-            </a:r>
-          </a:p>
-          <a:p>
-            <a:r>
-              <a:rPr lang="en-US" dirty="0"/>
-              <a:t>After tuning, the RNN became clearly stronger than the Bag-of-Words baseline.</a:t>
-            </a:r>
-            <a:br>
-              <a:rPr lang="en-US" dirty="0"/>
-            </a:br>
-            <a:r>
-              <a:rPr lang="en-US" dirty="0"/>
-              <a:t>Its public leaderboard score was 0.67891, compared with 0.64544 for the classical baseline.</a:t>
-            </a:r>
-            <a:br>
-              <a:rPr lang="en-US" dirty="0"/>
-            </a:br>
-            <a:r>
-              <a:rPr lang="en-US" dirty="0"/>
-              <a:t>This showed that sequential modeling helped, especially for Rating.</a:t>
+              <a:t>Since Kaggle requires integer ratings, the final Bag-of-Words submission used rounded Rating and hard-label Recommended.</a:t>
             </a:r>
             <a:endParaRPr lang="en-GB" dirty="0"/>
           </a:p>
@@ -1057,7 +757,7 @@
           <a:p>
             <a:fld id="{FD99EE23-E0B4-844F-8556-21E3C5FE9B7C}" type="slidenum">
               <a:rPr lang="en-GB" smtClean="0"/>
-              <a:t>10</a:t>
+              <a:t>12</a:t>
             </a:fld>
             <a:endParaRPr lang="en-GB"/>
           </a:p>
@@ -1066,7 +766,7 @@
     </p:spTree>
     <p:extLst>
       <p:ext uri="{BB962C8B-B14F-4D97-AF65-F5344CB8AC3E}">
-        <p14:creationId xmlns:p14="http://schemas.microsoft.com/office/powerpoint/2010/main" val="824383658"/>
+        <p14:creationId xmlns:p14="http://schemas.microsoft.com/office/powerpoint/2010/main" val="2094001383"/>
       </p:ext>
     </p:extLst>
   </p:cSld>
@@ -1122,119 +822,22 @@
           <a:p>
             <a:r>
               <a:rPr lang="en-US" dirty="0"/>
-              <a:t>Bag-of-Words was strongest for </a:t>
-            </a:r>
-            <a:r>
-              <a:rPr lang="en-US" sz="1200" kern="1200" dirty="0">
-                <a:solidFill>
-                  <a:schemeClr val="tx1"/>
-                </a:solidFill>
-                <a:latin typeface="+mn-lt"/>
-                <a:ea typeface="+mn-ea"/>
-                <a:cs typeface="+mn-cs"/>
-              </a:rPr>
-              <a:t>Recommended</a:t>
-            </a:r>
-            <a:r>
-              <a:rPr lang="en-US" dirty="0"/>
-              <a:t> </a:t>
-            </a:r>
-          </a:p>
-          <a:p>
-            <a:r>
-              <a:rPr lang="en-US" dirty="0"/>
-              <a:t>RNN was strongest for </a:t>
-            </a:r>
-            <a:r>
-              <a:rPr lang="en-US" sz="1200" kern="1200" dirty="0">
-                <a:solidFill>
-                  <a:schemeClr val="tx1"/>
-                </a:solidFill>
-                <a:latin typeface="+mn-lt"/>
-                <a:ea typeface="+mn-ea"/>
-                <a:cs typeface="+mn-cs"/>
-              </a:rPr>
-              <a:t>Rating</a:t>
-            </a:r>
-            <a:r>
-              <a:rPr lang="en-US" dirty="0"/>
-              <a:t> </a:t>
-            </a:r>
-          </a:p>
-          <a:p>
-            <a:r>
-              <a:rPr lang="en-US" dirty="0"/>
-              <a:t>Idea: combine the best model family for each target </a:t>
-            </a:r>
-          </a:p>
-          <a:p>
-            <a:r>
-              <a:rPr lang="en-US" b="1" dirty="0"/>
-              <a:t>Hybrid setup</a:t>
-            </a:r>
-            <a:endParaRPr lang="en-US" dirty="0"/>
-          </a:p>
-          <a:p>
-            <a:r>
-              <a:rPr lang="en-US" sz="1200" kern="1200" dirty="0">
-                <a:solidFill>
-                  <a:schemeClr val="tx1"/>
-                </a:solidFill>
-                <a:latin typeface="+mn-lt"/>
-                <a:ea typeface="+mn-ea"/>
-                <a:cs typeface="+mn-cs"/>
-              </a:rPr>
-              <a:t>Rating</a:t>
-            </a:r>
-            <a:r>
-              <a:rPr lang="en-US" dirty="0"/>
-              <a:t> → RNN </a:t>
-            </a:r>
-          </a:p>
-          <a:p>
-            <a:r>
-              <a:rPr lang="en-US" sz="1200" kern="1200" dirty="0">
-                <a:solidFill>
-                  <a:schemeClr val="tx1"/>
-                </a:solidFill>
-                <a:latin typeface="+mn-lt"/>
-                <a:ea typeface="+mn-ea"/>
-                <a:cs typeface="+mn-cs"/>
-              </a:rPr>
-              <a:t>Recommended</a:t>
-            </a:r>
-            <a:r>
-              <a:rPr lang="en-US" dirty="0"/>
-              <a:t> → Bag-of-Words </a:t>
-            </a:r>
-          </a:p>
-          <a:p>
-            <a:r>
-              <a:rPr lang="en-US" b="1" dirty="0"/>
-              <a:t>What to say</a:t>
-            </a:r>
-          </a:p>
-          <a:p>
-            <a:r>
-              <a:rPr lang="en-US" dirty="0"/>
-              <a:t>The experiments suggested that different targets benefit from different model families.</a:t>
+              <a:t>The final public leaderboard score for the Bag-of-Words baseline was 0.64544.</a:t>
             </a:r>
             <a:br>
               <a:rPr lang="en-US" dirty="0"/>
             </a:br>
             <a:r>
               <a:rPr lang="en-US" dirty="0"/>
-              <a:t>The RNN captured the ordinal Rating signal very well, while the sparse Bag-of-Words model remained extremely strong for Recommended.</a:t>
+              <a:t>This was already a strong and stable result, especially for the binary Recommended target.</a:t>
             </a:r>
             <a:br>
               <a:rPr lang="en-US" dirty="0"/>
             </a:br>
             <a:r>
               <a:rPr lang="en-US" dirty="0"/>
-              <a:t>So I built a hybrid model that uses the best branch for each target.</a:t>
-            </a:r>
-          </a:p>
-          <a:p>
+              <a:t>But because Bag-of-Words ignores word order beyond local n-grams, I next tested a sequential neural network.</a:t>
+            </a:r>
             <a:endParaRPr lang="en-GB" dirty="0"/>
           </a:p>
         </p:txBody>
@@ -1256,7 +859,7 @@
           <a:p>
             <a:fld id="{FD99EE23-E0B4-844F-8556-21E3C5FE9B7C}" type="slidenum">
               <a:rPr lang="en-GB" smtClean="0"/>
-              <a:t>11</a:t>
+              <a:t>13</a:t>
             </a:fld>
             <a:endParaRPr lang="en-GB"/>
           </a:p>
@@ -1265,7 +868,7 @@
     </p:spTree>
     <p:extLst>
       <p:ext uri="{BB962C8B-B14F-4D97-AF65-F5344CB8AC3E}">
-        <p14:creationId xmlns:p14="http://schemas.microsoft.com/office/powerpoint/2010/main" val="4038323059"/>
+        <p14:creationId xmlns:p14="http://schemas.microsoft.com/office/powerpoint/2010/main" val="1112732447"/>
       </p:ext>
     </p:extLst>
   </p:cSld>
@@ -1321,44 +924,400 @@
           <a:p>
             <a:r>
               <a:rPr lang="en-US" dirty="0"/>
-              <a:t>The hybrid was the best local configuration.</a:t>
+              <a:t>Architecture: Embedding </a:t>
+            </a:r>
+          </a:p>
+          <a:p>
+            <a:r>
+              <a:rPr lang="en-US" dirty="0"/>
+              <a:t>GRU </a:t>
+            </a:r>
+          </a:p>
+          <a:p>
+            <a:r>
+              <a:rPr lang="en-US" dirty="0"/>
+              <a:t>Dense layer </a:t>
+            </a:r>
+          </a:p>
+          <a:p>
+            <a:r>
+              <a:rPr lang="en-US" dirty="0"/>
+              <a:t>Separate models: </a:t>
+            </a:r>
+            <a:r>
+              <a:rPr lang="en-US" sz="1200" kern="1200" dirty="0">
+                <a:solidFill>
+                  <a:schemeClr val="tx1"/>
+                </a:solidFill>
+                <a:latin typeface="+mn-lt"/>
+                <a:ea typeface="+mn-ea"/>
+                <a:cs typeface="+mn-cs"/>
+              </a:rPr>
+              <a:t>Rating</a:t>
+            </a:r>
+            <a:r>
+              <a:rPr lang="en-US" dirty="0"/>
+              <a:t> → regression </a:t>
+            </a:r>
+          </a:p>
+          <a:p>
+            <a:r>
+              <a:rPr lang="en-US" sz="1200" kern="1200" dirty="0">
+                <a:solidFill>
+                  <a:schemeClr val="tx1"/>
+                </a:solidFill>
+                <a:latin typeface="+mn-lt"/>
+                <a:ea typeface="+mn-ea"/>
+                <a:cs typeface="+mn-cs"/>
+              </a:rPr>
+              <a:t>Recommended</a:t>
+            </a:r>
+            <a:r>
+              <a:rPr lang="en-US" dirty="0"/>
+              <a:t> → classification</a:t>
+            </a:r>
+          </a:p>
+          <a:p>
+            <a:endParaRPr lang="en-GB" dirty="0"/>
+          </a:p>
+          <a:p>
+            <a:r>
+              <a:rPr lang="en-US" sz="1200" kern="1200" dirty="0">
+                <a:solidFill>
+                  <a:schemeClr val="tx1"/>
+                </a:solidFill>
+                <a:latin typeface="+mn-lt"/>
+                <a:ea typeface="+mn-ea"/>
+                <a:cs typeface="+mn-cs"/>
+              </a:rPr>
+              <a:t>Rating</a:t>
+            </a:r>
+            <a:r>
+              <a:rPr lang="en-US" dirty="0"/>
+              <a:t> performed well </a:t>
+            </a:r>
+          </a:p>
+          <a:p>
+            <a:r>
+              <a:rPr lang="en-US" sz="1200" kern="1200" dirty="0">
+                <a:solidFill>
+                  <a:schemeClr val="tx1"/>
+                </a:solidFill>
+                <a:latin typeface="+mn-lt"/>
+                <a:ea typeface="+mn-ea"/>
+                <a:cs typeface="+mn-cs"/>
+              </a:rPr>
+              <a:t>Recommended</a:t>
+            </a:r>
+            <a:r>
+              <a:rPr lang="en-US" dirty="0"/>
+              <a:t> initially failed </a:t>
+            </a:r>
+          </a:p>
+          <a:p>
+            <a:r>
+              <a:rPr lang="en-US" dirty="0"/>
+              <a:t>Validation probabilities for </a:t>
+            </a:r>
+            <a:r>
+              <a:rPr lang="en-US" sz="1200" kern="1200" dirty="0">
+                <a:solidFill>
+                  <a:schemeClr val="tx1"/>
+                </a:solidFill>
+                <a:latin typeface="+mn-lt"/>
+                <a:ea typeface="+mn-ea"/>
+                <a:cs typeface="+mn-cs"/>
+              </a:rPr>
+              <a:t>Recommended</a:t>
+            </a:r>
+            <a:r>
+              <a:rPr lang="en-US" dirty="0"/>
+              <a:t> collapsed near 0.5 </a:t>
+            </a:r>
+          </a:p>
+          <a:p>
+            <a:r>
+              <a:rPr lang="en-US" dirty="0"/>
+              <a:t>Model predicted almost all reviews as recommended </a:t>
+            </a:r>
+          </a:p>
+          <a:p>
+            <a:r>
+              <a:rPr lang="en-US" dirty="0"/>
+              <a:t>You can add a small diagnostic note:</a:t>
+            </a:r>
+          </a:p>
+          <a:p>
+            <a:r>
+              <a:rPr lang="en-US" dirty="0"/>
+              <a:t>Prediction collapse due to unstable training / imbalance handling</a:t>
+            </a:r>
+          </a:p>
+          <a:p>
+            <a:endParaRPr lang="en-GB" dirty="0"/>
+          </a:p>
+          <a:p>
+            <a:endParaRPr lang="en-GB" dirty="0"/>
+          </a:p>
+          <a:p>
+            <a:pPr marL="0" marR="0" lvl="0" indent="0" algn="l" defTabSz="914400" rtl="0" eaLnBrk="1" fontAlgn="auto" latinLnBrk="0" hangingPunct="1">
+              <a:lnSpc>
+                <a:spcPct val="100000"/>
+              </a:lnSpc>
+              <a:spcBef>
+                <a:spcPts val="0"/>
+              </a:spcBef>
+              <a:spcAft>
+                <a:spcPts val="0"/>
+              </a:spcAft>
+              <a:buClrTx/>
+              <a:buSzTx/>
+              <a:buFontTx/>
+              <a:buNone/>
+              <a:tabLst/>
+              <a:defRPr/>
+            </a:pPr>
+            <a:r>
+              <a:rPr lang="en-US" dirty="0"/>
+              <a:t>The first RNN attempt was not immediately successful.</a:t>
             </a:r>
             <a:br>
               <a:rPr lang="en-US" dirty="0"/>
             </a:br>
             <a:r>
               <a:rPr lang="en-US" dirty="0"/>
-              <a:t>The strongest setup used rounded RNN predictions for Rating and hard-label Bag-of-Words predictions for Recommended.</a:t>
+              <a:t>The Rating model worked well, but the Recommended model collapsed: predicted probabilities were concentrated near 0.5 and most examples were classified as recommended.</a:t>
             </a:r>
             <a:br>
               <a:rPr lang="en-US" dirty="0"/>
             </a:br>
             <a:r>
               <a:rPr lang="en-US" dirty="0"/>
-              <a:t>This confirmed the idea that the two targets should not necessarily be modeled with the same approach.</a:t>
-            </a:r>
-          </a:p>
-          <a:p>
+              <a:t>This led to a very poor Recommended Spearman score, so I diagnosed and fixed the training setup rather than keeping the initial result.</a:t>
+            </a:r>
+          </a:p>
+          <a:p>
+            <a:endParaRPr lang="en-GB" dirty="0"/>
+          </a:p>
+          <a:p>
+            <a:endParaRPr lang="en-GB" dirty="0"/>
+          </a:p>
+          <a:p>
+            <a:r>
+              <a:rPr lang="en-US" dirty="0"/>
+              <a:t>Fixing the RNN</a:t>
+            </a:r>
+          </a:p>
+          <a:p>
+            <a:r>
+              <a:rPr lang="en-US" b="1" dirty="0"/>
+              <a:t>Content:</a:t>
+            </a:r>
             <a:endParaRPr lang="en-US" dirty="0"/>
           </a:p>
           <a:p>
             <a:r>
               <a:rPr lang="en-US" dirty="0"/>
-              <a:t>The hybrid submission achieved the best public leaderboard score: 0.69699.</a:t>
+              <a:t>Removed </a:t>
+            </a:r>
+            <a:r>
+              <a:rPr lang="en-US" sz="1200" kern="1200" dirty="0" err="1">
+                <a:solidFill>
+                  <a:schemeClr val="tx1"/>
+                </a:solidFill>
+                <a:latin typeface="+mn-lt"/>
+                <a:ea typeface="+mn-ea"/>
+                <a:cs typeface="+mn-cs"/>
+              </a:rPr>
+              <a:t>class_weight</a:t>
+            </a:r>
+            <a:r>
+              <a:rPr lang="en-US" dirty="0"/>
+              <a:t> </a:t>
+            </a:r>
+          </a:p>
+          <a:p>
+            <a:r>
+              <a:rPr lang="en-US" dirty="0"/>
+              <a:t>Reduced dropout from 0.3 to 0.2 for </a:t>
+            </a:r>
+            <a:r>
+              <a:rPr lang="en-US" sz="1200" kern="1200" dirty="0">
+                <a:solidFill>
+                  <a:schemeClr val="tx1"/>
+                </a:solidFill>
+                <a:latin typeface="+mn-lt"/>
+                <a:ea typeface="+mn-ea"/>
+                <a:cs typeface="+mn-cs"/>
+              </a:rPr>
+              <a:t>Recommended</a:t>
+            </a:r>
+            <a:r>
+              <a:rPr lang="en-US" dirty="0"/>
+              <a:t> </a:t>
+            </a:r>
+          </a:p>
+          <a:p>
+            <a:r>
+              <a:rPr lang="en-US" dirty="0"/>
+              <a:t>Lowered learning rate to </a:t>
+            </a:r>
+            <a:r>
+              <a:rPr lang="en-US" sz="1200" kern="1200" dirty="0">
+                <a:solidFill>
+                  <a:schemeClr val="tx1"/>
+                </a:solidFill>
+                <a:latin typeface="+mn-lt"/>
+                <a:ea typeface="+mn-ea"/>
+                <a:cs typeface="+mn-cs"/>
+              </a:rPr>
+              <a:t>5e-4</a:t>
+            </a:r>
+            <a:r>
+              <a:rPr lang="en-US" dirty="0"/>
+              <a:t> </a:t>
+            </a:r>
+          </a:p>
+          <a:p>
+            <a:r>
+              <a:rPr lang="en-US" dirty="0"/>
+              <a:t>Rechecked: </a:t>
+            </a:r>
+          </a:p>
+          <a:p>
+            <a:pPr lvl="1"/>
+            <a:r>
+              <a:rPr lang="en-US" dirty="0"/>
+              <a:t>probability distribution </a:t>
+            </a:r>
+          </a:p>
+          <a:p>
+            <a:pPr lvl="1"/>
+            <a:r>
+              <a:rPr lang="en-US" dirty="0"/>
+              <a:t>label counts </a:t>
+            </a:r>
+          </a:p>
+          <a:p>
+            <a:pPr lvl="1"/>
+            <a:r>
+              <a:rPr lang="en-US" dirty="0"/>
+              <a:t>confusion matrix </a:t>
+            </a:r>
+          </a:p>
+          <a:p>
+            <a:pPr lvl="1"/>
+            <a:r>
+              <a:rPr lang="en-US" dirty="0"/>
+              <a:t>validation Spearman</a:t>
+            </a:r>
+          </a:p>
+          <a:p>
+            <a:endParaRPr lang="en-GB" dirty="0"/>
+          </a:p>
+          <a:p>
+            <a:endParaRPr lang="en-GB" dirty="0"/>
+          </a:p>
+          <a:p>
+            <a:r>
+              <a:rPr lang="en-US" dirty="0"/>
+              <a:t>I improved the RNN by making the recommendation branch more stable.</a:t>
             </a:r>
             <a:br>
               <a:rPr lang="en-US" dirty="0"/>
             </a:br>
             <a:r>
               <a:rPr lang="en-US" dirty="0"/>
-              <a:t>It outperformed both standalone model families, which supports the final modeling choice.</a:t>
+              <a:t>The main changes were removing class weights, lowering dropout, and reducing the learning rate.</a:t>
             </a:r>
             <a:br>
               <a:rPr lang="en-US" dirty="0"/>
             </a:br>
             <a:r>
               <a:rPr lang="en-US" dirty="0"/>
-              <a:t>So the best final system was not the most complex single model, but the best combination of two complementary approaches.</a:t>
+              <a:t>After that, the recommendation probabilities became much more meaningful and the model stopped collapsing to trivial predictions.</a:t>
+            </a:r>
+          </a:p>
+          <a:p>
+            <a:endParaRPr lang="en-US" dirty="0"/>
+          </a:p>
+          <a:p>
+            <a:endParaRPr lang="en-US" dirty="0"/>
+          </a:p>
+          <a:p>
+            <a:r>
+              <a:rPr lang="en-US" dirty="0"/>
+              <a:t>Best local RNN setup: rounded </a:t>
+            </a:r>
+            <a:r>
+              <a:rPr lang="en-US" sz="1200" kern="1200" dirty="0">
+                <a:solidFill>
+                  <a:schemeClr val="tx1"/>
+                </a:solidFill>
+                <a:latin typeface="+mn-lt"/>
+                <a:ea typeface="+mn-ea"/>
+                <a:cs typeface="+mn-cs"/>
+              </a:rPr>
+              <a:t>Rating</a:t>
+            </a:r>
+            <a:r>
+              <a:rPr lang="en-US" dirty="0"/>
+              <a:t> </a:t>
+            </a:r>
+          </a:p>
+          <a:p>
+            <a:r>
+              <a:rPr lang="en-US" dirty="0"/>
+              <a:t>hard-label </a:t>
+            </a:r>
+            <a:r>
+              <a:rPr lang="en-US" sz="1200" kern="1200" dirty="0">
+                <a:solidFill>
+                  <a:schemeClr val="tx1"/>
+                </a:solidFill>
+                <a:latin typeface="+mn-lt"/>
+                <a:ea typeface="+mn-ea"/>
+                <a:cs typeface="+mn-cs"/>
+              </a:rPr>
+              <a:t>Recommended</a:t>
+            </a:r>
+            <a:r>
+              <a:rPr lang="en-US" dirty="0"/>
+              <a:t> </a:t>
+            </a:r>
+          </a:p>
+          <a:p>
+            <a:r>
+              <a:rPr lang="en-US" dirty="0"/>
+              <a:t>Final Kaggle score: </a:t>
+            </a:r>
+            <a:r>
+              <a:rPr lang="en-US" b="1" dirty="0"/>
+              <a:t>0.67891</a:t>
+            </a:r>
+            <a:r>
+              <a:rPr lang="en-US" dirty="0"/>
+              <a:t> Better than Bag-of-Words baseline</a:t>
+            </a:r>
+          </a:p>
+          <a:p>
+            <a:r>
+              <a:rPr lang="en-US" dirty="0"/>
+              <a:t>After tuning, the RNN became clearly stronger than the Bag-of-Words baseline.</a:t>
+            </a:r>
+            <a:br>
+              <a:rPr lang="en-US" dirty="0"/>
+            </a:br>
+            <a:r>
+              <a:rPr lang="en-US" dirty="0"/>
+              <a:t>Its public leaderboard score was 0.67891, compared with 0.64544 for the classical baseline.</a:t>
+            </a:r>
+            <a:br>
+              <a:rPr lang="en-US" dirty="0"/>
+            </a:br>
+            <a:r>
+              <a:rPr lang="en-US" dirty="0"/>
+              <a:t>This showed that sequential modeling helped, especially for Rating.</a:t>
             </a:r>
             <a:endParaRPr lang="en-GB" dirty="0"/>
           </a:p>
@@ -1381,7 +1340,7 @@
           <a:p>
             <a:fld id="{FD99EE23-E0B4-844F-8556-21E3C5FE9B7C}" type="slidenum">
               <a:rPr lang="en-GB" smtClean="0"/>
-              <a:t>12</a:t>
+              <a:t>14</a:t>
             </a:fld>
             <a:endParaRPr lang="en-GB"/>
           </a:p>
@@ -1390,7 +1349,7 @@
     </p:spTree>
     <p:extLst>
       <p:ext uri="{BB962C8B-B14F-4D97-AF65-F5344CB8AC3E}">
-        <p14:creationId xmlns:p14="http://schemas.microsoft.com/office/powerpoint/2010/main" val="1824324278"/>
+        <p14:creationId xmlns:p14="http://schemas.microsoft.com/office/powerpoint/2010/main" val="824383658"/>
       </p:ext>
     </p:extLst>
   </p:cSld>
@@ -1445,15 +1404,8 @@
           <a:lstStyle/>
           <a:p>
             <a:r>
-              <a:rPr lang="en-US" b="1" dirty="0"/>
-              <a:t>Content:</a:t>
-            </a:r>
-            <a:endParaRPr lang="en-US" dirty="0"/>
-          </a:p>
-          <a:p>
-            <a:r>
-              <a:rPr lang="en-US" dirty="0"/>
-              <a:t>Threshold tuning for </a:t>
+              <a:rPr lang="en-US" dirty="0"/>
+              <a:t>Bag-of-Words was strongest for </a:t>
             </a:r>
             <a:r>
               <a:rPr lang="en-US" sz="1200" kern="1200" dirty="0">
@@ -1472,45 +1424,9 @@
             </a:r>
           </a:p>
           <a:p>
-            <a:pPr lvl="1"/>
-            <a:r>
-              <a:rPr lang="en-US" dirty="0"/>
-              <a:t>did not improve the score </a:t>
-            </a:r>
-          </a:p>
-          <a:p>
-            <a:r>
-              <a:rPr lang="en-US" dirty="0"/>
-              <a:t>TF-IDF instead of </a:t>
-            </a:r>
-            <a:r>
-              <a:rPr lang="en-US" dirty="0" err="1"/>
-              <a:t>CountVectorizer</a:t>
-            </a:r>
-            <a:r>
-              <a:rPr lang="en-US" dirty="0"/>
-              <a:t> </a:t>
-            </a:r>
-          </a:p>
-          <a:p>
-            <a:pPr lvl="1"/>
-            <a:r>
-              <a:rPr lang="en-US" dirty="0"/>
-              <a:t>slightly worse than </a:t>
-            </a:r>
-            <a:r>
-              <a:rPr lang="en-US" dirty="0" err="1"/>
-              <a:t>BoW</a:t>
-            </a:r>
-            <a:r>
-              <a:rPr lang="en-US" dirty="0"/>
-              <a:t> </a:t>
-            </a:r>
-          </a:p>
-          <a:p>
-            <a:r>
-              <a:rPr lang="en-US" dirty="0"/>
-              <a:t>Huber loss for RNN </a:t>
+            <a:r>
+              <a:rPr lang="en-US" dirty="0"/>
+              <a:t>RNN was strongest for </a:t>
             </a:r>
             <a:r>
               <a:rPr lang="en-US" sz="1200" kern="1200" dirty="0">
@@ -1529,51 +1445,79 @@
             </a:r>
           </a:p>
           <a:p>
-            <a:pPr lvl="1"/>
-            <a:r>
-              <a:rPr lang="en-US" dirty="0"/>
-              <a:t>improved local validation </a:t>
-            </a:r>
-          </a:p>
-          <a:p>
-            <a:pPr lvl="1"/>
-            <a:r>
-              <a:rPr lang="en-US" dirty="0"/>
-              <a:t>did not improve public leaderboard </a:t>
-            </a:r>
-          </a:p>
-          <a:p>
-            <a:endParaRPr lang="en-GB" dirty="0"/>
-          </a:p>
-          <a:p>
-            <a:endParaRPr lang="en-GB" dirty="0"/>
-          </a:p>
-          <a:p>
-            <a:r>
-              <a:rPr lang="en-US" dirty="0"/>
-              <a:t>I also tested several improvements.</a:t>
+            <a:r>
+              <a:rPr lang="en-US" dirty="0"/>
+              <a:t>Idea: combine the best model family for each target </a:t>
+            </a:r>
+          </a:p>
+          <a:p>
+            <a:r>
+              <a:rPr lang="en-US" b="1" dirty="0"/>
+              <a:t>Hybrid setup</a:t>
+            </a:r>
+            <a:endParaRPr lang="en-US" dirty="0"/>
+          </a:p>
+          <a:p>
+            <a:r>
+              <a:rPr lang="en-US" sz="1200" kern="1200" dirty="0">
+                <a:solidFill>
+                  <a:schemeClr val="tx1"/>
+                </a:solidFill>
+                <a:latin typeface="+mn-lt"/>
+                <a:ea typeface="+mn-ea"/>
+                <a:cs typeface="+mn-cs"/>
+              </a:rPr>
+              <a:t>Rating</a:t>
+            </a:r>
+            <a:r>
+              <a:rPr lang="en-US" dirty="0"/>
+              <a:t> → RNN </a:t>
+            </a:r>
+          </a:p>
+          <a:p>
+            <a:r>
+              <a:rPr lang="en-US" sz="1200" kern="1200" dirty="0">
+                <a:solidFill>
+                  <a:schemeClr val="tx1"/>
+                </a:solidFill>
+                <a:latin typeface="+mn-lt"/>
+                <a:ea typeface="+mn-ea"/>
+                <a:cs typeface="+mn-cs"/>
+              </a:rPr>
+              <a:t>Recommended</a:t>
+            </a:r>
+            <a:r>
+              <a:rPr lang="en-US" dirty="0"/>
+              <a:t> → Bag-of-Words </a:t>
+            </a:r>
+          </a:p>
+          <a:p>
+            <a:r>
+              <a:rPr lang="en-US" b="1" dirty="0"/>
+              <a:t>What to say</a:t>
+            </a:r>
+          </a:p>
+          <a:p>
+            <a:r>
+              <a:rPr lang="en-US" dirty="0"/>
+              <a:t>The experiments suggested that different targets benefit from different model families.</a:t>
             </a:r>
             <a:br>
               <a:rPr lang="en-US" dirty="0"/>
             </a:br>
             <a:r>
               <a:rPr lang="en-US" dirty="0"/>
-              <a:t>Threshold tuning for Recommended did not help.</a:t>
+              <a:t>The RNN captured the ordinal Rating signal very well, while the sparse Bag-of-Words model remained extremely strong for Recommended.</a:t>
             </a:r>
             <a:br>
               <a:rPr lang="en-US" dirty="0"/>
             </a:br>
             <a:r>
               <a:rPr lang="en-US" dirty="0"/>
-              <a:t>Replacing Bag-of-Words with TF-IDF was slightly worse in this dataset.</a:t>
-            </a:r>
-            <a:br>
-              <a:rPr lang="en-US" dirty="0"/>
-            </a:br>
-            <a:r>
-              <a:rPr lang="en-US" dirty="0"/>
-              <a:t>Huber loss improved local validation for Rating, but did not translate into a better public leaderboard score than the main hybrid submission</a:t>
-            </a:r>
+              <a:t>So I built a hybrid model that uses the best branch for each target.</a:t>
+            </a:r>
+          </a:p>
+          <a:p>
             <a:endParaRPr lang="en-GB" dirty="0"/>
           </a:p>
         </p:txBody>
@@ -1595,7 +1539,346 @@
           <a:p>
             <a:fld id="{FD99EE23-E0B4-844F-8556-21E3C5FE9B7C}" type="slidenum">
               <a:rPr lang="en-GB" smtClean="0"/>
-              <a:t>13</a:t>
+              <a:t>15</a:t>
+            </a:fld>
+            <a:endParaRPr lang="en-GB"/>
+          </a:p>
+        </p:txBody>
+      </p:sp>
+    </p:spTree>
+    <p:extLst>
+      <p:ext uri="{BB962C8B-B14F-4D97-AF65-F5344CB8AC3E}">
+        <p14:creationId xmlns:p14="http://schemas.microsoft.com/office/powerpoint/2010/main" val="4038323059"/>
+      </p:ext>
+    </p:extLst>
+  </p:cSld>
+  <p:clrMapOvr>
+    <a:masterClrMapping/>
+  </p:clrMapOvr>
+</p:notes>
+</file>
+
+<file path=ppt/notesSlides/notesSlide14.xml><?xml version="1.0" encoding="utf-8"?>
+<p:notes xmlns:a="http://schemas.openxmlformats.org/drawingml/2006/main" xmlns:r="http://schemas.openxmlformats.org/officeDocument/2006/relationships" xmlns:p="http://schemas.openxmlformats.org/presentationml/2006/main">
+  <p:cSld>
+    <p:spTree>
+      <p:nvGrpSpPr>
+        <p:cNvPr id="1" name=""/>
+        <p:cNvGrpSpPr/>
+        <p:nvPr/>
+      </p:nvGrpSpPr>
+      <p:grpSpPr>
+        <a:xfrm>
+          <a:off x="0" y="0"/>
+          <a:ext cx="0" cy="0"/>
+          <a:chOff x="0" y="0"/>
+          <a:chExt cx="0" cy="0"/>
+        </a:xfrm>
+      </p:grpSpPr>
+      <p:sp>
+        <p:nvSpPr>
+          <p:cNvPr id="2" name="Slide Image Placeholder 1"/>
+          <p:cNvSpPr>
+            <a:spLocks noGrp="1" noRot="1" noChangeAspect="1"/>
+          </p:cNvSpPr>
+          <p:nvPr>
+            <p:ph type="sldImg"/>
+          </p:nvPr>
+        </p:nvSpPr>
+        <p:spPr/>
+      </p:sp>
+      <p:sp>
+        <p:nvSpPr>
+          <p:cNvPr id="3" name="Notes Placeholder 2"/>
+          <p:cNvSpPr>
+            <a:spLocks noGrp="1"/>
+          </p:cNvSpPr>
+          <p:nvPr>
+            <p:ph type="body" idx="1"/>
+          </p:nvPr>
+        </p:nvSpPr>
+        <p:spPr/>
+        <p:txBody>
+          <a:bodyPr/>
+          <a:lstStyle/>
+          <a:p>
+            <a:r>
+              <a:rPr lang="en-US" dirty="0"/>
+              <a:t>The hybrid was the best local configuration.</a:t>
+            </a:r>
+            <a:br>
+              <a:rPr lang="en-US" dirty="0"/>
+            </a:br>
+            <a:r>
+              <a:rPr lang="en-US" dirty="0"/>
+              <a:t>The strongest setup used rounded RNN predictions for Rating and hard-label Bag-of-Words predictions for Recommended.</a:t>
+            </a:r>
+            <a:br>
+              <a:rPr lang="en-US" dirty="0"/>
+            </a:br>
+            <a:r>
+              <a:rPr lang="en-US" dirty="0"/>
+              <a:t>This confirmed the idea that the two targets should not necessarily be modeled with the same approach.</a:t>
+            </a:r>
+          </a:p>
+          <a:p>
+            <a:endParaRPr lang="en-US" dirty="0"/>
+          </a:p>
+          <a:p>
+            <a:r>
+              <a:rPr lang="en-US" dirty="0"/>
+              <a:t>The hybrid submission achieved the best public leaderboard score: 0.69699.</a:t>
+            </a:r>
+            <a:br>
+              <a:rPr lang="en-US" dirty="0"/>
+            </a:br>
+            <a:r>
+              <a:rPr lang="en-US" dirty="0"/>
+              <a:t>It outperformed both standalone model families, which supports the final modeling choice.</a:t>
+            </a:r>
+            <a:br>
+              <a:rPr lang="en-US" dirty="0"/>
+            </a:br>
+            <a:r>
+              <a:rPr lang="en-US" dirty="0"/>
+              <a:t>So the best final system was not the most complex single model, but the best combination of two complementary approaches.</a:t>
+            </a:r>
+            <a:endParaRPr lang="en-GB" dirty="0"/>
+          </a:p>
+        </p:txBody>
+      </p:sp>
+      <p:sp>
+        <p:nvSpPr>
+          <p:cNvPr id="4" name="Slide Number Placeholder 3"/>
+          <p:cNvSpPr>
+            <a:spLocks noGrp="1"/>
+          </p:cNvSpPr>
+          <p:nvPr>
+            <p:ph type="sldNum" sz="quarter" idx="5"/>
+          </p:nvPr>
+        </p:nvSpPr>
+        <p:spPr/>
+        <p:txBody>
+          <a:bodyPr/>
+          <a:lstStyle/>
+          <a:p>
+            <a:fld id="{FD99EE23-E0B4-844F-8556-21E3C5FE9B7C}" type="slidenum">
+              <a:rPr lang="en-GB" smtClean="0"/>
+              <a:t>16</a:t>
+            </a:fld>
+            <a:endParaRPr lang="en-GB"/>
+          </a:p>
+        </p:txBody>
+      </p:sp>
+    </p:spTree>
+    <p:extLst>
+      <p:ext uri="{BB962C8B-B14F-4D97-AF65-F5344CB8AC3E}">
+        <p14:creationId xmlns:p14="http://schemas.microsoft.com/office/powerpoint/2010/main" val="1824324278"/>
+      </p:ext>
+    </p:extLst>
+  </p:cSld>
+  <p:clrMapOvr>
+    <a:masterClrMapping/>
+  </p:clrMapOvr>
+</p:notes>
+</file>
+
+<file path=ppt/notesSlides/notesSlide15.xml><?xml version="1.0" encoding="utf-8"?>
+<p:notes xmlns:a="http://schemas.openxmlformats.org/drawingml/2006/main" xmlns:r="http://schemas.openxmlformats.org/officeDocument/2006/relationships" xmlns:p="http://schemas.openxmlformats.org/presentationml/2006/main">
+  <p:cSld>
+    <p:spTree>
+      <p:nvGrpSpPr>
+        <p:cNvPr id="1" name=""/>
+        <p:cNvGrpSpPr/>
+        <p:nvPr/>
+      </p:nvGrpSpPr>
+      <p:grpSpPr>
+        <a:xfrm>
+          <a:off x="0" y="0"/>
+          <a:ext cx="0" cy="0"/>
+          <a:chOff x="0" y="0"/>
+          <a:chExt cx="0" cy="0"/>
+        </a:xfrm>
+      </p:grpSpPr>
+      <p:sp>
+        <p:nvSpPr>
+          <p:cNvPr id="2" name="Slide Image Placeholder 1"/>
+          <p:cNvSpPr>
+            <a:spLocks noGrp="1" noRot="1" noChangeAspect="1"/>
+          </p:cNvSpPr>
+          <p:nvPr>
+            <p:ph type="sldImg"/>
+          </p:nvPr>
+        </p:nvSpPr>
+        <p:spPr/>
+      </p:sp>
+      <p:sp>
+        <p:nvSpPr>
+          <p:cNvPr id="3" name="Notes Placeholder 2"/>
+          <p:cNvSpPr>
+            <a:spLocks noGrp="1"/>
+          </p:cNvSpPr>
+          <p:nvPr>
+            <p:ph type="body" idx="1"/>
+          </p:nvPr>
+        </p:nvSpPr>
+        <p:spPr/>
+        <p:txBody>
+          <a:bodyPr/>
+          <a:lstStyle/>
+          <a:p>
+            <a:r>
+              <a:rPr lang="en-US" b="1" dirty="0"/>
+              <a:t>Content:</a:t>
+            </a:r>
+            <a:endParaRPr lang="en-US" dirty="0"/>
+          </a:p>
+          <a:p>
+            <a:r>
+              <a:rPr lang="en-US" dirty="0"/>
+              <a:t>Threshold tuning for </a:t>
+            </a:r>
+            <a:r>
+              <a:rPr lang="en-US" sz="1200" kern="1200" dirty="0">
+                <a:solidFill>
+                  <a:schemeClr val="tx1"/>
+                </a:solidFill>
+                <a:latin typeface="+mn-lt"/>
+                <a:ea typeface="+mn-ea"/>
+                <a:cs typeface="+mn-cs"/>
+              </a:rPr>
+              <a:t>Recommended</a:t>
+            </a:r>
+            <a:r>
+              <a:rPr lang="en-US" dirty="0"/>
+              <a:t> </a:t>
+            </a:r>
+          </a:p>
+          <a:p>
+            <a:pPr lvl="1"/>
+            <a:r>
+              <a:rPr lang="en-US" dirty="0"/>
+              <a:t>did not improve the score </a:t>
+            </a:r>
+          </a:p>
+          <a:p>
+            <a:r>
+              <a:rPr lang="en-US" dirty="0"/>
+              <a:t>TF-IDF instead of </a:t>
+            </a:r>
+            <a:r>
+              <a:rPr lang="en-US" dirty="0" err="1"/>
+              <a:t>CountVectorizer</a:t>
+            </a:r>
+            <a:r>
+              <a:rPr lang="en-US" dirty="0"/>
+              <a:t> </a:t>
+            </a:r>
+          </a:p>
+          <a:p>
+            <a:pPr lvl="1"/>
+            <a:r>
+              <a:rPr lang="en-US" dirty="0"/>
+              <a:t>slightly worse than </a:t>
+            </a:r>
+            <a:r>
+              <a:rPr lang="en-US" dirty="0" err="1"/>
+              <a:t>BoW</a:t>
+            </a:r>
+            <a:r>
+              <a:rPr lang="en-US" dirty="0"/>
+              <a:t> </a:t>
+            </a:r>
+          </a:p>
+          <a:p>
+            <a:r>
+              <a:rPr lang="en-US" dirty="0"/>
+              <a:t>Huber loss for RNN </a:t>
+            </a:r>
+            <a:r>
+              <a:rPr lang="en-US" sz="1200" kern="1200" dirty="0">
+                <a:solidFill>
+                  <a:schemeClr val="tx1"/>
+                </a:solidFill>
+                <a:latin typeface="+mn-lt"/>
+                <a:ea typeface="+mn-ea"/>
+                <a:cs typeface="+mn-cs"/>
+              </a:rPr>
+              <a:t>Rating</a:t>
+            </a:r>
+            <a:r>
+              <a:rPr lang="en-US" dirty="0"/>
+              <a:t> </a:t>
+            </a:r>
+          </a:p>
+          <a:p>
+            <a:pPr lvl="1"/>
+            <a:r>
+              <a:rPr lang="en-US" dirty="0"/>
+              <a:t>improved local validation </a:t>
+            </a:r>
+          </a:p>
+          <a:p>
+            <a:pPr lvl="1"/>
+            <a:r>
+              <a:rPr lang="en-US" dirty="0"/>
+              <a:t>did not improve public leaderboard </a:t>
+            </a:r>
+          </a:p>
+          <a:p>
+            <a:endParaRPr lang="en-GB" dirty="0"/>
+          </a:p>
+          <a:p>
+            <a:endParaRPr lang="en-GB" dirty="0"/>
+          </a:p>
+          <a:p>
+            <a:r>
+              <a:rPr lang="en-US" dirty="0"/>
+              <a:t>I also tested several improvements.</a:t>
+            </a:r>
+            <a:br>
+              <a:rPr lang="en-US" dirty="0"/>
+            </a:br>
+            <a:r>
+              <a:rPr lang="en-US" dirty="0"/>
+              <a:t>Threshold tuning for Recommended did not help.</a:t>
+            </a:r>
+            <a:br>
+              <a:rPr lang="en-US" dirty="0"/>
+            </a:br>
+            <a:r>
+              <a:rPr lang="en-US" dirty="0"/>
+              <a:t>Replacing Bag-of-Words with TF-IDF was slightly worse in this dataset.</a:t>
+            </a:r>
+            <a:br>
+              <a:rPr lang="en-US" dirty="0"/>
+            </a:br>
+            <a:r>
+              <a:rPr lang="en-US" dirty="0"/>
+              <a:t>Huber loss improved local validation for Rating, but did not translate into a better public leaderboard score than the main hybrid submission</a:t>
+            </a:r>
+            <a:endParaRPr lang="en-GB" dirty="0"/>
+          </a:p>
+        </p:txBody>
+      </p:sp>
+      <p:sp>
+        <p:nvSpPr>
+          <p:cNvPr id="4" name="Slide Number Placeholder 3"/>
+          <p:cNvSpPr>
+            <a:spLocks noGrp="1"/>
+          </p:cNvSpPr>
+          <p:nvPr>
+            <p:ph type="sldNum" sz="quarter" idx="5"/>
+          </p:nvPr>
+        </p:nvSpPr>
+        <p:spPr/>
+        <p:txBody>
+          <a:bodyPr/>
+          <a:lstStyle/>
+          <a:p>
+            <a:fld id="{FD99EE23-E0B4-844F-8556-21E3C5FE9B7C}" type="slidenum">
+              <a:rPr lang="en-GB" smtClean="0"/>
+              <a:t>17</a:t>
             </a:fld>
             <a:endParaRPr lang="en-GB"/>
           </a:p>
@@ -1605,6 +1888,268 @@
     <p:extLst>
       <p:ext uri="{BB962C8B-B14F-4D97-AF65-F5344CB8AC3E}">
         <p14:creationId xmlns:p14="http://schemas.microsoft.com/office/powerpoint/2010/main" val="787492647"/>
+      </p:ext>
+    </p:extLst>
+  </p:cSld>
+  <p:clrMapOvr>
+    <a:masterClrMapping/>
+  </p:clrMapOvr>
+</p:notes>
+</file>
+
+<file path=ppt/notesSlides/notesSlide16.xml><?xml version="1.0" encoding="utf-8"?>
+<p:notes xmlns:a="http://schemas.openxmlformats.org/drawingml/2006/main" xmlns:r="http://schemas.openxmlformats.org/officeDocument/2006/relationships" xmlns:p="http://schemas.openxmlformats.org/presentationml/2006/main">
+  <p:cSld>
+    <p:spTree>
+      <p:nvGrpSpPr>
+        <p:cNvPr id="1" name=""/>
+        <p:cNvGrpSpPr/>
+        <p:nvPr/>
+      </p:nvGrpSpPr>
+      <p:grpSpPr>
+        <a:xfrm>
+          <a:off x="0" y="0"/>
+          <a:ext cx="0" cy="0"/>
+          <a:chOff x="0" y="0"/>
+          <a:chExt cx="0" cy="0"/>
+        </a:xfrm>
+      </p:grpSpPr>
+      <p:sp>
+        <p:nvSpPr>
+          <p:cNvPr id="2" name="Slide Image Placeholder 1"/>
+          <p:cNvSpPr>
+            <a:spLocks noGrp="1" noRot="1" noChangeAspect="1"/>
+          </p:cNvSpPr>
+          <p:nvPr>
+            <p:ph type="sldImg"/>
+          </p:nvPr>
+        </p:nvSpPr>
+        <p:spPr/>
+      </p:sp>
+      <p:sp>
+        <p:nvSpPr>
+          <p:cNvPr id="3" name="Notes Placeholder 2"/>
+          <p:cNvSpPr>
+            <a:spLocks noGrp="1"/>
+          </p:cNvSpPr>
+          <p:nvPr>
+            <p:ph type="body" idx="1"/>
+          </p:nvPr>
+        </p:nvSpPr>
+        <p:spPr/>
+        <p:txBody>
+          <a:bodyPr/>
+          <a:lstStyle/>
+          <a:p>
+            <a:r>
+              <a:rPr lang="en-US" dirty="0"/>
+              <a:t>EDA showed: strong class imbalance toward positive reviews </a:t>
+            </a:r>
+          </a:p>
+          <a:p>
+            <a:r>
+              <a:rPr lang="en-US" dirty="0"/>
+              <a:t>strong link between </a:t>
+            </a:r>
+            <a:r>
+              <a:rPr lang="en-US" sz="1200" kern="1200" dirty="0">
+                <a:solidFill>
+                  <a:schemeClr val="tx1"/>
+                </a:solidFill>
+                <a:latin typeface="+mn-lt"/>
+                <a:ea typeface="+mn-ea"/>
+                <a:cs typeface="+mn-cs"/>
+              </a:rPr>
+              <a:t>Rating</a:t>
+            </a:r>
+            <a:r>
+              <a:rPr lang="en-US" dirty="0"/>
+              <a:t> and </a:t>
+            </a:r>
+            <a:r>
+              <a:rPr lang="en-US" sz="1200" kern="1200" dirty="0">
+                <a:solidFill>
+                  <a:schemeClr val="tx1"/>
+                </a:solidFill>
+                <a:latin typeface="+mn-lt"/>
+                <a:ea typeface="+mn-ea"/>
+                <a:cs typeface="+mn-cs"/>
+              </a:rPr>
+              <a:t>Recommended</a:t>
+            </a:r>
+            <a:r>
+              <a:rPr lang="en-US" dirty="0"/>
+              <a:t> </a:t>
+            </a:r>
+          </a:p>
+          <a:p>
+            <a:r>
+              <a:rPr lang="en-US" dirty="0"/>
+              <a:t>missing text itself carried information </a:t>
+            </a:r>
+          </a:p>
+          <a:p>
+            <a:r>
+              <a:rPr lang="en-US" dirty="0"/>
+              <a:t>Bag-of-Words gave a strong interpretable baseline RNN improved sequential text modeling Hybrid model was best overall Final public score: </a:t>
+            </a:r>
+            <a:r>
+              <a:rPr lang="en-US" b="1" dirty="0"/>
+              <a:t>0.69699</a:t>
+            </a:r>
+            <a:endParaRPr lang="en-GB" dirty="0"/>
+          </a:p>
+        </p:txBody>
+      </p:sp>
+      <p:sp>
+        <p:nvSpPr>
+          <p:cNvPr id="4" name="Slide Number Placeholder 3"/>
+          <p:cNvSpPr>
+            <a:spLocks noGrp="1"/>
+          </p:cNvSpPr>
+          <p:nvPr>
+            <p:ph type="sldNum" sz="quarter" idx="5"/>
+          </p:nvPr>
+        </p:nvSpPr>
+        <p:spPr/>
+        <p:txBody>
+          <a:bodyPr/>
+          <a:lstStyle/>
+          <a:p>
+            <a:fld id="{FD99EE23-E0B4-844F-8556-21E3C5FE9B7C}" type="slidenum">
+              <a:rPr lang="en-GB" smtClean="0"/>
+              <a:t>18</a:t>
+            </a:fld>
+            <a:endParaRPr lang="en-GB"/>
+          </a:p>
+        </p:txBody>
+      </p:sp>
+    </p:spTree>
+    <p:extLst>
+      <p:ext uri="{BB962C8B-B14F-4D97-AF65-F5344CB8AC3E}">
+        <p14:creationId xmlns:p14="http://schemas.microsoft.com/office/powerpoint/2010/main" val="4040986342"/>
+      </p:ext>
+    </p:extLst>
+  </p:cSld>
+  <p:clrMapOvr>
+    <a:masterClrMapping/>
+  </p:clrMapOvr>
+</p:notes>
+</file>
+
+<file path=ppt/notesSlides/notesSlide17.xml><?xml version="1.0" encoding="utf-8"?>
+<p:notes xmlns:a="http://schemas.openxmlformats.org/drawingml/2006/main" xmlns:r="http://schemas.openxmlformats.org/officeDocument/2006/relationships" xmlns:p="http://schemas.openxmlformats.org/presentationml/2006/main">
+  <p:cSld>
+    <p:spTree>
+      <p:nvGrpSpPr>
+        <p:cNvPr id="1" name=""/>
+        <p:cNvGrpSpPr/>
+        <p:nvPr/>
+      </p:nvGrpSpPr>
+      <p:grpSpPr>
+        <a:xfrm>
+          <a:off x="0" y="0"/>
+          <a:ext cx="0" cy="0"/>
+          <a:chOff x="0" y="0"/>
+          <a:chExt cx="0" cy="0"/>
+        </a:xfrm>
+      </p:grpSpPr>
+      <p:sp>
+        <p:nvSpPr>
+          <p:cNvPr id="2" name="Slide Image Placeholder 1"/>
+          <p:cNvSpPr>
+            <a:spLocks noGrp="1" noRot="1" noChangeAspect="1"/>
+          </p:cNvSpPr>
+          <p:nvPr>
+            <p:ph type="sldImg"/>
+          </p:nvPr>
+        </p:nvSpPr>
+        <p:spPr/>
+      </p:sp>
+      <p:sp>
+        <p:nvSpPr>
+          <p:cNvPr id="3" name="Notes Placeholder 2"/>
+          <p:cNvSpPr>
+            <a:spLocks noGrp="1"/>
+          </p:cNvSpPr>
+          <p:nvPr>
+            <p:ph type="body" idx="1"/>
+          </p:nvPr>
+        </p:nvSpPr>
+        <p:spPr/>
+        <p:txBody>
+          <a:bodyPr/>
+          <a:lstStyle/>
+          <a:p>
+            <a:r>
+              <a:rPr lang="en-US" dirty="0"/>
+              <a:t>More advanced </a:t>
+            </a:r>
+            <a:r>
+              <a:rPr lang="en-US" dirty="0" err="1"/>
+              <a:t>ensembling</a:t>
+            </a:r>
+            <a:r>
+              <a:rPr lang="en-US" dirty="0"/>
+              <a:t> </a:t>
+            </a:r>
+          </a:p>
+          <a:p>
+            <a:r>
+              <a:rPr lang="en-US" dirty="0"/>
+              <a:t>Better rating blending </a:t>
+            </a:r>
+          </a:p>
+          <a:p>
+            <a:r>
+              <a:rPr lang="en-US" dirty="0"/>
+              <a:t>Character n-grams for sparse models </a:t>
+            </a:r>
+          </a:p>
+          <a:p>
+            <a:r>
+              <a:rPr lang="en-US" dirty="0"/>
+              <a:t>Functional API model combining text and metadata </a:t>
+            </a:r>
+          </a:p>
+          <a:p>
+            <a:r>
+              <a:rPr lang="en-US" dirty="0"/>
+              <a:t>More careful cross-validation / multiple random splits </a:t>
+            </a:r>
+          </a:p>
+          <a:p>
+            <a:endParaRPr lang="en-GB" dirty="0"/>
+          </a:p>
+        </p:txBody>
+      </p:sp>
+      <p:sp>
+        <p:nvSpPr>
+          <p:cNvPr id="4" name="Slide Number Placeholder 3"/>
+          <p:cNvSpPr>
+            <a:spLocks noGrp="1"/>
+          </p:cNvSpPr>
+          <p:nvPr>
+            <p:ph type="sldNum" sz="quarter" idx="5"/>
+          </p:nvPr>
+        </p:nvSpPr>
+        <p:spPr/>
+        <p:txBody>
+          <a:bodyPr/>
+          <a:lstStyle/>
+          <a:p>
+            <a:fld id="{FD99EE23-E0B4-844F-8556-21E3C5FE9B7C}" type="slidenum">
+              <a:rPr lang="en-GB" smtClean="0"/>
+              <a:t>19</a:t>
+            </a:fld>
+            <a:endParaRPr lang="en-GB"/>
+          </a:p>
+        </p:txBody>
+      </p:sp>
+    </p:spTree>
+    <p:extLst>
+      <p:ext uri="{BB962C8B-B14F-4D97-AF65-F5344CB8AC3E}">
+        <p14:creationId xmlns:p14="http://schemas.microsoft.com/office/powerpoint/2010/main" val="3636088670"/>
       </p:ext>
     </p:extLst>
   </p:cSld>
@@ -1658,144 +2203,6 @@
           <a:bodyPr/>
           <a:lstStyle/>
           <a:p>
-            <a:r>
-              <a:rPr lang="en-US" dirty="0"/>
-              <a:t>Put:</a:t>
-            </a:r>
-          </a:p>
-          <a:p>
-            <a:r>
-              <a:rPr lang="en-US" dirty="0"/>
-              <a:t>short description of dataset </a:t>
-            </a:r>
-          </a:p>
-          <a:p>
-            <a:r>
-              <a:rPr lang="en-US" dirty="0"/>
-              <a:t>input features: </a:t>
-            </a:r>
-          </a:p>
-          <a:p>
-            <a:pPr lvl="1"/>
-            <a:r>
-              <a:rPr lang="en-US" dirty="0"/>
-              <a:t>age </a:t>
-            </a:r>
-          </a:p>
-          <a:p>
-            <a:pPr lvl="1"/>
-            <a:r>
-              <a:rPr lang="en-US" dirty="0"/>
-              <a:t>title </a:t>
-            </a:r>
-          </a:p>
-          <a:p>
-            <a:pPr lvl="1"/>
-            <a:r>
-              <a:rPr lang="en-US" dirty="0"/>
-              <a:t>review text </a:t>
-            </a:r>
-          </a:p>
-          <a:p>
-            <a:pPr lvl="1"/>
-            <a:r>
-              <a:rPr lang="en-US" dirty="0"/>
-              <a:t>feedback count </a:t>
-            </a:r>
-          </a:p>
-          <a:p>
-            <a:pPr lvl="1"/>
-            <a:r>
-              <a:rPr lang="en-US" dirty="0"/>
-              <a:t>product categories </a:t>
-            </a:r>
-          </a:p>
-          <a:p>
-            <a:r>
-              <a:rPr lang="en-US" dirty="0"/>
-              <a:t>targets: </a:t>
-            </a:r>
-          </a:p>
-          <a:p>
-            <a:pPr lvl="1"/>
-            <a:r>
-              <a:rPr lang="en-US" sz="1200" kern="1200" dirty="0">
-                <a:solidFill>
-                  <a:schemeClr val="tx1"/>
-                </a:solidFill>
-                <a:latin typeface="+mn-lt"/>
-                <a:ea typeface="+mn-ea"/>
-                <a:cs typeface="+mn-cs"/>
-              </a:rPr>
-              <a:t>Rating</a:t>
-            </a:r>
-            <a:r>
-              <a:rPr lang="en-US" dirty="0"/>
-              <a:t> </a:t>
-            </a:r>
-          </a:p>
-          <a:p>
-            <a:pPr lvl="1"/>
-            <a:r>
-              <a:rPr lang="en-US" sz="1200" kern="1200" dirty="0">
-                <a:solidFill>
-                  <a:schemeClr val="tx1"/>
-                </a:solidFill>
-                <a:latin typeface="+mn-lt"/>
-                <a:ea typeface="+mn-ea"/>
-                <a:cs typeface="+mn-cs"/>
-              </a:rPr>
-              <a:t>Recommended</a:t>
-            </a:r>
-            <a:r>
-              <a:rPr lang="en-US" dirty="0"/>
-              <a:t> </a:t>
-            </a:r>
-          </a:p>
-          <a:p>
-            <a:r>
-              <a:rPr lang="en-US" dirty="0"/>
-              <a:t>metric: </a:t>
-            </a:r>
-          </a:p>
-          <a:p>
-            <a:pPr lvl="1"/>
-            <a:r>
-              <a:rPr lang="en-US" dirty="0"/>
-              <a:t>mean of Spearman correlations for the two targets </a:t>
-            </a:r>
-          </a:p>
-          <a:p>
-            <a:r>
-              <a:rPr lang="en-US" dirty="0"/>
-              <a:t>What to say:</a:t>
-            </a:r>
-          </a:p>
-          <a:p>
-            <a:r>
-              <a:rPr lang="en-US" dirty="0"/>
-              <a:t>Because the competition uses Spearman, preserving ranking is very important </a:t>
-            </a:r>
-          </a:p>
-          <a:p>
-            <a:r>
-              <a:rPr lang="en-US" dirty="0"/>
-              <a:t>This influenced model choices, especially for </a:t>
-            </a:r>
-            <a:r>
-              <a:rPr lang="en-US" sz="1200" kern="1200" dirty="0">
-                <a:solidFill>
-                  <a:schemeClr val="tx1"/>
-                </a:solidFill>
-                <a:latin typeface="+mn-lt"/>
-                <a:ea typeface="+mn-ea"/>
-                <a:cs typeface="+mn-cs"/>
-              </a:rPr>
-              <a:t>Rating</a:t>
-            </a:r>
-            <a:endParaRPr lang="en-US" dirty="0"/>
-          </a:p>
-          <a:p>
             <a:endParaRPr lang="en-GB" dirty="0"/>
           </a:p>
         </p:txBody>
@@ -1826,7 +2233,7 @@
     </p:spTree>
     <p:extLst>
       <p:ext uri="{BB962C8B-B14F-4D97-AF65-F5344CB8AC3E}">
-        <p14:creationId xmlns:p14="http://schemas.microsoft.com/office/powerpoint/2010/main" val="1739679683"/>
+        <p14:creationId xmlns:p14="http://schemas.microsoft.com/office/powerpoint/2010/main" val="3384057804"/>
       </p:ext>
     </p:extLst>
   </p:cSld>
@@ -1998,14 +2405,11 @@
           <a:p>
             <a:r>
               <a:rPr lang="en-US" dirty="0"/>
-              <a:t>Show:</a:t>
-            </a:r>
-          </a:p>
-          <a:p>
-            <a:r>
-              <a:rPr lang="en-US" dirty="0"/>
-              <a:t>distribution of </a:t>
-            </a:r>
+              <a:t>The reason the training data has 10 columns and the test data has 8 columns is that the training data contains the two target columns:</a:t>
+            </a:r>
+          </a:p>
+          <a:p>
+            <a:pPr rtl="0"/>
             <a:r>
               <a:rPr lang="en-US" sz="1200" kern="1200" dirty="0">
                 <a:solidFill>
@@ -2017,16 +2421,16 @@
               </a:rPr>
               <a:t>Rating</a:t>
             </a:r>
-            <a:r>
-              <a:rPr lang="en-US" dirty="0"/>
-              <a:t> </a:t>
-            </a:r>
-          </a:p>
-          <a:p>
-            <a:r>
-              <a:rPr lang="en-US" dirty="0"/>
-              <a:t>distribution of </a:t>
-            </a:r>
+            <a:br>
+              <a:rPr lang="en-US" sz="1200" kern="1200" dirty="0">
+                <a:solidFill>
+                  <a:schemeClr val="tx1"/>
+                </a:solidFill>
+                <a:latin typeface="+mn-lt"/>
+                <a:ea typeface="+mn-ea"/>
+                <a:cs typeface="+mn-cs"/>
+              </a:rPr>
+            </a:br>
             <a:r>
               <a:rPr lang="en-US" sz="1200" kern="1200" dirty="0">
                 <a:solidFill>
@@ -2038,39 +2442,30 @@
               </a:rPr>
               <a:t>Recommended</a:t>
             </a:r>
-            <a:r>
-              <a:rPr lang="en-US" dirty="0"/>
-              <a:t> </a:t>
-            </a:r>
-          </a:p>
-          <a:p>
-            <a:r>
-              <a:rPr lang="en-US" dirty="0"/>
-              <a:t>maybe correlation / crosstab between them </a:t>
+          </a:p>
+          <a:p>
+            <a:r>
+              <a:rPr lang="en-US" dirty="0"/>
+              <a:t>The test data does not contain them because these are the values we need to predict.</a:t>
             </a:r>
           </a:p>
           <a:p>
             <a:endParaRPr lang="en-US" dirty="0"/>
           </a:p>
           <a:p>
-            <a:r>
-              <a:rPr lang="en-US" dirty="0"/>
-              <a:t>Main message:</a:t>
-            </a:r>
-          </a:p>
-          <a:p>
-            <a:r>
-              <a:rPr lang="en-US" dirty="0"/>
-              <a:t>Both targets are positively skewed </a:t>
-            </a:r>
-          </a:p>
-          <a:p>
-            <a:r>
-              <a:rPr lang="en-US" dirty="0"/>
-              <a:t>Most reviews are positive </a:t>
-            </a:r>
-          </a:p>
-          <a:p>
+            <a:endParaRPr lang="en-US" dirty="0"/>
+          </a:p>
+          <a:p>
+            <a:r>
+              <a:rPr lang="en-US" dirty="0"/>
+              <a:t>Input features</a:t>
+            </a:r>
+          </a:p>
+          <a:p>
+            <a:r>
+              <a:rPr lang="en-US" dirty="0"/>
+              <a:t>For modeling, </a:t>
+            </a:r>
             <a:r>
               <a:rPr lang="en-US" sz="1200" kern="1200" dirty="0">
                 <a:solidFill>
@@ -2080,12 +2475,31 @@
                 <a:ea typeface="+mn-ea"/>
                 <a:cs typeface="+mn-cs"/>
               </a:rPr>
-              <a:t>Rating</a:t>
-            </a:r>
-            <a:r>
-              <a:rPr lang="en-US" dirty="0"/>
-              <a:t> and </a:t>
-            </a:r>
+              <a:t>Id</a:t>
+            </a:r>
+            <a:r>
+              <a:rPr lang="en-US" dirty="0"/>
+              <a:t> is mainly an identifier, not a meaningful predictive feature.</a:t>
+            </a:r>
+          </a:p>
+          <a:p>
+            <a:endParaRPr lang="en-GB" dirty="0"/>
+          </a:p>
+          <a:p>
+            <a:r>
+              <a:rPr lang="en-US" dirty="0"/>
+              <a:t>So the dataset combines several types of information:</a:t>
+            </a:r>
+          </a:p>
+          <a:p>
+            <a:r>
+              <a:rPr lang="en-US" b="1" dirty="0"/>
+              <a:t>Numerical features:</a:t>
+            </a:r>
+            <a:endParaRPr lang="en-US" dirty="0"/>
+          </a:p>
+          <a:p>
+            <a:pPr rtl="0"/>
             <a:r>
               <a:rPr lang="en-US" sz="1200" kern="1200" dirty="0">
                 <a:solidFill>
@@ -2095,33 +2509,413 @@
                 <a:ea typeface="+mn-ea"/>
                 <a:cs typeface="+mn-cs"/>
               </a:rPr>
-              <a:t>Recommended</a:t>
-            </a:r>
-            <a:r>
-              <a:rPr lang="en-US" dirty="0"/>
-              <a:t> are strongly related </a:t>
-            </a:r>
-          </a:p>
-          <a:p>
+              <a:t>Age</a:t>
+            </a:r>
+            <a:br>
+              <a:rPr lang="en-US" sz="1200" kern="1200" dirty="0">
+                <a:solidFill>
+                  <a:schemeClr val="tx1"/>
+                </a:solidFill>
+                <a:latin typeface="+mn-lt"/>
+                <a:ea typeface="+mn-ea"/>
+                <a:cs typeface="+mn-cs"/>
+              </a:rPr>
+            </a:br>
+            <a:r>
+              <a:rPr lang="en-US" sz="1200" kern="1200" dirty="0" err="1">
+                <a:solidFill>
+                  <a:schemeClr val="tx1"/>
+                </a:solidFill>
+                <a:latin typeface="+mn-lt"/>
+                <a:ea typeface="+mn-ea"/>
+                <a:cs typeface="+mn-cs"/>
+              </a:rPr>
+              <a:t>Pos_Feedback_Cnt</a:t>
+            </a:r>
+            <a:endParaRPr lang="en-US" sz="1200" kern="1200" dirty="0">
+              <a:solidFill>
+                <a:schemeClr val="tx1"/>
+              </a:solidFill>
+              <a:latin typeface="+mn-lt"/>
+              <a:ea typeface="+mn-ea"/>
+              <a:cs typeface="+mn-cs"/>
+            </a:endParaRPr>
+          </a:p>
+          <a:p>
+            <a:r>
+              <a:rPr lang="en-US" b="1" dirty="0"/>
+              <a:t>Text features:</a:t>
+            </a:r>
             <a:endParaRPr lang="en-US" dirty="0"/>
           </a:p>
           <a:p>
-            <a:r>
-              <a:rPr lang="en-US" dirty="0"/>
-              <a:t>What to say:</a:t>
-            </a:r>
-          </a:p>
-          <a:p>
-            <a:r>
-              <a:rPr lang="en-US" dirty="0"/>
-              <a:t>The dataset is imbalanced toward positive opinions </a:t>
-            </a:r>
-          </a:p>
-          <a:p>
-            <a:r>
-              <a:rPr lang="en-US" dirty="0"/>
-              <a:t>This is important because it affects classification behavior</a:t>
-            </a:r>
+            <a:pPr rtl="0"/>
+            <a:r>
+              <a:rPr lang="en-US" sz="1200" kern="1200" dirty="0" err="1">
+                <a:solidFill>
+                  <a:schemeClr val="tx1"/>
+                </a:solidFill>
+                <a:latin typeface="+mn-lt"/>
+                <a:ea typeface="+mn-ea"/>
+                <a:cs typeface="+mn-cs"/>
+              </a:rPr>
+              <a:t>Review_Title</a:t>
+            </a:r>
+            <a:br>
+              <a:rPr lang="en-US" sz="1200" kern="1200" dirty="0">
+                <a:solidFill>
+                  <a:schemeClr val="tx1"/>
+                </a:solidFill>
+                <a:latin typeface="+mn-lt"/>
+                <a:ea typeface="+mn-ea"/>
+                <a:cs typeface="+mn-cs"/>
+              </a:rPr>
+            </a:br>
+            <a:r>
+              <a:rPr lang="en-US" sz="1200" kern="1200" dirty="0">
+                <a:solidFill>
+                  <a:schemeClr val="tx1"/>
+                </a:solidFill>
+                <a:latin typeface="+mn-lt"/>
+                <a:ea typeface="+mn-ea"/>
+                <a:cs typeface="+mn-cs"/>
+              </a:rPr>
+              <a:t>Review</a:t>
+            </a:r>
+          </a:p>
+          <a:p>
+            <a:r>
+              <a:rPr lang="en-US" b="1" dirty="0"/>
+              <a:t>Categorical features:</a:t>
+            </a:r>
+            <a:endParaRPr lang="en-US" dirty="0"/>
+          </a:p>
+          <a:p>
+            <a:pPr rtl="0"/>
+            <a:r>
+              <a:rPr lang="en-US" sz="1200" kern="1200" dirty="0">
+                <a:solidFill>
+                  <a:schemeClr val="tx1"/>
+                </a:solidFill>
+                <a:latin typeface="+mn-lt"/>
+                <a:ea typeface="+mn-ea"/>
+                <a:cs typeface="+mn-cs"/>
+              </a:rPr>
+              <a:t>Division</a:t>
+            </a:r>
+            <a:br>
+              <a:rPr lang="en-US" sz="1200" kern="1200" dirty="0">
+                <a:solidFill>
+                  <a:schemeClr val="tx1"/>
+                </a:solidFill>
+                <a:latin typeface="+mn-lt"/>
+                <a:ea typeface="+mn-ea"/>
+                <a:cs typeface="+mn-cs"/>
+              </a:rPr>
+            </a:br>
+            <a:r>
+              <a:rPr lang="en-US" sz="1200" kern="1200" dirty="0">
+                <a:solidFill>
+                  <a:schemeClr val="tx1"/>
+                </a:solidFill>
+                <a:latin typeface="+mn-lt"/>
+                <a:ea typeface="+mn-ea"/>
+                <a:cs typeface="+mn-cs"/>
+              </a:rPr>
+              <a:t>Department</a:t>
+            </a:r>
+            <a:br>
+              <a:rPr lang="en-US" sz="1200" kern="1200" dirty="0">
+                <a:solidFill>
+                  <a:schemeClr val="tx1"/>
+                </a:solidFill>
+                <a:latin typeface="+mn-lt"/>
+                <a:ea typeface="+mn-ea"/>
+                <a:cs typeface="+mn-cs"/>
+              </a:rPr>
+            </a:br>
+            <a:r>
+              <a:rPr lang="en-US" sz="1200" kern="1200" dirty="0" err="1">
+                <a:solidFill>
+                  <a:schemeClr val="tx1"/>
+                </a:solidFill>
+                <a:latin typeface="+mn-lt"/>
+                <a:ea typeface="+mn-ea"/>
+                <a:cs typeface="+mn-cs"/>
+              </a:rPr>
+              <a:t>Product_Category</a:t>
+            </a:r>
+            <a:endParaRPr lang="en-US" sz="1200" kern="1200" dirty="0">
+              <a:solidFill>
+                <a:schemeClr val="tx1"/>
+              </a:solidFill>
+              <a:latin typeface="+mn-lt"/>
+              <a:ea typeface="+mn-ea"/>
+              <a:cs typeface="+mn-cs"/>
+            </a:endParaRPr>
+          </a:p>
+          <a:p>
+            <a:pPr rtl="0"/>
+            <a:endParaRPr lang="en-US" sz="1200" kern="1200" dirty="0">
+              <a:solidFill>
+                <a:schemeClr val="tx1"/>
+              </a:solidFill>
+              <a:latin typeface="+mn-lt"/>
+              <a:ea typeface="+mn-ea"/>
+              <a:cs typeface="+mn-cs"/>
+            </a:endParaRPr>
+          </a:p>
+          <a:p>
+            <a:pPr marL="0" marR="0" lvl="0" indent="0" algn="l" defTabSz="914400" rtl="0" eaLnBrk="1" fontAlgn="auto" latinLnBrk="0" hangingPunct="1">
+              <a:lnSpc>
+                <a:spcPct val="100000"/>
+              </a:lnSpc>
+              <a:spcBef>
+                <a:spcPts val="0"/>
+              </a:spcBef>
+              <a:spcAft>
+                <a:spcPts val="0"/>
+              </a:spcAft>
+              <a:buClrTx/>
+              <a:buSzTx/>
+              <a:buFontTx/>
+              <a:buNone/>
+              <a:tabLst/>
+              <a:defRPr/>
+            </a:pPr>
+            <a:r>
+              <a:rPr lang="en-US" dirty="0"/>
+              <a:t>This is important because different feature types need different preprocessing. Numerical features can be scaled or transformed, categorical features can be one-hot encoded, and text features need vectorization or neural network text processing.</a:t>
+            </a:r>
+          </a:p>
+          <a:p>
+            <a:pPr marL="0" marR="0" lvl="0" indent="0" algn="l" defTabSz="914400" rtl="0" eaLnBrk="1" fontAlgn="auto" latinLnBrk="0" hangingPunct="1">
+              <a:lnSpc>
+                <a:spcPct val="100000"/>
+              </a:lnSpc>
+              <a:spcBef>
+                <a:spcPts val="0"/>
+              </a:spcBef>
+              <a:spcAft>
+                <a:spcPts val="0"/>
+              </a:spcAft>
+              <a:buClrTx/>
+              <a:buSzTx/>
+              <a:buFontTx/>
+              <a:buNone/>
+              <a:tabLst/>
+              <a:defRPr/>
+            </a:pPr>
+            <a:endParaRPr lang="en-US" dirty="0"/>
+          </a:p>
+          <a:p>
+            <a:pPr marL="0" marR="0" lvl="0" indent="0" algn="l" defTabSz="914400" rtl="0" eaLnBrk="1" fontAlgn="auto" latinLnBrk="0" hangingPunct="1">
+              <a:lnSpc>
+                <a:spcPct val="100000"/>
+              </a:lnSpc>
+              <a:spcBef>
+                <a:spcPts val="0"/>
+              </a:spcBef>
+              <a:spcAft>
+                <a:spcPts val="0"/>
+              </a:spcAft>
+              <a:buClrTx/>
+              <a:buSzTx/>
+              <a:buFontTx/>
+              <a:buNone/>
+              <a:tabLst/>
+              <a:defRPr/>
+            </a:pPr>
+            <a:endParaRPr lang="en-US" dirty="0"/>
+          </a:p>
+          <a:p>
+            <a:r>
+              <a:rPr lang="en-US" dirty="0"/>
+              <a:t>The competition metric is the </a:t>
+            </a:r>
+            <a:r>
+              <a:rPr lang="en-US" b="1" dirty="0"/>
+              <a:t>mean of Spearman correlations</a:t>
+            </a:r>
+            <a:r>
+              <a:rPr lang="en-US" dirty="0"/>
+              <a:t> for the two targets.</a:t>
+            </a:r>
+          </a:p>
+          <a:p>
+            <a:pPr marL="0" marR="0" lvl="0" indent="0" algn="l" defTabSz="914400" rtl="0" eaLnBrk="1" fontAlgn="auto" latinLnBrk="0" hangingPunct="1">
+              <a:lnSpc>
+                <a:spcPct val="100000"/>
+              </a:lnSpc>
+              <a:spcBef>
+                <a:spcPts val="0"/>
+              </a:spcBef>
+              <a:spcAft>
+                <a:spcPts val="0"/>
+              </a:spcAft>
+              <a:buClrTx/>
+              <a:buSzTx/>
+              <a:buFontTx/>
+              <a:buNone/>
+              <a:tabLst/>
+              <a:defRPr/>
+            </a:pPr>
+            <a:endParaRPr lang="en-US" dirty="0"/>
+          </a:p>
+          <a:p>
+            <a:r>
+              <a:rPr lang="en-US" dirty="0"/>
+              <a:t>So the metric checks how well the predicted values preserve the correct ranking of the true values.</a:t>
+            </a:r>
+          </a:p>
+          <a:p>
+            <a:r>
+              <a:rPr lang="en-US" b="1" dirty="0"/>
+              <a:t>What Spearman correlation means</a:t>
+            </a:r>
+          </a:p>
+          <a:p>
+            <a:r>
+              <a:rPr lang="en-US" dirty="0"/>
+              <a:t>Spearman correlation does not directly compare exact values. Instead, it compares </a:t>
+            </a:r>
+            <a:r>
+              <a:rPr lang="en-US" b="1" dirty="0"/>
+              <a:t>ranks</a:t>
+            </a:r>
+            <a:r>
+              <a:rPr lang="en-US" dirty="0"/>
+              <a:t>.</a:t>
+            </a:r>
+          </a:p>
+          <a:p>
+            <a:r>
+              <a:rPr lang="en-US" dirty="0"/>
+              <a:t>For example, suppose we have true ratings:</a:t>
+            </a:r>
+          </a:p>
+          <a:p>
+            <a:pPr rtl="0"/>
+            <a:r>
+              <a:rPr lang="en-US" sz="1200" kern="1200" dirty="0">
+                <a:solidFill>
+                  <a:schemeClr val="tx1"/>
+                </a:solidFill>
+                <a:latin typeface="+mn-lt"/>
+                <a:ea typeface="+mn-ea"/>
+                <a:cs typeface="+mn-cs"/>
+              </a:rPr>
+              <a:t>[1, 3, 5]</a:t>
+            </a:r>
+          </a:p>
+          <a:p>
+            <a:r>
+              <a:rPr lang="en-US" dirty="0"/>
+              <a:t>and model predictions:</a:t>
+            </a:r>
+          </a:p>
+          <a:p>
+            <a:pPr rtl="0"/>
+            <a:r>
+              <a:rPr lang="en-US" sz="1200" kern="1200" dirty="0">
+                <a:solidFill>
+                  <a:schemeClr val="tx1"/>
+                </a:solidFill>
+                <a:latin typeface="+mn-lt"/>
+                <a:ea typeface="+mn-ea"/>
+                <a:cs typeface="+mn-cs"/>
+              </a:rPr>
+              <a:t>[0.2, 0.6, 0.9]</a:t>
+            </a:r>
+          </a:p>
+          <a:p>
+            <a:r>
+              <a:rPr lang="en-US" dirty="0"/>
+              <a:t>Even though the predictions are not exactly 1, 3, and 5, their order is correct: the lowest true rating gets the lowest prediction, and the highest true rating gets the highest prediction.</a:t>
+            </a:r>
+          </a:p>
+          <a:p>
+            <a:r>
+              <a:rPr lang="en-US" dirty="0"/>
+              <a:t>So Spearman correlation will be high.</a:t>
+            </a:r>
+          </a:p>
+          <a:p>
+            <a:r>
+              <a:rPr lang="en-US" dirty="0"/>
+              <a:t>This is different from metrics like RMSE or accuracy. Spearman cares more about whether the model puts examples in the correct order.</a:t>
+            </a:r>
+          </a:p>
+          <a:p>
+            <a:pPr marL="0" marR="0" lvl="0" indent="0" algn="l" defTabSz="914400" rtl="0" eaLnBrk="1" fontAlgn="auto" latinLnBrk="0" hangingPunct="1">
+              <a:lnSpc>
+                <a:spcPct val="100000"/>
+              </a:lnSpc>
+              <a:spcBef>
+                <a:spcPts val="0"/>
+              </a:spcBef>
+              <a:spcAft>
+                <a:spcPts val="0"/>
+              </a:spcAft>
+              <a:buClrTx/>
+              <a:buSzTx/>
+              <a:buFontTx/>
+              <a:buNone/>
+              <a:tabLst/>
+              <a:defRPr/>
+            </a:pPr>
+            <a:endParaRPr lang="en-US" dirty="0"/>
+          </a:p>
+          <a:p>
+            <a:pPr marL="0" marR="0" lvl="0" indent="0" algn="l" defTabSz="914400" rtl="0" eaLnBrk="1" fontAlgn="auto" latinLnBrk="0" hangingPunct="1">
+              <a:lnSpc>
+                <a:spcPct val="100000"/>
+              </a:lnSpc>
+              <a:spcBef>
+                <a:spcPts val="0"/>
+              </a:spcBef>
+              <a:spcAft>
+                <a:spcPts val="0"/>
+              </a:spcAft>
+              <a:buClrTx/>
+              <a:buSzTx/>
+              <a:buFontTx/>
+              <a:buNone/>
+              <a:tabLst/>
+              <a:defRPr/>
+            </a:pPr>
+            <a:endParaRPr lang="en-US" dirty="0"/>
+          </a:p>
+          <a:p>
+            <a:pPr marL="0" marR="0" lvl="0" indent="0" algn="l" defTabSz="914400" rtl="0" eaLnBrk="1" fontAlgn="auto" latinLnBrk="0" hangingPunct="1">
+              <a:lnSpc>
+                <a:spcPct val="100000"/>
+              </a:lnSpc>
+              <a:spcBef>
+                <a:spcPts val="0"/>
+              </a:spcBef>
+              <a:spcAft>
+                <a:spcPts val="0"/>
+              </a:spcAft>
+              <a:buClrTx/>
+              <a:buSzTx/>
+              <a:buFontTx/>
+              <a:buNone/>
+              <a:tabLst/>
+              <a:defRPr/>
+            </a:pPr>
+            <a:endParaRPr lang="en-US" dirty="0"/>
+          </a:p>
+          <a:p>
+            <a:pPr rtl="0"/>
+            <a:endParaRPr lang="en-US" sz="1200" kern="1200" dirty="0">
+              <a:solidFill>
+                <a:schemeClr val="tx1"/>
+              </a:solidFill>
+              <a:latin typeface="+mn-lt"/>
+              <a:ea typeface="+mn-ea"/>
+              <a:cs typeface="+mn-cs"/>
+            </a:endParaRPr>
           </a:p>
           <a:p>
             <a:endParaRPr lang="en-GB" dirty="0"/>
@@ -2154,7 +2948,7 @@
     </p:spTree>
     <p:extLst>
       <p:ext uri="{BB962C8B-B14F-4D97-AF65-F5344CB8AC3E}">
-        <p14:creationId xmlns:p14="http://schemas.microsoft.com/office/powerpoint/2010/main" val="2086963855"/>
+        <p14:creationId xmlns:p14="http://schemas.microsoft.com/office/powerpoint/2010/main" val="1739679683"/>
       </p:ext>
     </p:extLst>
   </p:cSld>
@@ -2169,7 +2963,13 @@
   <p:cSld>
     <p:spTree>
       <p:nvGrpSpPr>
-        <p:cNvPr id="1" name=""/>
+        <p:cNvPr id="1" name="">
+          <a:extLst>
+            <a:ext uri="{FF2B5EF4-FFF2-40B4-BE49-F238E27FC236}">
+              <a16:creationId xmlns:a16="http://schemas.microsoft.com/office/drawing/2014/main" id="{A206D3D2-2289-3077-6A5C-7BC6C4B4D47B}"/>
+            </a:ext>
+          </a:extLst>
+        </p:cNvPr>
         <p:cNvGrpSpPr/>
         <p:nvPr/>
       </p:nvGrpSpPr>
@@ -2183,7 +2983,13 @@
       </p:grpSpPr>
       <p:sp>
         <p:nvSpPr>
-          <p:cNvPr id="2" name="Slide Image Placeholder 1"/>
+          <p:cNvPr id="2" name="Slide Image Placeholder 1">
+            <a:extLst>
+              <a:ext uri="{FF2B5EF4-FFF2-40B4-BE49-F238E27FC236}">
+                <a16:creationId xmlns:a16="http://schemas.microsoft.com/office/drawing/2014/main" id="{57AB5040-1B99-01D3-E7B1-503A1931DE4C}"/>
+              </a:ext>
+            </a:extLst>
+          </p:cNvPr>
           <p:cNvSpPr>
             <a:spLocks noGrp="1" noRot="1" noChangeAspect="1"/>
           </p:cNvSpPr>
@@ -2195,7 +3001,13 @@
       </p:sp>
       <p:sp>
         <p:nvSpPr>
-          <p:cNvPr id="3" name="Notes Placeholder 2"/>
+          <p:cNvPr id="3" name="Notes Placeholder 2">
+            <a:extLst>
+              <a:ext uri="{FF2B5EF4-FFF2-40B4-BE49-F238E27FC236}">
+                <a16:creationId xmlns:a16="http://schemas.microsoft.com/office/drawing/2014/main" id="{86E64FFC-7672-4D62-28A7-FCFC8A61DF87}"/>
+              </a:ext>
+            </a:extLst>
+          </p:cNvPr>
           <p:cNvSpPr>
             <a:spLocks noGrp="1"/>
           </p:cNvSpPr>
@@ -2208,173 +3020,54 @@
           <a:bodyPr/>
           <a:lstStyle/>
           <a:p>
-            <a:r>
-              <a:rPr lang="en-US" dirty="0"/>
-              <a:t>Show:</a:t>
-            </a:r>
-          </a:p>
-          <a:p>
-            <a:r>
-              <a:rPr lang="en-US" dirty="0"/>
-              <a:t>missing values bar plot </a:t>
-            </a:r>
-          </a:p>
-          <a:p>
-            <a:r>
-              <a:rPr lang="en-US" dirty="0"/>
-              <a:t>maybe one table showing: </a:t>
-            </a:r>
-          </a:p>
-          <a:p>
-            <a:pPr lvl="1"/>
-            <a:r>
-              <a:rPr lang="en-US" sz="1200" kern="1200" dirty="0" err="1">
-                <a:solidFill>
-                  <a:schemeClr val="tx1"/>
-                </a:solidFill>
-                <a:latin typeface="+mn-lt"/>
-                <a:ea typeface="+mn-ea"/>
-                <a:cs typeface="+mn-cs"/>
-              </a:rPr>
-              <a:t>title_missing</a:t>
-            </a:r>
-            <a:r>
-              <a:rPr lang="en-US" dirty="0"/>
-              <a:t> </a:t>
-            </a:r>
-          </a:p>
-          <a:p>
-            <a:pPr lvl="1"/>
-            <a:r>
-              <a:rPr lang="en-US" sz="1200" kern="1200" dirty="0" err="1">
-                <a:solidFill>
-                  <a:schemeClr val="tx1"/>
-                </a:solidFill>
-                <a:latin typeface="+mn-lt"/>
-                <a:ea typeface="+mn-ea"/>
-                <a:cs typeface="+mn-cs"/>
-              </a:rPr>
-              <a:t>review_missing</a:t>
-            </a:r>
-            <a:r>
-              <a:rPr lang="en-US" dirty="0"/>
-              <a:t> </a:t>
-            </a:r>
-          </a:p>
-          <a:p>
-            <a:pPr lvl="1"/>
-            <a:r>
-              <a:rPr lang="en-US" dirty="0"/>
-              <a:t>average </a:t>
-            </a:r>
-            <a:r>
-              <a:rPr lang="en-US" sz="1200" kern="1200" dirty="0">
-                <a:solidFill>
-                  <a:schemeClr val="tx1"/>
-                </a:solidFill>
-                <a:latin typeface="+mn-lt"/>
-                <a:ea typeface="+mn-ea"/>
-                <a:cs typeface="+mn-cs"/>
-              </a:rPr>
-              <a:t>Rating</a:t>
-            </a:r>
-            <a:r>
-              <a:rPr lang="en-US" dirty="0"/>
-              <a:t> </a:t>
-            </a:r>
-          </a:p>
-          <a:p>
-            <a:pPr lvl="1"/>
-            <a:r>
-              <a:rPr lang="en-US" dirty="0"/>
-              <a:t>average </a:t>
-            </a:r>
-            <a:r>
-              <a:rPr lang="en-US" sz="1200" kern="1200" dirty="0">
-                <a:solidFill>
-                  <a:schemeClr val="tx1"/>
-                </a:solidFill>
-                <a:latin typeface="+mn-lt"/>
-                <a:ea typeface="+mn-ea"/>
-                <a:cs typeface="+mn-cs"/>
-              </a:rPr>
+            <a:pPr rtl="0"/>
+            <a:endParaRPr lang="en-US" sz="1200" kern="1200" dirty="0">
+              <a:solidFill>
+                <a:schemeClr val="tx1"/>
+              </a:solidFill>
+              <a:latin typeface="+mn-lt"/>
+              <a:ea typeface="+mn-ea"/>
+              <a:cs typeface="+mn-cs"/>
+            </a:endParaRPr>
+          </a:p>
+          <a:p>
+            <a:r>
+              <a:rPr lang="en-US" dirty="0"/>
+              <a:t>This shows that the dataset is strongly skewed toward positive reviews. More than half of all reviews have rating 5.</a:t>
+            </a:r>
+          </a:p>
+          <a:p>
+            <a:r>
+              <a:rPr lang="en-US" dirty="0"/>
+              <a:t>That means the model can easily learn to predict high ratings too often. For example, if the model predicts many 5s, it may look reasonable because 5 is the most common class, but it may fail to correctly rank lower-rated reviews.</a:t>
+            </a:r>
+          </a:p>
+          <a:p>
+            <a:endParaRPr lang="en-GB" dirty="0"/>
+          </a:p>
+          <a:p>
+            <a:endParaRPr lang="en-GB" dirty="0"/>
+          </a:p>
+          <a:p>
+            <a:r>
+              <a:rPr lang="en-US" dirty="0"/>
+              <a:t>The second target is </a:t>
+            </a:r>
+            <a:r>
+              <a:rPr lang="en-US" b="1" dirty="0"/>
               <a:t>Recommended</a:t>
             </a:r>
-            <a:r>
-              <a:rPr lang="en-US" dirty="0"/>
-              <a:t> </a:t>
-            </a:r>
-          </a:p>
-          <a:p>
-            <a:r>
-              <a:rPr lang="en-US" dirty="0"/>
-              <a:t>Main message:</a:t>
-            </a:r>
-          </a:p>
-          <a:p>
-            <a:r>
-              <a:rPr lang="en-US" dirty="0"/>
-              <a:t>Missing text is not random </a:t>
-            </a:r>
-          </a:p>
-          <a:p>
-            <a:r>
-              <a:rPr lang="en-US" dirty="0"/>
-              <a:t>Missing title/review can carry signal </a:t>
-            </a:r>
-          </a:p>
-          <a:p>
-            <a:r>
-              <a:rPr lang="en-US" dirty="0"/>
-              <a:t>Review length is informative </a:t>
-            </a:r>
-          </a:p>
-          <a:p>
-            <a:endParaRPr lang="en-US" dirty="0"/>
-          </a:p>
-          <a:p>
-            <a:r>
-              <a:rPr lang="en-US" dirty="0"/>
-              <a:t>What to say:</a:t>
-            </a:r>
-          </a:p>
-          <a:p>
-            <a:r>
-              <a:rPr lang="en-US" dirty="0"/>
-              <a:t>Reviews with missing text had different average targets </a:t>
-            </a:r>
-          </a:p>
-          <a:p>
-            <a:r>
-              <a:rPr lang="en-US" dirty="0"/>
-              <a:t>So I kept missingness indicators instead of simply dropping them </a:t>
-            </a:r>
-          </a:p>
-          <a:p>
-            <a:endParaRPr lang="en-US" dirty="0"/>
-          </a:p>
-          <a:p>
-            <a:r>
-              <a:rPr lang="en-US" dirty="0"/>
-              <a:t>To mention:</a:t>
-            </a:r>
-          </a:p>
-          <a:p>
-            <a:r>
-              <a:rPr lang="en-US" dirty="0"/>
-              <a:t>title length </a:t>
-            </a:r>
-          </a:p>
-          <a:p>
-            <a:r>
-              <a:rPr lang="en-US" dirty="0"/>
-              <a:t>review length </a:t>
-            </a:r>
-          </a:p>
-          <a:p>
-            <a:r>
-              <a:rPr lang="en-US" dirty="0"/>
-              <a:t>text preprocessing decisions came from EDA</a:t>
+          </a:p>
+          <a:p>
+            <a:r>
+              <a:rPr lang="en-US" dirty="0"/>
+              <a:t>This target is also imbalanced. Most customers recommend the product.</a:t>
+            </a:r>
+          </a:p>
+          <a:p>
+            <a:r>
+              <a:rPr lang="en-US" dirty="0"/>
+              <a:t>So both targets show the same general pattern: the dataset contains mostly positive customer feedback.</a:t>
             </a:r>
           </a:p>
           <a:p>
@@ -2384,7 +3077,13 @@
       </p:sp>
       <p:sp>
         <p:nvSpPr>
-          <p:cNvPr id="4" name="Slide Number Placeholder 3"/>
+          <p:cNvPr id="4" name="Slide Number Placeholder 3">
+            <a:extLst>
+              <a:ext uri="{FF2B5EF4-FFF2-40B4-BE49-F238E27FC236}">
+                <a16:creationId xmlns:a16="http://schemas.microsoft.com/office/drawing/2014/main" id="{38ADA57D-7778-F3BB-8111-C7E1AF0E8778}"/>
+              </a:ext>
+            </a:extLst>
+          </p:cNvPr>
           <p:cNvSpPr>
             <a:spLocks noGrp="1"/>
           </p:cNvSpPr>
@@ -2408,7 +3107,7 @@
     </p:spTree>
     <p:extLst>
       <p:ext uri="{BB962C8B-B14F-4D97-AF65-F5344CB8AC3E}">
-        <p14:creationId xmlns:p14="http://schemas.microsoft.com/office/powerpoint/2010/main" val="1024757444"/>
+        <p14:creationId xmlns:p14="http://schemas.microsoft.com/office/powerpoint/2010/main" val="3336984522"/>
       </p:ext>
     </p:extLst>
   </p:cSld>
@@ -2464,75 +3163,13 @@
           <a:p>
             <a:r>
               <a:rPr lang="en-US" dirty="0"/>
-              <a:t>Put:</a:t>
-            </a:r>
-          </a:p>
-          <a:p>
-            <a:r>
-              <a:rPr lang="en-US" dirty="0"/>
-              <a:t>lowercasing / light cleaning </a:t>
-            </a:r>
-          </a:p>
-          <a:p>
-            <a:r>
-              <a:rPr lang="en-US" dirty="0"/>
-              <a:t>missing text filled with empty strings </a:t>
-            </a:r>
-          </a:p>
-          <a:p>
-            <a:r>
-              <a:rPr lang="en-US" dirty="0"/>
-              <a:t>missingness indicators kept </a:t>
-            </a:r>
-          </a:p>
-          <a:p>
-            <a:r>
-              <a:rPr lang="en-US" dirty="0"/>
-              <a:t>title and review combined </a:t>
-            </a:r>
-          </a:p>
-          <a:p>
-            <a:r>
-              <a:rPr lang="en-US" dirty="0"/>
-              <a:t>n-grams used </a:t>
-            </a:r>
-          </a:p>
-          <a:p>
-            <a:r>
-              <a:rPr lang="en-US" dirty="0" err="1"/>
-              <a:t>BoW</a:t>
-            </a:r>
-            <a:r>
-              <a:rPr lang="en-US" dirty="0"/>
-              <a:t> (</a:t>
-            </a:r>
-            <a:r>
-              <a:rPr lang="en-US" sz="1200" kern="1200" dirty="0" err="1">
-                <a:solidFill>
-                  <a:schemeClr val="tx1"/>
-                </a:solidFill>
-                <a:latin typeface="+mn-lt"/>
-                <a:ea typeface="+mn-ea"/>
-                <a:cs typeface="+mn-cs"/>
-              </a:rPr>
-              <a:t>CountVectorizer</a:t>
-            </a:r>
-            <a:r>
-              <a:rPr lang="en-US" dirty="0"/>
-              <a:t>) with metadata </a:t>
-            </a:r>
-          </a:p>
-          <a:p>
-            <a:r>
-              <a:rPr lang="en-US" dirty="0"/>
-              <a:t>separate models: </a:t>
-            </a:r>
-          </a:p>
-          <a:p>
-            <a:pPr lvl="1"/>
-            <a:r>
-              <a:rPr lang="en-US" dirty="0"/>
-              <a:t>Ridge for </a:t>
+              <a:t>Show:</a:t>
+            </a:r>
+          </a:p>
+          <a:p>
+            <a:r>
+              <a:rPr lang="en-US" dirty="0"/>
+              <a:t>distribution of </a:t>
             </a:r>
             <a:r>
               <a:rPr lang="en-US" sz="1200" kern="1200" dirty="0">
@@ -2551,10 +3188,9 @@
             </a:r>
           </a:p>
           <a:p>
-            <a:pPr lvl="1"/>
-            <a:r>
-              <a:rPr lang="en-US" dirty="0"/>
-              <a:t>Logistic Regression for </a:t>
+            <a:r>
+              <a:rPr lang="en-US" dirty="0"/>
+              <a:t>distribution of </a:t>
             </a:r>
             <a:r>
               <a:rPr lang="en-US" sz="1200" kern="1200" dirty="0">
@@ -2575,26 +3211,85 @@
           <a:p>
             <a:r>
               <a:rPr lang="en-US" dirty="0"/>
+              <a:t>maybe correlation / crosstab between them </a:t>
+            </a:r>
+          </a:p>
+          <a:p>
+            <a:endParaRPr lang="en-US" dirty="0"/>
+          </a:p>
+          <a:p>
+            <a:r>
+              <a:rPr lang="en-US" dirty="0"/>
+              <a:t>Main message:</a:t>
+            </a:r>
+          </a:p>
+          <a:p>
+            <a:r>
+              <a:rPr lang="en-US" dirty="0"/>
+              <a:t>Both targets are positively skewed </a:t>
+            </a:r>
+          </a:p>
+          <a:p>
+            <a:r>
+              <a:rPr lang="en-US" dirty="0"/>
+              <a:t>Most reviews are positive </a:t>
+            </a:r>
+          </a:p>
+          <a:p>
+            <a:r>
+              <a:rPr lang="en-US" sz="1200" kern="1200" dirty="0">
+                <a:solidFill>
+                  <a:schemeClr val="tx1"/>
+                </a:solidFill>
+                <a:latin typeface="+mn-lt"/>
+                <a:ea typeface="+mn-ea"/>
+                <a:cs typeface="+mn-cs"/>
+              </a:rPr>
+              <a:t>Rating</a:t>
+            </a:r>
+            <a:r>
+              <a:rPr lang="en-US" dirty="0"/>
+              <a:t> and </a:t>
+            </a:r>
+            <a:r>
+              <a:rPr lang="en-US" sz="1200" kern="1200" dirty="0">
+                <a:solidFill>
+                  <a:schemeClr val="tx1"/>
+                </a:solidFill>
+                <a:latin typeface="+mn-lt"/>
+                <a:ea typeface="+mn-ea"/>
+                <a:cs typeface="+mn-cs"/>
+              </a:rPr>
+              <a:t>Recommended</a:t>
+            </a:r>
+            <a:r>
+              <a:rPr lang="en-US" dirty="0"/>
+              <a:t> are strongly related </a:t>
+            </a:r>
+          </a:p>
+          <a:p>
+            <a:endParaRPr lang="en-US" dirty="0"/>
+          </a:p>
+          <a:p>
+            <a:r>
+              <a:rPr lang="en-US" dirty="0"/>
               <a:t>What to say:</a:t>
             </a:r>
           </a:p>
           <a:p>
             <a:r>
               <a:rPr lang="en-US" dirty="0"/>
-              <a:t>Classical NLP here means preprocessing and sparse text representation </a:t>
-            </a:r>
-          </a:p>
-          <a:p>
-            <a:r>
-              <a:rPr lang="en-US" dirty="0"/>
-              <a:t>I used unigrams and bigrams because short phrases like “too small” or “not flattering” were important </a:t>
-            </a:r>
-          </a:p>
-          <a:p>
-            <a:r>
-              <a:rPr lang="en-US" dirty="0"/>
-              <a:t>Separate models were used because the targets are different </a:t>
-            </a:r>
+              <a:t>The dataset is imbalanced toward positive opinions </a:t>
+            </a:r>
+          </a:p>
+          <a:p>
+            <a:r>
+              <a:rPr lang="en-US" dirty="0"/>
+              <a:t>This is important because it affects classification behavior</a:t>
+            </a:r>
+          </a:p>
+          <a:p>
+            <a:endParaRPr lang="en-GB" dirty="0"/>
           </a:p>
         </p:txBody>
       </p:sp>
@@ -2624,7 +3319,7 @@
     </p:spTree>
     <p:extLst>
       <p:ext uri="{BB962C8B-B14F-4D97-AF65-F5344CB8AC3E}">
-        <p14:creationId xmlns:p14="http://schemas.microsoft.com/office/powerpoint/2010/main" val="1206832217"/>
+        <p14:creationId xmlns:p14="http://schemas.microsoft.com/office/powerpoint/2010/main" val="2086963855"/>
       </p:ext>
     </p:extLst>
   </p:cSld>
@@ -2679,56 +3374,20 @@
           <a:lstStyle/>
           <a:p>
             <a:r>
-              <a:rPr lang="en-US" b="1" dirty="0"/>
-              <a:t>Content:</a:t>
-            </a:r>
-            <a:endParaRPr lang="en-US" dirty="0"/>
-          </a:p>
-          <a:p>
-            <a:r>
-              <a:rPr lang="en-US" dirty="0"/>
-              <a:t>Classical NLP preprocessing: </a:t>
-            </a:r>
-          </a:p>
-          <a:p>
-            <a:pPr lvl="1"/>
-            <a:r>
-              <a:rPr lang="en-US" dirty="0"/>
-              <a:t>lowercasing </a:t>
-            </a:r>
-          </a:p>
-          <a:p>
-            <a:pPr lvl="1"/>
-            <a:r>
-              <a:rPr lang="en-US" dirty="0"/>
-              <a:t>light text cleaning </a:t>
-            </a:r>
-          </a:p>
-          <a:p>
-            <a:pPr lvl="1"/>
-            <a:r>
-              <a:rPr lang="en-US" dirty="0"/>
-              <a:t>missing text handling </a:t>
-            </a:r>
-          </a:p>
-          <a:p>
-            <a:pPr lvl="1"/>
-            <a:r>
-              <a:rPr lang="en-US" dirty="0"/>
-              <a:t>missingness indicators </a:t>
-            </a:r>
-          </a:p>
-          <a:p>
-            <a:pPr lvl="1"/>
-            <a:r>
-              <a:rPr lang="en-US" dirty="0"/>
-              <a:t>text length features </a:t>
-            </a:r>
-          </a:p>
-          <a:p>
-            <a:r>
-              <a:rPr lang="en-US" dirty="0"/>
-              <a:t>Text representation: </a:t>
+              <a:rPr lang="en-US" dirty="0"/>
+              <a:t>Show:</a:t>
+            </a:r>
+          </a:p>
+          <a:p>
+            <a:r>
+              <a:rPr lang="en-US" dirty="0"/>
+              <a:t>missing values bar plot </a:t>
+            </a:r>
+          </a:p>
+          <a:p>
+            <a:r>
+              <a:rPr lang="en-US" dirty="0"/>
+              <a:t>maybe one table showing: </a:t>
             </a:r>
           </a:p>
           <a:p>
@@ -2742,7 +3401,7 @@
                 <a:ea typeface="+mn-ea"/>
                 <a:cs typeface="+mn-cs"/>
               </a:rPr>
-              <a:t>CountVectorizer</a:t>
+              <a:t>title_missing</a:t>
             </a:r>
             <a:r>
               <a:rPr lang="en-US" dirty="0"/>
@@ -2752,18 +3411,27 @@
           <a:p>
             <a:pPr lvl="1"/>
             <a:r>
-              <a:rPr lang="en-US" dirty="0"/>
-              <a:t>unigrams + bigrams </a:t>
-            </a:r>
-          </a:p>
-          <a:p>
-            <a:r>
-              <a:rPr lang="en-US" dirty="0"/>
-              <a:t>Separate models: </a:t>
+              <a:rPr lang="en-US" sz="1200" kern="1200" dirty="0" err="1">
+                <a:solidFill>
+                  <a:schemeClr val="tx1"/>
+                </a:solidFill>
+                <a:latin typeface="+mn-lt"/>
+                <a:ea typeface="+mn-ea"/>
+                <a:cs typeface="+mn-cs"/>
+              </a:rPr>
+              <a:t>review_missing</a:t>
+            </a:r>
+            <a:r>
+              <a:rPr lang="en-US" dirty="0"/>
+              <a:t> </a:t>
             </a:r>
           </a:p>
           <a:p>
             <a:pPr lvl="1"/>
+            <a:r>
+              <a:rPr lang="en-US" dirty="0"/>
+              <a:t>average </a:t>
+            </a:r>
             <a:r>
               <a:rPr lang="en-US" sz="1200" kern="1200" dirty="0">
                 <a:solidFill>
@@ -2777,11 +3445,15 @@
             </a:r>
             <a:r>
               <a:rPr lang="en-US" dirty="0"/>
-              <a:t> → Ridge regression </a:t>
+              <a:t> </a:t>
             </a:r>
           </a:p>
           <a:p>
             <a:pPr lvl="1"/>
+            <a:r>
+              <a:rPr lang="en-US" dirty="0"/>
+              <a:t>average </a:t>
+            </a:r>
             <a:r>
               <a:rPr lang="en-US" sz="1200" kern="1200" dirty="0">
                 <a:solidFill>
@@ -2795,81 +3467,82 @@
             </a:r>
             <a:r>
               <a:rPr lang="en-US" dirty="0"/>
-              <a:t> → Logistic Regression </a:t>
-            </a:r>
-          </a:p>
-          <a:p>
-            <a:r>
-              <a:rPr lang="en-US" dirty="0"/>
-              <a:t>Additional metadata: </a:t>
-            </a:r>
-          </a:p>
-          <a:p>
-            <a:pPr lvl="1"/>
-            <a:r>
-              <a:rPr lang="en-US" dirty="0"/>
-              <a:t>Age </a:t>
-            </a:r>
-          </a:p>
-          <a:p>
-            <a:pPr lvl="1"/>
-            <a:r>
-              <a:rPr lang="en-US" dirty="0" err="1"/>
-              <a:t>Pos_Feedback_Cnt</a:t>
-            </a:r>
-            <a:r>
-              <a:rPr lang="en-US" dirty="0"/>
               <a:t> </a:t>
             </a:r>
           </a:p>
           <a:p>
-            <a:pPr lvl="1"/>
-            <a:r>
-              <a:rPr lang="en-US" dirty="0"/>
-              <a:t>Division / Department / </a:t>
-            </a:r>
-            <a:r>
-              <a:rPr lang="en-US" dirty="0" err="1"/>
-              <a:t>Product_Category</a:t>
-            </a:r>
+            <a:r>
+              <a:rPr lang="en-US" dirty="0"/>
+              <a:t>Main message:</a:t>
+            </a:r>
+          </a:p>
+          <a:p>
+            <a:r>
+              <a:rPr lang="en-US" dirty="0"/>
+              <a:t>Missing text is not random </a:t>
+            </a:r>
+          </a:p>
+          <a:p>
+            <a:r>
+              <a:rPr lang="en-US" dirty="0"/>
+              <a:t>Missing title/review can carry signal </a:t>
+            </a:r>
+          </a:p>
+          <a:p>
+            <a:r>
+              <a:rPr lang="en-US" dirty="0"/>
+              <a:t>Review length is informative </a:t>
+            </a:r>
+          </a:p>
+          <a:p>
             <a:endParaRPr lang="en-US" dirty="0"/>
           </a:p>
           <a:p>
-            <a:endParaRPr lang="en-GB" dirty="0"/>
-          </a:p>
-          <a:p>
-            <a:endParaRPr lang="en-GB" dirty="0"/>
-          </a:p>
-          <a:p>
-            <a:endParaRPr lang="en-GB" dirty="0"/>
-          </a:p>
-          <a:p>
-            <a:r>
-              <a:rPr lang="en-US" dirty="0"/>
-              <a:t>After EDA, I built the first predictive baseline using classical NLP and Bag-of-Words.</a:t>
-            </a:r>
-            <a:br>
-              <a:rPr lang="en-US" dirty="0"/>
-            </a:br>
-            <a:r>
-              <a:rPr lang="en-US" dirty="0"/>
-              <a:t>I used light preprocessing, handled missing text explicitly, and represented the reviews with word and phrase counts using </a:t>
-            </a:r>
-            <a:r>
-              <a:rPr lang="en-US" dirty="0" err="1"/>
-              <a:t>CountVectorizer</a:t>
-            </a:r>
-            <a:r>
-              <a:rPr lang="en-US" dirty="0"/>
-              <a:t>.</a:t>
-            </a:r>
-            <a:br>
-              <a:rPr lang="en-US" dirty="0"/>
-            </a:br>
-            <a:r>
-              <a:rPr lang="en-US" dirty="0"/>
-              <a:t>I also added metadata and trained separate models for the two targets: Ridge regression for Rating and Logistic Regression for Recommended.</a:t>
-            </a:r>
+            <a:r>
+              <a:rPr lang="en-US" dirty="0"/>
+              <a:t>What to say:</a:t>
+            </a:r>
+          </a:p>
+          <a:p>
+            <a:r>
+              <a:rPr lang="en-US" dirty="0"/>
+              <a:t>Reviews with missing text had different average targets </a:t>
+            </a:r>
+          </a:p>
+          <a:p>
+            <a:r>
+              <a:rPr lang="en-US" dirty="0"/>
+              <a:t>So I kept missingness indicators instead of simply dropping them </a:t>
+            </a:r>
+          </a:p>
+          <a:p>
+            <a:endParaRPr lang="en-US" dirty="0"/>
+          </a:p>
+          <a:p>
+            <a:r>
+              <a:rPr lang="en-US" dirty="0"/>
+              <a:t>To mention:</a:t>
+            </a:r>
+          </a:p>
+          <a:p>
+            <a:r>
+              <a:rPr lang="en-US" dirty="0"/>
+              <a:t>title length </a:t>
+            </a:r>
+          </a:p>
+          <a:p>
+            <a:r>
+              <a:rPr lang="en-US" dirty="0"/>
+              <a:t>review length </a:t>
+            </a:r>
+          </a:p>
+          <a:p>
+            <a:r>
+              <a:rPr lang="en-US" dirty="0"/>
+              <a:t>text preprocessing decisions came from EDA</a:t>
+            </a:r>
+          </a:p>
+          <a:p>
             <a:endParaRPr lang="en-GB" dirty="0"/>
           </a:p>
         </p:txBody>
@@ -2891,7 +3564,7 @@
           <a:p>
             <a:fld id="{FD99EE23-E0B4-844F-8556-21E3C5FE9B7C}" type="slidenum">
               <a:rPr lang="en-GB" smtClean="0"/>
-              <a:t>7</a:t>
+              <a:t>9</a:t>
             </a:fld>
             <a:endParaRPr lang="en-GB"/>
           </a:p>
@@ -2900,7 +3573,7 @@
     </p:spTree>
     <p:extLst>
       <p:ext uri="{BB962C8B-B14F-4D97-AF65-F5344CB8AC3E}">
-        <p14:creationId xmlns:p14="http://schemas.microsoft.com/office/powerpoint/2010/main" val="2316121022"/>
+        <p14:creationId xmlns:p14="http://schemas.microsoft.com/office/powerpoint/2010/main" val="1024757444"/>
       </p:ext>
     </p:extLst>
   </p:cSld>
@@ -2956,38 +3629,137 @@
           <a:p>
             <a:r>
               <a:rPr lang="en-US" dirty="0"/>
-              <a:t>I compared several output formats because the competition uses mean </a:t>
-            </a:r>
+              <a:t>Put:</a:t>
+            </a:r>
+          </a:p>
+          <a:p>
+            <a:r>
+              <a:rPr lang="en-US" dirty="0"/>
+              <a:t>lowercasing / light cleaning </a:t>
+            </a:r>
+          </a:p>
+          <a:p>
+            <a:r>
+              <a:rPr lang="en-US" dirty="0"/>
+              <a:t>missing text filled with empty strings </a:t>
+            </a:r>
+          </a:p>
+          <a:p>
+            <a:r>
+              <a:rPr lang="en-US" dirty="0"/>
+              <a:t>missingness indicators kept </a:t>
+            </a:r>
+          </a:p>
+          <a:p>
+            <a:r>
+              <a:rPr lang="en-US" dirty="0"/>
+              <a:t>title and review combined </a:t>
+            </a:r>
+          </a:p>
+          <a:p>
+            <a:r>
+              <a:rPr lang="en-US" dirty="0"/>
+              <a:t>n-grams used </a:t>
+            </a:r>
+          </a:p>
+          <a:p>
             <a:r>
               <a:rPr lang="en-US" dirty="0" err="1"/>
-              <a:t>columnwise</a:t>
-            </a:r>
-            <a:r>
-              <a:rPr lang="en-US" dirty="0"/>
-              <a:t> Spearman correlation.</a:t>
-            </a:r>
-            <a:br>
-              <a:rPr lang="en-US" dirty="0"/>
-            </a:br>
-            <a:r>
-              <a:rPr lang="en-US" dirty="0"/>
-              <a:t>For Rating, continuous predictions worked better locally than rounded ones, because they preserve ranking information.</a:t>
-            </a:r>
-            <a:br>
-              <a:rPr lang="en-US" dirty="0"/>
-            </a:br>
-            <a:r>
-              <a:rPr lang="en-US" dirty="0"/>
-              <a:t>For Recommended, hard class labels performed better than probabilities in this baseline.</a:t>
-            </a:r>
-            <a:br>
-              <a:rPr lang="en-US" dirty="0"/>
-            </a:br>
-            <a:r>
-              <a:rPr lang="en-US" dirty="0"/>
-              <a:t>Since Kaggle requires integer ratings, the final Bag-of-Words submission used rounded Rating and hard-label Recommended.</a:t>
-            </a:r>
-            <a:endParaRPr lang="en-GB" dirty="0"/>
+              <a:t>BoW</a:t>
+            </a:r>
+            <a:r>
+              <a:rPr lang="en-US" dirty="0"/>
+              <a:t> (</a:t>
+            </a:r>
+            <a:r>
+              <a:rPr lang="en-US" sz="1200" kern="1200" dirty="0" err="1">
+                <a:solidFill>
+                  <a:schemeClr val="tx1"/>
+                </a:solidFill>
+                <a:latin typeface="+mn-lt"/>
+                <a:ea typeface="+mn-ea"/>
+                <a:cs typeface="+mn-cs"/>
+              </a:rPr>
+              <a:t>CountVectorizer</a:t>
+            </a:r>
+            <a:r>
+              <a:rPr lang="en-US" dirty="0"/>
+              <a:t>) with metadata </a:t>
+            </a:r>
+          </a:p>
+          <a:p>
+            <a:r>
+              <a:rPr lang="en-US" dirty="0"/>
+              <a:t>separate models: </a:t>
+            </a:r>
+          </a:p>
+          <a:p>
+            <a:pPr lvl="1"/>
+            <a:r>
+              <a:rPr lang="en-US" dirty="0"/>
+              <a:t>Ridge for </a:t>
+            </a:r>
+            <a:r>
+              <a:rPr lang="en-US" sz="1200" kern="1200" dirty="0">
+                <a:solidFill>
+                  <a:schemeClr val="tx1"/>
+                </a:solidFill>
+                <a:latin typeface="+mn-lt"/>
+                <a:ea typeface="+mn-ea"/>
+                <a:cs typeface="+mn-cs"/>
+              </a:rPr>
+              <a:t>Rating</a:t>
+            </a:r>
+            <a:r>
+              <a:rPr lang="en-US" dirty="0"/>
+              <a:t> </a:t>
+            </a:r>
+          </a:p>
+          <a:p>
+            <a:pPr lvl="1"/>
+            <a:r>
+              <a:rPr lang="en-US" dirty="0"/>
+              <a:t>Logistic Regression for </a:t>
+            </a:r>
+            <a:r>
+              <a:rPr lang="en-US" sz="1200" kern="1200" dirty="0">
+                <a:solidFill>
+                  <a:schemeClr val="tx1"/>
+                </a:solidFill>
+                <a:latin typeface="+mn-lt"/>
+                <a:ea typeface="+mn-ea"/>
+                <a:cs typeface="+mn-cs"/>
+              </a:rPr>
+              <a:t>Recommended</a:t>
+            </a:r>
+            <a:r>
+              <a:rPr lang="en-US" dirty="0"/>
+              <a:t> </a:t>
+            </a:r>
+          </a:p>
+          <a:p>
+            <a:r>
+              <a:rPr lang="en-US" dirty="0"/>
+              <a:t>What to say:</a:t>
+            </a:r>
+          </a:p>
+          <a:p>
+            <a:r>
+              <a:rPr lang="en-US" dirty="0"/>
+              <a:t>Classical NLP here means preprocessing and sparse text representation </a:t>
+            </a:r>
+          </a:p>
+          <a:p>
+            <a:r>
+              <a:rPr lang="en-US" dirty="0"/>
+              <a:t>I used unigrams and bigrams because short phrases like “too small” or “not flattering” were important </a:t>
+            </a:r>
+          </a:p>
+          <a:p>
+            <a:r>
+              <a:rPr lang="en-US" dirty="0"/>
+              <a:t>Separate models were used because the targets are different </a:t>
+            </a:r>
           </a:p>
         </p:txBody>
       </p:sp>
@@ -3008,7 +3780,7 @@
           <a:p>
             <a:fld id="{FD99EE23-E0B4-844F-8556-21E3C5FE9B7C}" type="slidenum">
               <a:rPr lang="en-GB" smtClean="0"/>
-              <a:t>8</a:t>
+              <a:t>10</a:t>
             </a:fld>
             <a:endParaRPr lang="en-GB"/>
           </a:p>
@@ -3017,7 +3789,7 @@
     </p:spTree>
     <p:extLst>
       <p:ext uri="{BB962C8B-B14F-4D97-AF65-F5344CB8AC3E}">
-        <p14:creationId xmlns:p14="http://schemas.microsoft.com/office/powerpoint/2010/main" val="2094001383"/>
+        <p14:creationId xmlns:p14="http://schemas.microsoft.com/office/powerpoint/2010/main" val="1206832217"/>
       </p:ext>
     </p:extLst>
   </p:cSld>
@@ -3072,22 +3844,196 @@
           <a:lstStyle/>
           <a:p>
             <a:r>
-              <a:rPr lang="en-US" dirty="0"/>
-              <a:t>The final public leaderboard score for the Bag-of-Words baseline was 0.64544.</a:t>
+              <a:rPr lang="en-US" b="1" dirty="0"/>
+              <a:t>Content:</a:t>
+            </a:r>
+            <a:endParaRPr lang="en-US" dirty="0"/>
+          </a:p>
+          <a:p>
+            <a:r>
+              <a:rPr lang="en-US" dirty="0"/>
+              <a:t>Classical NLP preprocessing: </a:t>
+            </a:r>
+          </a:p>
+          <a:p>
+            <a:pPr lvl="1"/>
+            <a:r>
+              <a:rPr lang="en-US" dirty="0"/>
+              <a:t>lowercasing </a:t>
+            </a:r>
+          </a:p>
+          <a:p>
+            <a:pPr lvl="1"/>
+            <a:r>
+              <a:rPr lang="en-US" dirty="0"/>
+              <a:t>light text cleaning </a:t>
+            </a:r>
+          </a:p>
+          <a:p>
+            <a:pPr lvl="1"/>
+            <a:r>
+              <a:rPr lang="en-US" dirty="0"/>
+              <a:t>missing text handling </a:t>
+            </a:r>
+          </a:p>
+          <a:p>
+            <a:pPr lvl="1"/>
+            <a:r>
+              <a:rPr lang="en-US" dirty="0"/>
+              <a:t>missingness indicators </a:t>
+            </a:r>
+          </a:p>
+          <a:p>
+            <a:pPr lvl="1"/>
+            <a:r>
+              <a:rPr lang="en-US" dirty="0"/>
+              <a:t>text length features </a:t>
+            </a:r>
+          </a:p>
+          <a:p>
+            <a:r>
+              <a:rPr lang="en-US" dirty="0"/>
+              <a:t>Text representation: </a:t>
+            </a:r>
+          </a:p>
+          <a:p>
+            <a:pPr lvl="1"/>
+            <a:r>
+              <a:rPr lang="en-US" sz="1200" kern="1200" dirty="0" err="1">
+                <a:solidFill>
+                  <a:schemeClr val="tx1"/>
+                </a:solidFill>
+                <a:latin typeface="+mn-lt"/>
+                <a:ea typeface="+mn-ea"/>
+                <a:cs typeface="+mn-cs"/>
+              </a:rPr>
+              <a:t>CountVectorizer</a:t>
+            </a:r>
+            <a:r>
+              <a:rPr lang="en-US" dirty="0"/>
+              <a:t> </a:t>
+            </a:r>
+          </a:p>
+          <a:p>
+            <a:pPr lvl="1"/>
+            <a:r>
+              <a:rPr lang="en-US" dirty="0"/>
+              <a:t>unigrams + bigrams </a:t>
+            </a:r>
+          </a:p>
+          <a:p>
+            <a:r>
+              <a:rPr lang="en-US" dirty="0"/>
+              <a:t>Separate models: </a:t>
+            </a:r>
+          </a:p>
+          <a:p>
+            <a:pPr lvl="1"/>
+            <a:r>
+              <a:rPr lang="en-US" sz="1200" kern="1200" dirty="0">
+                <a:solidFill>
+                  <a:schemeClr val="tx1"/>
+                </a:solidFill>
+                <a:latin typeface="+mn-lt"/>
+                <a:ea typeface="+mn-ea"/>
+                <a:cs typeface="+mn-cs"/>
+              </a:rPr>
+              <a:t>Rating</a:t>
+            </a:r>
+            <a:r>
+              <a:rPr lang="en-US" dirty="0"/>
+              <a:t> → Ridge regression </a:t>
+            </a:r>
+          </a:p>
+          <a:p>
+            <a:pPr lvl="1"/>
+            <a:r>
+              <a:rPr lang="en-US" sz="1200" kern="1200" dirty="0">
+                <a:solidFill>
+                  <a:schemeClr val="tx1"/>
+                </a:solidFill>
+                <a:latin typeface="+mn-lt"/>
+                <a:ea typeface="+mn-ea"/>
+                <a:cs typeface="+mn-cs"/>
+              </a:rPr>
+              <a:t>Recommended</a:t>
+            </a:r>
+            <a:r>
+              <a:rPr lang="en-US" dirty="0"/>
+              <a:t> → Logistic Regression </a:t>
+            </a:r>
+          </a:p>
+          <a:p>
+            <a:r>
+              <a:rPr lang="en-US" dirty="0"/>
+              <a:t>Additional metadata: </a:t>
+            </a:r>
+          </a:p>
+          <a:p>
+            <a:pPr lvl="1"/>
+            <a:r>
+              <a:rPr lang="en-US" dirty="0"/>
+              <a:t>Age </a:t>
+            </a:r>
+          </a:p>
+          <a:p>
+            <a:pPr lvl="1"/>
+            <a:r>
+              <a:rPr lang="en-US" dirty="0" err="1"/>
+              <a:t>Pos_Feedback_Cnt</a:t>
+            </a:r>
+            <a:r>
+              <a:rPr lang="en-US" dirty="0"/>
+              <a:t> </a:t>
+            </a:r>
+          </a:p>
+          <a:p>
+            <a:pPr lvl="1"/>
+            <a:r>
+              <a:rPr lang="en-US" dirty="0"/>
+              <a:t>Division / Department / </a:t>
+            </a:r>
+            <a:r>
+              <a:rPr lang="en-US" dirty="0" err="1"/>
+              <a:t>Product_Category</a:t>
+            </a:r>
+            <a:endParaRPr lang="en-US" dirty="0"/>
+          </a:p>
+          <a:p>
+            <a:endParaRPr lang="en-GB" dirty="0"/>
+          </a:p>
+          <a:p>
+            <a:endParaRPr lang="en-GB" dirty="0"/>
+          </a:p>
+          <a:p>
+            <a:endParaRPr lang="en-GB" dirty="0"/>
+          </a:p>
+          <a:p>
+            <a:r>
+              <a:rPr lang="en-US" dirty="0"/>
+              <a:t>After EDA, I built the first predictive baseline using classical NLP and Bag-of-Words.</a:t>
             </a:r>
             <a:br>
               <a:rPr lang="en-US" dirty="0"/>
             </a:br>
             <a:r>
               <a:rPr lang="en-US" dirty="0"/>
-              <a:t>This was already a strong and stable result, especially for the binary Recommended target.</a:t>
+              <a:t>I used light preprocessing, handled missing text explicitly, and represented the reviews with word and phrase counts using </a:t>
+            </a:r>
+            <a:r>
+              <a:rPr lang="en-US" dirty="0" err="1"/>
+              <a:t>CountVectorizer</a:t>
+            </a:r>
+            <a:r>
+              <a:rPr lang="en-US" dirty="0"/>
+              <a:t>.</a:t>
             </a:r>
             <a:br>
               <a:rPr lang="en-US" dirty="0"/>
             </a:br>
             <a:r>
               <a:rPr lang="en-US" dirty="0"/>
-              <a:t>But because Bag-of-Words ignores word order beyond local n-grams, I next tested a sequential neural network.</a:t>
+              <a:t>I also added metadata and trained separate models for the two targets: Ridge regression for Rating and Logistic Regression for Recommended.</a:t>
             </a:r>
             <a:endParaRPr lang="en-GB" dirty="0"/>
           </a:p>
@@ -3110,7 +4056,7 @@
           <a:p>
             <a:fld id="{FD99EE23-E0B4-844F-8556-21E3C5FE9B7C}" type="slidenum">
               <a:rPr lang="en-GB" smtClean="0"/>
-              <a:t>9</a:t>
+              <a:t>11</a:t>
             </a:fld>
             <a:endParaRPr lang="en-GB"/>
           </a:p>
@@ -3119,7 +4065,7 @@
     </p:spTree>
     <p:extLst>
       <p:ext uri="{BB962C8B-B14F-4D97-AF65-F5344CB8AC3E}">
-        <p14:creationId xmlns:p14="http://schemas.microsoft.com/office/powerpoint/2010/main" val="1112732447"/>
+        <p14:creationId xmlns:p14="http://schemas.microsoft.com/office/powerpoint/2010/main" val="2316121022"/>
       </p:ext>
     </p:extLst>
   </p:cSld>
@@ -3282,7 +4228,7 @@
           <a:p>
             <a:fld id="{C128FA71-3A18-48C0-980F-4B68F7F63042}" type="datetime1">
               <a:rPr lang="en-US" smtClean="0"/>
-              <a:t>5/10/26</a:t>
+              <a:t>5/11/26</a:t>
             </a:fld>
             <a:endParaRPr lang="en-US"/>
           </a:p>
@@ -3490,7 +4436,7 @@
           <a:p>
             <a:fld id="{7104EDB3-C0E8-45F8-9E1D-1B6C8D1880C0}" type="datetime1">
               <a:rPr lang="en-US" smtClean="0"/>
-              <a:t>5/10/26</a:t>
+              <a:t>5/11/26</a:t>
             </a:fld>
             <a:endParaRPr lang="en-US"/>
           </a:p>
@@ -3700,7 +4646,7 @@
           <a:p>
             <a:fld id="{9CF0EC4B-54ED-4041-B552-9BA760FA3DBA}" type="datetime1">
               <a:rPr lang="en-US" smtClean="0"/>
-              <a:t>5/10/26</a:t>
+              <a:t>5/11/26</a:t>
             </a:fld>
             <a:endParaRPr lang="en-US"/>
           </a:p>
@@ -3898,7 +4844,7 @@
           <a:p>
             <a:fld id="{51C1210E-201E-4473-82AC-2466F5386C38}" type="datetime1">
               <a:rPr lang="en-US" smtClean="0"/>
-              <a:t>5/10/26</a:t>
+              <a:t>5/11/26</a:t>
             </a:fld>
             <a:endParaRPr lang="en-US"/>
           </a:p>
@@ -4176,7 +5122,7 @@
           <a:p>
             <a:fld id="{B01EA198-6CAB-4B8F-B93F-1F9C8C4B6CE7}" type="datetime1">
               <a:rPr lang="en-US" smtClean="0"/>
-              <a:t>5/10/26</a:t>
+              <a:t>5/11/26</a:t>
             </a:fld>
             <a:endParaRPr lang="en-US"/>
           </a:p>
@@ -4448,7 +5394,7 @@
           <a:p>
             <a:fld id="{CA06041F-4525-44D5-AA4F-332294BF1F56}" type="datetime1">
               <a:rPr lang="en-US" smtClean="0"/>
-              <a:t>5/10/26</a:t>
+              <a:t>5/11/26</a:t>
             </a:fld>
             <a:endParaRPr lang="en-US"/>
           </a:p>
@@ -4872,7 +5818,7 @@
           <a:p>
             <a:fld id="{F9557091-BBDF-4EB9-BA6B-2BB67AC4FC0F}" type="datetime1">
               <a:rPr lang="en-US" smtClean="0"/>
-              <a:t>5/10/26</a:t>
+              <a:t>5/11/26</a:t>
             </a:fld>
             <a:endParaRPr lang="en-US"/>
           </a:p>
@@ -5013,7 +5959,7 @@
           <a:p>
             <a:fld id="{2D6B226B-77A6-410C-9796-083F278E0125}" type="datetime1">
               <a:rPr lang="en-US" smtClean="0"/>
-              <a:t>5/10/26</a:t>
+              <a:t>5/11/26</a:t>
             </a:fld>
             <a:endParaRPr lang="en-US"/>
           </a:p>
@@ -5126,7 +6072,7 @@
           <a:p>
             <a:fld id="{A23A578B-D289-4C40-8593-3D356C49DA58}" type="datetime1">
               <a:rPr lang="en-US" smtClean="0"/>
-              <a:t>5/10/26</a:t>
+              <a:t>5/11/26</a:t>
             </a:fld>
             <a:endParaRPr lang="en-US"/>
           </a:p>
@@ -5445,7 +6391,7 @@
           <a:p>
             <a:fld id="{713DFAE3-14DB-48A7-A80F-80DDB072CE3D}" type="datetime1">
               <a:rPr lang="en-US" smtClean="0"/>
-              <a:t>5/10/26</a:t>
+              <a:t>5/11/26</a:t>
             </a:fld>
             <a:endParaRPr lang="en-US"/>
           </a:p>
@@ -5739,7 +6685,7 @@
           <a:p>
             <a:fld id="{92C5EAEF-6478-4102-8F5D-A5FE9FC97ACB}" type="datetime1">
               <a:rPr lang="en-US" smtClean="0"/>
-              <a:t>5/10/26</a:t>
+              <a:t>5/11/26</a:t>
             </a:fld>
             <a:endParaRPr lang="en-US"/>
           </a:p>
@@ -5980,7 +6926,7 @@
           <a:p>
             <a:fld id="{67F45AC6-C491-4585-A584-9CE2AF7D5500}" type="datetime1">
               <a:rPr lang="en-US" smtClean="0"/>
-              <a:t>5/10/26</a:t>
+              <a:t>5/11/26</a:t>
             </a:fld>
             <a:endParaRPr lang="en-US"/>
           </a:p>
@@ -6813,6 +7759,423 @@
           <p:cNvPr id="2" name="Title 1">
             <a:extLst>
               <a:ext uri="{FF2B5EF4-FFF2-40B4-BE49-F238E27FC236}">
+                <a16:creationId xmlns:a16="http://schemas.microsoft.com/office/drawing/2014/main" id="{36D82B7E-BBC2-5875-5EA5-0BF2CF639FCC}"/>
+              </a:ext>
+            </a:extLst>
+          </p:cNvPr>
+          <p:cNvSpPr>
+            <a:spLocks noGrp="1"/>
+          </p:cNvSpPr>
+          <p:nvPr>
+            <p:ph type="title"/>
+          </p:nvPr>
+        </p:nvSpPr>
+        <p:spPr/>
+        <p:txBody>
+          <a:bodyPr/>
+          <a:lstStyle/>
+          <a:p>
+            <a:r>
+              <a:rPr lang="en-US" dirty="0"/>
+              <a:t>Classical NLP preprocessing and Bag-of-Words baseline</a:t>
+            </a:r>
+            <a:endParaRPr lang="en-GB" dirty="0"/>
+          </a:p>
+        </p:txBody>
+      </p:sp>
+      <p:sp>
+        <p:nvSpPr>
+          <p:cNvPr id="3" name="Content Placeholder 2">
+            <a:extLst>
+              <a:ext uri="{FF2B5EF4-FFF2-40B4-BE49-F238E27FC236}">
+                <a16:creationId xmlns:a16="http://schemas.microsoft.com/office/drawing/2014/main" id="{F3CD81DA-B2E6-4423-4299-3D3B83DF0CB7}"/>
+              </a:ext>
+            </a:extLst>
+          </p:cNvPr>
+          <p:cNvSpPr>
+            <a:spLocks noGrp="1"/>
+          </p:cNvSpPr>
+          <p:nvPr>
+            <p:ph idx="1"/>
+          </p:nvPr>
+        </p:nvSpPr>
+        <p:spPr/>
+        <p:txBody>
+          <a:bodyPr/>
+          <a:lstStyle/>
+          <a:p>
+            <a:endParaRPr lang="en-GB"/>
+          </a:p>
+        </p:txBody>
+      </p:sp>
+    </p:spTree>
+    <p:extLst>
+      <p:ext uri="{BB962C8B-B14F-4D97-AF65-F5344CB8AC3E}">
+        <p14:creationId xmlns:p14="http://schemas.microsoft.com/office/powerpoint/2010/main" val="821462737"/>
+      </p:ext>
+    </p:extLst>
+  </p:cSld>
+  <p:clrMapOvr>
+    <a:masterClrMapping/>
+  </p:clrMapOvr>
+</p:sld>
+</file>
+
+<file path=ppt/slides/slide11.xml><?xml version="1.0" encoding="utf-8"?>
+<p:sld xmlns:a="http://schemas.openxmlformats.org/drawingml/2006/main" xmlns:r="http://schemas.openxmlformats.org/officeDocument/2006/relationships" xmlns:p="http://schemas.openxmlformats.org/presentationml/2006/main">
+  <p:cSld>
+    <p:spTree>
+      <p:nvGrpSpPr>
+        <p:cNvPr id="1" name=""/>
+        <p:cNvGrpSpPr/>
+        <p:nvPr/>
+      </p:nvGrpSpPr>
+      <p:grpSpPr>
+        <a:xfrm>
+          <a:off x="0" y="0"/>
+          <a:ext cx="0" cy="0"/>
+          <a:chOff x="0" y="0"/>
+          <a:chExt cx="0" cy="0"/>
+        </a:xfrm>
+      </p:grpSpPr>
+      <p:sp>
+        <p:nvSpPr>
+          <p:cNvPr id="2" name="Title 1">
+            <a:extLst>
+              <a:ext uri="{FF2B5EF4-FFF2-40B4-BE49-F238E27FC236}">
+                <a16:creationId xmlns:a16="http://schemas.microsoft.com/office/drawing/2014/main" id="{DE20B5F8-2515-3E9D-C526-582E0E49E2D3}"/>
+              </a:ext>
+            </a:extLst>
+          </p:cNvPr>
+          <p:cNvSpPr>
+            <a:spLocks noGrp="1"/>
+          </p:cNvSpPr>
+          <p:nvPr>
+            <p:ph type="title"/>
+          </p:nvPr>
+        </p:nvSpPr>
+        <p:spPr/>
+        <p:txBody>
+          <a:bodyPr/>
+          <a:lstStyle/>
+          <a:p>
+            <a:r>
+              <a:rPr lang="en-US" dirty="0"/>
+              <a:t>Bag-of-Words model: setup</a:t>
+            </a:r>
+            <a:endParaRPr lang="en-GB" dirty="0"/>
+          </a:p>
+        </p:txBody>
+      </p:sp>
+      <p:sp>
+        <p:nvSpPr>
+          <p:cNvPr id="3" name="Content Placeholder 2">
+            <a:extLst>
+              <a:ext uri="{FF2B5EF4-FFF2-40B4-BE49-F238E27FC236}">
+                <a16:creationId xmlns:a16="http://schemas.microsoft.com/office/drawing/2014/main" id="{38055292-3631-1D8D-D764-F6A0AC20CD49}"/>
+              </a:ext>
+            </a:extLst>
+          </p:cNvPr>
+          <p:cNvSpPr>
+            <a:spLocks noGrp="1"/>
+          </p:cNvSpPr>
+          <p:nvPr>
+            <p:ph idx="1"/>
+          </p:nvPr>
+        </p:nvSpPr>
+        <p:spPr/>
+        <p:txBody>
+          <a:bodyPr/>
+          <a:lstStyle/>
+          <a:p>
+            <a:endParaRPr lang="en-GB"/>
+          </a:p>
+        </p:txBody>
+      </p:sp>
+    </p:spTree>
+    <p:extLst>
+      <p:ext uri="{BB962C8B-B14F-4D97-AF65-F5344CB8AC3E}">
+        <p14:creationId xmlns:p14="http://schemas.microsoft.com/office/powerpoint/2010/main" val="1385345628"/>
+      </p:ext>
+    </p:extLst>
+  </p:cSld>
+  <p:clrMapOvr>
+    <a:masterClrMapping/>
+  </p:clrMapOvr>
+</p:sld>
+</file>
+
+<file path=ppt/slides/slide12.xml><?xml version="1.0" encoding="utf-8"?>
+<p:sld xmlns:a="http://schemas.openxmlformats.org/drawingml/2006/main" xmlns:r="http://schemas.openxmlformats.org/officeDocument/2006/relationships" xmlns:p="http://schemas.openxmlformats.org/presentationml/2006/main">
+  <p:cSld>
+    <p:spTree>
+      <p:nvGrpSpPr>
+        <p:cNvPr id="1" name=""/>
+        <p:cNvGrpSpPr/>
+        <p:nvPr/>
+      </p:nvGrpSpPr>
+      <p:grpSpPr>
+        <a:xfrm>
+          <a:off x="0" y="0"/>
+          <a:ext cx="0" cy="0"/>
+          <a:chOff x="0" y="0"/>
+          <a:chExt cx="0" cy="0"/>
+        </a:xfrm>
+      </p:grpSpPr>
+      <p:sp>
+        <p:nvSpPr>
+          <p:cNvPr id="2" name="Title 1">
+            <a:extLst>
+              <a:ext uri="{FF2B5EF4-FFF2-40B4-BE49-F238E27FC236}">
+                <a16:creationId xmlns:a16="http://schemas.microsoft.com/office/drawing/2014/main" id="{3BD27498-2256-293C-558F-6C142F0CB041}"/>
+              </a:ext>
+            </a:extLst>
+          </p:cNvPr>
+          <p:cNvSpPr>
+            <a:spLocks noGrp="1"/>
+          </p:cNvSpPr>
+          <p:nvPr>
+            <p:ph type="title"/>
+          </p:nvPr>
+        </p:nvSpPr>
+        <p:spPr/>
+        <p:txBody>
+          <a:bodyPr/>
+          <a:lstStyle/>
+          <a:p>
+            <a:r>
+              <a:rPr lang="en-US" dirty="0"/>
+              <a:t>Bag-of-Words validation results</a:t>
+            </a:r>
+            <a:endParaRPr lang="en-GB" dirty="0"/>
+          </a:p>
+        </p:txBody>
+      </p:sp>
+      <p:pic>
+        <p:nvPicPr>
+          <p:cNvPr id="5" name="Content Placeholder 4">
+            <a:extLst>
+              <a:ext uri="{FF2B5EF4-FFF2-40B4-BE49-F238E27FC236}">
+                <a16:creationId xmlns:a16="http://schemas.microsoft.com/office/drawing/2014/main" id="{821DAB98-F997-E9BB-47B6-4847DBAE5B3A}"/>
+              </a:ext>
+            </a:extLst>
+          </p:cNvPr>
+          <p:cNvPicPr>
+            <a:picLocks noGrp="1" noChangeAspect="1"/>
+          </p:cNvPicPr>
+          <p:nvPr>
+            <p:ph idx="1"/>
+          </p:nvPr>
+        </p:nvPicPr>
+        <p:blipFill>
+          <a:blip r:embed="rId3"/>
+          <a:stretch>
+            <a:fillRect/>
+          </a:stretch>
+        </p:blipFill>
+        <p:spPr>
+          <a:xfrm>
+            <a:off x="827881" y="3186906"/>
+            <a:ext cx="10223500" cy="1651000"/>
+          </a:xfrm>
+          <a:prstGeom prst="rect">
+            <a:avLst/>
+          </a:prstGeom>
+        </p:spPr>
+      </p:pic>
+    </p:spTree>
+    <p:extLst>
+      <p:ext uri="{BB962C8B-B14F-4D97-AF65-F5344CB8AC3E}">
+        <p14:creationId xmlns:p14="http://schemas.microsoft.com/office/powerpoint/2010/main" val="2907997910"/>
+      </p:ext>
+    </p:extLst>
+  </p:cSld>
+  <p:clrMapOvr>
+    <a:masterClrMapping/>
+  </p:clrMapOvr>
+</p:sld>
+</file>
+
+<file path=ppt/slides/slide13.xml><?xml version="1.0" encoding="utf-8"?>
+<p:sld xmlns:a="http://schemas.openxmlformats.org/drawingml/2006/main" xmlns:r="http://schemas.openxmlformats.org/officeDocument/2006/relationships" xmlns:p="http://schemas.openxmlformats.org/presentationml/2006/main">
+  <p:cSld>
+    <p:spTree>
+      <p:nvGrpSpPr>
+        <p:cNvPr id="1" name=""/>
+        <p:cNvGrpSpPr/>
+        <p:nvPr/>
+      </p:nvGrpSpPr>
+      <p:grpSpPr>
+        <a:xfrm>
+          <a:off x="0" y="0"/>
+          <a:ext cx="0" cy="0"/>
+          <a:chOff x="0" y="0"/>
+          <a:chExt cx="0" cy="0"/>
+        </a:xfrm>
+      </p:grpSpPr>
+      <p:sp>
+        <p:nvSpPr>
+          <p:cNvPr id="2" name="Title 1">
+            <a:extLst>
+              <a:ext uri="{FF2B5EF4-FFF2-40B4-BE49-F238E27FC236}">
+                <a16:creationId xmlns:a16="http://schemas.microsoft.com/office/drawing/2014/main" id="{0BB9D11C-6ACF-CBC3-0417-F705C8F5C77B}"/>
+              </a:ext>
+            </a:extLst>
+          </p:cNvPr>
+          <p:cNvSpPr>
+            <a:spLocks noGrp="1"/>
+          </p:cNvSpPr>
+          <p:nvPr>
+            <p:ph type="title"/>
+          </p:nvPr>
+        </p:nvSpPr>
+        <p:spPr/>
+        <p:txBody>
+          <a:bodyPr/>
+          <a:lstStyle/>
+          <a:p>
+            <a:r>
+              <a:rPr lang="en-US" dirty="0"/>
+              <a:t>Bag-of-Words interpretation</a:t>
+            </a:r>
+            <a:br>
+              <a:rPr lang="en-US" dirty="0"/>
+            </a:br>
+            <a:r>
+              <a:rPr lang="en-US" sz="2800" b="0" dirty="0"/>
+              <a:t>What the Bag-of-Words model learned</a:t>
+            </a:r>
+            <a:endParaRPr lang="en-GB" b="0" dirty="0"/>
+          </a:p>
+        </p:txBody>
+      </p:sp>
+      <p:pic>
+        <p:nvPicPr>
+          <p:cNvPr id="8" name="Picture 7">
+            <a:extLst>
+              <a:ext uri="{FF2B5EF4-FFF2-40B4-BE49-F238E27FC236}">
+                <a16:creationId xmlns:a16="http://schemas.microsoft.com/office/drawing/2014/main" id="{E9CE05DB-2D98-4F6F-27E9-10669BE812A0}"/>
+              </a:ext>
+            </a:extLst>
+          </p:cNvPr>
+          <p:cNvPicPr>
+            <a:picLocks noChangeAspect="1"/>
+          </p:cNvPicPr>
+          <p:nvPr/>
+        </p:nvPicPr>
+        <p:blipFill>
+          <a:blip r:embed="rId3"/>
+          <a:stretch>
+            <a:fillRect/>
+          </a:stretch>
+        </p:blipFill>
+        <p:spPr>
+          <a:xfrm>
+            <a:off x="7312535" y="548640"/>
+            <a:ext cx="4699141" cy="2773098"/>
+          </a:xfrm>
+          <a:prstGeom prst="rect">
+            <a:avLst/>
+          </a:prstGeom>
+        </p:spPr>
+      </p:pic>
+      <p:pic>
+        <p:nvPicPr>
+          <p:cNvPr id="13" name="Content Placeholder 12">
+            <a:extLst>
+              <a:ext uri="{FF2B5EF4-FFF2-40B4-BE49-F238E27FC236}">
+                <a16:creationId xmlns:a16="http://schemas.microsoft.com/office/drawing/2014/main" id="{04994208-7F69-547F-704D-3CAB6FA5A951}"/>
+              </a:ext>
+            </a:extLst>
+          </p:cNvPr>
+          <p:cNvPicPr>
+            <a:picLocks noGrp="1" noChangeAspect="1"/>
+          </p:cNvPicPr>
+          <p:nvPr>
+            <p:ph idx="1"/>
+          </p:nvPr>
+        </p:nvPicPr>
+        <p:blipFill>
+          <a:blip r:embed="rId4"/>
+          <a:stretch>
+            <a:fillRect/>
+          </a:stretch>
+        </p:blipFill>
+        <p:spPr>
+          <a:xfrm>
+            <a:off x="6684625" y="6049995"/>
+            <a:ext cx="5327051" cy="463458"/>
+          </a:xfrm>
+          <a:prstGeom prst="rect">
+            <a:avLst/>
+          </a:prstGeom>
+        </p:spPr>
+      </p:pic>
+      <p:pic>
+        <p:nvPicPr>
+          <p:cNvPr id="11" name="Picture 10">
+            <a:extLst>
+              <a:ext uri="{FF2B5EF4-FFF2-40B4-BE49-F238E27FC236}">
+                <a16:creationId xmlns:a16="http://schemas.microsoft.com/office/drawing/2014/main" id="{00A5E117-6774-5F2B-58C2-23CA83186E64}"/>
+              </a:ext>
+            </a:extLst>
+          </p:cNvPr>
+          <p:cNvPicPr>
+            <a:picLocks noChangeAspect="1"/>
+          </p:cNvPicPr>
+          <p:nvPr/>
+        </p:nvPicPr>
+        <p:blipFill>
+          <a:blip r:embed="rId5"/>
+          <a:stretch>
+            <a:fillRect/>
+          </a:stretch>
+        </p:blipFill>
+        <p:spPr>
+          <a:xfrm>
+            <a:off x="1789896" y="2029779"/>
+            <a:ext cx="4894729" cy="2798442"/>
+          </a:xfrm>
+          <a:prstGeom prst="rect">
+            <a:avLst/>
+          </a:prstGeom>
+        </p:spPr>
+      </p:pic>
+    </p:spTree>
+    <p:extLst>
+      <p:ext uri="{BB962C8B-B14F-4D97-AF65-F5344CB8AC3E}">
+        <p14:creationId xmlns:p14="http://schemas.microsoft.com/office/powerpoint/2010/main" val="1376153329"/>
+      </p:ext>
+    </p:extLst>
+  </p:cSld>
+  <p:clrMapOvr>
+    <a:masterClrMapping/>
+  </p:clrMapOvr>
+</p:sld>
+</file>
+
+<file path=ppt/slides/slide14.xml><?xml version="1.0" encoding="utf-8"?>
+<p:sld xmlns:a="http://schemas.openxmlformats.org/drawingml/2006/main" xmlns:r="http://schemas.openxmlformats.org/officeDocument/2006/relationships" xmlns:p="http://schemas.openxmlformats.org/presentationml/2006/main">
+  <p:cSld>
+    <p:spTree>
+      <p:nvGrpSpPr>
+        <p:cNvPr id="1" name=""/>
+        <p:cNvGrpSpPr/>
+        <p:nvPr/>
+      </p:nvGrpSpPr>
+      <p:grpSpPr>
+        <a:xfrm>
+          <a:off x="0" y="0"/>
+          <a:ext cx="0" cy="0"/>
+          <a:chOff x="0" y="0"/>
+          <a:chExt cx="0" cy="0"/>
+        </a:xfrm>
+      </p:grpSpPr>
+      <p:sp>
+        <p:nvSpPr>
+          <p:cNvPr id="2" name="Title 1">
+            <a:extLst>
+              <a:ext uri="{FF2B5EF4-FFF2-40B4-BE49-F238E27FC236}">
                 <a16:creationId xmlns:a16="http://schemas.microsoft.com/office/drawing/2014/main" id="{4D1DC7BB-B241-2AED-5DCC-33B7F56CE548}"/>
               </a:ext>
             </a:extLst>
@@ -7248,7 +8611,7 @@
 </p:sld>
 </file>
 
-<file path=ppt/slides/slide11.xml><?xml version="1.0" encoding="utf-8"?>
+<file path=ppt/slides/slide15.xml><?xml version="1.0" encoding="utf-8"?>
 <p:sld xmlns:a="http://schemas.openxmlformats.org/drawingml/2006/main" xmlns:r="http://schemas.openxmlformats.org/officeDocument/2006/relationships" xmlns:p="http://schemas.openxmlformats.org/presentationml/2006/main">
   <p:cSld>
     <p:spTree>
@@ -7353,7 +8716,7 @@
 </p:sld>
 </file>
 
-<file path=ppt/slides/slide12.xml><?xml version="1.0" encoding="utf-8"?>
+<file path=ppt/slides/slide16.xml><?xml version="1.0" encoding="utf-8"?>
 <p:sld xmlns:a="http://schemas.openxmlformats.org/drawingml/2006/main" xmlns:r="http://schemas.openxmlformats.org/officeDocument/2006/relationships" xmlns:p="http://schemas.openxmlformats.org/presentationml/2006/main">
   <p:cSld>
     <p:spTree>
@@ -7908,7 +9271,7 @@
 </p:sld>
 </file>
 
-<file path=ppt/slides/slide13.xml><?xml version="1.0" encoding="utf-8"?>
+<file path=ppt/slides/slide17.xml><?xml version="1.0" encoding="utf-8"?>
 <p:sld xmlns:a="http://schemas.openxmlformats.org/drawingml/2006/main" xmlns:r="http://schemas.openxmlformats.org/officeDocument/2006/relationships" xmlns:p="http://schemas.openxmlformats.org/presentationml/2006/main">
   <p:cSld>
     <p:spTree>
@@ -8070,7 +9433,7 @@
 </p:sld>
 </file>
 
-<file path=ppt/slides/slide14.xml><?xml version="1.0" encoding="utf-8"?>
+<file path=ppt/slides/slide18.xml><?xml version="1.0" encoding="utf-8"?>
 <p:sld xmlns:a="http://schemas.openxmlformats.org/drawingml/2006/main" xmlns:r="http://schemas.openxmlformats.org/officeDocument/2006/relationships" xmlns:p="http://schemas.openxmlformats.org/presentationml/2006/main">
   <p:cSld>
     <p:spTree>
@@ -8109,7 +9472,7 @@
           <a:lstStyle/>
           <a:p>
             <a:r>
-              <a:rPr lang="en-GB"/>
+              <a:rPr lang="en-GB" dirty="0"/>
               <a:t>Final conclusion</a:t>
             </a:r>
           </a:p>
@@ -8144,6 +9507,90 @@
     <p:extLst>
       <p:ext uri="{BB962C8B-B14F-4D97-AF65-F5344CB8AC3E}">
         <p14:creationId xmlns:p14="http://schemas.microsoft.com/office/powerpoint/2010/main" val="1135264755"/>
+      </p:ext>
+    </p:extLst>
+  </p:cSld>
+  <p:clrMapOvr>
+    <a:masterClrMapping/>
+  </p:clrMapOvr>
+</p:sld>
+</file>
+
+<file path=ppt/slides/slide19.xml><?xml version="1.0" encoding="utf-8"?>
+<p:sld xmlns:a="http://schemas.openxmlformats.org/drawingml/2006/main" xmlns:r="http://schemas.openxmlformats.org/officeDocument/2006/relationships" xmlns:p="http://schemas.openxmlformats.org/presentationml/2006/main">
+  <p:cSld>
+    <p:spTree>
+      <p:nvGrpSpPr>
+        <p:cNvPr id="1" name=""/>
+        <p:cNvGrpSpPr/>
+        <p:nvPr/>
+      </p:nvGrpSpPr>
+      <p:grpSpPr>
+        <a:xfrm>
+          <a:off x="0" y="0"/>
+          <a:ext cx="0" cy="0"/>
+          <a:chOff x="0" y="0"/>
+          <a:chExt cx="0" cy="0"/>
+        </a:xfrm>
+      </p:grpSpPr>
+      <p:sp>
+        <p:nvSpPr>
+          <p:cNvPr id="2" name="Title 1">
+            <a:extLst>
+              <a:ext uri="{FF2B5EF4-FFF2-40B4-BE49-F238E27FC236}">
+                <a16:creationId xmlns:a16="http://schemas.microsoft.com/office/drawing/2014/main" id="{3000005A-3E22-DBA9-0814-09DF319DD172}"/>
+              </a:ext>
+            </a:extLst>
+          </p:cNvPr>
+          <p:cNvSpPr>
+            <a:spLocks noGrp="1"/>
+          </p:cNvSpPr>
+          <p:nvPr>
+            <p:ph type="title"/>
+          </p:nvPr>
+        </p:nvSpPr>
+        <p:spPr/>
+        <p:txBody>
+          <a:bodyPr/>
+          <a:lstStyle/>
+          <a:p>
+            <a:r>
+              <a:rPr lang="en-US" dirty="0"/>
+              <a:t>What could be improved further?</a:t>
+            </a:r>
+            <a:endParaRPr lang="en-GB" dirty="0"/>
+          </a:p>
+        </p:txBody>
+      </p:sp>
+      <p:sp>
+        <p:nvSpPr>
+          <p:cNvPr id="3" name="Content Placeholder 2">
+            <a:extLst>
+              <a:ext uri="{FF2B5EF4-FFF2-40B4-BE49-F238E27FC236}">
+                <a16:creationId xmlns:a16="http://schemas.microsoft.com/office/drawing/2014/main" id="{C44687CF-338D-FEFF-E0F9-087BBCECDD62}"/>
+              </a:ext>
+            </a:extLst>
+          </p:cNvPr>
+          <p:cNvSpPr>
+            <a:spLocks noGrp="1"/>
+          </p:cNvSpPr>
+          <p:nvPr>
+            <p:ph idx="1"/>
+          </p:nvPr>
+        </p:nvSpPr>
+        <p:spPr/>
+        <p:txBody>
+          <a:bodyPr/>
+          <a:lstStyle/>
+          <a:p>
+            <a:endParaRPr lang="en-GB"/>
+          </a:p>
+        </p:txBody>
+      </p:sp>
+    </p:spTree>
+    <p:extLst>
+      <p:ext uri="{BB962C8B-B14F-4D97-AF65-F5344CB8AC3E}">
+        <p14:creationId xmlns:p14="http://schemas.microsoft.com/office/powerpoint/2010/main" val="3531082633"/>
       </p:ext>
     </p:extLst>
   </p:cSld>
@@ -8175,7 +9622,7 @@
           <p:cNvPr id="2" name="Title 1">
             <a:extLst>
               <a:ext uri="{FF2B5EF4-FFF2-40B4-BE49-F238E27FC236}">
-                <a16:creationId xmlns:a16="http://schemas.microsoft.com/office/drawing/2014/main" id="{96506D34-69E6-59A8-BD5F-46CCF18FD4F4}"/>
+                <a16:creationId xmlns:a16="http://schemas.microsoft.com/office/drawing/2014/main" id="{EC1D7D7A-775F-35B4-26DB-5E216C4D9FFE}"/>
               </a:ext>
             </a:extLst>
           </p:cNvPr>
@@ -8192,42 +9639,489 @@
           <a:lstStyle/>
           <a:p>
             <a:r>
-              <a:rPr lang="en-US" dirty="0"/>
-              <a:t>Problem and evaluation metric</a:t>
-            </a:r>
+              <a:rPr lang="en-GB" dirty="0"/>
+              <a:t>All instruments that were used</a:t>
+            </a:r>
+          </a:p>
+        </p:txBody>
+      </p:sp>
+      <p:sp>
+        <p:nvSpPr>
+          <p:cNvPr id="3" name="Content Placeholder 2">
+            <a:extLst>
+              <a:ext uri="{FF2B5EF4-FFF2-40B4-BE49-F238E27FC236}">
+                <a16:creationId xmlns:a16="http://schemas.microsoft.com/office/drawing/2014/main" id="{BA583CC9-829A-8D81-1EB3-1FC872B802EC}"/>
+              </a:ext>
+            </a:extLst>
+          </p:cNvPr>
+          <p:cNvSpPr>
+            <a:spLocks noGrp="1"/>
+          </p:cNvSpPr>
+          <p:nvPr>
+            <p:ph idx="1"/>
+          </p:nvPr>
+        </p:nvSpPr>
+        <p:spPr/>
+        <p:txBody>
+          <a:bodyPr/>
+          <a:lstStyle/>
+          <a:p>
+            <a:pPr marL="0" indent="0">
+              <a:buNone/>
+            </a:pPr>
+            <a:r>
+              <a:rPr lang="en-US" b="1" dirty="0"/>
+              <a:t>Technologies and tools used:</a:t>
+            </a:r>
+            <a:endParaRPr lang="en-US" dirty="0"/>
+          </a:p>
+          <a:p>
+            <a:r>
+              <a:rPr lang="en-US" dirty="0"/>
+              <a:t>Python </a:t>
+            </a:r>
+          </a:p>
+          <a:p>
+            <a:r>
+              <a:rPr lang="en-US" dirty="0" err="1"/>
+              <a:t>Jupyter</a:t>
+            </a:r>
+            <a:r>
+              <a:rPr lang="en-US" dirty="0"/>
+              <a:t> Notebook / VS Code / Google </a:t>
+            </a:r>
+            <a:r>
+              <a:rPr lang="en-US" dirty="0" err="1"/>
+              <a:t>Colab</a:t>
+            </a:r>
+            <a:r>
+              <a:rPr lang="en-US" dirty="0"/>
+              <a:t> </a:t>
+            </a:r>
+          </a:p>
+          <a:p>
+            <a:r>
+              <a:rPr lang="en-US" dirty="0"/>
+              <a:t>pandas, NumPy, SciPy </a:t>
+            </a:r>
+          </a:p>
+          <a:p>
+            <a:r>
+              <a:rPr lang="en-US" dirty="0"/>
+              <a:t>Matplotlib, Seaborn </a:t>
+            </a:r>
+          </a:p>
+          <a:p>
+            <a:r>
+              <a:rPr lang="en-US" dirty="0"/>
+              <a:t>scikit-learn </a:t>
+            </a:r>
+          </a:p>
+          <a:p>
+            <a:r>
+              <a:rPr lang="en-US" dirty="0"/>
+              <a:t>TensorFlow / </a:t>
+            </a:r>
+            <a:r>
+              <a:rPr lang="en-US" dirty="0" err="1"/>
+              <a:t>Keras</a:t>
+            </a:r>
+            <a:r>
+              <a:rPr lang="en-US" dirty="0"/>
+              <a:t> </a:t>
+            </a:r>
+          </a:p>
+          <a:p>
+            <a:r>
+              <a:rPr lang="en-US" dirty="0"/>
+              <a:t>Kaggle </a:t>
+            </a:r>
+          </a:p>
+          <a:p>
             <a:endParaRPr lang="en-GB" dirty="0"/>
           </a:p>
         </p:txBody>
       </p:sp>
-      <p:sp>
-        <p:nvSpPr>
-          <p:cNvPr id="3" name="Content Placeholder 2">
-            <a:extLst>
-              <a:ext uri="{FF2B5EF4-FFF2-40B4-BE49-F238E27FC236}">
-                <a16:creationId xmlns:a16="http://schemas.microsoft.com/office/drawing/2014/main" id="{81292AE3-6DDF-DE99-9D20-CCFA287EAC22}"/>
-              </a:ext>
-            </a:extLst>
-          </p:cNvPr>
-          <p:cNvSpPr>
-            <a:spLocks noGrp="1"/>
-          </p:cNvSpPr>
-          <p:nvPr>
-            <p:ph idx="1"/>
-          </p:nvPr>
-        </p:nvSpPr>
-        <p:spPr/>
-        <p:txBody>
-          <a:bodyPr/>
-          <a:lstStyle/>
-          <a:p>
-            <a:endParaRPr lang="en-GB"/>
-          </a:p>
-        </p:txBody>
-      </p:sp>
+      <p:pic>
+        <p:nvPicPr>
+          <p:cNvPr id="4098" name="Picture 2" descr="Python Tool Review: Using PyCharm for ...">
+            <a:extLst>
+              <a:ext uri="{FF2B5EF4-FFF2-40B4-BE49-F238E27FC236}">
+                <a16:creationId xmlns:a16="http://schemas.microsoft.com/office/drawing/2014/main" id="{BDF7BB4E-6C7F-5EDC-FAA8-8A5FC4654485}"/>
+              </a:ext>
+            </a:extLst>
+          </p:cNvPr>
+          <p:cNvPicPr>
+            <a:picLocks noChangeAspect="1" noChangeArrowheads="1"/>
+          </p:cNvPicPr>
+          <p:nvPr/>
+        </p:nvPicPr>
+        <p:blipFill>
+          <a:blip r:embed="rId3">
+            <a:extLst>
+              <a:ext uri="{28A0092B-C50C-407E-A947-70E740481C1C}">
+                <a14:useLocalDpi xmlns:a14="http://schemas.microsoft.com/office/drawing/2010/main" val="0"/>
+              </a:ext>
+            </a:extLst>
+          </a:blip>
+          <a:srcRect/>
+          <a:stretch>
+            <a:fillRect/>
+          </a:stretch>
+        </p:blipFill>
+        <p:spPr bwMode="auto">
+          <a:xfrm>
+            <a:off x="10964209" y="1529903"/>
+            <a:ext cx="937144" cy="937144"/>
+          </a:xfrm>
+          <a:prstGeom prst="rect">
+            <a:avLst/>
+          </a:prstGeom>
+          <a:noFill/>
+          <a:extLst>
+            <a:ext uri="{909E8E84-426E-40DD-AFC4-6F175D3DCCD1}">
+              <a14:hiddenFill xmlns:a14="http://schemas.microsoft.com/office/drawing/2010/main">
+                <a:solidFill>
+                  <a:srgbClr val="FFFFFF"/>
+                </a:solidFill>
+              </a14:hiddenFill>
+            </a:ext>
+          </a:extLst>
+        </p:spPr>
+      </p:pic>
+      <p:pic>
+        <p:nvPicPr>
+          <p:cNvPr id="4104" name="Picture 8" descr="Claude - Review 2026 - PCMag UK">
+            <a:extLst>
+              <a:ext uri="{FF2B5EF4-FFF2-40B4-BE49-F238E27FC236}">
+                <a16:creationId xmlns:a16="http://schemas.microsoft.com/office/drawing/2014/main" id="{EC1713DD-F479-7677-9B4D-90DCAF7ACDE2}"/>
+              </a:ext>
+            </a:extLst>
+          </p:cNvPr>
+          <p:cNvPicPr>
+            <a:picLocks noChangeAspect="1" noChangeArrowheads="1"/>
+          </p:cNvPicPr>
+          <p:nvPr/>
+        </p:nvPicPr>
+        <p:blipFill>
+          <a:blip r:embed="rId4">
+            <a:extLst>
+              <a:ext uri="{28A0092B-C50C-407E-A947-70E740481C1C}">
+                <a14:useLocalDpi xmlns:a14="http://schemas.microsoft.com/office/drawing/2010/main" val="0"/>
+              </a:ext>
+            </a:extLst>
+          </a:blip>
+          <a:srcRect/>
+          <a:stretch>
+            <a:fillRect/>
+          </a:stretch>
+        </p:blipFill>
+        <p:spPr bwMode="auto">
+          <a:xfrm>
+            <a:off x="8736656" y="2605725"/>
+            <a:ext cx="3067400" cy="1717744"/>
+          </a:xfrm>
+          <a:prstGeom prst="rect">
+            <a:avLst/>
+          </a:prstGeom>
+          <a:noFill/>
+          <a:extLst>
+            <a:ext uri="{909E8E84-426E-40DD-AFC4-6F175D3DCCD1}">
+              <a14:hiddenFill xmlns:a14="http://schemas.microsoft.com/office/drawing/2010/main">
+                <a:solidFill>
+                  <a:srgbClr val="FFFFFF"/>
+                </a:solidFill>
+              </a14:hiddenFill>
+            </a:ext>
+          </a:extLst>
+        </p:spPr>
+      </p:pic>
+      <p:pic>
+        <p:nvPicPr>
+          <p:cNvPr id="4102" name="Picture 6" descr="ChatGPT Edu - Centre for Teaching ...">
+            <a:extLst>
+              <a:ext uri="{FF2B5EF4-FFF2-40B4-BE49-F238E27FC236}">
+                <a16:creationId xmlns:a16="http://schemas.microsoft.com/office/drawing/2014/main" id="{36A3A5B5-4928-041A-6EB0-398404CAC41B}"/>
+              </a:ext>
+            </a:extLst>
+          </p:cNvPr>
+          <p:cNvPicPr>
+            <a:picLocks noChangeAspect="1" noChangeArrowheads="1"/>
+          </p:cNvPicPr>
+          <p:nvPr/>
+        </p:nvPicPr>
+        <p:blipFill>
+          <a:blip r:embed="rId5">
+            <a:extLst>
+              <a:ext uri="{28A0092B-C50C-407E-A947-70E740481C1C}">
+                <a14:useLocalDpi xmlns:a14="http://schemas.microsoft.com/office/drawing/2010/main" val="0"/>
+              </a:ext>
+            </a:extLst>
+          </a:blip>
+          <a:srcRect/>
+          <a:stretch>
+            <a:fillRect/>
+          </a:stretch>
+        </p:blipFill>
+        <p:spPr bwMode="auto">
+          <a:xfrm>
+            <a:off x="9543779" y="1983540"/>
+            <a:ext cx="925292" cy="925292"/>
+          </a:xfrm>
+          <a:prstGeom prst="rect">
+            <a:avLst/>
+          </a:prstGeom>
+          <a:noFill/>
+          <a:extLst>
+            <a:ext uri="{909E8E84-426E-40DD-AFC4-6F175D3DCCD1}">
+              <a14:hiddenFill xmlns:a14="http://schemas.microsoft.com/office/drawing/2010/main">
+                <a:solidFill>
+                  <a:srgbClr val="FFFFFF"/>
+                </a:solidFill>
+              </a14:hiddenFill>
+            </a:ext>
+          </a:extLst>
+        </p:spPr>
+      </p:pic>
+      <p:pic>
+        <p:nvPicPr>
+          <p:cNvPr id="4106" name="Picture 10">
+            <a:extLst>
+              <a:ext uri="{FF2B5EF4-FFF2-40B4-BE49-F238E27FC236}">
+                <a16:creationId xmlns:a16="http://schemas.microsoft.com/office/drawing/2014/main" id="{C0E87B0E-39B7-A1C2-9F2A-FF0276E615D1}"/>
+              </a:ext>
+            </a:extLst>
+          </p:cNvPr>
+          <p:cNvPicPr>
+            <a:picLocks noChangeAspect="1" noChangeArrowheads="1"/>
+          </p:cNvPicPr>
+          <p:nvPr/>
+        </p:nvPicPr>
+        <p:blipFill>
+          <a:blip r:embed="rId6">
+            <a:extLst>
+              <a:ext uri="{28A0092B-C50C-407E-A947-70E740481C1C}">
+                <a14:useLocalDpi xmlns:a14="http://schemas.microsoft.com/office/drawing/2010/main" val="0"/>
+              </a:ext>
+            </a:extLst>
+          </a:blip>
+          <a:srcRect/>
+          <a:stretch>
+            <a:fillRect/>
+          </a:stretch>
+        </p:blipFill>
+        <p:spPr bwMode="auto">
+          <a:xfrm>
+            <a:off x="8864554" y="5005573"/>
+            <a:ext cx="2714799" cy="722286"/>
+          </a:xfrm>
+          <a:prstGeom prst="rect">
+            <a:avLst/>
+          </a:prstGeom>
+          <a:noFill/>
+          <a:extLst>
+            <a:ext uri="{909E8E84-426E-40DD-AFC4-6F175D3DCCD1}">
+              <a14:hiddenFill xmlns:a14="http://schemas.microsoft.com/office/drawing/2010/main">
+                <a:solidFill>
+                  <a:srgbClr val="FFFFFF"/>
+                </a:solidFill>
+              </a14:hiddenFill>
+            </a:ext>
+          </a:extLst>
+        </p:spPr>
+      </p:pic>
+      <p:pic>
+        <p:nvPicPr>
+          <p:cNvPr id="1028" name="Picture 4" descr="Visual Studio Code - Wikipedia">
+            <a:extLst>
+              <a:ext uri="{FF2B5EF4-FFF2-40B4-BE49-F238E27FC236}">
+                <a16:creationId xmlns:a16="http://schemas.microsoft.com/office/drawing/2014/main" id="{49D7110B-61D1-F51B-E59A-276786D7ED83}"/>
+              </a:ext>
+            </a:extLst>
+          </p:cNvPr>
+          <p:cNvPicPr>
+            <a:picLocks noChangeAspect="1" noChangeArrowheads="1"/>
+          </p:cNvPicPr>
+          <p:nvPr/>
+        </p:nvPicPr>
+        <p:blipFill>
+          <a:blip r:embed="rId7">
+            <a:extLst>
+              <a:ext uri="{28A0092B-C50C-407E-A947-70E740481C1C}">
+                <a14:useLocalDpi xmlns:a14="http://schemas.microsoft.com/office/drawing/2010/main" val="0"/>
+              </a:ext>
+            </a:extLst>
+          </a:blip>
+          <a:srcRect/>
+          <a:stretch>
+            <a:fillRect/>
+          </a:stretch>
+        </p:blipFill>
+        <p:spPr bwMode="auto">
+          <a:xfrm>
+            <a:off x="10020763" y="245998"/>
+            <a:ext cx="1132259" cy="1132259"/>
+          </a:xfrm>
+          <a:prstGeom prst="rect">
+            <a:avLst/>
+          </a:prstGeom>
+          <a:noFill/>
+          <a:extLst>
+            <a:ext uri="{909E8E84-426E-40DD-AFC4-6F175D3DCCD1}">
+              <a14:hiddenFill xmlns:a14="http://schemas.microsoft.com/office/drawing/2010/main">
+                <a:solidFill>
+                  <a:srgbClr val="FFFFFF"/>
+                </a:solidFill>
+              </a14:hiddenFill>
+            </a:ext>
+          </a:extLst>
+        </p:spPr>
+      </p:pic>
+      <p:pic>
+        <p:nvPicPr>
+          <p:cNvPr id="4100" name="Picture 4" descr="TensorFlow - Wikipedia">
+            <a:extLst>
+              <a:ext uri="{FF2B5EF4-FFF2-40B4-BE49-F238E27FC236}">
+                <a16:creationId xmlns:a16="http://schemas.microsoft.com/office/drawing/2014/main" id="{3037613C-3CF1-B8B2-9A42-BE329991A801}"/>
+              </a:ext>
+            </a:extLst>
+          </p:cNvPr>
+          <p:cNvPicPr>
+            <a:picLocks noChangeAspect="1" noChangeArrowheads="1"/>
+          </p:cNvPicPr>
+          <p:nvPr/>
+        </p:nvPicPr>
+        <p:blipFill>
+          <a:blip r:embed="rId8">
+            <a:extLst>
+              <a:ext uri="{28A0092B-C50C-407E-A947-70E740481C1C}">
+                <a14:useLocalDpi xmlns:a14="http://schemas.microsoft.com/office/drawing/2010/main" val="0"/>
+              </a:ext>
+            </a:extLst>
+          </a:blip>
+          <a:srcRect/>
+          <a:stretch>
+            <a:fillRect/>
+          </a:stretch>
+        </p:blipFill>
+        <p:spPr bwMode="auto">
+          <a:xfrm>
+            <a:off x="10037759" y="3778105"/>
+            <a:ext cx="1926919" cy="1227468"/>
+          </a:xfrm>
+          <a:prstGeom prst="rect">
+            <a:avLst/>
+          </a:prstGeom>
+          <a:noFill/>
+          <a:extLst>
+            <a:ext uri="{909E8E84-426E-40DD-AFC4-6F175D3DCCD1}">
+              <a14:hiddenFill xmlns:a14="http://schemas.microsoft.com/office/drawing/2010/main">
+                <a:solidFill>
+                  <a:srgbClr val="FFFFFF"/>
+                </a:solidFill>
+              </a14:hiddenFill>
+            </a:ext>
+          </a:extLst>
+        </p:spPr>
+      </p:pic>
+      <p:pic>
+        <p:nvPicPr>
+          <p:cNvPr id="1030" name="Picture 6" descr="Google Colab - A Step-by-step Guide ...">
+            <a:extLst>
+              <a:ext uri="{FF2B5EF4-FFF2-40B4-BE49-F238E27FC236}">
+                <a16:creationId xmlns:a16="http://schemas.microsoft.com/office/drawing/2014/main" id="{59849491-EB21-3C04-46C5-3D191DC120EF}"/>
+              </a:ext>
+            </a:extLst>
+          </p:cNvPr>
+          <p:cNvPicPr>
+            <a:picLocks noChangeAspect="1" noChangeArrowheads="1"/>
+          </p:cNvPicPr>
+          <p:nvPr/>
+        </p:nvPicPr>
+        <p:blipFill>
+          <a:blip r:embed="rId9">
+            <a:extLst>
+              <a:ext uri="{28A0092B-C50C-407E-A947-70E740481C1C}">
+                <a14:useLocalDpi xmlns:a14="http://schemas.microsoft.com/office/drawing/2010/main" val="0"/>
+              </a:ext>
+            </a:extLst>
+          </a:blip>
+          <a:srcRect/>
+          <a:stretch>
+            <a:fillRect/>
+          </a:stretch>
+        </p:blipFill>
+        <p:spPr bwMode="auto">
+          <a:xfrm>
+            <a:off x="8079506" y="810317"/>
+            <a:ext cx="1926919" cy="1282277"/>
+          </a:xfrm>
+          <a:prstGeom prst="rect">
+            <a:avLst/>
+          </a:prstGeom>
+          <a:noFill/>
+          <a:extLst>
+            <a:ext uri="{909E8E84-426E-40DD-AFC4-6F175D3DCCD1}">
+              <a14:hiddenFill xmlns:a14="http://schemas.microsoft.com/office/drawing/2010/main">
+                <a:solidFill>
+                  <a:srgbClr val="FFFFFF"/>
+                </a:solidFill>
+              </a14:hiddenFill>
+            </a:ext>
+          </a:extLst>
+        </p:spPr>
+      </p:pic>
+      <p:pic>
+        <p:nvPicPr>
+          <p:cNvPr id="1032" name="Picture 8" descr="Python (programming language) - Wikipedia">
+            <a:extLst>
+              <a:ext uri="{FF2B5EF4-FFF2-40B4-BE49-F238E27FC236}">
+                <a16:creationId xmlns:a16="http://schemas.microsoft.com/office/drawing/2014/main" id="{1BFB0EE0-E66C-EF11-45CE-B300FBE076BA}"/>
+              </a:ext>
+            </a:extLst>
+          </p:cNvPr>
+          <p:cNvPicPr>
+            <a:picLocks noChangeAspect="1" noChangeArrowheads="1"/>
+          </p:cNvPicPr>
+          <p:nvPr/>
+        </p:nvPicPr>
+        <p:blipFill>
+          <a:blip r:embed="rId10">
+            <a:extLst>
+              <a:ext uri="{28A0092B-C50C-407E-A947-70E740481C1C}">
+                <a14:useLocalDpi xmlns:a14="http://schemas.microsoft.com/office/drawing/2010/main" val="0"/>
+              </a:ext>
+            </a:extLst>
+          </a:blip>
+          <a:srcRect/>
+          <a:stretch>
+            <a:fillRect/>
+          </a:stretch>
+        </p:blipFill>
+        <p:spPr bwMode="auto">
+          <a:xfrm>
+            <a:off x="7731997" y="2536797"/>
+            <a:ext cx="1079645" cy="1079645"/>
+          </a:xfrm>
+          <a:prstGeom prst="rect">
+            <a:avLst/>
+          </a:prstGeom>
+          <a:noFill/>
+          <a:extLst>
+            <a:ext uri="{909E8E84-426E-40DD-AFC4-6F175D3DCCD1}">
+              <a14:hiddenFill xmlns:a14="http://schemas.microsoft.com/office/drawing/2010/main">
+                <a:solidFill>
+                  <a:srgbClr val="FFFFFF"/>
+                </a:solidFill>
+              </a14:hiddenFill>
+            </a:ext>
+          </a:extLst>
+        </p:spPr>
+      </p:pic>
     </p:spTree>
     <p:extLst>
       <p:ext uri="{BB962C8B-B14F-4D97-AF65-F5344CB8AC3E}">
-        <p14:creationId xmlns:p14="http://schemas.microsoft.com/office/powerpoint/2010/main" val="3941301270"/>
+        <p14:creationId xmlns:p14="http://schemas.microsoft.com/office/powerpoint/2010/main" val="2578357403"/>
       </p:ext>
     </p:extLst>
   </p:cSld>
@@ -8299,12 +10193,78 @@
             <p:ph idx="1"/>
           </p:nvPr>
         </p:nvSpPr>
-        <p:spPr/>
+        <p:spPr>
+          <a:xfrm>
+            <a:off x="612647" y="2647832"/>
+            <a:ext cx="10653579" cy="3661528"/>
+          </a:xfrm>
+        </p:spPr>
         <p:txBody>
           <a:bodyPr/>
           <a:lstStyle/>
           <a:p>
             <a:endParaRPr lang="en-GB" dirty="0"/>
+          </a:p>
+        </p:txBody>
+      </p:sp>
+      <p:sp>
+        <p:nvSpPr>
+          <p:cNvPr id="5" name="TextBox 4">
+            <a:extLst>
+              <a:ext uri="{FF2B5EF4-FFF2-40B4-BE49-F238E27FC236}">
+                <a16:creationId xmlns:a16="http://schemas.microsoft.com/office/drawing/2014/main" id="{B3B67467-B8C1-5698-2627-F8A519C171DE}"/>
+              </a:ext>
+            </a:extLst>
+          </p:cNvPr>
+          <p:cNvSpPr txBox="1"/>
+          <p:nvPr/>
+        </p:nvSpPr>
+        <p:spPr>
+          <a:xfrm>
+            <a:off x="437322" y="1515574"/>
+            <a:ext cx="10653578" cy="1077218"/>
+          </a:xfrm>
+          <a:prstGeom prst="rect">
+            <a:avLst/>
+          </a:prstGeom>
+          <a:noFill/>
+        </p:spPr>
+        <p:txBody>
+          <a:bodyPr wrap="square">
+            <a:spAutoFit/>
+          </a:bodyPr>
+          <a:lstStyle/>
+          <a:p>
+            <a:pPr marL="0" marR="0" lvl="0" indent="0" algn="l" defTabSz="914400" rtl="0" eaLnBrk="1" fontAlgn="auto" latinLnBrk="0" hangingPunct="1">
+              <a:lnSpc>
+                <a:spcPct val="100000"/>
+              </a:lnSpc>
+              <a:spcBef>
+                <a:spcPts val="0"/>
+              </a:spcBef>
+              <a:spcAft>
+                <a:spcPts val="0"/>
+              </a:spcAft>
+              <a:buClrTx/>
+              <a:buSzTx/>
+              <a:buFontTx/>
+              <a:buNone/>
+              <a:tabLst/>
+              <a:defRPr/>
+            </a:pPr>
+            <a:r>
+              <a:rPr lang="en-US" sz="3200" b="1" dirty="0"/>
+              <a:t>EDA → Classical NLP / </a:t>
+            </a:r>
+            <a:r>
+              <a:rPr lang="en-US" sz="3200" b="1" dirty="0" err="1"/>
+              <a:t>BoW</a:t>
+            </a:r>
+            <a:r>
+              <a:rPr lang="en-US" sz="3200" b="1" dirty="0"/>
+              <a:t> baseline → RNN model → Hybrid model → Final submission</a:t>
+            </a:r>
+            <a:endParaRPr lang="en-US" sz="3200" dirty="0"/>
           </a:p>
         </p:txBody>
       </p:sp>
@@ -8343,7 +10303,7 @@
           <p:cNvPr id="2" name="Title 1">
             <a:extLst>
               <a:ext uri="{FF2B5EF4-FFF2-40B4-BE49-F238E27FC236}">
-                <a16:creationId xmlns:a16="http://schemas.microsoft.com/office/drawing/2014/main" id="{D34C1AFD-38C2-FECC-13A2-6BB7FF7E4DB1}"/>
+                <a16:creationId xmlns:a16="http://schemas.microsoft.com/office/drawing/2014/main" id="{96506D34-69E6-59A8-BD5F-46CCF18FD4F4}"/>
               </a:ext>
             </a:extLst>
           </p:cNvPr>
@@ -8361,7 +10321,7 @@
           <a:p>
             <a:r>
               <a:rPr lang="en-US" dirty="0"/>
-              <a:t>EDA: target distributions and data patterns</a:t>
+              <a:t>Problem and evaluation metric</a:t>
             </a:r>
             <a:endParaRPr lang="en-GB" dirty="0"/>
           </a:p>
@@ -8372,7 +10332,7 @@
           <p:cNvPr id="3" name="Content Placeholder 2">
             <a:extLst>
               <a:ext uri="{FF2B5EF4-FFF2-40B4-BE49-F238E27FC236}">
-                <a16:creationId xmlns:a16="http://schemas.microsoft.com/office/drawing/2014/main" id="{6A83CE14-49C7-36C2-273B-27408C296F98}"/>
+                <a16:creationId xmlns:a16="http://schemas.microsoft.com/office/drawing/2014/main" id="{81292AE3-6DDF-DE99-9D20-CCFA287EAC22}"/>
               </a:ext>
             </a:extLst>
           </p:cNvPr>
@@ -8383,19 +10343,404 @@
             <p:ph idx="1"/>
           </p:nvPr>
         </p:nvSpPr>
-        <p:spPr/>
-        <p:txBody>
-          <a:bodyPr/>
-          <a:lstStyle/>
-          <a:p>
-            <a:endParaRPr lang="en-GB"/>
+        <p:spPr>
+          <a:xfrm>
+            <a:off x="591962" y="1569265"/>
+            <a:ext cx="10653579" cy="4593828"/>
+          </a:xfrm>
+        </p:spPr>
+        <p:txBody>
+          <a:bodyPr>
+            <a:normAutofit lnSpcReduction="10000"/>
+          </a:bodyPr>
+          <a:lstStyle/>
+          <a:p>
+            <a:r>
+              <a:rPr lang="en-GB" dirty="0"/>
+              <a:t>Data structure</a:t>
+            </a:r>
+          </a:p>
+          <a:p>
+            <a:endParaRPr lang="en-GB" dirty="0"/>
+          </a:p>
+          <a:p>
+            <a:endParaRPr lang="en-GB" dirty="0"/>
+          </a:p>
+          <a:p>
+            <a:r>
+              <a:rPr lang="en-GB" dirty="0"/>
+              <a:t>Input features</a:t>
+            </a:r>
+          </a:p>
+          <a:p>
+            <a:endParaRPr lang="en-GB" dirty="0"/>
+          </a:p>
+          <a:p>
+            <a:endParaRPr lang="en-GB" dirty="0"/>
+          </a:p>
+          <a:p>
+            <a:endParaRPr lang="en-GB" dirty="0"/>
+          </a:p>
+          <a:p>
+            <a:r>
+              <a:rPr lang="en-US" dirty="0"/>
+              <a:t>Target variables</a:t>
+            </a:r>
+          </a:p>
+          <a:p>
+            <a:endParaRPr lang="en-US" dirty="0"/>
+          </a:p>
+          <a:p>
+            <a:r>
+              <a:rPr lang="en-US" dirty="0"/>
+              <a:t>Evaluation metric:   </a:t>
+            </a:r>
+            <a:r>
+              <a:rPr lang="en-US" sz="1600" dirty="0">
+                <a:latin typeface="Consolas" panose="020B0609020204030204" pitchFamily="49" charset="0"/>
+                <a:cs typeface="Consolas" panose="020B0609020204030204" pitchFamily="49" charset="0"/>
+              </a:rPr>
+              <a:t>Mean Spearman correlation</a:t>
+            </a:r>
+            <a:endParaRPr lang="en-GB" dirty="0">
+              <a:latin typeface="Consolas" panose="020B0609020204030204" pitchFamily="49" charset="0"/>
+              <a:cs typeface="Consolas" panose="020B0609020204030204" pitchFamily="49" charset="0"/>
+            </a:endParaRPr>
+          </a:p>
+        </p:txBody>
+      </p:sp>
+      <p:sp>
+        <p:nvSpPr>
+          <p:cNvPr id="5" name="TextBox 4">
+            <a:extLst>
+              <a:ext uri="{FF2B5EF4-FFF2-40B4-BE49-F238E27FC236}">
+                <a16:creationId xmlns:a16="http://schemas.microsoft.com/office/drawing/2014/main" id="{9A581B70-232F-F6F9-D277-72C8EBDEEF7E}"/>
+              </a:ext>
+            </a:extLst>
+          </p:cNvPr>
+          <p:cNvSpPr txBox="1"/>
+          <p:nvPr/>
+        </p:nvSpPr>
+        <p:spPr>
+          <a:xfrm>
+            <a:off x="2867439" y="1410264"/>
+            <a:ext cx="4805569" cy="830997"/>
+          </a:xfrm>
+          <a:prstGeom prst="rect">
+            <a:avLst/>
+          </a:prstGeom>
+          <a:noFill/>
+        </p:spPr>
+        <p:txBody>
+          <a:bodyPr wrap="square">
+            <a:spAutoFit/>
+          </a:bodyPr>
+          <a:lstStyle/>
+          <a:p>
+            <a:r>
+              <a:rPr lang="en-GB" sz="1600" dirty="0">
+                <a:latin typeface="Consolas" panose="020B0609020204030204" pitchFamily="49" charset="0"/>
+                <a:cs typeface="Consolas" panose="020B0609020204030204" pitchFamily="49" charset="0"/>
+              </a:rPr>
+              <a:t>Train shape: 14091 rows, 10 columns</a:t>
+            </a:r>
+          </a:p>
+          <a:p>
+            <a:r>
+              <a:rPr lang="en-GB" sz="1600" dirty="0">
+                <a:latin typeface="Consolas" panose="020B0609020204030204" pitchFamily="49" charset="0"/>
+                <a:cs typeface="Consolas" panose="020B0609020204030204" pitchFamily="49" charset="0"/>
+              </a:rPr>
+              <a:t>Test shape: 9395 rows, 8 columns</a:t>
+            </a:r>
+          </a:p>
+          <a:p>
+            <a:r>
+              <a:rPr lang="en-GB" sz="1600" dirty="0">
+                <a:latin typeface="Consolas" panose="020B0609020204030204" pitchFamily="49" charset="0"/>
+                <a:cs typeface="Consolas" panose="020B0609020204030204" pitchFamily="49" charset="0"/>
+              </a:rPr>
+              <a:t>Sample submission: 9395 rows, 3 columns</a:t>
+            </a:r>
+          </a:p>
+        </p:txBody>
+      </p:sp>
+      <p:sp>
+        <p:nvSpPr>
+          <p:cNvPr id="7" name="TextBox 6">
+            <a:extLst>
+              <a:ext uri="{FF2B5EF4-FFF2-40B4-BE49-F238E27FC236}">
+                <a16:creationId xmlns:a16="http://schemas.microsoft.com/office/drawing/2014/main" id="{9544AB80-1E39-A5EF-4D18-CF71F4F0F054}"/>
+              </a:ext>
+            </a:extLst>
+          </p:cNvPr>
+          <p:cNvSpPr txBox="1"/>
+          <p:nvPr/>
+        </p:nvSpPr>
+        <p:spPr>
+          <a:xfrm>
+            <a:off x="2867439" y="2462018"/>
+            <a:ext cx="6102626" cy="2123658"/>
+          </a:xfrm>
+          <a:prstGeom prst="rect">
+            <a:avLst/>
+          </a:prstGeom>
+          <a:noFill/>
+        </p:spPr>
+        <p:txBody>
+          <a:bodyPr wrap="square">
+            <a:spAutoFit/>
+          </a:bodyPr>
+          <a:lstStyle/>
+          <a:p>
+            <a:r>
+              <a:rPr lang="en-GB" sz="1600" strike="sngStrike" dirty="0">
+                <a:latin typeface="Consolas" panose="020B0609020204030204" pitchFamily="49" charset="0"/>
+                <a:cs typeface="Consolas" panose="020B0609020204030204" pitchFamily="49" charset="0"/>
+              </a:rPr>
+              <a:t>Id</a:t>
+            </a:r>
+          </a:p>
+          <a:p>
+            <a:r>
+              <a:rPr lang="en-GB" sz="1600" dirty="0">
+                <a:latin typeface="Consolas" panose="020B0609020204030204" pitchFamily="49" charset="0"/>
+                <a:cs typeface="Consolas" panose="020B0609020204030204" pitchFamily="49" charset="0"/>
+              </a:rPr>
+              <a:t>Age</a:t>
+            </a:r>
+          </a:p>
+          <a:p>
+            <a:r>
+              <a:rPr lang="en-GB" sz="1600" dirty="0" err="1">
+                <a:latin typeface="Consolas" panose="020B0609020204030204" pitchFamily="49" charset="0"/>
+                <a:cs typeface="Consolas" panose="020B0609020204030204" pitchFamily="49" charset="0"/>
+              </a:rPr>
+              <a:t>Review_Title</a:t>
+            </a:r>
+            <a:endParaRPr lang="en-GB" sz="1600" dirty="0">
+              <a:latin typeface="Consolas" panose="020B0609020204030204" pitchFamily="49" charset="0"/>
+              <a:cs typeface="Consolas" panose="020B0609020204030204" pitchFamily="49" charset="0"/>
+            </a:endParaRPr>
+          </a:p>
+          <a:p>
+            <a:r>
+              <a:rPr lang="en-GB" sz="1600" dirty="0">
+                <a:latin typeface="Consolas" panose="020B0609020204030204" pitchFamily="49" charset="0"/>
+                <a:cs typeface="Consolas" panose="020B0609020204030204" pitchFamily="49" charset="0"/>
+              </a:rPr>
+              <a:t>Review</a:t>
+            </a:r>
+          </a:p>
+          <a:p>
+            <a:r>
+              <a:rPr lang="en-GB" sz="1600" dirty="0" err="1">
+                <a:latin typeface="Consolas" panose="020B0609020204030204" pitchFamily="49" charset="0"/>
+                <a:cs typeface="Consolas" panose="020B0609020204030204" pitchFamily="49" charset="0"/>
+              </a:rPr>
+              <a:t>Pos_Feedback_Cnt</a:t>
+            </a:r>
+            <a:endParaRPr lang="en-GB" sz="1600" dirty="0">
+              <a:latin typeface="Consolas" panose="020B0609020204030204" pitchFamily="49" charset="0"/>
+              <a:cs typeface="Consolas" panose="020B0609020204030204" pitchFamily="49" charset="0"/>
+            </a:endParaRPr>
+          </a:p>
+          <a:p>
+            <a:r>
+              <a:rPr lang="en-GB" sz="1600" dirty="0">
+                <a:latin typeface="Consolas" panose="020B0609020204030204" pitchFamily="49" charset="0"/>
+                <a:cs typeface="Consolas" panose="020B0609020204030204" pitchFamily="49" charset="0"/>
+              </a:rPr>
+              <a:t>Division</a:t>
+            </a:r>
+          </a:p>
+          <a:p>
+            <a:r>
+              <a:rPr lang="en-GB" sz="1600" dirty="0">
+                <a:latin typeface="Consolas" panose="020B0609020204030204" pitchFamily="49" charset="0"/>
+                <a:cs typeface="Consolas" panose="020B0609020204030204" pitchFamily="49" charset="0"/>
+              </a:rPr>
+              <a:t>Department</a:t>
+            </a:r>
+          </a:p>
+          <a:p>
+            <a:r>
+              <a:rPr lang="en-GB" sz="1600" dirty="0" err="1">
+                <a:latin typeface="Consolas" panose="020B0609020204030204" pitchFamily="49" charset="0"/>
+                <a:cs typeface="Consolas" panose="020B0609020204030204" pitchFamily="49" charset="0"/>
+              </a:rPr>
+              <a:t>Product_Category</a:t>
+            </a:r>
+            <a:endParaRPr lang="en-GB" sz="1600" dirty="0">
+              <a:latin typeface="Consolas" panose="020B0609020204030204" pitchFamily="49" charset="0"/>
+              <a:cs typeface="Consolas" panose="020B0609020204030204" pitchFamily="49" charset="0"/>
+            </a:endParaRPr>
+          </a:p>
+        </p:txBody>
+      </p:sp>
+      <p:sp>
+        <p:nvSpPr>
+          <p:cNvPr id="11" name="TextBox 10">
+            <a:extLst>
+              <a:ext uri="{FF2B5EF4-FFF2-40B4-BE49-F238E27FC236}">
+                <a16:creationId xmlns:a16="http://schemas.microsoft.com/office/drawing/2014/main" id="{F870489F-4285-8A9C-8A1C-8CC603792026}"/>
+              </a:ext>
+            </a:extLst>
+          </p:cNvPr>
+          <p:cNvSpPr txBox="1"/>
+          <p:nvPr/>
+        </p:nvSpPr>
+        <p:spPr>
+          <a:xfrm>
+            <a:off x="2888124" y="4785863"/>
+            <a:ext cx="6102626" cy="584775"/>
+          </a:xfrm>
+          <a:prstGeom prst="rect">
+            <a:avLst/>
+          </a:prstGeom>
+          <a:noFill/>
+        </p:spPr>
+        <p:txBody>
+          <a:bodyPr wrap="square">
+            <a:spAutoFit/>
+          </a:bodyPr>
+          <a:lstStyle/>
+          <a:p>
+            <a:r>
+              <a:rPr lang="en-US" sz="1600" b="1" dirty="0">
+                <a:latin typeface="Consolas" panose="020B0609020204030204" pitchFamily="49" charset="0"/>
+                <a:cs typeface="Consolas" panose="020B0609020204030204" pitchFamily="49" charset="0"/>
+              </a:rPr>
+              <a:t>Rating</a:t>
+            </a:r>
+            <a:r>
+              <a:rPr lang="en-US" sz="1600" dirty="0">
+                <a:latin typeface="Consolas" panose="020B0609020204030204" pitchFamily="49" charset="0"/>
+                <a:cs typeface="Consolas" panose="020B0609020204030204" pitchFamily="49" charset="0"/>
+              </a:rPr>
+              <a:t> </a:t>
+            </a:r>
+            <a:r>
+              <a:rPr lang="en-US" sz="1600" b="1" dirty="0">
+                <a:latin typeface="Consolas" panose="020B0609020204030204" pitchFamily="49" charset="0"/>
+                <a:cs typeface="Consolas" panose="020B0609020204030204" pitchFamily="49" charset="0"/>
+              </a:rPr>
+              <a:t>(values from 1 to 5)</a:t>
+            </a:r>
+          </a:p>
+          <a:p>
+            <a:r>
+              <a:rPr lang="en-US" sz="1600" b="1" dirty="0">
+                <a:latin typeface="Consolas" panose="020B0609020204030204" pitchFamily="49" charset="0"/>
+                <a:cs typeface="Consolas" panose="020B0609020204030204" pitchFamily="49" charset="0"/>
+              </a:rPr>
+              <a:t>Recommended (0 or 1)</a:t>
+            </a:r>
+            <a:endParaRPr lang="en-GB" sz="1600" b="1" dirty="0">
+              <a:latin typeface="Consolas" panose="020B0609020204030204" pitchFamily="49" charset="0"/>
+              <a:cs typeface="Consolas" panose="020B0609020204030204" pitchFamily="49" charset="0"/>
+            </a:endParaRPr>
+          </a:p>
+        </p:txBody>
+      </p:sp>
+      <p:sp>
+        <p:nvSpPr>
+          <p:cNvPr id="13" name="TextBox 12">
+            <a:extLst>
+              <a:ext uri="{FF2B5EF4-FFF2-40B4-BE49-F238E27FC236}">
+                <a16:creationId xmlns:a16="http://schemas.microsoft.com/office/drawing/2014/main" id="{D5A9538A-06BB-3D5E-2D39-B5091647A496}"/>
+              </a:ext>
+            </a:extLst>
+          </p:cNvPr>
+          <p:cNvSpPr txBox="1"/>
+          <p:nvPr/>
+        </p:nvSpPr>
+        <p:spPr>
+          <a:xfrm>
+            <a:off x="1258957" y="6155471"/>
+            <a:ext cx="11589026" cy="338554"/>
+          </a:xfrm>
+          <a:prstGeom prst="rect">
+            <a:avLst/>
+          </a:prstGeom>
+          <a:noFill/>
+        </p:spPr>
+        <p:txBody>
+          <a:bodyPr wrap="square">
+            <a:spAutoFit/>
+          </a:bodyPr>
+          <a:lstStyle/>
+          <a:p>
+            <a:r>
+              <a:rPr lang="en-GB" sz="1600" dirty="0">
+                <a:latin typeface="Consolas" panose="020B0609020204030204" pitchFamily="49" charset="0"/>
+                <a:cs typeface="Consolas" panose="020B0609020204030204" pitchFamily="49" charset="0"/>
+              </a:rPr>
+              <a:t>Score = (Spearman(</a:t>
+            </a:r>
+            <a:r>
+              <a:rPr lang="en-GB" sz="1600" dirty="0" err="1">
+                <a:latin typeface="Consolas" panose="020B0609020204030204" pitchFamily="49" charset="0"/>
+                <a:cs typeface="Consolas" panose="020B0609020204030204" pitchFamily="49" charset="0"/>
+              </a:rPr>
+              <a:t>Rating_true</a:t>
+            </a:r>
+            <a:r>
+              <a:rPr lang="en-GB" sz="1600" dirty="0">
+                <a:latin typeface="Consolas" panose="020B0609020204030204" pitchFamily="49" charset="0"/>
+                <a:cs typeface="Consolas" panose="020B0609020204030204" pitchFamily="49" charset="0"/>
+              </a:rPr>
+              <a:t>, </a:t>
+            </a:r>
+            <a:r>
+              <a:rPr lang="en-GB" sz="1600" dirty="0" err="1">
+                <a:latin typeface="Consolas" panose="020B0609020204030204" pitchFamily="49" charset="0"/>
+                <a:cs typeface="Consolas" panose="020B0609020204030204" pitchFamily="49" charset="0"/>
+              </a:rPr>
+              <a:t>Rating_pred</a:t>
+            </a:r>
+            <a:r>
+              <a:rPr lang="en-GB" sz="1600" dirty="0">
+                <a:latin typeface="Consolas" panose="020B0609020204030204" pitchFamily="49" charset="0"/>
+                <a:cs typeface="Consolas" panose="020B0609020204030204" pitchFamily="49" charset="0"/>
+              </a:rPr>
+              <a:t>) + Spearman(</a:t>
+            </a:r>
+            <a:r>
+              <a:rPr lang="en-GB" sz="1600" dirty="0" err="1">
+                <a:latin typeface="Consolas" panose="020B0609020204030204" pitchFamily="49" charset="0"/>
+                <a:cs typeface="Consolas" panose="020B0609020204030204" pitchFamily="49" charset="0"/>
+              </a:rPr>
+              <a:t>Recommended_true</a:t>
+            </a:r>
+            <a:r>
+              <a:rPr lang="en-GB" sz="1600" dirty="0">
+                <a:latin typeface="Consolas" panose="020B0609020204030204" pitchFamily="49" charset="0"/>
+                <a:cs typeface="Consolas" panose="020B0609020204030204" pitchFamily="49" charset="0"/>
+              </a:rPr>
+              <a:t>, </a:t>
+            </a:r>
+            <a:r>
+              <a:rPr lang="en-GB" sz="1600" dirty="0" err="1">
+                <a:latin typeface="Consolas" panose="020B0609020204030204" pitchFamily="49" charset="0"/>
+                <a:cs typeface="Consolas" panose="020B0609020204030204" pitchFamily="49" charset="0"/>
+              </a:rPr>
+              <a:t>Recommended_pred</a:t>
+            </a:r>
+            <a:r>
+              <a:rPr lang="en-GB" sz="1600" dirty="0">
+                <a:latin typeface="Consolas" panose="020B0609020204030204" pitchFamily="49" charset="0"/>
+                <a:cs typeface="Consolas" panose="020B0609020204030204" pitchFamily="49" charset="0"/>
+              </a:rPr>
+              <a:t>)) / 2</a:t>
+            </a:r>
           </a:p>
         </p:txBody>
       </p:sp>
     </p:spTree>
     <p:extLst>
       <p:ext uri="{BB962C8B-B14F-4D97-AF65-F5344CB8AC3E}">
-        <p14:creationId xmlns:p14="http://schemas.microsoft.com/office/powerpoint/2010/main" val="3216049078"/>
+        <p14:creationId xmlns:p14="http://schemas.microsoft.com/office/powerpoint/2010/main" val="3941301270"/>
       </p:ext>
     </p:extLst>
   </p:cSld>
@@ -8408,9 +10753,23 @@
 <file path=ppt/slides/slide5.xml><?xml version="1.0" encoding="utf-8"?>
 <p:sld xmlns:a="http://schemas.openxmlformats.org/drawingml/2006/main" xmlns:r="http://schemas.openxmlformats.org/officeDocument/2006/relationships" xmlns:p="http://schemas.openxmlformats.org/presentationml/2006/main">
   <p:cSld>
+    <p:bg>
+      <p:bgPr>
+        <a:solidFill>
+          <a:schemeClr val="bg1"/>
+        </a:solidFill>
+        <a:effectLst/>
+      </p:bgPr>
+    </p:bg>
     <p:spTree>
       <p:nvGrpSpPr>
-        <p:cNvPr id="1" name=""/>
+        <p:cNvPr id="1" name="">
+          <a:extLst>
+            <a:ext uri="{FF2B5EF4-FFF2-40B4-BE49-F238E27FC236}">
+              <a16:creationId xmlns:a16="http://schemas.microsoft.com/office/drawing/2014/main" id="{57AA1E23-CFD9-EFFC-D8A4-E23EE3648C68}"/>
+            </a:ext>
+          </a:extLst>
+        </p:cNvPr>
         <p:cNvGrpSpPr/>
         <p:nvPr/>
       </p:nvGrpSpPr>
@@ -8422,12 +10781,88 @@
           <a:chExt cx="0" cy="0"/>
         </a:xfrm>
       </p:grpSpPr>
+      <p:sp useBgFill="1">
+        <p:nvSpPr>
+          <p:cNvPr id="9" name="Rectangle 8">
+            <a:extLst>
+              <a:ext uri="{FF2B5EF4-FFF2-40B4-BE49-F238E27FC236}">
+                <a16:creationId xmlns:a16="http://schemas.microsoft.com/office/drawing/2014/main" id="{9B65F7F7-2FCE-8F01-53DE-15C39342BE99}"/>
+              </a:ext>
+              <a:ext uri="{C183D7F6-B498-43B3-948B-1728B52AA6E4}">
+                <adec:decorative xmlns:adec="http://schemas.microsoft.com/office/drawing/2017/decorative" val="1"/>
+              </a:ext>
+            </a:extLst>
+          </p:cNvPr>
+          <p:cNvSpPr>
+            <a:spLocks noGrp="1" noRot="1" noChangeAspect="1" noMove="1" noResize="1" noEditPoints="1" noAdjustHandles="1" noChangeArrowheads="1" noChangeShapeType="1" noTextEdit="1"/>
+          </p:cNvSpPr>
+          <p:nvPr>
+            <p:extLst>
+              <p:ext uri="{386F3935-93C4-4BCD-93E2-E3B085C9AB24}">
+                <p16:designElem xmlns:p16="http://schemas.microsoft.com/office/powerpoint/2015/main" val="1"/>
+              </p:ext>
+            </p:extLst>
+          </p:nvPr>
+        </p:nvSpPr>
+        <p:spPr>
+          <a:xfrm>
+            <a:off x="0" y="0"/>
+            <a:ext cx="12192000" cy="6858000"/>
+          </a:xfrm>
+          <a:prstGeom prst="rect">
+            <a:avLst/>
+          </a:prstGeom>
+          <a:ln w="12700" cap="flat" cmpd="sng" algn="ctr">
+            <a:noFill/>
+            <a:prstDash val="solid"/>
+            <a:miter lim="800000"/>
+          </a:ln>
+          <a:effectLst/>
+          <a:extLst>
+            <a:ext uri="{91240B29-F687-4F45-9708-019B960494DF}">
+              <a14:hiddenLine xmlns:a14="http://schemas.microsoft.com/office/drawing/2010/main" w="12700" cap="flat" cmpd="sng" algn="ctr">
+                <a:solidFill>
+                  <a:schemeClr val="accent1">
+                    <a:shade val="15000"/>
+                  </a:schemeClr>
+                </a:solidFill>
+                <a:prstDash val="solid"/>
+                <a:miter lim="800000"/>
+              </a14:hiddenLine>
+            </a:ext>
+          </a:extLst>
+        </p:spPr>
+        <p:style>
+          <a:lnRef idx="2">
+            <a:schemeClr val="accent1">
+              <a:shade val="15000"/>
+            </a:schemeClr>
+          </a:lnRef>
+          <a:fillRef idx="1">
+            <a:schemeClr val="accent1"/>
+          </a:fillRef>
+          <a:effectRef idx="0">
+            <a:schemeClr val="accent1"/>
+          </a:effectRef>
+          <a:fontRef idx="minor">
+            <a:schemeClr val="lt1"/>
+          </a:fontRef>
+        </p:style>
+        <p:txBody>
+          <a:bodyPr rtlCol="0" anchor="ctr"/>
+          <a:lstStyle/>
+          <a:p>
+            <a:pPr algn="ctr"/>
+            <a:endParaRPr lang="en-US"/>
+          </a:p>
+        </p:txBody>
+      </p:sp>
       <p:sp>
         <p:nvSpPr>
           <p:cNvPr id="2" name="Title 1">
             <a:extLst>
               <a:ext uri="{FF2B5EF4-FFF2-40B4-BE49-F238E27FC236}">
-                <a16:creationId xmlns:a16="http://schemas.microsoft.com/office/drawing/2014/main" id="{0E311046-3E9E-6865-F748-A8C73A9EF3F9}"/>
+                <a16:creationId xmlns:a16="http://schemas.microsoft.com/office/drawing/2014/main" id="{AC5D494C-AA1C-98F9-ABE8-5384DEA8D630}"/>
               </a:ext>
             </a:extLst>
           </p:cNvPr>
@@ -8438,48 +10873,202 @@
             <p:ph type="title"/>
           </p:nvPr>
         </p:nvSpPr>
-        <p:spPr/>
-        <p:txBody>
-          <a:bodyPr/>
-          <a:lstStyle/>
-          <a:p>
-            <a:r>
-              <a:rPr lang="en-US" dirty="0"/>
-              <a:t>EDA: missing values and text behavior</a:t>
-            </a:r>
-            <a:endParaRPr lang="en-GB" dirty="0"/>
-          </a:p>
-        </p:txBody>
-      </p:sp>
-      <p:sp>
-        <p:nvSpPr>
-          <p:cNvPr id="3" name="Content Placeholder 2">
-            <a:extLst>
-              <a:ext uri="{FF2B5EF4-FFF2-40B4-BE49-F238E27FC236}">
-                <a16:creationId xmlns:a16="http://schemas.microsoft.com/office/drawing/2014/main" id="{C4B9BD00-6260-5610-80D1-D0DC6F4445D9}"/>
-              </a:ext>
-            </a:extLst>
-          </p:cNvPr>
-          <p:cNvSpPr>
-            <a:spLocks noGrp="1"/>
-          </p:cNvSpPr>
+        <p:spPr>
+          <a:xfrm>
+            <a:off x="586409" y="478622"/>
+            <a:ext cx="8728364" cy="689279"/>
+          </a:xfrm>
+        </p:spPr>
+        <p:txBody>
+          <a:bodyPr vert="horz" lIns="91440" tIns="45720" rIns="91440" bIns="45720" rtlCol="0" anchor="b">
+            <a:normAutofit/>
+          </a:bodyPr>
+          <a:lstStyle/>
+          <a:p>
+            <a:pPr algn="ctr"/>
+            <a:r>
+              <a:rPr lang="en-US" sz="3100" dirty="0"/>
+              <a:t>EDA: target distributions and data patterns</a:t>
+            </a:r>
+          </a:p>
+        </p:txBody>
+      </p:sp>
+      <p:pic>
+        <p:nvPicPr>
+          <p:cNvPr id="4" name="Content Placeholder 3">
+            <a:extLst>
+              <a:ext uri="{FF2B5EF4-FFF2-40B4-BE49-F238E27FC236}">
+                <a16:creationId xmlns:a16="http://schemas.microsoft.com/office/drawing/2014/main" id="{9424E58E-9038-EEE1-EB47-FF659BA312FC}"/>
+              </a:ext>
+            </a:extLst>
+          </p:cNvPr>
+          <p:cNvPicPr>
+            <a:picLocks noGrp="1" noChangeAspect="1"/>
+          </p:cNvPicPr>
           <p:nvPr>
             <p:ph idx="1"/>
           </p:nvPr>
-        </p:nvSpPr>
-        <p:spPr/>
-        <p:txBody>
-          <a:bodyPr/>
-          <a:lstStyle/>
-          <a:p>
-            <a:endParaRPr lang="en-GB"/>
-          </a:p>
-        </p:txBody>
-      </p:sp>
+        </p:nvPicPr>
+        <p:blipFill>
+          <a:blip r:embed="rId3"/>
+          <a:stretch>
+            <a:fillRect/>
+          </a:stretch>
+        </p:blipFill>
+        <p:spPr>
+          <a:xfrm>
+            <a:off x="358303" y="1364671"/>
+            <a:ext cx="3557716" cy="2383669"/>
+          </a:xfrm>
+          <a:prstGeom prst="rect">
+            <a:avLst/>
+          </a:prstGeom>
+        </p:spPr>
+      </p:pic>
+      <p:sp>
+        <p:nvSpPr>
+          <p:cNvPr id="8" name="TextBox 7">
+            <a:extLst>
+              <a:ext uri="{FF2B5EF4-FFF2-40B4-BE49-F238E27FC236}">
+                <a16:creationId xmlns:a16="http://schemas.microsoft.com/office/drawing/2014/main" id="{F759A100-3B26-DE13-A008-934A5E0529F8}"/>
+              </a:ext>
+            </a:extLst>
+          </p:cNvPr>
+          <p:cNvSpPr txBox="1"/>
+          <p:nvPr/>
+        </p:nvSpPr>
+        <p:spPr>
+          <a:xfrm>
+            <a:off x="586409" y="3825842"/>
+            <a:ext cx="3786808" cy="1477328"/>
+          </a:xfrm>
+          <a:prstGeom prst="rect">
+            <a:avLst/>
+          </a:prstGeom>
+          <a:noFill/>
+        </p:spPr>
+        <p:txBody>
+          <a:bodyPr wrap="square">
+            <a:spAutoFit/>
+          </a:bodyPr>
+          <a:lstStyle/>
+          <a:p>
+            <a:r>
+              <a:rPr lang="en-GB" dirty="0">
+                <a:latin typeface="Aptos" panose="020B0004020202020204" pitchFamily="34" charset="0"/>
+              </a:rPr>
+              <a:t>Rating 1: 502 samples, 3.56%</a:t>
+            </a:r>
+          </a:p>
+          <a:p>
+            <a:r>
+              <a:rPr lang="en-GB" dirty="0">
+                <a:latin typeface="Aptos" panose="020B0004020202020204" pitchFamily="34" charset="0"/>
+              </a:rPr>
+              <a:t>Rating 2: 933 samples, 6.62%</a:t>
+            </a:r>
+          </a:p>
+          <a:p>
+            <a:r>
+              <a:rPr lang="en-GB" dirty="0">
+                <a:latin typeface="Aptos" panose="020B0004020202020204" pitchFamily="34" charset="0"/>
+              </a:rPr>
+              <a:t>Rating 3: 1748 samples, 12.41%</a:t>
+            </a:r>
+          </a:p>
+          <a:p>
+            <a:r>
+              <a:rPr lang="en-GB" dirty="0">
+                <a:latin typeface="Aptos" panose="020B0004020202020204" pitchFamily="34" charset="0"/>
+              </a:rPr>
+              <a:t>Rating 4: 3001 samples, 21.30%</a:t>
+            </a:r>
+          </a:p>
+          <a:p>
+            <a:r>
+              <a:rPr lang="en-GB" dirty="0">
+                <a:latin typeface="Aptos" panose="020B0004020202020204" pitchFamily="34" charset="0"/>
+              </a:rPr>
+              <a:t>Rating 5: 7907 samples, 56.11%</a:t>
+            </a:r>
+          </a:p>
+        </p:txBody>
+      </p:sp>
+      <p:sp>
+        <p:nvSpPr>
+          <p:cNvPr id="11" name="TextBox 10">
+            <a:extLst>
+              <a:ext uri="{FF2B5EF4-FFF2-40B4-BE49-F238E27FC236}">
+                <a16:creationId xmlns:a16="http://schemas.microsoft.com/office/drawing/2014/main" id="{D8C581A4-7BDC-CB5B-5CB8-1FE87ECAD642}"/>
+              </a:ext>
+            </a:extLst>
+          </p:cNvPr>
+          <p:cNvSpPr txBox="1"/>
+          <p:nvPr/>
+        </p:nvSpPr>
+        <p:spPr>
+          <a:xfrm>
+            <a:off x="5915992" y="4558641"/>
+            <a:ext cx="6102626" cy="646331"/>
+          </a:xfrm>
+          <a:prstGeom prst="rect">
+            <a:avLst/>
+          </a:prstGeom>
+          <a:noFill/>
+        </p:spPr>
+        <p:txBody>
+          <a:bodyPr wrap="square">
+            <a:spAutoFit/>
+          </a:bodyPr>
+          <a:lstStyle/>
+          <a:p>
+            <a:r>
+              <a:rPr lang="en-GB" dirty="0"/>
+              <a:t>Recommended = 0: 2501 samples, 17.75%</a:t>
+            </a:r>
+          </a:p>
+          <a:p>
+            <a:r>
+              <a:rPr lang="en-GB" dirty="0"/>
+              <a:t>Recommended = 1: 11590 samples, 82.25%</a:t>
+            </a:r>
+          </a:p>
+        </p:txBody>
+      </p:sp>
+      <p:pic>
+        <p:nvPicPr>
+          <p:cNvPr id="12" name="Picture 11">
+            <a:extLst>
+              <a:ext uri="{FF2B5EF4-FFF2-40B4-BE49-F238E27FC236}">
+                <a16:creationId xmlns:a16="http://schemas.microsoft.com/office/drawing/2014/main" id="{F66D1F78-8E96-5CEC-9674-0BD9AB4DA17F}"/>
+              </a:ext>
+            </a:extLst>
+          </p:cNvPr>
+          <p:cNvPicPr>
+            <a:picLocks noChangeAspect="1"/>
+          </p:cNvPicPr>
+          <p:nvPr/>
+        </p:nvPicPr>
+        <p:blipFill>
+          <a:blip r:embed="rId4"/>
+          <a:stretch>
+            <a:fillRect/>
+          </a:stretch>
+        </p:blipFill>
+        <p:spPr>
+          <a:xfrm>
+            <a:off x="6276009" y="1364671"/>
+            <a:ext cx="3557716" cy="2998646"/>
+          </a:xfrm>
+          <a:prstGeom prst="rect">
+            <a:avLst/>
+          </a:prstGeom>
+        </p:spPr>
+      </p:pic>
     </p:spTree>
     <p:extLst>
       <p:ext uri="{BB962C8B-B14F-4D97-AF65-F5344CB8AC3E}">
-        <p14:creationId xmlns:p14="http://schemas.microsoft.com/office/powerpoint/2010/main" val="1761563725"/>
+        <p14:creationId xmlns:p14="http://schemas.microsoft.com/office/powerpoint/2010/main" val="3672269065"/>
       </p:ext>
     </p:extLst>
   </p:cSld>
@@ -8508,10 +11097,10 @@
       </p:grpSpPr>
       <p:sp>
         <p:nvSpPr>
-          <p:cNvPr id="2" name="Title 1">
-            <a:extLst>
-              <a:ext uri="{FF2B5EF4-FFF2-40B4-BE49-F238E27FC236}">
-                <a16:creationId xmlns:a16="http://schemas.microsoft.com/office/drawing/2014/main" id="{36D82B7E-BBC2-5875-5EA5-0BF2CF639FCC}"/>
+          <p:cNvPr id="5" name="Title 4">
+            <a:extLst>
+              <a:ext uri="{FF2B5EF4-FFF2-40B4-BE49-F238E27FC236}">
+                <a16:creationId xmlns:a16="http://schemas.microsoft.com/office/drawing/2014/main" id="{6C94A25D-75B0-8601-1557-DC6329F42986}"/>
               </a:ext>
             </a:extLst>
           </p:cNvPr>
@@ -8527,43 +11116,189 @@
           <a:bodyPr/>
           <a:lstStyle/>
           <a:p>
-            <a:r>
-              <a:rPr lang="en-US" dirty="0"/>
-              <a:t>Classical NLP preprocessing and Bag-of-Words baseline</a:t>
-            </a:r>
+            <a:endParaRPr lang="en-GB"/>
+          </a:p>
+        </p:txBody>
+      </p:sp>
+      <p:pic>
+        <p:nvPicPr>
+          <p:cNvPr id="6" name="Picture 5">
+            <a:extLst>
+              <a:ext uri="{FF2B5EF4-FFF2-40B4-BE49-F238E27FC236}">
+                <a16:creationId xmlns:a16="http://schemas.microsoft.com/office/drawing/2014/main" id="{9B4FBA05-F4D9-B2BF-1746-7FB0703567E8}"/>
+              </a:ext>
+            </a:extLst>
+          </p:cNvPr>
+          <p:cNvPicPr>
+            <a:picLocks noChangeAspect="1"/>
+          </p:cNvPicPr>
+          <p:nvPr/>
+        </p:nvPicPr>
+        <p:blipFill>
+          <a:blip r:embed="rId3"/>
+          <a:stretch>
+            <a:fillRect/>
+          </a:stretch>
+        </p:blipFill>
+        <p:spPr>
+          <a:xfrm>
+            <a:off x="261730" y="139205"/>
+            <a:ext cx="5403574" cy="3841847"/>
+          </a:xfrm>
+          <a:prstGeom prst="rect">
+            <a:avLst/>
+          </a:prstGeom>
+        </p:spPr>
+      </p:pic>
+      <p:pic>
+        <p:nvPicPr>
+          <p:cNvPr id="7" name="Picture 6">
+            <a:extLst>
+              <a:ext uri="{FF2B5EF4-FFF2-40B4-BE49-F238E27FC236}">
+                <a16:creationId xmlns:a16="http://schemas.microsoft.com/office/drawing/2014/main" id="{BFE25478-F2B0-E628-06D8-5B7D2331E7B3}"/>
+              </a:ext>
+            </a:extLst>
+          </p:cNvPr>
+          <p:cNvPicPr>
+            <a:picLocks noChangeAspect="1"/>
+          </p:cNvPicPr>
+          <p:nvPr/>
+        </p:nvPicPr>
+        <p:blipFill>
+          <a:blip r:embed="rId4"/>
+          <a:stretch>
+            <a:fillRect/>
+          </a:stretch>
+        </p:blipFill>
+        <p:spPr>
+          <a:xfrm>
+            <a:off x="5665304" y="182298"/>
+            <a:ext cx="3703272" cy="2475842"/>
+          </a:xfrm>
+          <a:prstGeom prst="rect">
+            <a:avLst/>
+          </a:prstGeom>
+        </p:spPr>
+      </p:pic>
+      <p:pic>
+        <p:nvPicPr>
+          <p:cNvPr id="13" name="Picture 12">
+            <a:extLst>
+              <a:ext uri="{FF2B5EF4-FFF2-40B4-BE49-F238E27FC236}">
+                <a16:creationId xmlns:a16="http://schemas.microsoft.com/office/drawing/2014/main" id="{2007A2A4-15D7-F939-C641-F37DD3E23AA2}"/>
+              </a:ext>
+            </a:extLst>
+          </p:cNvPr>
+          <p:cNvPicPr>
+            <a:picLocks noChangeAspect="1"/>
+          </p:cNvPicPr>
+          <p:nvPr/>
+        </p:nvPicPr>
+        <p:blipFill>
+          <a:blip r:embed="rId5"/>
+          <a:stretch>
+            <a:fillRect/>
+          </a:stretch>
+        </p:blipFill>
+        <p:spPr>
+          <a:xfrm>
+            <a:off x="925774" y="4167786"/>
+            <a:ext cx="2754546" cy="1954839"/>
+          </a:xfrm>
+          <a:prstGeom prst="rect">
+            <a:avLst/>
+          </a:prstGeom>
+        </p:spPr>
+      </p:pic>
+      <p:sp>
+        <p:nvSpPr>
+          <p:cNvPr id="15" name="Content Placeholder 14">
+            <a:extLst>
+              <a:ext uri="{FF2B5EF4-FFF2-40B4-BE49-F238E27FC236}">
+                <a16:creationId xmlns:a16="http://schemas.microsoft.com/office/drawing/2014/main" id="{BF8D56C9-432F-426C-1D23-AFC0457EEE86}"/>
+              </a:ext>
+            </a:extLst>
+          </p:cNvPr>
+          <p:cNvSpPr>
+            <a:spLocks noGrp="1"/>
+          </p:cNvSpPr>
+          <p:nvPr>
+            <p:ph idx="1"/>
+          </p:nvPr>
+        </p:nvSpPr>
+        <p:spPr/>
+        <p:txBody>
+          <a:bodyPr/>
+          <a:lstStyle/>
+          <a:p>
             <a:endParaRPr lang="en-GB" dirty="0"/>
           </a:p>
         </p:txBody>
       </p:sp>
-      <p:sp>
-        <p:nvSpPr>
-          <p:cNvPr id="3" name="Content Placeholder 2">
-            <a:extLst>
-              <a:ext uri="{FF2B5EF4-FFF2-40B4-BE49-F238E27FC236}">
-                <a16:creationId xmlns:a16="http://schemas.microsoft.com/office/drawing/2014/main" id="{F3CD81DA-B2E6-4423-4299-3D3B83DF0CB7}"/>
-              </a:ext>
-            </a:extLst>
-          </p:cNvPr>
-          <p:cNvSpPr>
-            <a:spLocks noGrp="1"/>
-          </p:cNvSpPr>
-          <p:nvPr>
-            <p:ph idx="1"/>
-          </p:nvPr>
-        </p:nvSpPr>
-        <p:spPr/>
-        <p:txBody>
-          <a:bodyPr/>
-          <a:lstStyle/>
-          <a:p>
-            <a:endParaRPr lang="en-GB"/>
-          </a:p>
-        </p:txBody>
-      </p:sp>
+      <p:pic>
+        <p:nvPicPr>
+          <p:cNvPr id="16" name="Picture 15">
+            <a:extLst>
+              <a:ext uri="{FF2B5EF4-FFF2-40B4-BE49-F238E27FC236}">
+                <a16:creationId xmlns:a16="http://schemas.microsoft.com/office/drawing/2014/main" id="{19B01B9A-B5F8-34E5-E3B7-CE35DD0C954F}"/>
+              </a:ext>
+            </a:extLst>
+          </p:cNvPr>
+          <p:cNvPicPr>
+            <a:picLocks noChangeAspect="1"/>
+          </p:cNvPicPr>
+          <p:nvPr/>
+        </p:nvPicPr>
+        <p:blipFill>
+          <a:blip r:embed="rId6"/>
+          <a:stretch>
+            <a:fillRect/>
+          </a:stretch>
+        </p:blipFill>
+        <p:spPr>
+          <a:xfrm>
+            <a:off x="8272698" y="2383718"/>
+            <a:ext cx="3650029" cy="2350721"/>
+          </a:xfrm>
+          <a:prstGeom prst="rect">
+            <a:avLst/>
+          </a:prstGeom>
+        </p:spPr>
+      </p:pic>
+      <p:pic>
+        <p:nvPicPr>
+          <p:cNvPr id="17" name="Picture 16">
+            <a:extLst>
+              <a:ext uri="{FF2B5EF4-FFF2-40B4-BE49-F238E27FC236}">
+                <a16:creationId xmlns:a16="http://schemas.microsoft.com/office/drawing/2014/main" id="{AC553CBC-721B-FE07-0CBE-729E0CF2DC5A}"/>
+              </a:ext>
+            </a:extLst>
+          </p:cNvPr>
+          <p:cNvPicPr>
+            <a:picLocks noChangeAspect="1"/>
+          </p:cNvPicPr>
+          <p:nvPr/>
+        </p:nvPicPr>
+        <p:blipFill>
+          <a:blip r:embed="rId7"/>
+          <a:stretch>
+            <a:fillRect/>
+          </a:stretch>
+        </p:blipFill>
+        <p:spPr>
+          <a:xfrm>
+            <a:off x="5978431" y="4464002"/>
+            <a:ext cx="3252898" cy="2119780"/>
+          </a:xfrm>
+          <a:prstGeom prst="rect">
+            <a:avLst/>
+          </a:prstGeom>
+        </p:spPr>
+      </p:pic>
     </p:spTree>
     <p:extLst>
       <p:ext uri="{BB962C8B-B14F-4D97-AF65-F5344CB8AC3E}">
-        <p14:creationId xmlns:p14="http://schemas.microsoft.com/office/powerpoint/2010/main" val="821462737"/>
+        <p14:creationId xmlns:p14="http://schemas.microsoft.com/office/powerpoint/2010/main" val="3216049078"/>
       </p:ext>
     </p:extLst>
   </p:cSld>
@@ -8595,7 +11330,7 @@
           <p:cNvPr id="2" name="Title 1">
             <a:extLst>
               <a:ext uri="{FF2B5EF4-FFF2-40B4-BE49-F238E27FC236}">
-                <a16:creationId xmlns:a16="http://schemas.microsoft.com/office/drawing/2014/main" id="{DE20B5F8-2515-3E9D-C526-582E0E49E2D3}"/>
+                <a16:creationId xmlns:a16="http://schemas.microsoft.com/office/drawing/2014/main" id="{25D1B97C-3955-EE84-5F35-92D0CA5596BC}"/>
               </a:ext>
             </a:extLst>
           </p:cNvPr>
@@ -8611,11 +11346,7 @@
           <a:bodyPr/>
           <a:lstStyle/>
           <a:p>
-            <a:r>
-              <a:rPr lang="en-US" dirty="0"/>
-              <a:t>Bag-of-Words model: setup</a:t>
-            </a:r>
-            <a:endParaRPr lang="en-GB" dirty="0"/>
+            <a:endParaRPr lang="en-GB"/>
           </a:p>
         </p:txBody>
       </p:sp>
@@ -8624,7 +11355,7 @@
           <p:cNvPr id="3" name="Content Placeholder 2">
             <a:extLst>
               <a:ext uri="{FF2B5EF4-FFF2-40B4-BE49-F238E27FC236}">
-                <a16:creationId xmlns:a16="http://schemas.microsoft.com/office/drawing/2014/main" id="{38055292-3631-1D8D-D764-F6A0AC20CD49}"/>
+                <a16:creationId xmlns:a16="http://schemas.microsoft.com/office/drawing/2014/main" id="{F230F128-51C1-F03A-AFCF-AE1BA95D99B1}"/>
               </a:ext>
             </a:extLst>
           </p:cNvPr>
@@ -8644,10 +11375,130 @@
           </a:p>
         </p:txBody>
       </p:sp>
+      <p:pic>
+        <p:nvPicPr>
+          <p:cNvPr id="4" name="Picture 3">
+            <a:extLst>
+              <a:ext uri="{FF2B5EF4-FFF2-40B4-BE49-F238E27FC236}">
+                <a16:creationId xmlns:a16="http://schemas.microsoft.com/office/drawing/2014/main" id="{57628DE1-86F8-7677-AC0D-45CE8E22D5C9}"/>
+              </a:ext>
+            </a:extLst>
+          </p:cNvPr>
+          <p:cNvPicPr>
+            <a:picLocks noChangeAspect="1"/>
+          </p:cNvPicPr>
+          <p:nvPr/>
+        </p:nvPicPr>
+        <p:blipFill>
+          <a:blip r:embed="rId2"/>
+          <a:stretch>
+            <a:fillRect/>
+          </a:stretch>
+        </p:blipFill>
+        <p:spPr>
+          <a:xfrm>
+            <a:off x="366926" y="2502147"/>
+            <a:ext cx="5446279" cy="3877813"/>
+          </a:xfrm>
+          <a:prstGeom prst="rect">
+            <a:avLst/>
+          </a:prstGeom>
+        </p:spPr>
+      </p:pic>
+      <p:pic>
+        <p:nvPicPr>
+          <p:cNvPr id="5" name="Content Placeholder 8">
+            <a:extLst>
+              <a:ext uri="{FF2B5EF4-FFF2-40B4-BE49-F238E27FC236}">
+                <a16:creationId xmlns:a16="http://schemas.microsoft.com/office/drawing/2014/main" id="{4DBF2723-771A-947B-B8ED-3DABA9E63DED}"/>
+              </a:ext>
+            </a:extLst>
+          </p:cNvPr>
+          <p:cNvPicPr>
+            <a:picLocks noChangeAspect="1"/>
+          </p:cNvPicPr>
+          <p:nvPr/>
+        </p:nvPicPr>
+        <p:blipFill>
+          <a:blip r:embed="rId3"/>
+          <a:stretch>
+            <a:fillRect/>
+          </a:stretch>
+        </p:blipFill>
+        <p:spPr>
+          <a:xfrm>
+            <a:off x="612647" y="512674"/>
+            <a:ext cx="4954839" cy="1954839"/>
+          </a:xfrm>
+          <a:prstGeom prst="rect">
+            <a:avLst/>
+          </a:prstGeom>
+        </p:spPr>
+      </p:pic>
+      <p:pic>
+        <p:nvPicPr>
+          <p:cNvPr id="7" name="Picture 6">
+            <a:extLst>
+              <a:ext uri="{FF2B5EF4-FFF2-40B4-BE49-F238E27FC236}">
+                <a16:creationId xmlns:a16="http://schemas.microsoft.com/office/drawing/2014/main" id="{323C6F95-2C82-EE45-DDCE-155ADCB8C4C0}"/>
+              </a:ext>
+            </a:extLst>
+          </p:cNvPr>
+          <p:cNvPicPr>
+            <a:picLocks noChangeAspect="1"/>
+          </p:cNvPicPr>
+          <p:nvPr/>
+        </p:nvPicPr>
+        <p:blipFill>
+          <a:blip r:embed="rId4"/>
+          <a:stretch>
+            <a:fillRect/>
+          </a:stretch>
+        </p:blipFill>
+        <p:spPr>
+          <a:xfrm>
+            <a:off x="5567486" y="366704"/>
+            <a:ext cx="3244373" cy="2556455"/>
+          </a:xfrm>
+          <a:prstGeom prst="rect">
+            <a:avLst/>
+          </a:prstGeom>
+        </p:spPr>
+      </p:pic>
+      <p:pic>
+        <p:nvPicPr>
+          <p:cNvPr id="9" name="Picture 8">
+            <a:extLst>
+              <a:ext uri="{FF2B5EF4-FFF2-40B4-BE49-F238E27FC236}">
+                <a16:creationId xmlns:a16="http://schemas.microsoft.com/office/drawing/2014/main" id="{B9A7420C-1469-4DA0-0DAA-D2020E7FA643}"/>
+              </a:ext>
+            </a:extLst>
+          </p:cNvPr>
+          <p:cNvPicPr>
+            <a:picLocks noChangeAspect="1"/>
+          </p:cNvPicPr>
+          <p:nvPr/>
+        </p:nvPicPr>
+        <p:blipFill>
+          <a:blip r:embed="rId5"/>
+          <a:stretch>
+            <a:fillRect/>
+          </a:stretch>
+        </p:blipFill>
+        <p:spPr>
+          <a:xfrm>
+            <a:off x="8811859" y="207865"/>
+            <a:ext cx="3188755" cy="2541761"/>
+          </a:xfrm>
+          <a:prstGeom prst="rect">
+            <a:avLst/>
+          </a:prstGeom>
+        </p:spPr>
+      </p:pic>
     </p:spTree>
     <p:extLst>
       <p:ext uri="{BB962C8B-B14F-4D97-AF65-F5344CB8AC3E}">
-        <p14:creationId xmlns:p14="http://schemas.microsoft.com/office/powerpoint/2010/main" val="1385345628"/>
+        <p14:creationId xmlns:p14="http://schemas.microsoft.com/office/powerpoint/2010/main" val="2058740291"/>
       </p:ext>
     </p:extLst>
   </p:cSld>
@@ -8660,6 +11511,14 @@
 <file path=ppt/slides/slide8.xml><?xml version="1.0" encoding="utf-8"?>
 <p:sld xmlns:a="http://schemas.openxmlformats.org/drawingml/2006/main" xmlns:r="http://schemas.openxmlformats.org/officeDocument/2006/relationships" xmlns:p="http://schemas.openxmlformats.org/presentationml/2006/main">
   <p:cSld>
+    <p:bg>
+      <p:bgPr>
+        <a:solidFill>
+          <a:schemeClr val="bg1"/>
+        </a:solidFill>
+        <a:effectLst/>
+      </p:bgPr>
+    </p:bg>
     <p:spTree>
       <p:nvGrpSpPr>
         <p:cNvPr id="1" name=""/>
@@ -8676,59 +11535,170 @@
       </p:grpSpPr>
       <p:sp>
         <p:nvSpPr>
-          <p:cNvPr id="2" name="Title 1">
-            <a:extLst>
-              <a:ext uri="{FF2B5EF4-FFF2-40B4-BE49-F238E27FC236}">
-                <a16:creationId xmlns:a16="http://schemas.microsoft.com/office/drawing/2014/main" id="{3BD27498-2256-293C-558F-6C142F0CB041}"/>
-              </a:ext>
-            </a:extLst>
-          </p:cNvPr>
-          <p:cNvSpPr>
-            <a:spLocks noGrp="1"/>
-          </p:cNvSpPr>
-          <p:nvPr>
-            <p:ph type="title"/>
-          </p:nvPr>
-        </p:nvSpPr>
-        <p:spPr/>
-        <p:txBody>
-          <a:bodyPr/>
-          <a:lstStyle/>
-          <a:p>
-            <a:r>
-              <a:rPr lang="en-US" dirty="0"/>
-              <a:t>Bag-of-Words validation results</a:t>
-            </a:r>
-            <a:endParaRPr lang="en-GB" dirty="0"/>
+          <p:cNvPr id="13" name="Rectangle 12">
+            <a:extLst>
+              <a:ext uri="{FF2B5EF4-FFF2-40B4-BE49-F238E27FC236}">
+                <a16:creationId xmlns:a16="http://schemas.microsoft.com/office/drawing/2014/main" id="{2C5AECB1-8254-3357-3EB3-6A75DA093109}"/>
+              </a:ext>
+              <a:ext uri="{C183D7F6-B498-43B3-948B-1728B52AA6E4}">
+                <adec:decorative xmlns:adec="http://schemas.microsoft.com/office/drawing/2017/decorative" val="1"/>
+              </a:ext>
+            </a:extLst>
+          </p:cNvPr>
+          <p:cNvSpPr>
+            <a:spLocks noGrp="1" noRot="1" noChangeAspect="1" noMove="1" noResize="1" noEditPoints="1" noAdjustHandles="1" noChangeArrowheads="1" noChangeShapeType="1" noTextEdit="1"/>
+          </p:cNvSpPr>
+          <p:nvPr>
+            <p:extLst>
+              <p:ext uri="{386F3935-93C4-4BCD-93E2-E3B085C9AB24}">
+                <p16:designElem xmlns:p16="http://schemas.microsoft.com/office/powerpoint/2015/main" val="1"/>
+              </p:ext>
+            </p:extLst>
+          </p:nvPr>
+        </p:nvSpPr>
+        <p:spPr>
+          <a:xfrm>
+            <a:off x="0" y="0"/>
+            <a:ext cx="12192000" cy="6858000"/>
+          </a:xfrm>
+          <a:prstGeom prst="rect">
+            <a:avLst/>
+          </a:prstGeom>
+          <a:solidFill>
+            <a:schemeClr val="bg1"/>
+          </a:solidFill>
+          <a:ln w="12700" cap="flat" cmpd="sng" algn="ctr">
+            <a:noFill/>
+            <a:prstDash val="solid"/>
+            <a:miter lim="800000"/>
+          </a:ln>
+          <a:effectLst/>
+          <a:extLst>
+            <a:ext uri="{91240B29-F687-4F45-9708-019B960494DF}">
+              <a14:hiddenLine xmlns:a14="http://schemas.microsoft.com/office/drawing/2010/main" w="12700" cap="flat" cmpd="sng" algn="ctr">
+                <a:solidFill>
+                  <a:schemeClr val="accent1">
+                    <a:shade val="15000"/>
+                  </a:schemeClr>
+                </a:solidFill>
+                <a:prstDash val="solid"/>
+                <a:miter lim="800000"/>
+              </a14:hiddenLine>
+            </a:ext>
+          </a:extLst>
+        </p:spPr>
+        <p:style>
+          <a:lnRef idx="2">
+            <a:schemeClr val="accent1">
+              <a:shade val="15000"/>
+            </a:schemeClr>
+          </a:lnRef>
+          <a:fillRef idx="1">
+            <a:schemeClr val="accent1"/>
+          </a:fillRef>
+          <a:effectRef idx="0">
+            <a:schemeClr val="accent1"/>
+          </a:effectRef>
+          <a:fontRef idx="minor">
+            <a:schemeClr val="lt1"/>
+          </a:fontRef>
+        </p:style>
+        <p:txBody>
+          <a:bodyPr rtlCol="0" anchor="ctr"/>
+          <a:lstStyle/>
+          <a:p>
+            <a:pPr algn="ctr"/>
+            <a:endParaRPr lang="en-US"/>
           </a:p>
         </p:txBody>
       </p:sp>
       <p:pic>
         <p:nvPicPr>
-          <p:cNvPr id="5" name="Content Placeholder 4">
-            <a:extLst>
-              <a:ext uri="{FF2B5EF4-FFF2-40B4-BE49-F238E27FC236}">
-                <a16:creationId xmlns:a16="http://schemas.microsoft.com/office/drawing/2014/main" id="{821DAB98-F997-E9BB-47B6-4847DBAE5B3A}"/>
+          <p:cNvPr id="4" name="Picture 3">
+            <a:extLst>
+              <a:ext uri="{FF2B5EF4-FFF2-40B4-BE49-F238E27FC236}">
+                <a16:creationId xmlns:a16="http://schemas.microsoft.com/office/drawing/2014/main" id="{B9506DA4-AA35-77A3-450A-24166A25099F}"/>
               </a:ext>
             </a:extLst>
           </p:cNvPr>
           <p:cNvPicPr>
-            <a:picLocks noGrp="1" noChangeAspect="1"/>
+            <a:picLocks noChangeAspect="1"/>
           </p:cNvPicPr>
-          <p:nvPr>
-            <p:ph idx="1"/>
-          </p:nvPr>
+          <p:nvPr/>
         </p:nvPicPr>
         <p:blipFill>
-          <a:blip r:embed="rId3"/>
+          <a:blip r:embed="rId2"/>
+          <a:srcRect l="3568" r="9529" b="-1"/>
           <a:stretch>
             <a:fillRect/>
           </a:stretch>
         </p:blipFill>
         <p:spPr>
           <a:xfrm>
-            <a:off x="827881" y="3186906"/>
-            <a:ext cx="10223500" cy="1651000"/>
+            <a:off x="191406" y="50006"/>
+            <a:ext cx="3815730" cy="2239334"/>
+          </a:xfrm>
+          <a:prstGeom prst="rect">
+            <a:avLst/>
+          </a:prstGeom>
+        </p:spPr>
+      </p:pic>
+      <p:pic>
+        <p:nvPicPr>
+          <p:cNvPr id="6" name="Picture 5">
+            <a:extLst>
+              <a:ext uri="{FF2B5EF4-FFF2-40B4-BE49-F238E27FC236}">
+                <a16:creationId xmlns:a16="http://schemas.microsoft.com/office/drawing/2014/main" id="{1A6B53A6-21C2-5F4B-8C5D-2508F37083A3}"/>
+              </a:ext>
+            </a:extLst>
+          </p:cNvPr>
+          <p:cNvPicPr>
+            <a:picLocks noChangeAspect="1"/>
+          </p:cNvPicPr>
+          <p:nvPr/>
+        </p:nvPicPr>
+        <p:blipFill>
+          <a:blip r:embed="rId3"/>
+          <a:srcRect r="11295"/>
+          <a:stretch>
+            <a:fillRect/>
+          </a:stretch>
+        </p:blipFill>
+        <p:spPr>
+          <a:xfrm>
+            <a:off x="191406" y="2348393"/>
+            <a:ext cx="3815730" cy="2247576"/>
+          </a:xfrm>
+          <a:prstGeom prst="rect">
+            <a:avLst/>
+          </a:prstGeom>
+        </p:spPr>
+      </p:pic>
+      <p:pic>
+        <p:nvPicPr>
+          <p:cNvPr id="5" name="Picture 4">
+            <a:extLst>
+              <a:ext uri="{FF2B5EF4-FFF2-40B4-BE49-F238E27FC236}">
+                <a16:creationId xmlns:a16="http://schemas.microsoft.com/office/drawing/2014/main" id="{5B475563-7AED-5E95-88C3-3F4565B0C359}"/>
+              </a:ext>
+            </a:extLst>
+          </p:cNvPr>
+          <p:cNvPicPr>
+            <a:picLocks noChangeAspect="1"/>
+          </p:cNvPicPr>
+          <p:nvPr/>
+        </p:nvPicPr>
+        <p:blipFill>
+          <a:blip r:embed="rId4"/>
+          <a:srcRect r="9751" b="-2"/>
+          <a:stretch>
+            <a:fillRect/>
+          </a:stretch>
+        </p:blipFill>
+        <p:spPr>
+          <a:xfrm>
+            <a:off x="191407" y="4595969"/>
+            <a:ext cx="3815729" cy="2262031"/>
           </a:xfrm>
           <a:prstGeom prst="rect">
             <a:avLst/>
@@ -8738,7 +11708,7 @@
     </p:spTree>
     <p:extLst>
       <p:ext uri="{BB962C8B-B14F-4D97-AF65-F5344CB8AC3E}">
-        <p14:creationId xmlns:p14="http://schemas.microsoft.com/office/powerpoint/2010/main" val="2907997910"/>
+        <p14:creationId xmlns:p14="http://schemas.microsoft.com/office/powerpoint/2010/main" val="1411518041"/>
       </p:ext>
     </p:extLst>
   </p:cSld>
@@ -8770,7 +11740,7 @@
           <p:cNvPr id="2" name="Title 1">
             <a:extLst>
               <a:ext uri="{FF2B5EF4-FFF2-40B4-BE49-F238E27FC236}">
-                <a16:creationId xmlns:a16="http://schemas.microsoft.com/office/drawing/2014/main" id="{0BB9D11C-6ACF-CBC3-0417-F705C8F5C77B}"/>
+                <a16:creationId xmlns:a16="http://schemas.microsoft.com/office/drawing/2014/main" id="{0E311046-3E9E-6865-F748-A8C73A9EF3F9}"/>
               </a:ext>
             </a:extLst>
           </p:cNvPr>
@@ -8788,115 +11758,41 @@
           <a:p>
             <a:r>
               <a:rPr lang="en-US" dirty="0"/>
-              <a:t>Bag-of-Words interpretation</a:t>
-            </a:r>
-            <a:br>
-              <a:rPr lang="en-US" dirty="0"/>
-            </a:br>
-            <a:r>
-              <a:rPr lang="en-US" sz="2800" b="0" dirty="0"/>
-              <a:t>What the Bag-of-Words model learned</a:t>
-            </a:r>
-            <a:endParaRPr lang="en-GB" b="0" dirty="0"/>
-          </a:p>
-        </p:txBody>
-      </p:sp>
-      <p:pic>
-        <p:nvPicPr>
-          <p:cNvPr id="8" name="Picture 7">
-            <a:extLst>
-              <a:ext uri="{FF2B5EF4-FFF2-40B4-BE49-F238E27FC236}">
-                <a16:creationId xmlns:a16="http://schemas.microsoft.com/office/drawing/2014/main" id="{E9CE05DB-2D98-4F6F-27E9-10669BE812A0}"/>
-              </a:ext>
-            </a:extLst>
-          </p:cNvPr>
-          <p:cNvPicPr>
-            <a:picLocks noChangeAspect="1"/>
-          </p:cNvPicPr>
-          <p:nvPr/>
-        </p:nvPicPr>
-        <p:blipFill>
-          <a:blip r:embed="rId3"/>
-          <a:stretch>
-            <a:fillRect/>
-          </a:stretch>
-        </p:blipFill>
-        <p:spPr>
-          <a:xfrm>
-            <a:off x="7312535" y="548640"/>
-            <a:ext cx="4699141" cy="2773098"/>
-          </a:xfrm>
-          <a:prstGeom prst="rect">
-            <a:avLst/>
-          </a:prstGeom>
-        </p:spPr>
-      </p:pic>
-      <p:pic>
-        <p:nvPicPr>
-          <p:cNvPr id="13" name="Content Placeholder 12">
-            <a:extLst>
-              <a:ext uri="{FF2B5EF4-FFF2-40B4-BE49-F238E27FC236}">
-                <a16:creationId xmlns:a16="http://schemas.microsoft.com/office/drawing/2014/main" id="{04994208-7F69-547F-704D-3CAB6FA5A951}"/>
-              </a:ext>
-            </a:extLst>
-          </p:cNvPr>
-          <p:cNvPicPr>
-            <a:picLocks noGrp="1" noChangeAspect="1"/>
-          </p:cNvPicPr>
+              <a:t>EDA: missing values and text behavior</a:t>
+            </a:r>
+            <a:endParaRPr lang="en-GB" dirty="0"/>
+          </a:p>
+        </p:txBody>
+      </p:sp>
+      <p:sp>
+        <p:nvSpPr>
+          <p:cNvPr id="3" name="Content Placeholder 2">
+            <a:extLst>
+              <a:ext uri="{FF2B5EF4-FFF2-40B4-BE49-F238E27FC236}">
+                <a16:creationId xmlns:a16="http://schemas.microsoft.com/office/drawing/2014/main" id="{C4B9BD00-6260-5610-80D1-D0DC6F4445D9}"/>
+              </a:ext>
+            </a:extLst>
+          </p:cNvPr>
+          <p:cNvSpPr>
+            <a:spLocks noGrp="1"/>
+          </p:cNvSpPr>
           <p:nvPr>
             <p:ph idx="1"/>
           </p:nvPr>
-        </p:nvPicPr>
-        <p:blipFill>
-          <a:blip r:embed="rId4"/>
-          <a:stretch>
-            <a:fillRect/>
-          </a:stretch>
-        </p:blipFill>
-        <p:spPr>
-          <a:xfrm>
-            <a:off x="6684625" y="6049995"/>
-            <a:ext cx="5327051" cy="463458"/>
-          </a:xfrm>
-          <a:prstGeom prst="rect">
-            <a:avLst/>
-          </a:prstGeom>
-        </p:spPr>
-      </p:pic>
-      <p:pic>
-        <p:nvPicPr>
-          <p:cNvPr id="11" name="Picture 10">
-            <a:extLst>
-              <a:ext uri="{FF2B5EF4-FFF2-40B4-BE49-F238E27FC236}">
-                <a16:creationId xmlns:a16="http://schemas.microsoft.com/office/drawing/2014/main" id="{00A5E117-6774-5F2B-58C2-23CA83186E64}"/>
-              </a:ext>
-            </a:extLst>
-          </p:cNvPr>
-          <p:cNvPicPr>
-            <a:picLocks noChangeAspect="1"/>
-          </p:cNvPicPr>
-          <p:nvPr/>
-        </p:nvPicPr>
-        <p:blipFill>
-          <a:blip r:embed="rId5"/>
-          <a:stretch>
-            <a:fillRect/>
-          </a:stretch>
-        </p:blipFill>
-        <p:spPr>
-          <a:xfrm>
-            <a:off x="1789896" y="2029779"/>
-            <a:ext cx="4894729" cy="2798442"/>
-          </a:xfrm>
-          <a:prstGeom prst="rect">
-            <a:avLst/>
-          </a:prstGeom>
-        </p:spPr>
-      </p:pic>
+        </p:nvSpPr>
+        <p:spPr/>
+        <p:txBody>
+          <a:bodyPr/>
+          <a:lstStyle/>
+          <a:p>
+            <a:endParaRPr lang="en-GB"/>
+          </a:p>
+        </p:txBody>
+      </p:sp>
     </p:spTree>
     <p:extLst>
       <p:ext uri="{BB962C8B-B14F-4D97-AF65-F5344CB8AC3E}">
-        <p14:creationId xmlns:p14="http://schemas.microsoft.com/office/powerpoint/2010/main" val="1376153329"/>
+        <p14:creationId xmlns:p14="http://schemas.microsoft.com/office/powerpoint/2010/main" val="1761563725"/>
       </p:ext>
     </p:extLst>
   </p:cSld>
